--- a/lessons/lesson-15/slides.pptx
+++ b/lessons/lesson-15/slides.pptx
@@ -2,27 +2,27 @@
 <file path=ppt/presentation.xml><?xml version="1.0" encoding="utf-8"?>
 <p:presentation xmlns:p="http://schemas.openxmlformats.org/presentationml/2006/main">
   <p:sldMasterIdLst>
-    <p:sldMasterId xmlns:r="http://schemas.openxmlformats.org/officeDocument/2006/relationships" id="2147483648" r:id="Rd8df1f36121441e3"/>
+    <p:sldMasterId xmlns:r="http://schemas.openxmlformats.org/officeDocument/2006/relationships" id="2147483648" r:id="R52d3b98e1cec43b9"/>
   </p:sldMasterIdLst>
   <p:notesMasterIdLst>
-    <p:notesMasterId xmlns:r="http://schemas.openxmlformats.org/officeDocument/2006/relationships" r:id="R00742f1888e9459e"/>
+    <p:notesMasterId xmlns:r="http://schemas.openxmlformats.org/officeDocument/2006/relationships" r:id="R39b0be5e10a64aaa"/>
   </p:notesMasterIdLst>
   <p:sldIdLst>
-    <p:sldId xmlns:r="http://schemas.openxmlformats.org/officeDocument/2006/relationships" id="256" r:id="R1ca66aaebc5d4a83"/>
-    <p:sldId xmlns:r="http://schemas.openxmlformats.org/officeDocument/2006/relationships" id="257" r:id="R7be4793569164790"/>
-    <p:sldId xmlns:r="http://schemas.openxmlformats.org/officeDocument/2006/relationships" id="258" r:id="R4d6ec927789447e4"/>
-    <p:sldId xmlns:r="http://schemas.openxmlformats.org/officeDocument/2006/relationships" id="259" r:id="R174f38f5e2f046da"/>
-    <p:sldId xmlns:r="http://schemas.openxmlformats.org/officeDocument/2006/relationships" id="260" r:id="R81bc7b667ab64372"/>
-    <p:sldId xmlns:r="http://schemas.openxmlformats.org/officeDocument/2006/relationships" id="261" r:id="Rcec648502ac64a74"/>
-    <p:sldId xmlns:r="http://schemas.openxmlformats.org/officeDocument/2006/relationships" id="262" r:id="R9a1e4b57edbc471e"/>
-    <p:sldId xmlns:r="http://schemas.openxmlformats.org/officeDocument/2006/relationships" id="263" r:id="Rbfff05b3bdef4be4"/>
-    <p:sldId xmlns:r="http://schemas.openxmlformats.org/officeDocument/2006/relationships" id="264" r:id="Rdb247c3256384faf"/>
-    <p:sldId xmlns:r="http://schemas.openxmlformats.org/officeDocument/2006/relationships" id="265" r:id="R8e550bdf8bf54d56"/>
-    <p:sldId xmlns:r="http://schemas.openxmlformats.org/officeDocument/2006/relationships" id="266" r:id="R37374bdcc5634383"/>
-    <p:sldId xmlns:r="http://schemas.openxmlformats.org/officeDocument/2006/relationships" id="267" r:id="Re724bec864914149"/>
-    <p:sldId xmlns:r="http://schemas.openxmlformats.org/officeDocument/2006/relationships" id="268" r:id="Rc7a2ce71754742d8"/>
-    <p:sldId xmlns:r="http://schemas.openxmlformats.org/officeDocument/2006/relationships" id="269" r:id="Rcd9d5b15b98f40ab"/>
-    <p:sldId xmlns:r="http://schemas.openxmlformats.org/officeDocument/2006/relationships" id="270" r:id="R98f37dad06cc40e9"/>
+    <p:sldId xmlns:r="http://schemas.openxmlformats.org/officeDocument/2006/relationships" id="256" r:id="R309c1a4a42b74ca4"/>
+    <p:sldId xmlns:r="http://schemas.openxmlformats.org/officeDocument/2006/relationships" id="257" r:id="R77ac0abd831a4af0"/>
+    <p:sldId xmlns:r="http://schemas.openxmlformats.org/officeDocument/2006/relationships" id="258" r:id="Rb943dd9466f1451a"/>
+    <p:sldId xmlns:r="http://schemas.openxmlformats.org/officeDocument/2006/relationships" id="259" r:id="R83cab154b21a4c27"/>
+    <p:sldId xmlns:r="http://schemas.openxmlformats.org/officeDocument/2006/relationships" id="260" r:id="Rd1e37d3696d9419a"/>
+    <p:sldId xmlns:r="http://schemas.openxmlformats.org/officeDocument/2006/relationships" id="261" r:id="R7614ddab4ac54cca"/>
+    <p:sldId xmlns:r="http://schemas.openxmlformats.org/officeDocument/2006/relationships" id="262" r:id="R4188a7528aa04d0b"/>
+    <p:sldId xmlns:r="http://schemas.openxmlformats.org/officeDocument/2006/relationships" id="263" r:id="Recab76510d184004"/>
+    <p:sldId xmlns:r="http://schemas.openxmlformats.org/officeDocument/2006/relationships" id="264" r:id="Re514afe0064242be"/>
+    <p:sldId xmlns:r="http://schemas.openxmlformats.org/officeDocument/2006/relationships" id="265" r:id="Rea36086ffabd4d40"/>
+    <p:sldId xmlns:r="http://schemas.openxmlformats.org/officeDocument/2006/relationships" id="266" r:id="R49332fc4a43d4198"/>
+    <p:sldId xmlns:r="http://schemas.openxmlformats.org/officeDocument/2006/relationships" id="267" r:id="R29e7609c61f04a1c"/>
+    <p:sldId xmlns:r="http://schemas.openxmlformats.org/officeDocument/2006/relationships" id="268" r:id="R15293bcfd3914a9b"/>
+    <p:sldId xmlns:r="http://schemas.openxmlformats.org/officeDocument/2006/relationships" id="269" r:id="Rda2c449b7b214ab1"/>
+    <p:sldId xmlns:r="http://schemas.openxmlformats.org/officeDocument/2006/relationships" id="270" r:id="R0ed03fbcca574775"/>
   </p:sldIdLst>
   <p:sldSz cx="12192000" cy="6858000"/>
   <p:notesSz cx="6858000" cy="9144000"/>
@@ -402,27 +402,27 @@
           <a:lstStyle xmlns:a="http://schemas.openxmlformats.org/drawingml/2006/main"/>
           <a:p xmlns:a="http://schemas.openxmlformats.org/drawingml/2006/main">
             <a:r>
-              <a:t>现行逐页母稿：</a:t>
-            </a:r>
-          </a:p>
-          <a:p xmlns:a="http://schemas.openxmlformats.org/drawingml/2006/main">
-            <a:r>
-              <a:t>## P01｜第15讲 同行评审、论证门预检与修改工作坊</a:t>
-            </a:r>
-          </a:p>
-          <a:p xmlns:a="http://schemas.openxmlformats.org/drawingml/2006/main">
-            <a:r>
-              <a:t/>
-            </a:r>
-          </a:p>
-          <a:p xmlns:a="http://schemas.openxmlformats.org/drawingml/2006/main">
-            <a:r>
-              <a:t>### 屏显内容</a:t>
-            </a:r>
-          </a:p>
-          <a:p xmlns:a="http://schemas.openxmlformats.org/drawingml/2006/main">
-            <a:r>
-              <a:t/>
+              <a:t>页面：P01 第15讲 同行评审、论证门预检与修改工作坊</a:t>
+            </a:r>
+          </a:p>
+          <a:p xmlns:a="http://schemas.openxmlformats.org/drawingml/2006/main">
+            <a:r>
+              <a:t/>
+            </a:r>
+          </a:p>
+          <a:p xmlns:a="http://schemas.openxmlformats.org/drawingml/2006/main">
+            <a:r>
+              <a:t>讲义位置：本课讲义；见逐页母稿映射表</a:t>
+            </a:r>
+          </a:p>
+          <a:p xmlns:a="http://schemas.openxmlformats.org/drawingml/2006/main">
+            <a:r>
+              <a:t/>
+            </a:r>
+          </a:p>
+          <a:p xmlns:a="http://schemas.openxmlformats.org/drawingml/2006/main">
+            <a:r>
+              <a:t>屏显核对：</a:t>
             </a:r>
           </a:p>
           <a:p xmlns:a="http://schemas.openxmlformats.org/drawingml/2006/main">
@@ -437,32 +437,7 @@
           </a:p>
           <a:p xmlns:a="http://schemas.openxmlformats.org/drawingml/2006/main">
             <a:r>
-              <a:t>### 视觉结构</a:t>
-            </a:r>
-          </a:p>
-          <a:p xmlns:a="http://schemas.openxmlformats.org/drawingml/2006/main">
-            <a:r>
-              <a:t/>
-            </a:r>
-          </a:p>
-          <a:p xmlns:a="http://schemas.openxmlformats.org/drawingml/2006/main">
-            <a:r>
-              <a:t>仅正式课名，保留原生交大封面，标题位于中部两横线之间。</a:t>
-            </a:r>
-          </a:p>
-          <a:p xmlns:a="http://schemas.openxmlformats.org/drawingml/2006/main">
-            <a:r>
-              <a:t/>
-            </a:r>
-          </a:p>
-          <a:p xmlns:a="http://schemas.openxmlformats.org/drawingml/2006/main">
-            <a:r>
-              <a:t>### 教师备注／互动</a:t>
-            </a:r>
-          </a:p>
-          <a:p xmlns:a="http://schemas.openxmlformats.org/drawingml/2006/main">
-            <a:r>
-              <a:t/>
+              <a:t>教师讲述：</a:t>
             </a:r>
           </a:p>
           <a:p xmlns:a="http://schemas.openxmlformats.org/drawingml/2006/main">
@@ -477,12 +452,22 @@
           </a:p>
           <a:p xmlns:a="http://schemas.openxmlformats.org/drawingml/2006/main">
             <a:r>
-              <a:t>### 来源与边界</a:t>
-            </a:r>
-          </a:p>
-          <a:p xmlns:a="http://schemas.openxmlformats.org/drawingml/2006/main">
-            <a:r>
-              <a:t/>
+              <a:t>学生动作：</a:t>
+            </a:r>
+          </a:p>
+          <a:p xmlns:a="http://schemas.openxmlformats.org/drawingml/2006/main">
+            <a:r>
+              <a:t/>
+            </a:r>
+          </a:p>
+          <a:p xmlns:a="http://schemas.openxmlformats.org/drawingml/2006/main">
+            <a:r>
+              <a:t/>
+            </a:r>
+          </a:p>
+          <a:p xmlns:a="http://schemas.openxmlformats.org/drawingml/2006/main">
+            <a:r>
+              <a:t>来源与边界：</a:t>
             </a:r>
           </a:p>
           <a:p xmlns:a="http://schemas.openxmlformats.org/drawingml/2006/main">
@@ -497,47 +482,32 @@
           </a:p>
           <a:p xmlns:a="http://schemas.openxmlformats.org/drawingml/2006/main">
             <a:r>
-              <a:t/>
-            </a:r>
-          </a:p>
-          <a:p xmlns:a="http://schemas.openxmlformats.org/drawingml/2006/main">
-            <a:r>
-              <a:t/>
-            </a:r>
-          </a:p>
-          <a:p xmlns:a="http://schemas.openxmlformats.org/drawingml/2006/main">
-            <a:r>
-              <a:t>内容与90分钟教学结构不变，独立总结前置。</a:t>
-            </a:r>
-          </a:p>
-          <a:p xmlns:a="http://schemas.openxmlformats.org/drawingml/2006/main">
-            <a:r>
-              <a:t/>
-            </a:r>
-          </a:p>
-          <a:p xmlns:a="http://schemas.openxmlformats.org/drawingml/2006/main">
-            <a:r>
               <a:t>[Sources]</a:t>
             </a:r>
           </a:p>
           <a:p xmlns:a="http://schemas.openxmlformats.org/drawingml/2006/main">
             <a:r>
-              <a:t>- lessons/lesson-15/handout.md</a:t>
-            </a:r>
-          </a:p>
-          <a:p xmlns:a="http://schemas.openxmlformats.org/drawingml/2006/main">
-            <a:r>
-              <a:t>- lessons/lesson-15/slides.md</a:t>
-            </a:r>
-          </a:p>
-          <a:p xmlns:a="http://schemas.openxmlformats.org/drawingml/2006/main">
-            <a:r>
-              <a:t>- course/assignments.md</a:t>
-            </a:r>
-          </a:p>
-          <a:p xmlns:a="http://schemas.openxmlformats.org/drawingml/2006/main">
-            <a:r>
-              <a:t>- Smith, A. J. (1990). The Task of the Referee. Computer 23(4), 65–71.</a:t>
+              <a:t/>
+            </a:r>
+          </a:p>
+          <a:p xmlns:a="http://schemas.openxmlformats.org/drawingml/2006/main">
+            <a:r>
+              <a:t>- 本课 handout.md 与 slides.md</a:t>
+            </a:r>
+          </a:p>
+          <a:p xmlns:a="http://schemas.openxmlformats.org/drawingml/2006/main">
+            <a:r>
+              <a:t/>
+            </a:r>
+          </a:p>
+          <a:p xmlns:a="http://schemas.openxmlformats.org/drawingml/2006/main">
+            <a:r>
+              <a:t>- ../../course/reading-card-case.md</a:t>
+            </a:r>
+          </a:p>
+          <a:p xmlns:a="http://schemas.openxmlformats.org/drawingml/2006/main">
+            <a:r>
+              <a:t/>
             </a:r>
           </a:p>
           <a:p xmlns:a="http://schemas.openxmlformats.org/drawingml/2006/main">
@@ -612,27 +582,27 @@
           <a:lstStyle xmlns:a="http://schemas.openxmlformats.org/drawingml/2006/main"/>
           <a:p xmlns:a="http://schemas.openxmlformats.org/drawingml/2006/main">
             <a:r>
-              <a:t>现行逐页母稿：</a:t>
-            </a:r>
-          </a:p>
-          <a:p xmlns:a="http://schemas.openxmlformats.org/drawingml/2006/main">
-            <a:r>
-              <a:t>## P10｜现在修改最可能卡门的一项</a:t>
-            </a:r>
-          </a:p>
-          <a:p xmlns:a="http://schemas.openxmlformats.org/drawingml/2006/main">
-            <a:r>
-              <a:t/>
-            </a:r>
-          </a:p>
-          <a:p xmlns:a="http://schemas.openxmlformats.org/drawingml/2006/main">
-            <a:r>
-              <a:t>### 屏显内容</a:t>
-            </a:r>
-          </a:p>
-          <a:p xmlns:a="http://schemas.openxmlformats.org/drawingml/2006/main">
-            <a:r>
-              <a:t/>
+              <a:t>页面：P10 现在修改最可能卡门的一项</a:t>
+            </a:r>
+          </a:p>
+          <a:p xmlns:a="http://schemas.openxmlformats.org/drawingml/2006/main">
+            <a:r>
+              <a:t/>
+            </a:r>
+          </a:p>
+          <a:p xmlns:a="http://schemas.openxmlformats.org/drawingml/2006/main">
+            <a:r>
+              <a:t>讲义位置：本课讲义；见逐页母稿映射表</a:t>
+            </a:r>
+          </a:p>
+          <a:p xmlns:a="http://schemas.openxmlformats.org/drawingml/2006/main">
+            <a:r>
+              <a:t/>
+            </a:r>
+          </a:p>
+          <a:p xmlns:a="http://schemas.openxmlformats.org/drawingml/2006/main">
+            <a:r>
+              <a:t>屏显核对：</a:t>
             </a:r>
           </a:p>
           <a:p xmlns:a="http://schemas.openxmlformats.org/drawingml/2006/main">
@@ -657,17 +627,17 @@
           </a:p>
           <a:p xmlns:a="http://schemas.openxmlformats.org/drawingml/2006/main">
             <a:r>
-              <a:t>+ 本批论文中阅读卡组遗漏率较低，方向支持 H1。</a:t>
-            </a:r>
-          </a:p>
-          <a:p xmlns:a="http://schemas.openxmlformats.org/drawingml/2006/main">
-            <a:r>
-              <a:t/>
-            </a:r>
-          </a:p>
-          <a:p xmlns:a="http://schemas.openxmlformats.org/drawingml/2006/main">
-            <a:r>
-              <a:t>+ A1/A2/A3 尚未充分区分；状态：支持（待验证）。</a:t>
+              <a:t>+ 本教学构造包中阅读卡组总遗漏率较低，方向与 Q1 一致，H1 机制未决。</a:t>
+            </a:r>
+          </a:p>
+          <a:p xmlns:a="http://schemas.openxmlformats.org/drawingml/2006/main">
+            <a:r>
+              <a:t/>
+            </a:r>
+          </a:p>
+          <a:p xmlns:a="http://schemas.openxmlformats.org/drawingml/2006/main">
+            <a:r>
+              <a:t>+ H1/A2 尚未区分，A1 质量代价未评价，A3 范围受限；工件：review；机制判断：仍不能判断。</a:t>
             </a:r>
           </a:p>
           <a:p xmlns:a="http://schemas.openxmlformats.org/drawingml/2006/main">
@@ -687,32 +657,7 @@
           </a:p>
           <a:p xmlns:a="http://schemas.openxmlformats.org/drawingml/2006/main">
             <a:r>
-              <a:t>### 视觉结构</a:t>
-            </a:r>
-          </a:p>
-          <a:p xmlns:a="http://schemas.openxmlformats.org/drawingml/2006/main">
-            <a:r>
-              <a:t/>
-            </a:r>
-          </a:p>
-          <a:p xmlns:a="http://schemas.openxmlformats.org/drawingml/2006/main">
-            <a:r>
-              <a:t>可编辑文本 diff 为主视觉，红删绿增；侧栏显示优先级、保存位置与审核点；不是旧／新抽象标签卡。</a:t>
-            </a:r>
-          </a:p>
-          <a:p xmlns:a="http://schemas.openxmlformats.org/drawingml/2006/main">
-            <a:r>
-              <a:t/>
-            </a:r>
-          </a:p>
-          <a:p xmlns:a="http://schemas.openxmlformats.org/drawingml/2006/main">
-            <a:r>
-              <a:t>### 教师备注／互动</a:t>
-            </a:r>
-          </a:p>
-          <a:p xmlns:a="http://schemas.openxmlformats.org/drawingml/2006/main">
-            <a:r>
-              <a:t/>
+              <a:t>教师讲述：</a:t>
             </a:r>
           </a:p>
           <a:p xmlns:a="http://schemas.openxmlformats.org/drawingml/2006/main">
@@ -727,12 +672,22 @@
           </a:p>
           <a:p xmlns:a="http://schemas.openxmlformats.org/drawingml/2006/main">
             <a:r>
-              <a:t>### 来源与边界</a:t>
-            </a:r>
-          </a:p>
-          <a:p xmlns:a="http://schemas.openxmlformats.org/drawingml/2006/main">
-            <a:r>
-              <a:t/>
+              <a:t>学生动作：</a:t>
+            </a:r>
+          </a:p>
+          <a:p xmlns:a="http://schemas.openxmlformats.org/drawingml/2006/main">
+            <a:r>
+              <a:t/>
+            </a:r>
+          </a:p>
+          <a:p xmlns:a="http://schemas.openxmlformats.org/drawingml/2006/main">
+            <a:r>
+              <a:t/>
+            </a:r>
+          </a:p>
+          <a:p xmlns:a="http://schemas.openxmlformats.org/drawingml/2006/main">
+            <a:r>
+              <a:t>来源与边界：</a:t>
             </a:r>
           </a:p>
           <a:p xmlns:a="http://schemas.openxmlformats.org/drawingml/2006/main">
@@ -747,47 +702,32 @@
           </a:p>
           <a:p xmlns:a="http://schemas.openxmlformats.org/drawingml/2006/main">
             <a:r>
-              <a:t/>
-            </a:r>
-          </a:p>
-          <a:p xmlns:a="http://schemas.openxmlformats.org/drawingml/2006/main">
-            <a:r>
-              <a:t/>
-            </a:r>
-          </a:p>
-          <a:p xmlns:a="http://schemas.openxmlformats.org/drawingml/2006/main">
-            <a:r>
-              <a:t>内容与90分钟教学结构不变，独立总结前置。</a:t>
-            </a:r>
-          </a:p>
-          <a:p xmlns:a="http://schemas.openxmlformats.org/drawingml/2006/main">
-            <a:r>
-              <a:t/>
-            </a:r>
-          </a:p>
-          <a:p xmlns:a="http://schemas.openxmlformats.org/drawingml/2006/main">
-            <a:r>
               <a:t>[Sources]</a:t>
             </a:r>
           </a:p>
           <a:p xmlns:a="http://schemas.openxmlformats.org/drawingml/2006/main">
             <a:r>
-              <a:t>- lessons/lesson-15/handout.md</a:t>
-            </a:r>
-          </a:p>
-          <a:p xmlns:a="http://schemas.openxmlformats.org/drawingml/2006/main">
-            <a:r>
-              <a:t>- lessons/lesson-15/slides.md</a:t>
-            </a:r>
-          </a:p>
-          <a:p xmlns:a="http://schemas.openxmlformats.org/drawingml/2006/main">
-            <a:r>
-              <a:t>- course/assignments.md</a:t>
-            </a:r>
-          </a:p>
-          <a:p xmlns:a="http://schemas.openxmlformats.org/drawingml/2006/main">
-            <a:r>
-              <a:t>- Smith, A. J. (1990). The Task of the Referee. Computer 23(4), 65–71.</a:t>
+              <a:t/>
+            </a:r>
+          </a:p>
+          <a:p xmlns:a="http://schemas.openxmlformats.org/drawingml/2006/main">
+            <a:r>
+              <a:t>- 本课 handout.md 与 slides.md</a:t>
+            </a:r>
+          </a:p>
+          <a:p xmlns:a="http://schemas.openxmlformats.org/drawingml/2006/main">
+            <a:r>
+              <a:t/>
+            </a:r>
+          </a:p>
+          <a:p xmlns:a="http://schemas.openxmlformats.org/drawingml/2006/main">
+            <a:r>
+              <a:t>- ../../course/reading-card-case.md</a:t>
+            </a:r>
+          </a:p>
+          <a:p xmlns:a="http://schemas.openxmlformats.org/drawingml/2006/main">
+            <a:r>
+              <a:t/>
             </a:r>
           </a:p>
           <a:p xmlns:a="http://schemas.openxmlformats.org/drawingml/2006/main">
@@ -862,142 +802,102 @@
           <a:lstStyle xmlns:a="http://schemas.openxmlformats.org/drawingml/2006/main"/>
           <a:p xmlns:a="http://schemas.openxmlformats.org/drawingml/2006/main">
             <a:r>
-              <a:t>现行逐页母稿：</a:t>
-            </a:r>
-          </a:p>
-          <a:p xmlns:a="http://schemas.openxmlformats.org/drawingml/2006/main">
-            <a:r>
-              <a:t>## P11｜把剩余问题正确收口</a:t>
-            </a:r>
-          </a:p>
-          <a:p xmlns:a="http://schemas.openxmlformats.org/drawingml/2006/main">
-            <a:r>
-              <a:t/>
-            </a:r>
-          </a:p>
-          <a:p xmlns:a="http://schemas.openxmlformats.org/drawingml/2006/main">
-            <a:r>
-              <a:t>### 屏显内容</a:t>
-            </a:r>
-          </a:p>
-          <a:p xmlns:a="http://schemas.openxmlformats.org/drawingml/2006/main">
-            <a:r>
-              <a:t/>
-            </a:r>
-          </a:p>
-          <a:p xmlns:a="http://schemas.openxmlformats.org/drawingml/2006/main">
-            <a:r>
-              <a:t>证据不足 → 降为支持（待验证）</a:t>
-            </a:r>
-          </a:p>
-          <a:p xmlns:a="http://schemas.openxmlformats.org/drawingml/2006/main">
-            <a:r>
-              <a:t/>
-            </a:r>
-          </a:p>
-          <a:p xmlns:a="http://schemas.openxmlformats.org/drawingml/2006/main">
-            <a:r>
-              <a:t>缺关键对照 → 写最小补证动作</a:t>
-            </a:r>
-          </a:p>
-          <a:p xmlns:a="http://schemas.openxmlformats.org/drawingml/2006/main">
-            <a:r>
-              <a:t/>
-            </a:r>
-          </a:p>
-          <a:p xmlns:a="http://schemas.openxmlformats.org/drawingml/2006/main">
-            <a:r>
-              <a:t>权限或数据不足 → 写阻塞、风险与复核点</a:t>
-            </a:r>
-          </a:p>
-          <a:p xmlns:a="http://schemas.openxmlformats.org/drawingml/2006/main">
-            <a:r>
-              <a:t/>
-            </a:r>
-          </a:p>
-          <a:p xmlns:a="http://schemas.openxmlformats.org/drawingml/2006/main">
-            <a:r>
-              <a:t>普通技术失败进入修复复盘；编造、隐瞒、越权或伪造记录才是红线。</a:t>
-            </a:r>
-          </a:p>
-          <a:p xmlns:a="http://schemas.openxmlformats.org/drawingml/2006/main">
-            <a:r>
-              <a:t/>
-            </a:r>
-          </a:p>
-          <a:p xmlns:a="http://schemas.openxmlformats.org/drawingml/2006/main">
-            <a:r>
-              <a:t>### 视觉结构</a:t>
-            </a:r>
-          </a:p>
-          <a:p xmlns:a="http://schemas.openxmlformats.org/drawingml/2006/main">
-            <a:r>
-              <a:t/>
-            </a:r>
-          </a:p>
-          <a:p xmlns:a="http://schemas.openxmlformats.org/drawingml/2006/main">
-            <a:r>
-              <a:t>三行具体问题→修订动作，每行保留对应状态；红线在相关文字附近，不以整页红块恐吓。</a:t>
-            </a:r>
-          </a:p>
-          <a:p xmlns:a="http://schemas.openxmlformats.org/drawingml/2006/main">
-            <a:r>
-              <a:t/>
-            </a:r>
-          </a:p>
-          <a:p xmlns:a="http://schemas.openxmlformats.org/drawingml/2006/main">
-            <a:r>
-              <a:t>### 教师备注／互动</a:t>
-            </a:r>
-          </a:p>
-          <a:p xmlns:a="http://schemas.openxmlformats.org/drawingml/2006/main">
-            <a:r>
-              <a:t/>
-            </a:r>
-          </a:p>
-          <a:p xmlns:a="http://schemas.openxmlformats.org/drawingml/2006/main">
-            <a:r>
-              <a:t>强调“不显著”不证明机制不存在；编造、隐瞒、越权或伪造记录才是红线。</a:t>
-            </a:r>
-          </a:p>
-          <a:p xmlns:a="http://schemas.openxmlformats.org/drawingml/2006/main">
-            <a:r>
-              <a:t/>
-            </a:r>
-          </a:p>
-          <a:p xmlns:a="http://schemas.openxmlformats.org/drawingml/2006/main">
-            <a:r>
-              <a:t>### 来源与边界</a:t>
-            </a:r>
-          </a:p>
-          <a:p xmlns:a="http://schemas.openxmlformats.org/drawingml/2006/main">
-            <a:r>
-              <a:t/>
-            </a:r>
-          </a:p>
-          <a:p xmlns:a="http://schemas.openxmlformats.org/drawingml/2006/main">
-            <a:r>
-              <a:t>讲义 §五；assessment.md。</a:t>
-            </a:r>
-          </a:p>
-          <a:p xmlns:a="http://schemas.openxmlformats.org/drawingml/2006/main">
-            <a:r>
-              <a:t/>
-            </a:r>
-          </a:p>
-          <a:p xmlns:a="http://schemas.openxmlformats.org/drawingml/2006/main">
-            <a:r>
-              <a:t/>
-            </a:r>
-          </a:p>
-          <a:p xmlns:a="http://schemas.openxmlformats.org/drawingml/2006/main">
-            <a:r>
-              <a:t/>
-            </a:r>
-          </a:p>
-          <a:p xmlns:a="http://schemas.openxmlformats.org/drawingml/2006/main">
-            <a:r>
-              <a:t>内容与90分钟教学结构不变，独立总结前置。</a:t>
+              <a:t>页面：P11 证据不足，怎样修改主句？</a:t>
+            </a:r>
+          </a:p>
+          <a:p xmlns:a="http://schemas.openxmlformats.org/drawingml/2006/main">
+            <a:r>
+              <a:t/>
+            </a:r>
+          </a:p>
+          <a:p xmlns:a="http://schemas.openxmlformats.org/drawingml/2006/main">
+            <a:r>
+              <a:t>讲义位置：handout.md §七、贯穿案例：从第 14 课初稿到同行评审</a:t>
+            </a:r>
+          </a:p>
+          <a:p xmlns:a="http://schemas.openxmlformats.org/drawingml/2006/main">
+            <a:r>
+              <a:t/>
+            </a:r>
+          </a:p>
+          <a:p xmlns:a="http://schemas.openxmlformats.org/drawingml/2006/main">
+            <a:r>
+              <a:t>屏显核对：</a:t>
+            </a:r>
+          </a:p>
+          <a:p xmlns:a="http://schemas.openxmlformats.org/drawingml/2006/main">
+            <a:r>
+              <a:t>Q1：在构造包中方向一致。</a:t>
+            </a:r>
+          </a:p>
+          <a:p xmlns:a="http://schemas.openxmlformats.org/drawingml/2006/main">
+            <a:r>
+              <a:t>H1/A2：仍不能区分。</a:t>
+            </a:r>
+          </a:p>
+          <a:p xmlns:a="http://schemas.openxmlformats.org/drawingml/2006/main">
+            <a:r>
+              <a:t>其他质量：尚未测量。</a:t>
+            </a:r>
+          </a:p>
+          <a:p xmlns:a="http://schemas.openxmlformats.org/drawingml/2006/main">
+            <a:r>
+              <a:t>范围：保留T03负例，撤回“所有文本”。</a:t>
+            </a:r>
+          </a:p>
+          <a:p xmlns:a="http://schemas.openxmlformats.org/drawingml/2006/main">
+            <a:r>
+              <a:t/>
+            </a:r>
+          </a:p>
+          <a:p xmlns:a="http://schemas.openxmlformats.org/drawingml/2006/main">
+            <a:r>
+              <a:t>修改正文，再更新追踪状态。</a:t>
+            </a:r>
+          </a:p>
+          <a:p xmlns:a="http://schemas.openxmlformats.org/drawingml/2006/main">
+            <a:r>
+              <a:t/>
+            </a:r>
+          </a:p>
+          <a:p xmlns:a="http://schemas.openxmlformats.org/drawingml/2006/main">
+            <a:r>
+              <a:t>教师讲述：</a:t>
+            </a:r>
+          </a:p>
+          <a:p xmlns:a="http://schemas.openxmlformats.org/drawingml/2006/main">
+            <a:r>
+              <a:t>不要把“机制已证明”简单改成“支持待验证”。证据没有回答机制时，状态应为不能判断；工件成熟度另行检查。修改动作需落到文件并形成diff。</a:t>
+            </a:r>
+          </a:p>
+          <a:p xmlns:a="http://schemas.openxmlformats.org/drawingml/2006/main">
+            <a:r>
+              <a:t/>
+            </a:r>
+          </a:p>
+          <a:p xmlns:a="http://schemas.openxmlformats.org/drawingml/2006/main">
+            <a:r>
+              <a:t>学生动作：</a:t>
+            </a:r>
+          </a:p>
+          <a:p xmlns:a="http://schemas.openxmlformats.org/drawingml/2006/main">
+            <a:r>
+              <a:t>核对一条作者回应是否已经改变正文与追踪记录。</a:t>
+            </a:r>
+          </a:p>
+          <a:p xmlns:a="http://schemas.openxmlformats.org/drawingml/2006/main">
+            <a:r>
+              <a:t/>
+            </a:r>
+          </a:p>
+          <a:p xmlns:a="http://schemas.openxmlformats.org/drawingml/2006/main">
+            <a:r>
+              <a:t>来源与边界：</a:t>
+            </a:r>
+          </a:p>
+          <a:p xmlns:a="http://schemas.openxmlformats.org/drawingml/2006/main">
+            <a:r>
+              <a:t>./handout.md；课堂示例与构造数据见 ../../course/reading-card-case.md</a:t>
             </a:r>
           </a:p>
           <a:p xmlns:a="http://schemas.openxmlformats.org/drawingml/2006/main">
@@ -1012,22 +912,27 @@
           </a:p>
           <a:p xmlns:a="http://schemas.openxmlformats.org/drawingml/2006/main">
             <a:r>
-              <a:t>- lessons/lesson-15/handout.md</a:t>
-            </a:r>
-          </a:p>
-          <a:p xmlns:a="http://schemas.openxmlformats.org/drawingml/2006/main">
-            <a:r>
-              <a:t>- lessons/lesson-15/slides.md</a:t>
-            </a:r>
-          </a:p>
-          <a:p xmlns:a="http://schemas.openxmlformats.org/drawingml/2006/main">
-            <a:r>
-              <a:t>- course/assignments.md</a:t>
-            </a:r>
-          </a:p>
-          <a:p xmlns:a="http://schemas.openxmlformats.org/drawingml/2006/main">
-            <a:r>
-              <a:t>- Smith, A. J. (1990). The Task of the Referee. Computer 23(4), 65–71.</a:t>
+              <a:t/>
+            </a:r>
+          </a:p>
+          <a:p xmlns:a="http://schemas.openxmlformats.org/drawingml/2006/main">
+            <a:r>
+              <a:t>- 本课 handout.md 与 slides.md</a:t>
+            </a:r>
+          </a:p>
+          <a:p xmlns:a="http://schemas.openxmlformats.org/drawingml/2006/main">
+            <a:r>
+              <a:t/>
+            </a:r>
+          </a:p>
+          <a:p xmlns:a="http://schemas.openxmlformats.org/drawingml/2006/main">
+            <a:r>
+              <a:t>- ../../course/reading-card-case.md</a:t>
+            </a:r>
+          </a:p>
+          <a:p xmlns:a="http://schemas.openxmlformats.org/drawingml/2006/main">
+            <a:r>
+              <a:t/>
             </a:r>
           </a:p>
           <a:p xmlns:a="http://schemas.openxmlformats.org/drawingml/2006/main">
@@ -1102,27 +1007,27 @@
           <a:lstStyle xmlns:a="http://schemas.openxmlformats.org/drawingml/2006/main"/>
           <a:p xmlns:a="http://schemas.openxmlformats.org/drawingml/2006/main">
             <a:r>
-              <a:t>现行逐页母稿：</a:t>
-            </a:r>
-          </a:p>
-          <a:p xmlns:a="http://schemas.openxmlformats.org/drawingml/2006/main">
-            <a:r>
-              <a:t>## P12｜保存第二项修改或一个缺口</a:t>
-            </a:r>
-          </a:p>
-          <a:p xmlns:a="http://schemas.openxmlformats.org/drawingml/2006/main">
-            <a:r>
-              <a:t/>
-            </a:r>
-          </a:p>
-          <a:p xmlns:a="http://schemas.openxmlformats.org/drawingml/2006/main">
-            <a:r>
-              <a:t>### 屏显内容</a:t>
-            </a:r>
-          </a:p>
-          <a:p xmlns:a="http://schemas.openxmlformats.org/drawingml/2006/main">
-            <a:r>
-              <a:t/>
+              <a:t>页面：P12 保存第二项修改或一个缺口</a:t>
+            </a:r>
+          </a:p>
+          <a:p xmlns:a="http://schemas.openxmlformats.org/drawingml/2006/main">
+            <a:r>
+              <a:t/>
+            </a:r>
+          </a:p>
+          <a:p xmlns:a="http://schemas.openxmlformats.org/drawingml/2006/main">
+            <a:r>
+              <a:t>讲义位置：本课讲义；见逐页母稿映射表</a:t>
+            </a:r>
+          </a:p>
+          <a:p xmlns:a="http://schemas.openxmlformats.org/drawingml/2006/main">
+            <a:r>
+              <a:t/>
+            </a:r>
+          </a:p>
+          <a:p xmlns:a="http://schemas.openxmlformats.org/drawingml/2006/main">
+            <a:r>
+              <a:t>屏显核对：</a:t>
             </a:r>
           </a:p>
           <a:p xmlns:a="http://schemas.openxmlformats.org/drawingml/2006/main">
@@ -1167,32 +1072,7 @@
           </a:p>
           <a:p xmlns:a="http://schemas.openxmlformats.org/drawingml/2006/main">
             <a:r>
-              <a:t>### 视觉结构</a:t>
-            </a:r>
-          </a:p>
-          <a:p xmlns:a="http://schemas.openxmlformats.org/drawingml/2006/main">
-            <a:r>
-              <a:t/>
-            </a:r>
-          </a:p>
-          <a:p xmlns:a="http://schemas.openxmlformats.org/drawingml/2006/main">
-            <a:r>
-              <a:t>左侧一个选择动作和输入，右侧一条完整的未修复项处理记录；同一稿件对象延续 P10。</a:t>
-            </a:r>
-          </a:p>
-          <a:p xmlns:a="http://schemas.openxmlformats.org/drawingml/2006/main">
-            <a:r>
-              <a:t/>
-            </a:r>
-          </a:p>
-          <a:p xmlns:a="http://schemas.openxmlformats.org/drawingml/2006/main">
-            <a:r>
-              <a:t>### 教师备注／互动</a:t>
-            </a:r>
-          </a:p>
-          <a:p xmlns:a="http://schemas.openxmlformats.org/drawingml/2006/main">
-            <a:r>
-              <a:t/>
+              <a:t>教师讲述：</a:t>
             </a:r>
           </a:p>
           <a:p xmlns:a="http://schemas.openxmlformats.org/drawingml/2006/main">
@@ -1207,12 +1087,22 @@
           </a:p>
           <a:p xmlns:a="http://schemas.openxmlformats.org/drawingml/2006/main">
             <a:r>
-              <a:t>### 来源与边界</a:t>
-            </a:r>
-          </a:p>
-          <a:p xmlns:a="http://schemas.openxmlformats.org/drawingml/2006/main">
-            <a:r>
-              <a:t/>
+              <a:t>学生动作：</a:t>
+            </a:r>
+          </a:p>
+          <a:p xmlns:a="http://schemas.openxmlformats.org/drawingml/2006/main">
+            <a:r>
+              <a:t/>
+            </a:r>
+          </a:p>
+          <a:p xmlns:a="http://schemas.openxmlformats.org/drawingml/2006/main">
+            <a:r>
+              <a:t/>
+            </a:r>
+          </a:p>
+          <a:p xmlns:a="http://schemas.openxmlformats.org/drawingml/2006/main">
+            <a:r>
+              <a:t>来源与边界：</a:t>
             </a:r>
           </a:p>
           <a:p xmlns:a="http://schemas.openxmlformats.org/drawingml/2006/main">
@@ -1227,47 +1117,32 @@
           </a:p>
           <a:p xmlns:a="http://schemas.openxmlformats.org/drawingml/2006/main">
             <a:r>
-              <a:t/>
-            </a:r>
-          </a:p>
-          <a:p xmlns:a="http://schemas.openxmlformats.org/drawingml/2006/main">
-            <a:r>
-              <a:t/>
-            </a:r>
-          </a:p>
-          <a:p xmlns:a="http://schemas.openxmlformats.org/drawingml/2006/main">
-            <a:r>
-              <a:t>内容与90分钟教学结构不变，独立总结前置。</a:t>
-            </a:r>
-          </a:p>
-          <a:p xmlns:a="http://schemas.openxmlformats.org/drawingml/2006/main">
-            <a:r>
-              <a:t/>
-            </a:r>
-          </a:p>
-          <a:p xmlns:a="http://schemas.openxmlformats.org/drawingml/2006/main">
-            <a:r>
               <a:t>[Sources]</a:t>
             </a:r>
           </a:p>
           <a:p xmlns:a="http://schemas.openxmlformats.org/drawingml/2006/main">
             <a:r>
-              <a:t>- lessons/lesson-15/handout.md</a:t>
-            </a:r>
-          </a:p>
-          <a:p xmlns:a="http://schemas.openxmlformats.org/drawingml/2006/main">
-            <a:r>
-              <a:t>- lessons/lesson-15/slides.md</a:t>
-            </a:r>
-          </a:p>
-          <a:p xmlns:a="http://schemas.openxmlformats.org/drawingml/2006/main">
-            <a:r>
-              <a:t>- course/assignments.md</a:t>
-            </a:r>
-          </a:p>
-          <a:p xmlns:a="http://schemas.openxmlformats.org/drawingml/2006/main">
-            <a:r>
-              <a:t>- Smith, A. J. (1990). The Task of the Referee. Computer 23(4), 65–71.</a:t>
+              <a:t/>
+            </a:r>
+          </a:p>
+          <a:p xmlns:a="http://schemas.openxmlformats.org/drawingml/2006/main">
+            <a:r>
+              <a:t>- 本课 handout.md 与 slides.md</a:t>
+            </a:r>
+          </a:p>
+          <a:p xmlns:a="http://schemas.openxmlformats.org/drawingml/2006/main">
+            <a:r>
+              <a:t/>
+            </a:r>
+          </a:p>
+          <a:p xmlns:a="http://schemas.openxmlformats.org/drawingml/2006/main">
+            <a:r>
+              <a:t>- ../../course/reading-card-case.md</a:t>
+            </a:r>
+          </a:p>
+          <a:p xmlns:a="http://schemas.openxmlformats.org/drawingml/2006/main">
+            <a:r>
+              <a:t/>
             </a:r>
           </a:p>
           <a:p xmlns:a="http://schemas.openxmlformats.org/drawingml/2006/main">
@@ -1342,27 +1217,27 @@
           <a:lstStyle xmlns:a="http://schemas.openxmlformats.org/drawingml/2006/main"/>
           <a:p xmlns:a="http://schemas.openxmlformats.org/drawingml/2006/main">
             <a:r>
-              <a:t>现行逐页母稿：</a:t>
-            </a:r>
-          </a:p>
-          <a:p xmlns:a="http://schemas.openxmlformats.org/drawingml/2006/main">
-            <a:r>
-              <a:t>## P13｜逐项预检，不假装全部通过</a:t>
-            </a:r>
-          </a:p>
-          <a:p xmlns:a="http://schemas.openxmlformats.org/drawingml/2006/main">
-            <a:r>
-              <a:t/>
-            </a:r>
-          </a:p>
-          <a:p xmlns:a="http://schemas.openxmlformats.org/drawingml/2006/main">
-            <a:r>
-              <a:t>### 屏显内容</a:t>
-            </a:r>
-          </a:p>
-          <a:p xmlns:a="http://schemas.openxmlformats.org/drawingml/2006/main">
-            <a:r>
-              <a:t/>
+              <a:t>页面：P13 逐项预检，不假装全部通过</a:t>
+            </a:r>
+          </a:p>
+          <a:p xmlns:a="http://schemas.openxmlformats.org/drawingml/2006/main">
+            <a:r>
+              <a:t/>
+            </a:r>
+          </a:p>
+          <a:p xmlns:a="http://schemas.openxmlformats.org/drawingml/2006/main">
+            <a:r>
+              <a:t>讲义位置：本课讲义；见逐页母稿映射表</a:t>
+            </a:r>
+          </a:p>
+          <a:p xmlns:a="http://schemas.openxmlformats.org/drawingml/2006/main">
+            <a:r>
+              <a:t/>
+            </a:r>
+          </a:p>
+          <a:p xmlns:a="http://schemas.openxmlformats.org/drawingml/2006/main">
+            <a:r>
+              <a:t>屏显核对：</a:t>
             </a:r>
           </a:p>
           <a:p xmlns:a="http://schemas.openxmlformats.org/drawingml/2006/main">
@@ -1397,32 +1272,7 @@
           </a:p>
           <a:p xmlns:a="http://schemas.openxmlformats.org/drawingml/2006/main">
             <a:r>
-              <a:t>### 视觉结构</a:t>
-            </a:r>
-          </a:p>
-          <a:p xmlns:a="http://schemas.openxmlformats.org/drawingml/2006/main">
-            <a:r>
-              <a:t/>
-            </a:r>
-          </a:p>
-          <a:p xmlns:a="http://schemas.openxmlformats.org/drawingml/2006/main">
-            <a:r>
-              <a:t>五行门检清单配空白三态选择列，展示可用检查工具，不自动替学生勾选通过。</a:t>
-            </a:r>
-          </a:p>
-          <a:p xmlns:a="http://schemas.openxmlformats.org/drawingml/2006/main">
-            <a:r>
-              <a:t/>
-            </a:r>
-          </a:p>
-          <a:p xmlns:a="http://schemas.openxmlformats.org/drawingml/2006/main">
-            <a:r>
-              <a:t>### 教师备注／互动</a:t>
-            </a:r>
-          </a:p>
-          <a:p xmlns:a="http://schemas.openxmlformats.org/drawingml/2006/main">
-            <a:r>
-              <a:t/>
+              <a:t>教师讲述：</a:t>
             </a:r>
           </a:p>
           <a:p xmlns:a="http://schemas.openxmlformats.org/drawingml/2006/main">
@@ -1437,12 +1287,22 @@
           </a:p>
           <a:p xmlns:a="http://schemas.openxmlformats.org/drawingml/2006/main">
             <a:r>
-              <a:t>### 来源与边界</a:t>
-            </a:r>
-          </a:p>
-          <a:p xmlns:a="http://schemas.openxmlformats.org/drawingml/2006/main">
-            <a:r>
-              <a:t/>
+              <a:t>学生动作：</a:t>
+            </a:r>
+          </a:p>
+          <a:p xmlns:a="http://schemas.openxmlformats.org/drawingml/2006/main">
+            <a:r>
+              <a:t/>
+            </a:r>
+          </a:p>
+          <a:p xmlns:a="http://schemas.openxmlformats.org/drawingml/2006/main">
+            <a:r>
+              <a:t/>
+            </a:r>
+          </a:p>
+          <a:p xmlns:a="http://schemas.openxmlformats.org/drawingml/2006/main">
+            <a:r>
+              <a:t>来源与边界：</a:t>
             </a:r>
           </a:p>
           <a:p xmlns:a="http://schemas.openxmlformats.org/drawingml/2006/main">
@@ -1457,47 +1317,32 @@
           </a:p>
           <a:p xmlns:a="http://schemas.openxmlformats.org/drawingml/2006/main">
             <a:r>
-              <a:t/>
-            </a:r>
-          </a:p>
-          <a:p xmlns:a="http://schemas.openxmlformats.org/drawingml/2006/main">
-            <a:r>
-              <a:t/>
-            </a:r>
-          </a:p>
-          <a:p xmlns:a="http://schemas.openxmlformats.org/drawingml/2006/main">
-            <a:r>
-              <a:t>内容与90分钟教学结构不变，独立总结前置。</a:t>
-            </a:r>
-          </a:p>
-          <a:p xmlns:a="http://schemas.openxmlformats.org/drawingml/2006/main">
-            <a:r>
-              <a:t/>
-            </a:r>
-          </a:p>
-          <a:p xmlns:a="http://schemas.openxmlformats.org/drawingml/2006/main">
-            <a:r>
               <a:t>[Sources]</a:t>
             </a:r>
           </a:p>
           <a:p xmlns:a="http://schemas.openxmlformats.org/drawingml/2006/main">
             <a:r>
-              <a:t>- lessons/lesson-15/handout.md</a:t>
-            </a:r>
-          </a:p>
-          <a:p xmlns:a="http://schemas.openxmlformats.org/drawingml/2006/main">
-            <a:r>
-              <a:t>- lessons/lesson-15/slides.md</a:t>
-            </a:r>
-          </a:p>
-          <a:p xmlns:a="http://schemas.openxmlformats.org/drawingml/2006/main">
-            <a:r>
-              <a:t>- course/assignments.md</a:t>
-            </a:r>
-          </a:p>
-          <a:p xmlns:a="http://schemas.openxmlformats.org/drawingml/2006/main">
-            <a:r>
-              <a:t>- Smith, A. J. (1990). The Task of the Referee. Computer 23(4), 65–71.</a:t>
+              <a:t/>
+            </a:r>
+          </a:p>
+          <a:p xmlns:a="http://schemas.openxmlformats.org/drawingml/2006/main">
+            <a:r>
+              <a:t>- 本课 handout.md 与 slides.md</a:t>
+            </a:r>
+          </a:p>
+          <a:p xmlns:a="http://schemas.openxmlformats.org/drawingml/2006/main">
+            <a:r>
+              <a:t/>
+            </a:r>
+          </a:p>
+          <a:p xmlns:a="http://schemas.openxmlformats.org/drawingml/2006/main">
+            <a:r>
+              <a:t>- ../../course/reading-card-case.md</a:t>
+            </a:r>
+          </a:p>
+          <a:p xmlns:a="http://schemas.openxmlformats.org/drawingml/2006/main">
+            <a:r>
+              <a:t/>
             </a:r>
           </a:p>
           <a:p xmlns:a="http://schemas.openxmlformats.org/drawingml/2006/main">
@@ -1572,27 +1417,27 @@
           <a:lstStyle xmlns:a="http://schemas.openxmlformats.org/drawingml/2006/main"/>
           <a:p xmlns:a="http://schemas.openxmlformats.org/drawingml/2006/main">
             <a:r>
-              <a:t>现行逐页母稿：</a:t>
-            </a:r>
-          </a:p>
-          <a:p xmlns:a="http://schemas.openxmlformats.org/drawingml/2006/main">
-            <a:r>
-              <a:t>## P14｜本讲知识点总结</a:t>
-            </a:r>
-          </a:p>
-          <a:p xmlns:a="http://schemas.openxmlformats.org/drawingml/2006/main">
-            <a:r>
-              <a:t/>
-            </a:r>
-          </a:p>
-          <a:p xmlns:a="http://schemas.openxmlformats.org/drawingml/2006/main">
-            <a:r>
-              <a:t>### 屏显内容</a:t>
-            </a:r>
-          </a:p>
-          <a:p xmlns:a="http://schemas.openxmlformats.org/drawingml/2006/main">
-            <a:r>
-              <a:t/>
+              <a:t>页面：P14 本讲知识点总结</a:t>
+            </a:r>
+          </a:p>
+          <a:p xmlns:a="http://schemas.openxmlformats.org/drawingml/2006/main">
+            <a:r>
+              <a:t/>
+            </a:r>
+          </a:p>
+          <a:p xmlns:a="http://schemas.openxmlformats.org/drawingml/2006/main">
+            <a:r>
+              <a:t>讲义位置：本课讲义；见逐页母稿映射表</a:t>
+            </a:r>
+          </a:p>
+          <a:p xmlns:a="http://schemas.openxmlformats.org/drawingml/2006/main">
+            <a:r>
+              <a:t/>
+            </a:r>
+          </a:p>
+          <a:p xmlns:a="http://schemas.openxmlformats.org/drawingml/2006/main">
+            <a:r>
+              <a:t>屏显核对：</a:t>
             </a:r>
           </a:p>
           <a:p xmlns:a="http://schemas.openxmlformats.org/drawingml/2006/main">
@@ -1627,32 +1472,7 @@
           </a:p>
           <a:p xmlns:a="http://schemas.openxmlformats.org/drawingml/2006/main">
             <a:r>
-              <a:t>### 视觉结构</a:t>
-            </a:r>
-          </a:p>
-          <a:p xmlns:a="http://schemas.openxmlformats.org/drawingml/2006/main">
-            <a:r>
-              <a:t/>
-            </a:r>
-          </a:p>
-          <a:p xmlns:a="http://schemas.openxmlformats.org/drawingml/2006/main">
-            <a:r>
-              <a:t>独立总结：用已在前页完成的“真实意见→处理决定→实际修改→剩余边界”链收束；突出修改证据与作者判断，不混入展示安排。</a:t>
-            </a:r>
-          </a:p>
-          <a:p xmlns:a="http://schemas.openxmlformats.org/drawingml/2006/main">
-            <a:r>
-              <a:t/>
-            </a:r>
-          </a:p>
-          <a:p xmlns:a="http://schemas.openxmlformats.org/drawingml/2006/main">
-            <a:r>
-              <a:t>### 教师备注／互动</a:t>
-            </a:r>
-          </a:p>
-          <a:p xmlns:a="http://schemas.openxmlformats.org/drawingml/2006/main">
-            <a:r>
-              <a:t/>
+              <a:t>教师讲述：</a:t>
             </a:r>
           </a:p>
           <a:p xmlns:a="http://schemas.openxmlformats.org/drawingml/2006/main">
@@ -1667,12 +1487,22 @@
           </a:p>
           <a:p xmlns:a="http://schemas.openxmlformats.org/drawingml/2006/main">
             <a:r>
-              <a:t>### 来源与边界</a:t>
-            </a:r>
-          </a:p>
-          <a:p xmlns:a="http://schemas.openxmlformats.org/drawingml/2006/main">
-            <a:r>
-              <a:t/>
+              <a:t>学生动作：</a:t>
+            </a:r>
+          </a:p>
+          <a:p xmlns:a="http://schemas.openxmlformats.org/drawingml/2006/main">
+            <a:r>
+              <a:t/>
+            </a:r>
+          </a:p>
+          <a:p xmlns:a="http://schemas.openxmlformats.org/drawingml/2006/main">
+            <a:r>
+              <a:t/>
+            </a:r>
+          </a:p>
+          <a:p xmlns:a="http://schemas.openxmlformats.org/drawingml/2006/main">
+            <a:r>
+              <a:t>来源与边界：</a:t>
             </a:r>
           </a:p>
           <a:p xmlns:a="http://schemas.openxmlformats.org/drawingml/2006/main">
@@ -1687,47 +1517,32 @@
           </a:p>
           <a:p xmlns:a="http://schemas.openxmlformats.org/drawingml/2006/main">
             <a:r>
-              <a:t/>
-            </a:r>
-          </a:p>
-          <a:p xmlns:a="http://schemas.openxmlformats.org/drawingml/2006/main">
-            <a:r>
-              <a:t/>
-            </a:r>
-          </a:p>
-          <a:p xmlns:a="http://schemas.openxmlformats.org/drawingml/2006/main">
-            <a:r>
-              <a:t>内容与90分钟教学结构不变，独立总结前置。</a:t>
-            </a:r>
-          </a:p>
-          <a:p xmlns:a="http://schemas.openxmlformats.org/drawingml/2006/main">
-            <a:r>
-              <a:t/>
-            </a:r>
-          </a:p>
-          <a:p xmlns:a="http://schemas.openxmlformats.org/drawingml/2006/main">
-            <a:r>
               <a:t>[Sources]</a:t>
             </a:r>
           </a:p>
           <a:p xmlns:a="http://schemas.openxmlformats.org/drawingml/2006/main">
             <a:r>
-              <a:t>- lessons/lesson-15/handout.md</a:t>
-            </a:r>
-          </a:p>
-          <a:p xmlns:a="http://schemas.openxmlformats.org/drawingml/2006/main">
-            <a:r>
-              <a:t>- lessons/lesson-15/slides.md</a:t>
-            </a:r>
-          </a:p>
-          <a:p xmlns:a="http://schemas.openxmlformats.org/drawingml/2006/main">
-            <a:r>
-              <a:t>- course/assignments.md</a:t>
-            </a:r>
-          </a:p>
-          <a:p xmlns:a="http://schemas.openxmlformats.org/drawingml/2006/main">
-            <a:r>
-              <a:t>- Smith, A. J. (1990). The Task of the Referee. Computer 23(4), 65–71.</a:t>
+              <a:t/>
+            </a:r>
+          </a:p>
+          <a:p xmlns:a="http://schemas.openxmlformats.org/drawingml/2006/main">
+            <a:r>
+              <a:t>- 本课 handout.md 与 slides.md</a:t>
+            </a:r>
+          </a:p>
+          <a:p xmlns:a="http://schemas.openxmlformats.org/drawingml/2006/main">
+            <a:r>
+              <a:t/>
+            </a:r>
+          </a:p>
+          <a:p xmlns:a="http://schemas.openxmlformats.org/drawingml/2006/main">
+            <a:r>
+              <a:t>- ../../course/reading-card-case.md</a:t>
+            </a:r>
+          </a:p>
+          <a:p xmlns:a="http://schemas.openxmlformats.org/drawingml/2006/main">
+            <a:r>
+              <a:t/>
             </a:r>
           </a:p>
           <a:p xmlns:a="http://schemas.openxmlformats.org/drawingml/2006/main">
@@ -1802,27 +1617,27 @@
           <a:lstStyle xmlns:a="http://schemas.openxmlformats.org/drawingml/2006/main"/>
           <a:p xmlns:a="http://schemas.openxmlformats.org/drawingml/2006/main">
             <a:r>
-              <a:t>现行逐页母稿：</a:t>
-            </a:r>
-          </a:p>
-          <a:p xmlns:a="http://schemas.openxmlformats.org/drawingml/2006/main">
-            <a:r>
-              <a:t>## P15｜带齐展示与抽查材料</a:t>
-            </a:r>
-          </a:p>
-          <a:p xmlns:a="http://schemas.openxmlformats.org/drawingml/2006/main">
-            <a:r>
-              <a:t/>
-            </a:r>
-          </a:p>
-          <a:p xmlns:a="http://schemas.openxmlformats.org/drawingml/2006/main">
-            <a:r>
-              <a:t>### 屏显内容</a:t>
-            </a:r>
-          </a:p>
-          <a:p xmlns:a="http://schemas.openxmlformats.org/drawingml/2006/main">
-            <a:r>
-              <a:t/>
+              <a:t>页面：P15 带齐展示与抽查材料</a:t>
+            </a:r>
+          </a:p>
+          <a:p xmlns:a="http://schemas.openxmlformats.org/drawingml/2006/main">
+            <a:r>
+              <a:t/>
+            </a:r>
+          </a:p>
+          <a:p xmlns:a="http://schemas.openxmlformats.org/drawingml/2006/main">
+            <a:r>
+              <a:t>讲义位置：本课讲义；见逐页母稿映射表</a:t>
+            </a:r>
+          </a:p>
+          <a:p xmlns:a="http://schemas.openxmlformats.org/drawingml/2006/main">
+            <a:r>
+              <a:t/>
+            </a:r>
+          </a:p>
+          <a:p xmlns:a="http://schemas.openxmlformats.org/drawingml/2006/main">
+            <a:r>
+              <a:t>屏显核对：</a:t>
             </a:r>
           </a:p>
           <a:p xmlns:a="http://schemas.openxmlformats.org/drawingml/2006/main">
@@ -1867,32 +1682,7 @@
           </a:p>
           <a:p xmlns:a="http://schemas.openxmlformats.org/drawingml/2006/main">
             <a:r>
-              <a:t>### 视觉结构</a:t>
-            </a:r>
-          </a:p>
-          <a:p xmlns:a="http://schemas.openxmlformats.org/drawingml/2006/main">
-            <a:r>
-              <a:t/>
-            </a:r>
-          </a:p>
-          <a:p xmlns:a="http://schemas.openxmlformats.org/drawingml/2006/main">
-            <a:r>
-              <a:t>上下两层展示结构，右侧抽查问题连接到各层可定位工件；无独立感谢页。</a:t>
-            </a:r>
-          </a:p>
-          <a:p xmlns:a="http://schemas.openxmlformats.org/drawingml/2006/main">
-            <a:r>
-              <a:t/>
-            </a:r>
-          </a:p>
-          <a:p xmlns:a="http://schemas.openxmlformats.org/drawingml/2006/main">
-            <a:r>
-              <a:t>### 教师备注／互动</a:t>
-            </a:r>
-          </a:p>
-          <a:p xmlns:a="http://schemas.openxmlformats.org/drawingml/2006/main">
-            <a:r>
-              <a:t/>
+              <a:t>教师讲述：</a:t>
             </a:r>
           </a:p>
           <a:p xmlns:a="http://schemas.openxmlformats.org/drawingml/2006/main">
@@ -1907,12 +1697,22 @@
           </a:p>
           <a:p xmlns:a="http://schemas.openxmlformats.org/drawingml/2006/main">
             <a:r>
-              <a:t>### 来源与边界</a:t>
-            </a:r>
-          </a:p>
-          <a:p xmlns:a="http://schemas.openxmlformats.org/drawingml/2006/main">
-            <a:r>
-              <a:t/>
+              <a:t>学生动作：</a:t>
+            </a:r>
+          </a:p>
+          <a:p xmlns:a="http://schemas.openxmlformats.org/drawingml/2006/main">
+            <a:r>
+              <a:t/>
+            </a:r>
+          </a:p>
+          <a:p xmlns:a="http://schemas.openxmlformats.org/drawingml/2006/main">
+            <a:r>
+              <a:t/>
+            </a:r>
+          </a:p>
+          <a:p xmlns:a="http://schemas.openxmlformats.org/drawingml/2006/main">
+            <a:r>
+              <a:t>来源与边界：</a:t>
             </a:r>
           </a:p>
           <a:p xmlns:a="http://schemas.openxmlformats.org/drawingml/2006/main">
@@ -1927,42 +1727,32 @@
           </a:p>
           <a:p xmlns:a="http://schemas.openxmlformats.org/drawingml/2006/main">
             <a:r>
-              <a:t/>
-            </a:r>
-          </a:p>
-          <a:p xmlns:a="http://schemas.openxmlformats.org/drawingml/2006/main">
-            <a:r>
-              <a:t>内容与90分钟教学结构不变，独立总结前置。</a:t>
-            </a:r>
-          </a:p>
-          <a:p xmlns:a="http://schemas.openxmlformats.org/drawingml/2006/main">
-            <a:r>
-              <a:t/>
-            </a:r>
-          </a:p>
-          <a:p xmlns:a="http://schemas.openxmlformats.org/drawingml/2006/main">
-            <a:r>
               <a:t>[Sources]</a:t>
             </a:r>
           </a:p>
           <a:p xmlns:a="http://schemas.openxmlformats.org/drawingml/2006/main">
             <a:r>
-              <a:t>- lessons/lesson-15/handout.md</a:t>
-            </a:r>
-          </a:p>
-          <a:p xmlns:a="http://schemas.openxmlformats.org/drawingml/2006/main">
-            <a:r>
-              <a:t>- lessons/lesson-15/slides.md</a:t>
-            </a:r>
-          </a:p>
-          <a:p xmlns:a="http://schemas.openxmlformats.org/drawingml/2006/main">
-            <a:r>
-              <a:t>- course/assignments.md</a:t>
-            </a:r>
-          </a:p>
-          <a:p xmlns:a="http://schemas.openxmlformats.org/drawingml/2006/main">
-            <a:r>
-              <a:t>- Smith, A. J. (1990). The Task of the Referee. Computer 23(4), 65–71.</a:t>
+              <a:t/>
+            </a:r>
+          </a:p>
+          <a:p xmlns:a="http://schemas.openxmlformats.org/drawingml/2006/main">
+            <a:r>
+              <a:t>- 本课 handout.md 与 slides.md</a:t>
+            </a:r>
+          </a:p>
+          <a:p xmlns:a="http://schemas.openxmlformats.org/drawingml/2006/main">
+            <a:r>
+              <a:t/>
+            </a:r>
+          </a:p>
+          <a:p xmlns:a="http://schemas.openxmlformats.org/drawingml/2006/main">
+            <a:r>
+              <a:t>- ../../course/reading-card-case.md</a:t>
+            </a:r>
+          </a:p>
+          <a:p xmlns:a="http://schemas.openxmlformats.org/drawingml/2006/main">
+            <a:r>
+              <a:t/>
             </a:r>
           </a:p>
           <a:p xmlns:a="http://schemas.openxmlformats.org/drawingml/2006/main">
@@ -2037,27 +1827,27 @@
           <a:lstStyle xmlns:a="http://schemas.openxmlformats.org/drawingml/2006/main"/>
           <a:p xmlns:a="http://schemas.openxmlformats.org/drawingml/2006/main">
             <a:r>
-              <a:t>现行逐页母稿：</a:t>
-            </a:r>
-          </a:p>
-          <a:p xmlns:a="http://schemas.openxmlformats.org/drawingml/2006/main">
-            <a:r>
-              <a:t>## P02｜把泛泛评价改成可定位意见</a:t>
-            </a:r>
-          </a:p>
-          <a:p xmlns:a="http://schemas.openxmlformats.org/drawingml/2006/main">
-            <a:r>
-              <a:t/>
-            </a:r>
-          </a:p>
-          <a:p xmlns:a="http://schemas.openxmlformats.org/drawingml/2006/main">
-            <a:r>
-              <a:t>### 屏显内容</a:t>
-            </a:r>
-          </a:p>
-          <a:p xmlns:a="http://schemas.openxmlformats.org/drawingml/2006/main">
-            <a:r>
-              <a:t/>
+              <a:t>页面：P02 把泛泛评价改成可定位意见</a:t>
+            </a:r>
+          </a:p>
+          <a:p xmlns:a="http://schemas.openxmlformats.org/drawingml/2006/main">
+            <a:r>
+              <a:t/>
+            </a:r>
+          </a:p>
+          <a:p xmlns:a="http://schemas.openxmlformats.org/drawingml/2006/main">
+            <a:r>
+              <a:t>讲义位置：本课讲义；见逐页母稿映射表</a:t>
+            </a:r>
+          </a:p>
+          <a:p xmlns:a="http://schemas.openxmlformats.org/drawingml/2006/main">
+            <a:r>
+              <a:t/>
+            </a:r>
+          </a:p>
+          <a:p xmlns:a="http://schemas.openxmlformats.org/drawingml/2006/main">
+            <a:r>
+              <a:t>屏显核对：</a:t>
             </a:r>
           </a:p>
           <a:p xmlns:a="http://schemas.openxmlformats.org/drawingml/2006/main">
@@ -2082,7 +1872,7 @@
           </a:p>
           <a:p xmlns:a="http://schemas.openxmlformats.org/drawingml/2006/main">
             <a:r>
-              <a:t>+ report.md 结果段：主张“机制已证实”，但没有区分 A1/A2/A3。建议降级结论并补边界。</a:t>
+              <a:t>+ report.md 结果段：主张“机制已证实”，但没有区分 H1/A2，也没有测量其他质量。建议降级结论并补边界。</a:t>
             </a:r>
           </a:p>
           <a:p xmlns:a="http://schemas.openxmlformats.org/drawingml/2006/main">
@@ -2102,32 +1892,7 @@
           </a:p>
           <a:p xmlns:a="http://schemas.openxmlformats.org/drawingml/2006/main">
             <a:r>
-              <a:t>### 视觉结构</a:t>
-            </a:r>
-          </a:p>
-          <a:p xmlns:a="http://schemas.openxmlformats.org/drawingml/2006/main">
-            <a:r>
-              <a:t/>
-            </a:r>
-          </a:p>
-          <a:p xmlns:a="http://schemas.openxmlformats.org/drawingml/2006/main">
-            <a:r>
-              <a:t>一条真实教学语境下的改写前后意见占主体，右侧批注位置／观察／可执行建议，不显示抽象“工作／作者”卡。</a:t>
-            </a:r>
-          </a:p>
-          <a:p xmlns:a="http://schemas.openxmlformats.org/drawingml/2006/main">
-            <a:r>
-              <a:t/>
-            </a:r>
-          </a:p>
-          <a:p xmlns:a="http://schemas.openxmlformats.org/drawingml/2006/main">
-            <a:r>
-              <a:t>### 教师备注／互动</a:t>
-            </a:r>
-          </a:p>
-          <a:p xmlns:a="http://schemas.openxmlformats.org/drawingml/2006/main">
-            <a:r>
-              <a:t/>
+              <a:t>教师讲述：</a:t>
             </a:r>
           </a:p>
           <a:p xmlns:a="http://schemas.openxmlformats.org/drawingml/2006/main">
@@ -2142,12 +1907,77 @@
           </a:p>
           <a:p xmlns:a="http://schemas.openxmlformats.org/drawingml/2006/main">
             <a:r>
-              <a:t>### 来源与边界</a:t>
-            </a:r>
-          </a:p>
-          <a:p xmlns:a="http://schemas.openxmlformats.org/drawingml/2006/main">
-            <a:r>
-              <a:t/>
+              <a:t>学生动作：</a:t>
+            </a:r>
+          </a:p>
+          <a:p xmlns:a="http://schemas.openxmlformats.org/drawingml/2006/main">
+            <a:r>
+              <a:t/>
+            </a:r>
+          </a:p>
+          <a:p xmlns:a="http://schemas.openxmlformats.org/drawingml/2006/main">
+            <a:r>
+              <a:t/>
+            </a:r>
+          </a:p>
+          <a:p xmlns:a="http://schemas.openxmlformats.org/drawingml/2006/main">
+            <a:r>
+              <a:t>本课板书、诊断与串词：</a:t>
+            </a:r>
+          </a:p>
+          <a:p xmlns:a="http://schemas.openxmlformats.org/drawingml/2006/main">
+            <a:r>
+              <a:t>本节替换同类口头提示，不增加既有时段。开场诊断嵌入现有开场/回顾，后续再沿原实践时段操作。</a:t>
+            </a:r>
+          </a:p>
+          <a:p xmlns:a="http://schemas.openxmlformats.org/drawingml/2006/main">
+            <a:r>
+              <a:t/>
+            </a:r>
+          </a:p>
+          <a:p xmlns:a="http://schemas.openxmlformats.org/drawingml/2006/main">
+            <a:r>
+              <a:t>- **板书主线**：意见定位 → 严重度 → 回应理由 → 实际diff → 未决项。</a:t>
+            </a:r>
+          </a:p>
+          <a:p xmlns:a="http://schemas.openxmlformats.org/drawingml/2006/main">
+            <a:r>
+              <a:t>- **诊断问题**：写了修改计划，是否就算处理完意见？</a:t>
+            </a:r>
+          </a:p>
+          <a:p xmlns:a="http://schemas.openxmlformats.org/drawingml/2006/main">
+            <a:r>
+              <a:t>- **预期回答**：要看正文或工件的实际修改；未完成需标缺口。</a:t>
+            </a:r>
+          </a:p>
+          <a:p xmlns:a="http://schemas.openxmlformats.org/drawingml/2006/main">
+            <a:r>
+              <a:t>- **常见误答后的追问**：如所有意见都写接受，核对依据，允许合理拒绝或暂缓。</a:t>
+            </a:r>
+          </a:p>
+          <a:p xmlns:a="http://schemas.openxmlformats.org/drawingml/2006/main">
+            <a:r>
+              <a:t>- **过渡串词**：“第16课会抽查这些修改后的真实记录，而非只看汇报表述。”</a:t>
+            </a:r>
+          </a:p>
+          <a:p xmlns:a="http://schemas.openxmlformats.org/drawingml/2006/main">
+            <a:r>
+              <a:t>- **当堂最小产出**：真实互评、作者回应、一项已落盘修改与剩余清单。</a:t>
+            </a:r>
+          </a:p>
+          <a:p xmlns:a="http://schemas.openxmlformats.org/drawingml/2006/main">
+            <a:r>
+              <a:t>- **退出记录**：写“已完成的动作、本人项目仍缺的证据/工件、下次补齐位置”。使用教师包时标明课堂方法练习，不能据此宣称本人研究门通过；正式提交课次仍为第 6、9、13、16 课。</a:t>
+            </a:r>
+          </a:p>
+          <a:p xmlns:a="http://schemas.openxmlformats.org/drawingml/2006/main">
+            <a:r>
+              <a:t/>
+            </a:r>
+          </a:p>
+          <a:p xmlns:a="http://schemas.openxmlformats.org/drawingml/2006/main">
+            <a:r>
+              <a:t>来源与边界：</a:t>
             </a:r>
           </a:p>
           <a:p xmlns:a="http://schemas.openxmlformats.org/drawingml/2006/main">
@@ -2162,47 +1992,32 @@
           </a:p>
           <a:p xmlns:a="http://schemas.openxmlformats.org/drawingml/2006/main">
             <a:r>
-              <a:t/>
-            </a:r>
-          </a:p>
-          <a:p xmlns:a="http://schemas.openxmlformats.org/drawingml/2006/main">
-            <a:r>
-              <a:t/>
-            </a:r>
-          </a:p>
-          <a:p xmlns:a="http://schemas.openxmlformats.org/drawingml/2006/main">
-            <a:r>
-              <a:t>内容与90分钟教学结构不变，独立总结前置。</a:t>
-            </a:r>
-          </a:p>
-          <a:p xmlns:a="http://schemas.openxmlformats.org/drawingml/2006/main">
-            <a:r>
-              <a:t/>
-            </a:r>
-          </a:p>
-          <a:p xmlns:a="http://schemas.openxmlformats.org/drawingml/2006/main">
-            <a:r>
               <a:t>[Sources]</a:t>
             </a:r>
           </a:p>
           <a:p xmlns:a="http://schemas.openxmlformats.org/drawingml/2006/main">
             <a:r>
-              <a:t>- lessons/lesson-15/handout.md</a:t>
-            </a:r>
-          </a:p>
-          <a:p xmlns:a="http://schemas.openxmlformats.org/drawingml/2006/main">
-            <a:r>
-              <a:t>- lessons/lesson-15/slides.md</a:t>
-            </a:r>
-          </a:p>
-          <a:p xmlns:a="http://schemas.openxmlformats.org/drawingml/2006/main">
-            <a:r>
-              <a:t>- course/assignments.md</a:t>
-            </a:r>
-          </a:p>
-          <a:p xmlns:a="http://schemas.openxmlformats.org/drawingml/2006/main">
-            <a:r>
-              <a:t>- Smith, A. J. (1990). The Task of the Referee. Computer 23(4), 65–71.</a:t>
+              <a:t/>
+            </a:r>
+          </a:p>
+          <a:p xmlns:a="http://schemas.openxmlformats.org/drawingml/2006/main">
+            <a:r>
+              <a:t>- 本课 handout.md 与 slides.md</a:t>
+            </a:r>
+          </a:p>
+          <a:p xmlns:a="http://schemas.openxmlformats.org/drawingml/2006/main">
+            <a:r>
+              <a:t/>
+            </a:r>
+          </a:p>
+          <a:p xmlns:a="http://schemas.openxmlformats.org/drawingml/2006/main">
+            <a:r>
+              <a:t>- ../../course/reading-card-case.md</a:t>
+            </a:r>
+          </a:p>
+          <a:p xmlns:a="http://schemas.openxmlformats.org/drawingml/2006/main">
+            <a:r>
+              <a:t/>
             </a:r>
           </a:p>
           <a:p xmlns:a="http://schemas.openxmlformats.org/drawingml/2006/main">
@@ -2277,27 +2092,27 @@
           <a:lstStyle xmlns:a="http://schemas.openxmlformats.org/drawingml/2006/main"/>
           <a:p xmlns:a="http://schemas.openxmlformats.org/drawingml/2006/main">
             <a:r>
-              <a:t>现行逐页母稿：</a:t>
-            </a:r>
-          </a:p>
-          <a:p xmlns:a="http://schemas.openxmlformats.org/drawingml/2006/main">
-            <a:r>
-              <a:t>## P03｜评审必须留下修改证据</a:t>
-            </a:r>
-          </a:p>
-          <a:p xmlns:a="http://schemas.openxmlformats.org/drawingml/2006/main">
-            <a:r>
-              <a:t/>
-            </a:r>
-          </a:p>
-          <a:p xmlns:a="http://schemas.openxmlformats.org/drawingml/2006/main">
-            <a:r>
-              <a:t>### 屏显内容</a:t>
-            </a:r>
-          </a:p>
-          <a:p xmlns:a="http://schemas.openxmlformats.org/drawingml/2006/main">
-            <a:r>
-              <a:t/>
+              <a:t>页面：P03 评审必须留下修改证据</a:t>
+            </a:r>
+          </a:p>
+          <a:p xmlns:a="http://schemas.openxmlformats.org/drawingml/2006/main">
+            <a:r>
+              <a:t/>
+            </a:r>
+          </a:p>
+          <a:p xmlns:a="http://schemas.openxmlformats.org/drawingml/2006/main">
+            <a:r>
+              <a:t>讲义位置：本课讲义；见逐页母稿映射表</a:t>
+            </a:r>
+          </a:p>
+          <a:p xmlns:a="http://schemas.openxmlformats.org/drawingml/2006/main">
+            <a:r>
+              <a:t/>
+            </a:r>
+          </a:p>
+          <a:p xmlns:a="http://schemas.openxmlformats.org/drawingml/2006/main">
+            <a:r>
+              <a:t>屏显核对：</a:t>
             </a:r>
           </a:p>
           <a:p xmlns:a="http://schemas.openxmlformats.org/drawingml/2006/main">
@@ -2352,32 +2167,7 @@
           </a:p>
           <a:p xmlns:a="http://schemas.openxmlformats.org/drawingml/2006/main">
             <a:r>
-              <a:t>### 视觉结构</a:t>
-            </a:r>
-          </a:p>
-          <a:p xmlns:a="http://schemas.openxmlformats.org/drawingml/2006/main">
-            <a:r>
-              <a:t/>
-            </a:r>
-          </a:p>
-          <a:p xmlns:a="http://schemas.openxmlformats.org/drawingml/2006/main">
-            <a:r>
-              <a:t>三个完整教学记录片段并排，呈现同一意见的处理顺序，突出 `stable → 支持（待验证）` 的实际文本差异；醒目标明虚构。</a:t>
-            </a:r>
-          </a:p>
-          <a:p xmlns:a="http://schemas.openxmlformats.org/drawingml/2006/main">
-            <a:r>
-              <a:t/>
-            </a:r>
-          </a:p>
-          <a:p xmlns:a="http://schemas.openxmlformats.org/drawingml/2006/main">
-            <a:r>
-              <a:t>### 教师备注／互动</a:t>
-            </a:r>
-          </a:p>
-          <a:p xmlns:a="http://schemas.openxmlformats.org/drawingml/2006/main">
-            <a:r>
-              <a:t/>
+              <a:t>教师讲述：</a:t>
             </a:r>
           </a:p>
           <a:p xmlns:a="http://schemas.openxmlformats.org/drawingml/2006/main">
@@ -2392,12 +2182,22 @@
           </a:p>
           <a:p xmlns:a="http://schemas.openxmlformats.org/drawingml/2006/main">
             <a:r>
-              <a:t>### 来源与边界</a:t>
-            </a:r>
-          </a:p>
-          <a:p xmlns:a="http://schemas.openxmlformats.org/drawingml/2006/main">
-            <a:r>
-              <a:t/>
+              <a:t>学生动作：</a:t>
+            </a:r>
+          </a:p>
+          <a:p xmlns:a="http://schemas.openxmlformats.org/drawingml/2006/main">
+            <a:r>
+              <a:t/>
+            </a:r>
+          </a:p>
+          <a:p xmlns:a="http://schemas.openxmlformats.org/drawingml/2006/main">
+            <a:r>
+              <a:t/>
+            </a:r>
+          </a:p>
+          <a:p xmlns:a="http://schemas.openxmlformats.org/drawingml/2006/main">
+            <a:r>
+              <a:t>来源与边界：</a:t>
             </a:r>
           </a:p>
           <a:p xmlns:a="http://schemas.openxmlformats.org/drawingml/2006/main">
@@ -2412,47 +2212,32 @@
           </a:p>
           <a:p xmlns:a="http://schemas.openxmlformats.org/drawingml/2006/main">
             <a:r>
-              <a:t/>
-            </a:r>
-          </a:p>
-          <a:p xmlns:a="http://schemas.openxmlformats.org/drawingml/2006/main">
-            <a:r>
-              <a:t/>
-            </a:r>
-          </a:p>
-          <a:p xmlns:a="http://schemas.openxmlformats.org/drawingml/2006/main">
-            <a:r>
-              <a:t>内容与90分钟教学结构不变，独立总结前置。</a:t>
-            </a:r>
-          </a:p>
-          <a:p xmlns:a="http://schemas.openxmlformats.org/drawingml/2006/main">
-            <a:r>
-              <a:t/>
-            </a:r>
-          </a:p>
-          <a:p xmlns:a="http://schemas.openxmlformats.org/drawingml/2006/main">
-            <a:r>
               <a:t>[Sources]</a:t>
             </a:r>
           </a:p>
           <a:p xmlns:a="http://schemas.openxmlformats.org/drawingml/2006/main">
             <a:r>
-              <a:t>- lessons/lesson-15/handout.md</a:t>
-            </a:r>
-          </a:p>
-          <a:p xmlns:a="http://schemas.openxmlformats.org/drawingml/2006/main">
-            <a:r>
-              <a:t>- lessons/lesson-15/slides.md</a:t>
-            </a:r>
-          </a:p>
-          <a:p xmlns:a="http://schemas.openxmlformats.org/drawingml/2006/main">
-            <a:r>
-              <a:t>- course/assignments.md</a:t>
-            </a:r>
-          </a:p>
-          <a:p xmlns:a="http://schemas.openxmlformats.org/drawingml/2006/main">
-            <a:r>
-              <a:t>- Smith, A. J. (1990). The Task of the Referee. Computer 23(4), 65–71.</a:t>
+              <a:t/>
+            </a:r>
+          </a:p>
+          <a:p xmlns:a="http://schemas.openxmlformats.org/drawingml/2006/main">
+            <a:r>
+              <a:t>- 本课 handout.md 与 slides.md</a:t>
+            </a:r>
+          </a:p>
+          <a:p xmlns:a="http://schemas.openxmlformats.org/drawingml/2006/main">
+            <a:r>
+              <a:t/>
+            </a:r>
+          </a:p>
+          <a:p xmlns:a="http://schemas.openxmlformats.org/drawingml/2006/main">
+            <a:r>
+              <a:t>- ../../course/reading-card-case.md</a:t>
+            </a:r>
+          </a:p>
+          <a:p xmlns:a="http://schemas.openxmlformats.org/drawingml/2006/main">
+            <a:r>
+              <a:t/>
             </a:r>
           </a:p>
           <a:p xmlns:a="http://schemas.openxmlformats.org/drawingml/2006/main">
@@ -2527,142 +2312,97 @@
           <a:lstStyle xmlns:a="http://schemas.openxmlformats.org/drawingml/2006/main"/>
           <a:p xmlns:a="http://schemas.openxmlformats.org/drawingml/2006/main">
             <a:r>
-              <a:t>现行逐页母稿：</a:t>
-            </a:r>
-          </a:p>
-          <a:p xmlns:a="http://schemas.openxmlformats.org/drawingml/2006/main">
-            <a:r>
-              <a:t>## P04｜这条结论应当怎样降级？</a:t>
-            </a:r>
-          </a:p>
-          <a:p xmlns:a="http://schemas.openxmlformats.org/drawingml/2006/main">
-            <a:r>
-              <a:t/>
-            </a:r>
-          </a:p>
-          <a:p xmlns:a="http://schemas.openxmlformats.org/drawingml/2006/main">
-            <a:r>
-              <a:t>### 屏显内容</a:t>
-            </a:r>
-          </a:p>
-          <a:p xmlns:a="http://schemas.openxmlformats.org/drawingml/2006/main">
-            <a:r>
-              <a:t/>
-            </a:r>
-          </a:p>
-          <a:p xmlns:a="http://schemas.openxmlformats.org/drawingml/2006/main">
-            <a:r>
-              <a:t>教师故意含错的虚构版本</a:t>
-            </a:r>
-          </a:p>
-          <a:p xmlns:a="http://schemas.openxmlformats.org/drawingml/2006/main">
-            <a:r>
-              <a:t/>
-            </a:r>
-          </a:p>
-          <a:p xmlns:a="http://schemas.openxmlformats.org/drawingml/2006/main">
-            <a:r>
-              <a:t>“20 篇论文的阅读卡组更好，因此机制已证实，状态 stable。”</a:t>
-            </a:r>
-          </a:p>
-          <a:p xmlns:a="http://schemas.openxmlformats.org/drawingml/2006/main">
-            <a:r>
-              <a:t/>
-            </a:r>
-          </a:p>
-          <a:p xmlns:a="http://schemas.openxmlformats.org/drawingml/2006/main">
-            <a:r>
-              <a:t>请标注：致命／重要／表达？依据在哪里？</a:t>
-            </a:r>
-          </a:p>
-          <a:p xmlns:a="http://schemas.openxmlformats.org/drawingml/2006/main">
-            <a:r>
-              <a:t/>
-            </a:r>
-          </a:p>
-          <a:p xmlns:a="http://schemas.openxmlformats.org/drawingml/2006/main">
-            <a:r>
-              <a:t>核验：同一批 20 篇 × 2 条件 × 3 次运行 = 120 次输出；A1/A2/A3 未充分区分。</a:t>
-            </a:r>
-          </a:p>
-          <a:p xmlns:a="http://schemas.openxmlformats.org/drawingml/2006/main">
-            <a:r>
-              <a:t/>
-            </a:r>
-          </a:p>
-          <a:p xmlns:a="http://schemas.openxmlformats.org/drawingml/2006/main">
-            <a:r>
-              <a:t>### 视觉结构</a:t>
-            </a:r>
-          </a:p>
-          <a:p xmlns:a="http://schemas.openxmlformats.org/drawingml/2006/main">
-            <a:r>
-              <a:t/>
-            </a:r>
-          </a:p>
-          <a:p xmlns:a="http://schemas.openxmlformats.org/drawingml/2006/main">
-            <a:r>
-              <a:t>正文片段居中；只把“机制已证实”和 stable 标红，下方为证据约束与严重程度选择，不提前替学生选结论。</a:t>
-            </a:r>
-          </a:p>
-          <a:p xmlns:a="http://schemas.openxmlformats.org/drawingml/2006/main">
-            <a:r>
-              <a:t/>
-            </a:r>
-          </a:p>
-          <a:p xmlns:a="http://schemas.openxmlformats.org/drawingml/2006/main">
-            <a:r>
-              <a:t>### 教师备注／互动</a:t>
-            </a:r>
-          </a:p>
-          <a:p xmlns:a="http://schemas.openxmlformats.org/drawingml/2006/main">
-            <a:r>
-              <a:t/>
-            </a:r>
-          </a:p>
-          <a:p xmlns:a="http://schemas.openxmlformats.org/drawingml/2006/main">
-            <a:r>
-              <a:t>正确识别：同一批论文、两条件各三次、120 次输出的虚构汇总只能支持待验证判断；A1/A2/A3 未充分区分。</a:t>
-            </a:r>
-          </a:p>
-          <a:p xmlns:a="http://schemas.openxmlformats.org/drawingml/2006/main">
-            <a:r>
-              <a:t/>
-            </a:r>
-          </a:p>
-          <a:p xmlns:a="http://schemas.openxmlformats.org/drawingml/2006/main">
-            <a:r>
-              <a:t>### 来源与边界</a:t>
-            </a:r>
-          </a:p>
-          <a:p xmlns:a="http://schemas.openxmlformats.org/drawingml/2006/main">
-            <a:r>
-              <a:t/>
-            </a:r>
-          </a:p>
-          <a:p xmlns:a="http://schemas.openxmlformats.org/drawingml/2006/main">
-            <a:r>
-              <a:t>虚构教学案例；AGENTS.md `stable` 证据规则。</a:t>
-            </a:r>
-          </a:p>
-          <a:p xmlns:a="http://schemas.openxmlformats.org/drawingml/2006/main">
-            <a:r>
-              <a:t/>
-            </a:r>
-          </a:p>
-          <a:p xmlns:a="http://schemas.openxmlformats.org/drawingml/2006/main">
-            <a:r>
-              <a:t/>
-            </a:r>
-          </a:p>
-          <a:p xmlns:a="http://schemas.openxmlformats.org/drawingml/2006/main">
-            <a:r>
-              <a:t/>
-            </a:r>
-          </a:p>
-          <a:p xmlns:a="http://schemas.openxmlformats.org/drawingml/2006/main">
-            <a:r>
-              <a:t>内容与90分钟教学结构不变，独立总结前置。</a:t>
+              <a:t>页面：P04 给三处错误排优先级</a:t>
+            </a:r>
+          </a:p>
+          <a:p xmlns:a="http://schemas.openxmlformats.org/drawingml/2006/main">
+            <a:r>
+              <a:t/>
+            </a:r>
+          </a:p>
+          <a:p xmlns:a="http://schemas.openxmlformats.org/drawingml/2006/main">
+            <a:r>
+              <a:t>讲义位置：handout.md §七、贯穿案例：从第 14 课初稿到同行评审</a:t>
+            </a:r>
+          </a:p>
+          <a:p xmlns:a="http://schemas.openxmlformats.org/drawingml/2006/main">
+            <a:r>
+              <a:t/>
+            </a:r>
+          </a:p>
+          <a:p xmlns:a="http://schemas.openxmlformats.org/drawingml/2006/main">
+            <a:r>
+              <a:t>屏显核对：</a:t>
+            </a:r>
+          </a:p>
+          <a:p xmlns:a="http://schemas.openxmlformats.org/drawingml/2006/main">
+            <a:r>
+              <a:t>D1：“证明机制，对所有文本有效，stable。”</a:t>
+            </a:r>
+          </a:p>
+          <a:p xmlns:a="http://schemas.openxmlformats.org/drawingml/2006/main">
+            <a:r>
+              <a:t>D2：只给百分比，没有分母和原始记录位置。</a:t>
+            </a:r>
+          </a:p>
+          <a:p xmlns:a="http://schemas.openxmlformats.org/drawingml/2006/main">
+            <a:r>
+              <a:t>图1：“组一/组二”，指标和范围不明。</a:t>
+            </a:r>
+          </a:p>
+          <a:p xmlns:a="http://schemas.openxmlformats.org/drawingml/2006/main">
+            <a:r>
+              <a:t/>
+            </a:r>
+          </a:p>
+          <a:p xmlns:a="http://schemas.openxmlformats.org/drawingml/2006/main">
+            <a:r>
+              <a:t>先处理结论越界，再补追踪与图表说明。</a:t>
+            </a:r>
+          </a:p>
+          <a:p xmlns:a="http://schemas.openxmlformats.org/drawingml/2006/main">
+            <a:r>
+              <a:t/>
+            </a:r>
+          </a:p>
+          <a:p xmlns:a="http://schemas.openxmlformats.org/drawingml/2006/main">
+            <a:r>
+              <a:t>教师讲述：</a:t>
+            </a:r>
+          </a:p>
+          <a:p xmlns:a="http://schemas.openxmlformats.org/drawingml/2006/main">
+            <a:r>
+              <a:t>打开calibration-pack完整含错版本。三条意见须分别指出位置、问题、影响和修订动作。标准答案只作教师校准；本课主体仍是学生真实互评。</a:t>
+            </a:r>
+          </a:p>
+          <a:p xmlns:a="http://schemas.openxmlformats.org/drawingml/2006/main">
+            <a:r>
+              <a:t/>
+            </a:r>
+          </a:p>
+          <a:p xmlns:a="http://schemas.openxmlformats.org/drawingml/2006/main">
+            <a:r>
+              <a:t>学生动作：</a:t>
+            </a:r>
+          </a:p>
+          <a:p xmlns:a="http://schemas.openxmlformats.org/drawingml/2006/main">
+            <a:r>
+              <a:t>各写一条可执行意见，与教师参考意见比较优先级。</a:t>
+            </a:r>
+          </a:p>
+          <a:p xmlns:a="http://schemas.openxmlformats.org/drawingml/2006/main">
+            <a:r>
+              <a:t/>
+            </a:r>
+          </a:p>
+          <a:p xmlns:a="http://schemas.openxmlformats.org/drawingml/2006/main">
+            <a:r>
+              <a:t>来源与边界：</a:t>
+            </a:r>
+          </a:p>
+          <a:p xmlns:a="http://schemas.openxmlformats.org/drawingml/2006/main">
+            <a:r>
+              <a:t>./handout.md；课堂示例与构造数据见 ../../course/reading-card-case.md</a:t>
             </a:r>
           </a:p>
           <a:p xmlns:a="http://schemas.openxmlformats.org/drawingml/2006/main">
@@ -2677,22 +2417,27 @@
           </a:p>
           <a:p xmlns:a="http://schemas.openxmlformats.org/drawingml/2006/main">
             <a:r>
-              <a:t>- lessons/lesson-15/handout.md</a:t>
-            </a:r>
-          </a:p>
-          <a:p xmlns:a="http://schemas.openxmlformats.org/drawingml/2006/main">
-            <a:r>
-              <a:t>- lessons/lesson-15/slides.md</a:t>
-            </a:r>
-          </a:p>
-          <a:p xmlns:a="http://schemas.openxmlformats.org/drawingml/2006/main">
-            <a:r>
-              <a:t>- course/assignments.md</a:t>
-            </a:r>
-          </a:p>
-          <a:p xmlns:a="http://schemas.openxmlformats.org/drawingml/2006/main">
-            <a:r>
-              <a:t>- Smith, A. J. (1990). The Task of the Referee. Computer 23(4), 65–71.</a:t>
+              <a:t/>
+            </a:r>
+          </a:p>
+          <a:p xmlns:a="http://schemas.openxmlformats.org/drawingml/2006/main">
+            <a:r>
+              <a:t>- 本课 handout.md 与 slides.md</a:t>
+            </a:r>
+          </a:p>
+          <a:p xmlns:a="http://schemas.openxmlformats.org/drawingml/2006/main">
+            <a:r>
+              <a:t/>
+            </a:r>
+          </a:p>
+          <a:p xmlns:a="http://schemas.openxmlformats.org/drawingml/2006/main">
+            <a:r>
+              <a:t>- ../../course/reading-card-case.md</a:t>
+            </a:r>
+          </a:p>
+          <a:p xmlns:a="http://schemas.openxmlformats.org/drawingml/2006/main">
+            <a:r>
+              <a:t/>
             </a:r>
           </a:p>
           <a:p xmlns:a="http://schemas.openxmlformats.org/drawingml/2006/main">
@@ -2767,27 +2512,27 @@
           <a:lstStyle xmlns:a="http://schemas.openxmlformats.org/drawingml/2006/main"/>
           <a:p xmlns:a="http://schemas.openxmlformats.org/drawingml/2006/main">
             <a:r>
-              <a:t>现行逐页母稿：</a:t>
-            </a:r>
-          </a:p>
-          <a:p xmlns:a="http://schemas.openxmlformats.org/drawingml/2006/main">
-            <a:r>
-              <a:t>## P05｜按五个维度检查这份初稿</a:t>
-            </a:r>
-          </a:p>
-          <a:p xmlns:a="http://schemas.openxmlformats.org/drawingml/2006/main">
-            <a:r>
-              <a:t/>
-            </a:r>
-          </a:p>
-          <a:p xmlns:a="http://schemas.openxmlformats.org/drawingml/2006/main">
-            <a:r>
-              <a:t>### 屏显内容</a:t>
-            </a:r>
-          </a:p>
-          <a:p xmlns:a="http://schemas.openxmlformats.org/drawingml/2006/main">
-            <a:r>
-              <a:t/>
+              <a:t>页面：P05 按五个维度检查这份初稿</a:t>
+            </a:r>
+          </a:p>
+          <a:p xmlns:a="http://schemas.openxmlformats.org/drawingml/2006/main">
+            <a:r>
+              <a:t/>
+            </a:r>
+          </a:p>
+          <a:p xmlns:a="http://schemas.openxmlformats.org/drawingml/2006/main">
+            <a:r>
+              <a:t>讲义位置：本课讲义；见逐页母稿映射表</a:t>
+            </a:r>
+          </a:p>
+          <a:p xmlns:a="http://schemas.openxmlformats.org/drawingml/2006/main">
+            <a:r>
+              <a:t/>
+            </a:r>
+          </a:p>
+          <a:p xmlns:a="http://schemas.openxmlformats.org/drawingml/2006/main">
+            <a:r>
+              <a:t>屏显核对：</a:t>
             </a:r>
           </a:p>
           <a:p xmlns:a="http://schemas.openxmlformats.org/drawingml/2006/main">
@@ -2852,32 +2597,7 @@
           </a:p>
           <a:p xmlns:a="http://schemas.openxmlformats.org/drawingml/2006/main">
             <a:r>
-              <a:t>### 视觉结构</a:t>
-            </a:r>
-          </a:p>
-          <a:p xmlns:a="http://schemas.openxmlformats.org/drawingml/2006/main">
-            <a:r>
-              <a:t/>
-            </a:r>
-          </a:p>
-          <a:p xmlns:a="http://schemas.openxmlformats.org/drawingml/2006/main">
-            <a:r>
-              <a:t>五行开放式检查表，以细线分隔；各维度对应待检查的稿件位置，正文常规字重。</a:t>
-            </a:r>
-          </a:p>
-          <a:p xmlns:a="http://schemas.openxmlformats.org/drawingml/2006/main">
-            <a:r>
-              <a:t/>
-            </a:r>
-          </a:p>
-          <a:p xmlns:a="http://schemas.openxmlformats.org/drawingml/2006/main">
-            <a:r>
-              <a:t>### 教师备注／互动</a:t>
-            </a:r>
-          </a:p>
-          <a:p xmlns:a="http://schemas.openxmlformats.org/drawingml/2006/main">
-            <a:r>
-              <a:t/>
+              <a:t>教师讲述：</a:t>
             </a:r>
           </a:p>
           <a:p xmlns:a="http://schemas.openxmlformats.org/drawingml/2006/main">
@@ -2892,12 +2612,22 @@
           </a:p>
           <a:p xmlns:a="http://schemas.openxmlformats.org/drawingml/2006/main">
             <a:r>
-              <a:t>### 来源与边界</a:t>
-            </a:r>
-          </a:p>
-          <a:p xmlns:a="http://schemas.openxmlformats.org/drawingml/2006/main">
-            <a:r>
-              <a:t/>
+              <a:t>学生动作：</a:t>
+            </a:r>
+          </a:p>
+          <a:p xmlns:a="http://schemas.openxmlformats.org/drawingml/2006/main">
+            <a:r>
+              <a:t/>
+            </a:r>
+          </a:p>
+          <a:p xmlns:a="http://schemas.openxmlformats.org/drawingml/2006/main">
+            <a:r>
+              <a:t/>
+            </a:r>
+          </a:p>
+          <a:p xmlns:a="http://schemas.openxmlformats.org/drawingml/2006/main">
+            <a:r>
+              <a:t>来源与边界：</a:t>
             </a:r>
           </a:p>
           <a:p xmlns:a="http://schemas.openxmlformats.org/drawingml/2006/main">
@@ -2912,47 +2642,32 @@
           </a:p>
           <a:p xmlns:a="http://schemas.openxmlformats.org/drawingml/2006/main">
             <a:r>
-              <a:t/>
-            </a:r>
-          </a:p>
-          <a:p xmlns:a="http://schemas.openxmlformats.org/drawingml/2006/main">
-            <a:r>
-              <a:t/>
-            </a:r>
-          </a:p>
-          <a:p xmlns:a="http://schemas.openxmlformats.org/drawingml/2006/main">
-            <a:r>
-              <a:t>内容与90分钟教学结构不变，独立总结前置。</a:t>
-            </a:r>
-          </a:p>
-          <a:p xmlns:a="http://schemas.openxmlformats.org/drawingml/2006/main">
-            <a:r>
-              <a:t/>
-            </a:r>
-          </a:p>
-          <a:p xmlns:a="http://schemas.openxmlformats.org/drawingml/2006/main">
-            <a:r>
               <a:t>[Sources]</a:t>
             </a:r>
           </a:p>
           <a:p xmlns:a="http://schemas.openxmlformats.org/drawingml/2006/main">
             <a:r>
-              <a:t>- lessons/lesson-15/handout.md</a:t>
-            </a:r>
-          </a:p>
-          <a:p xmlns:a="http://schemas.openxmlformats.org/drawingml/2006/main">
-            <a:r>
-              <a:t>- lessons/lesson-15/slides.md</a:t>
-            </a:r>
-          </a:p>
-          <a:p xmlns:a="http://schemas.openxmlformats.org/drawingml/2006/main">
-            <a:r>
-              <a:t>- course/assignments.md</a:t>
-            </a:r>
-          </a:p>
-          <a:p xmlns:a="http://schemas.openxmlformats.org/drawingml/2006/main">
-            <a:r>
-              <a:t>- Smith, A. J. (1990). The Task of the Referee. Computer 23(4), 65–71.</a:t>
+              <a:t/>
+            </a:r>
+          </a:p>
+          <a:p xmlns:a="http://schemas.openxmlformats.org/drawingml/2006/main">
+            <a:r>
+              <a:t>- 本课 handout.md 与 slides.md</a:t>
+            </a:r>
+          </a:p>
+          <a:p xmlns:a="http://schemas.openxmlformats.org/drawingml/2006/main">
+            <a:r>
+              <a:t/>
+            </a:r>
+          </a:p>
+          <a:p xmlns:a="http://schemas.openxmlformats.org/drawingml/2006/main">
+            <a:r>
+              <a:t>- ../../course/reading-card-case.md</a:t>
+            </a:r>
+          </a:p>
+          <a:p xmlns:a="http://schemas.openxmlformats.org/drawingml/2006/main">
+            <a:r>
+              <a:t/>
             </a:r>
           </a:p>
           <a:p xmlns:a="http://schemas.openxmlformats.org/drawingml/2006/main">
@@ -3027,22 +2742,32 @@
           <a:lstStyle xmlns:a="http://schemas.openxmlformats.org/drawingml/2006/main"/>
           <a:p xmlns:a="http://schemas.openxmlformats.org/drawingml/2006/main">
             <a:r>
-              <a:t>现行逐页母稿：</a:t>
-            </a:r>
-          </a:p>
-          <a:p xmlns:a="http://schemas.openxmlformats.org/drawingml/2006/main">
-            <a:r>
-              <a:t>## P06｜留下三条能执行的反馈</a:t>
-            </a:r>
-          </a:p>
-          <a:p xmlns:a="http://schemas.openxmlformats.org/drawingml/2006/main">
-            <a:r>
-              <a:t/>
-            </a:r>
-          </a:p>
-          <a:p xmlns:a="http://schemas.openxmlformats.org/drawingml/2006/main">
-            <a:r>
-              <a:t>### 屏显内容</a:t>
+              <a:t>页面：P06 留下三条能执行的反馈</a:t>
+            </a:r>
+          </a:p>
+          <a:p xmlns:a="http://schemas.openxmlformats.org/drawingml/2006/main">
+            <a:r>
+              <a:t/>
+            </a:r>
+          </a:p>
+          <a:p xmlns:a="http://schemas.openxmlformats.org/drawingml/2006/main">
+            <a:r>
+              <a:t>讲义位置：本课讲义；见逐页母稿映射表</a:t>
+            </a:r>
+          </a:p>
+          <a:p xmlns:a="http://schemas.openxmlformats.org/drawingml/2006/main">
+            <a:r>
+              <a:t/>
+            </a:r>
+          </a:p>
+          <a:p xmlns:a="http://schemas.openxmlformats.org/drawingml/2006/main">
+            <a:r>
+              <a:t>屏显核对：</a:t>
+            </a:r>
+          </a:p>
+          <a:p xmlns:a="http://schemas.openxmlformats.org/drawingml/2006/main">
+            <a:r>
+              <a:t>留下三条能执行的反馈：</a:t>
             </a:r>
           </a:p>
           <a:p xmlns:a="http://schemas.openxmlformats.org/drawingml/2006/main">
@@ -3057,21 +2782,11 @@
           </a:p>
           <a:p xmlns:a="http://schemas.openxmlformats.org/drawingml/2006/main">
             <a:r>
-              <a:t/>
-            </a:r>
-          </a:p>
-          <a:p xmlns:a="http://schemas.openxmlformats.org/drawingml/2006/main">
-            <a:r>
               <a:t>最大风险：会卡住哪条门条件？</a:t>
             </a:r>
           </a:p>
           <a:p xmlns:a="http://schemas.openxmlformats.org/drawingml/2006/main">
             <a:r>
-              <a:t/>
-            </a:r>
-          </a:p>
-          <a:p xmlns:a="http://schemas.openxmlformats.org/drawingml/2006/main">
-            <a:r>
               <a:t>可执行建议：最小改动是什么？</a:t>
             </a:r>
           </a:p>
@@ -3082,52 +2797,22 @@
           </a:p>
           <a:p xmlns:a="http://schemas.openxmlformats.org/drawingml/2006/main">
             <a:r>
-              <a:t>所有意见指出具体段落、表、证据项或运行记录。</a:t>
-            </a:r>
-          </a:p>
-          <a:p xmlns:a="http://schemas.openxmlformats.org/drawingml/2006/main">
-            <a:r>
-              <a:t/>
-            </a:r>
-          </a:p>
-          <a:p xmlns:a="http://schemas.openxmlformats.org/drawingml/2006/main">
-            <a:r>
-              <a:t>课程虚构稿件节选：C1 阅读卡组遗漏率较低；证据为评价报告 §2；状态支持（待验证）；A1/A2/A3 尚未区分。</a:t>
-            </a:r>
-          </a:p>
-          <a:p xmlns:a="http://schemas.openxmlformats.org/drawingml/2006/main">
-            <a:r>
-              <a:t/>
-            </a:r>
-          </a:p>
-          <a:p xmlns:a="http://schemas.openxmlformats.org/drawingml/2006/main">
-            <a:r>
-              <a:t>### 视觉结构</a:t>
-            </a:r>
-          </a:p>
-          <a:p xmlns:a="http://schemas.openxmlformats.org/drawingml/2006/main">
-            <a:r>
-              <a:t/>
-            </a:r>
-          </a:p>
-          <a:p xmlns:a="http://schemas.openxmlformats.org/drawingml/2006/main">
-            <a:r>
-              <a:t>左侧显示上述稿件节选，右侧三问与可定位的记录对照；不把三问画成无意义流程箭头。</a:t>
-            </a:r>
-          </a:p>
-          <a:p xmlns:a="http://schemas.openxmlformats.org/drawingml/2006/main">
-            <a:r>
-              <a:t/>
-            </a:r>
-          </a:p>
-          <a:p xmlns:a="http://schemas.openxmlformats.org/drawingml/2006/main">
-            <a:r>
-              <a:t>### 教师备注／互动</a:t>
-            </a:r>
-          </a:p>
-          <a:p xmlns:a="http://schemas.openxmlformats.org/drawingml/2006/main">
-            <a:r>
-              <a:t/>
+              <a:t>指向具体段落、表、证据项或运行记录。</a:t>
+            </a:r>
+          </a:p>
+          <a:p xmlns:a="http://schemas.openxmlformats.org/drawingml/2006/main">
+            <a:r>
+              <a:t>本例核对点：Q1 包内一致；H1/A2 未决；质量与范围仍有缺口。</a:t>
+            </a:r>
+          </a:p>
+          <a:p xmlns:a="http://schemas.openxmlformats.org/drawingml/2006/main">
+            <a:r>
+              <a:t/>
+            </a:r>
+          </a:p>
+          <a:p xmlns:a="http://schemas.openxmlformats.org/drawingml/2006/main">
+            <a:r>
+              <a:t>教师讲述：</a:t>
             </a:r>
           </a:p>
           <a:p xmlns:a="http://schemas.openxmlformats.org/drawingml/2006/main">
@@ -3142,12 +2827,22 @@
           </a:p>
           <a:p xmlns:a="http://schemas.openxmlformats.org/drawingml/2006/main">
             <a:r>
-              <a:t>### 来源与边界</a:t>
-            </a:r>
-          </a:p>
-          <a:p xmlns:a="http://schemas.openxmlformats.org/drawingml/2006/main">
-            <a:r>
-              <a:t/>
+              <a:t>学生动作：</a:t>
+            </a:r>
+          </a:p>
+          <a:p xmlns:a="http://schemas.openxmlformats.org/drawingml/2006/main">
+            <a:r>
+              <a:t/>
+            </a:r>
+          </a:p>
+          <a:p xmlns:a="http://schemas.openxmlformats.org/drawingml/2006/main">
+            <a:r>
+              <a:t/>
+            </a:r>
+          </a:p>
+          <a:p xmlns:a="http://schemas.openxmlformats.org/drawingml/2006/main">
+            <a:r>
+              <a:t>来源与边界：</a:t>
             </a:r>
           </a:p>
           <a:p xmlns:a="http://schemas.openxmlformats.org/drawingml/2006/main">
@@ -3162,47 +2857,32 @@
           </a:p>
           <a:p xmlns:a="http://schemas.openxmlformats.org/drawingml/2006/main">
             <a:r>
-              <a:t/>
-            </a:r>
-          </a:p>
-          <a:p xmlns:a="http://schemas.openxmlformats.org/drawingml/2006/main">
-            <a:r>
-              <a:t/>
-            </a:r>
-          </a:p>
-          <a:p xmlns:a="http://schemas.openxmlformats.org/drawingml/2006/main">
-            <a:r>
-              <a:t>内容与90分钟教学结构不变，独立总结前置。</a:t>
-            </a:r>
-          </a:p>
-          <a:p xmlns:a="http://schemas.openxmlformats.org/drawingml/2006/main">
-            <a:r>
-              <a:t/>
-            </a:r>
-          </a:p>
-          <a:p xmlns:a="http://schemas.openxmlformats.org/drawingml/2006/main">
-            <a:r>
               <a:t>[Sources]</a:t>
             </a:r>
           </a:p>
           <a:p xmlns:a="http://schemas.openxmlformats.org/drawingml/2006/main">
             <a:r>
-              <a:t>- lessons/lesson-15/handout.md</a:t>
-            </a:r>
-          </a:p>
-          <a:p xmlns:a="http://schemas.openxmlformats.org/drawingml/2006/main">
-            <a:r>
-              <a:t>- lessons/lesson-15/slides.md</a:t>
-            </a:r>
-          </a:p>
-          <a:p xmlns:a="http://schemas.openxmlformats.org/drawingml/2006/main">
-            <a:r>
-              <a:t>- course/assignments.md</a:t>
-            </a:r>
-          </a:p>
-          <a:p xmlns:a="http://schemas.openxmlformats.org/drawingml/2006/main">
-            <a:r>
-              <a:t>- Smith, A. J. (1990). The Task of the Referee. Computer 23(4), 65–71.</a:t>
+              <a:t/>
+            </a:r>
+          </a:p>
+          <a:p xmlns:a="http://schemas.openxmlformats.org/drawingml/2006/main">
+            <a:r>
+              <a:t>- 本课 handout.md 与 slides.md</a:t>
+            </a:r>
+          </a:p>
+          <a:p xmlns:a="http://schemas.openxmlformats.org/drawingml/2006/main">
+            <a:r>
+              <a:t/>
+            </a:r>
+          </a:p>
+          <a:p xmlns:a="http://schemas.openxmlformats.org/drawingml/2006/main">
+            <a:r>
+              <a:t>- ../../course/reading-card-case.md</a:t>
+            </a:r>
+          </a:p>
+          <a:p xmlns:a="http://schemas.openxmlformats.org/drawingml/2006/main">
+            <a:r>
+              <a:t/>
             </a:r>
           </a:p>
           <a:p xmlns:a="http://schemas.openxmlformats.org/drawingml/2006/main">
@@ -3277,27 +2957,27 @@
           <a:lstStyle xmlns:a="http://schemas.openxmlformats.org/drawingml/2006/main"/>
           <a:p xmlns:a="http://schemas.openxmlformats.org/drawingml/2006/main">
             <a:r>
-              <a:t>现行逐页母稿：</a:t>
-            </a:r>
-          </a:p>
-          <a:p xmlns:a="http://schemas.openxmlformats.org/drawingml/2006/main">
-            <a:r>
-              <a:t>## P07｜打开同伴初稿，开始交叉评审</a:t>
-            </a:r>
-          </a:p>
-          <a:p xmlns:a="http://schemas.openxmlformats.org/drawingml/2006/main">
-            <a:r>
-              <a:t/>
-            </a:r>
-          </a:p>
-          <a:p xmlns:a="http://schemas.openxmlformats.org/drawingml/2006/main">
-            <a:r>
-              <a:t>### 屏显内容</a:t>
-            </a:r>
-          </a:p>
-          <a:p xmlns:a="http://schemas.openxmlformats.org/drawingml/2006/main">
-            <a:r>
-              <a:t/>
+              <a:t>页面：P07 打开同伴初稿，开始交叉评审</a:t>
+            </a:r>
+          </a:p>
+          <a:p xmlns:a="http://schemas.openxmlformats.org/drawingml/2006/main">
+            <a:r>
+              <a:t/>
+            </a:r>
+          </a:p>
+          <a:p xmlns:a="http://schemas.openxmlformats.org/drawingml/2006/main">
+            <a:r>
+              <a:t>讲义位置：本课讲义；见逐页母稿映射表</a:t>
+            </a:r>
+          </a:p>
+          <a:p xmlns:a="http://schemas.openxmlformats.org/drawingml/2006/main">
+            <a:r>
+              <a:t/>
+            </a:r>
+          </a:p>
+          <a:p xmlns:a="http://schemas.openxmlformats.org/drawingml/2006/main">
+            <a:r>
+              <a:t>屏显核对：</a:t>
             </a:r>
           </a:p>
           <a:p xmlns:a="http://schemas.openxmlformats.org/drawingml/2006/main">
@@ -3342,32 +3022,7 @@
           </a:p>
           <a:p xmlns:a="http://schemas.openxmlformats.org/drawingml/2006/main">
             <a:r>
-              <a:t>### 视觉结构</a:t>
-            </a:r>
-          </a:p>
-          <a:p xmlns:a="http://schemas.openxmlformats.org/drawingml/2006/main">
-            <a:r>
-              <a:t/>
-            </a:r>
-          </a:p>
-          <a:p xmlns:a="http://schemas.openxmlformats.org/drawingml/2006/main">
-            <a:r>
-              <a:t>左侧单一动作与轮转角色，右侧一条填写完成的评审记录；不显示计时，避免密集排班表。</a:t>
-            </a:r>
-          </a:p>
-          <a:p xmlns:a="http://schemas.openxmlformats.org/drawingml/2006/main">
-            <a:r>
-              <a:t/>
-            </a:r>
-          </a:p>
-          <a:p xmlns:a="http://schemas.openxmlformats.org/drawingml/2006/main">
-            <a:r>
-              <a:t>### 教师备注／互动</a:t>
-            </a:r>
-          </a:p>
-          <a:p xmlns:a="http://schemas.openxmlformats.org/drawingml/2006/main">
-            <a:r>
-              <a:t/>
+              <a:t>教师讲述：</a:t>
             </a:r>
           </a:p>
           <a:p xmlns:a="http://schemas.openxmlformats.org/drawingml/2006/main">
@@ -3382,12 +3037,22 @@
           </a:p>
           <a:p xmlns:a="http://schemas.openxmlformats.org/drawingml/2006/main">
             <a:r>
-              <a:t>### 来源与边界</a:t>
-            </a:r>
-          </a:p>
-          <a:p xmlns:a="http://schemas.openxmlformats.org/drawingml/2006/main">
-            <a:r>
-              <a:t/>
+              <a:t>学生动作：</a:t>
+            </a:r>
+          </a:p>
+          <a:p xmlns:a="http://schemas.openxmlformats.org/drawingml/2006/main">
+            <a:r>
+              <a:t/>
+            </a:r>
+          </a:p>
+          <a:p xmlns:a="http://schemas.openxmlformats.org/drawingml/2006/main">
+            <a:r>
+              <a:t/>
+            </a:r>
+          </a:p>
+          <a:p xmlns:a="http://schemas.openxmlformats.org/drawingml/2006/main">
+            <a:r>
+              <a:t>来源与边界：</a:t>
             </a:r>
           </a:p>
           <a:p xmlns:a="http://schemas.openxmlformats.org/drawingml/2006/main">
@@ -3402,47 +3067,32 @@
           </a:p>
           <a:p xmlns:a="http://schemas.openxmlformats.org/drawingml/2006/main">
             <a:r>
-              <a:t/>
-            </a:r>
-          </a:p>
-          <a:p xmlns:a="http://schemas.openxmlformats.org/drawingml/2006/main">
-            <a:r>
-              <a:t/>
-            </a:r>
-          </a:p>
-          <a:p xmlns:a="http://schemas.openxmlformats.org/drawingml/2006/main">
-            <a:r>
-              <a:t>内容与90分钟教学结构不变，独立总结前置。</a:t>
-            </a:r>
-          </a:p>
-          <a:p xmlns:a="http://schemas.openxmlformats.org/drawingml/2006/main">
-            <a:r>
-              <a:t/>
-            </a:r>
-          </a:p>
-          <a:p xmlns:a="http://schemas.openxmlformats.org/drawingml/2006/main">
-            <a:r>
               <a:t>[Sources]</a:t>
             </a:r>
           </a:p>
           <a:p xmlns:a="http://schemas.openxmlformats.org/drawingml/2006/main">
             <a:r>
-              <a:t>- lessons/lesson-15/handout.md</a:t>
-            </a:r>
-          </a:p>
-          <a:p xmlns:a="http://schemas.openxmlformats.org/drawingml/2006/main">
-            <a:r>
-              <a:t>- lessons/lesson-15/slides.md</a:t>
-            </a:r>
-          </a:p>
-          <a:p xmlns:a="http://schemas.openxmlformats.org/drawingml/2006/main">
-            <a:r>
-              <a:t>- course/assignments.md</a:t>
-            </a:r>
-          </a:p>
-          <a:p xmlns:a="http://schemas.openxmlformats.org/drawingml/2006/main">
-            <a:r>
-              <a:t>- Smith, A. J. (1990). The Task of the Referee. Computer 23(4), 65–71.</a:t>
+              <a:t/>
+            </a:r>
+          </a:p>
+          <a:p xmlns:a="http://schemas.openxmlformats.org/drawingml/2006/main">
+            <a:r>
+              <a:t>- 本课 handout.md 与 slides.md</a:t>
+            </a:r>
+          </a:p>
+          <a:p xmlns:a="http://schemas.openxmlformats.org/drawingml/2006/main">
+            <a:r>
+              <a:t/>
+            </a:r>
+          </a:p>
+          <a:p xmlns:a="http://schemas.openxmlformats.org/drawingml/2006/main">
+            <a:r>
+              <a:t>- ../../course/reading-card-case.md</a:t>
+            </a:r>
+          </a:p>
+          <a:p xmlns:a="http://schemas.openxmlformats.org/drawingml/2006/main">
+            <a:r>
+              <a:t/>
             </a:r>
           </a:p>
           <a:p xmlns:a="http://schemas.openxmlformats.org/drawingml/2006/main">
@@ -3517,27 +3167,27 @@
           <a:lstStyle xmlns:a="http://schemas.openxmlformats.org/drawingml/2006/main"/>
           <a:p xmlns:a="http://schemas.openxmlformats.org/drawingml/2006/main">
             <a:r>
-              <a:t>现行逐页母稿：</a:t>
-            </a:r>
-          </a:p>
-          <a:p xmlns:a="http://schemas.openxmlformats.org/drawingml/2006/main">
-            <a:r>
-              <a:t>## P08｜根据真实理由选择处理动作</a:t>
-            </a:r>
-          </a:p>
-          <a:p xmlns:a="http://schemas.openxmlformats.org/drawingml/2006/main">
-            <a:r>
-              <a:t/>
-            </a:r>
-          </a:p>
-          <a:p xmlns:a="http://schemas.openxmlformats.org/drawingml/2006/main">
-            <a:r>
-              <a:t>### 屏显内容</a:t>
-            </a:r>
-          </a:p>
-          <a:p xmlns:a="http://schemas.openxmlformats.org/drawingml/2006/main">
-            <a:r>
-              <a:t/>
+              <a:t>页面：P08 根据真实理由选择处理动作</a:t>
+            </a:r>
+          </a:p>
+          <a:p xmlns:a="http://schemas.openxmlformats.org/drawingml/2006/main">
+            <a:r>
+              <a:t/>
+            </a:r>
+          </a:p>
+          <a:p xmlns:a="http://schemas.openxmlformats.org/drawingml/2006/main">
+            <a:r>
+              <a:t>讲义位置：本课讲义；见逐页母稿映射表</a:t>
+            </a:r>
+          </a:p>
+          <a:p xmlns:a="http://schemas.openxmlformats.org/drawingml/2006/main">
+            <a:r>
+              <a:t/>
+            </a:r>
+          </a:p>
+          <a:p xmlns:a="http://schemas.openxmlformats.org/drawingml/2006/main">
+            <a:r>
+              <a:t>屏显核对：</a:t>
             </a:r>
           </a:p>
           <a:p xmlns:a="http://schemas.openxmlformats.org/drawingml/2006/main">
@@ -3602,32 +3252,7 @@
           </a:p>
           <a:p xmlns:a="http://schemas.openxmlformats.org/drawingml/2006/main">
             <a:r>
-              <a:t>### 视觉结构</a:t>
-            </a:r>
-          </a:p>
-          <a:p xmlns:a="http://schemas.openxmlformats.org/drawingml/2006/main">
-            <a:r>
-              <a:t/>
-            </a:r>
-          </a:p>
-          <a:p xmlns:a="http://schemas.openxmlformats.org/drawingml/2006/main">
-            <a:r>
-              <a:t>五条处理动作和适用理由纵向对齐；以文字而非绿红左右色暗示优劣，不画等权卡片墙。</a:t>
-            </a:r>
-          </a:p>
-          <a:p xmlns:a="http://schemas.openxmlformats.org/drawingml/2006/main">
-            <a:r>
-              <a:t/>
-            </a:r>
-          </a:p>
-          <a:p xmlns:a="http://schemas.openxmlformats.org/drawingml/2006/main">
-            <a:r>
-              <a:t>### 教师备注／互动</a:t>
-            </a:r>
-          </a:p>
-          <a:p xmlns:a="http://schemas.openxmlformats.org/drawingml/2006/main">
-            <a:r>
-              <a:t/>
+              <a:t>教师讲述：</a:t>
             </a:r>
           </a:p>
           <a:p xmlns:a="http://schemas.openxmlformats.org/drawingml/2006/main">
@@ -3642,12 +3267,22 @@
           </a:p>
           <a:p xmlns:a="http://schemas.openxmlformats.org/drawingml/2006/main">
             <a:r>
-              <a:t>### 来源与边界</a:t>
-            </a:r>
-          </a:p>
-          <a:p xmlns:a="http://schemas.openxmlformats.org/drawingml/2006/main">
-            <a:r>
-              <a:t/>
+              <a:t>学生动作：</a:t>
+            </a:r>
+          </a:p>
+          <a:p xmlns:a="http://schemas.openxmlformats.org/drawingml/2006/main">
+            <a:r>
+              <a:t/>
+            </a:r>
+          </a:p>
+          <a:p xmlns:a="http://schemas.openxmlformats.org/drawingml/2006/main">
+            <a:r>
+              <a:t/>
+            </a:r>
+          </a:p>
+          <a:p xmlns:a="http://schemas.openxmlformats.org/drawingml/2006/main">
+            <a:r>
+              <a:t>来源与边界：</a:t>
             </a:r>
           </a:p>
           <a:p xmlns:a="http://schemas.openxmlformats.org/drawingml/2006/main">
@@ -3662,47 +3297,32 @@
           </a:p>
           <a:p xmlns:a="http://schemas.openxmlformats.org/drawingml/2006/main">
             <a:r>
-              <a:t/>
-            </a:r>
-          </a:p>
-          <a:p xmlns:a="http://schemas.openxmlformats.org/drawingml/2006/main">
-            <a:r>
-              <a:t/>
-            </a:r>
-          </a:p>
-          <a:p xmlns:a="http://schemas.openxmlformats.org/drawingml/2006/main">
-            <a:r>
-              <a:t>内容与90分钟教学结构不变，独立总结前置。</a:t>
-            </a:r>
-          </a:p>
-          <a:p xmlns:a="http://schemas.openxmlformats.org/drawingml/2006/main">
-            <a:r>
-              <a:t/>
-            </a:r>
-          </a:p>
-          <a:p xmlns:a="http://schemas.openxmlformats.org/drawingml/2006/main">
-            <a:r>
               <a:t>[Sources]</a:t>
             </a:r>
           </a:p>
           <a:p xmlns:a="http://schemas.openxmlformats.org/drawingml/2006/main">
             <a:r>
-              <a:t>- lessons/lesson-15/handout.md</a:t>
-            </a:r>
-          </a:p>
-          <a:p xmlns:a="http://schemas.openxmlformats.org/drawingml/2006/main">
-            <a:r>
-              <a:t>- lessons/lesson-15/slides.md</a:t>
-            </a:r>
-          </a:p>
-          <a:p xmlns:a="http://schemas.openxmlformats.org/drawingml/2006/main">
-            <a:r>
-              <a:t>- course/assignments.md</a:t>
-            </a:r>
-          </a:p>
-          <a:p xmlns:a="http://schemas.openxmlformats.org/drawingml/2006/main">
-            <a:r>
-              <a:t>- Smith, A. J. (1990). The Task of the Referee. Computer 23(4), 65–71.</a:t>
+              <a:t/>
+            </a:r>
+          </a:p>
+          <a:p xmlns:a="http://schemas.openxmlformats.org/drawingml/2006/main">
+            <a:r>
+              <a:t>- 本课 handout.md 与 slides.md</a:t>
+            </a:r>
+          </a:p>
+          <a:p xmlns:a="http://schemas.openxmlformats.org/drawingml/2006/main">
+            <a:r>
+              <a:t/>
+            </a:r>
+          </a:p>
+          <a:p xmlns:a="http://schemas.openxmlformats.org/drawingml/2006/main">
+            <a:r>
+              <a:t>- ../../course/reading-card-case.md</a:t>
+            </a:r>
+          </a:p>
+          <a:p xmlns:a="http://schemas.openxmlformats.org/drawingml/2006/main">
+            <a:r>
+              <a:t/>
             </a:r>
           </a:p>
           <a:p xmlns:a="http://schemas.openxmlformats.org/drawingml/2006/main">
@@ -3777,27 +3397,27 @@
           <a:lstStyle xmlns:a="http://schemas.openxmlformats.org/drawingml/2006/main"/>
           <a:p xmlns:a="http://schemas.openxmlformats.org/drawingml/2006/main">
             <a:r>
-              <a:t>现行逐页母稿：</a:t>
-            </a:r>
-          </a:p>
-          <a:p xmlns:a="http://schemas.openxmlformats.org/drawingml/2006/main">
-            <a:r>
-              <a:t>## P09｜为这条意见写出回应</a:t>
-            </a:r>
-          </a:p>
-          <a:p xmlns:a="http://schemas.openxmlformats.org/drawingml/2006/main">
-            <a:r>
-              <a:t/>
-            </a:r>
-          </a:p>
-          <a:p xmlns:a="http://schemas.openxmlformats.org/drawingml/2006/main">
-            <a:r>
-              <a:t>### 屏显内容</a:t>
-            </a:r>
-          </a:p>
-          <a:p xmlns:a="http://schemas.openxmlformats.org/drawingml/2006/main">
-            <a:r>
-              <a:t/>
+              <a:t>页面：P09 为这条意见写出回应</a:t>
+            </a:r>
+          </a:p>
+          <a:p xmlns:a="http://schemas.openxmlformats.org/drawingml/2006/main">
+            <a:r>
+              <a:t/>
+            </a:r>
+          </a:p>
+          <a:p xmlns:a="http://schemas.openxmlformats.org/drawingml/2006/main">
+            <a:r>
+              <a:t>讲义位置：本课讲义；见逐页母稿映射表</a:t>
+            </a:r>
+          </a:p>
+          <a:p xmlns:a="http://schemas.openxmlformats.org/drawingml/2006/main">
+            <a:r>
+              <a:t/>
+            </a:r>
+          </a:p>
+          <a:p xmlns:a="http://schemas.openxmlformats.org/drawingml/2006/main">
+            <a:r>
+              <a:t>屏显核对：</a:t>
             </a:r>
           </a:p>
           <a:p xmlns:a="http://schemas.openxmlformats.org/drawingml/2006/main">
@@ -3822,17 +3442,17 @@
           </a:p>
           <a:p xmlns:a="http://schemas.openxmlformats.org/drawingml/2006/main">
             <a:r>
-              <a:t>边界：同一批 20 篇 CS 论文；依据：评价报告 §2。</a:t>
-            </a:r>
-          </a:p>
-          <a:p xmlns:a="http://schemas.openxmlformats.org/drawingml/2006/main">
-            <a:r>
-              <a:t/>
-            </a:r>
-          </a:p>
-          <a:p xmlns:a="http://schemas.openxmlformats.org/drawingml/2006/main">
-            <a:r>
-              <a:t>状态：支持（待验证）；影响工件：report.md、结论追踪记录。</a:t>
+              <a:t>边界：同一批 3 份构造源文本；依据：评价报告 §2。</a:t>
+            </a:r>
+          </a:p>
+          <a:p xmlns:a="http://schemas.openxmlformats.org/drawingml/2006/main">
+            <a:r>
+              <a:t/>
+            </a:r>
+          </a:p>
+          <a:p xmlns:a="http://schemas.openxmlformats.org/drawingml/2006/main">
+            <a:r>
+              <a:t>主张方向：Q1 包内一致、H1/A2 未决；工件：review；影响工件：report.md、结论追踪记录。</a:t>
             </a:r>
           </a:p>
           <a:p xmlns:a="http://schemas.openxmlformats.org/drawingml/2006/main">
@@ -3852,32 +3472,7 @@
           </a:p>
           <a:p xmlns:a="http://schemas.openxmlformats.org/drawingml/2006/main">
             <a:r>
-              <a:t>### 视觉结构</a:t>
-            </a:r>
-          </a:p>
-          <a:p xmlns:a="http://schemas.openxmlformats.org/drawingml/2006/main">
-            <a:r>
-              <a:t/>
-            </a:r>
-          </a:p>
-          <a:p xmlns:a="http://schemas.openxmlformats.org/drawingml/2006/main">
-            <a:r>
-              <a:t>一条收到的意见在顶部，六字段回应展开为三条宽行，下方标实际写入位置；不挤六个窄节点。</a:t>
-            </a:r>
-          </a:p>
-          <a:p xmlns:a="http://schemas.openxmlformats.org/drawingml/2006/main">
-            <a:r>
-              <a:t/>
-            </a:r>
-          </a:p>
-          <a:p xmlns:a="http://schemas.openxmlformats.org/drawingml/2006/main">
-            <a:r>
-              <a:t>### 教师备注／互动</a:t>
-            </a:r>
-          </a:p>
-          <a:p xmlns:a="http://schemas.openxmlformats.org/drawingml/2006/main">
-            <a:r>
-              <a:t/>
+              <a:t>教师讲述：</a:t>
             </a:r>
           </a:p>
           <a:p xmlns:a="http://schemas.openxmlformats.org/drawingml/2006/main">
@@ -3892,12 +3487,22 @@
           </a:p>
           <a:p xmlns:a="http://schemas.openxmlformats.org/drawingml/2006/main">
             <a:r>
-              <a:t>### 来源与边界</a:t>
-            </a:r>
-          </a:p>
-          <a:p xmlns:a="http://schemas.openxmlformats.org/drawingml/2006/main">
-            <a:r>
-              <a:t/>
+              <a:t>学生动作：</a:t>
+            </a:r>
+          </a:p>
+          <a:p xmlns:a="http://schemas.openxmlformats.org/drawingml/2006/main">
+            <a:r>
+              <a:t/>
+            </a:r>
+          </a:p>
+          <a:p xmlns:a="http://schemas.openxmlformats.org/drawingml/2006/main">
+            <a:r>
+              <a:t/>
+            </a:r>
+          </a:p>
+          <a:p xmlns:a="http://schemas.openxmlformats.org/drawingml/2006/main">
+            <a:r>
+              <a:t>来源与边界：</a:t>
             </a:r>
           </a:p>
           <a:p xmlns:a="http://schemas.openxmlformats.org/drawingml/2006/main">
@@ -3912,47 +3517,32 @@
           </a:p>
           <a:p xmlns:a="http://schemas.openxmlformats.org/drawingml/2006/main">
             <a:r>
-              <a:t/>
-            </a:r>
-          </a:p>
-          <a:p xmlns:a="http://schemas.openxmlformats.org/drawingml/2006/main">
-            <a:r>
-              <a:t/>
-            </a:r>
-          </a:p>
-          <a:p xmlns:a="http://schemas.openxmlformats.org/drawingml/2006/main">
-            <a:r>
-              <a:t>内容与90分钟教学结构不变，独立总结前置。</a:t>
-            </a:r>
-          </a:p>
-          <a:p xmlns:a="http://schemas.openxmlformats.org/drawingml/2006/main">
-            <a:r>
-              <a:t/>
-            </a:r>
-          </a:p>
-          <a:p xmlns:a="http://schemas.openxmlformats.org/drawingml/2006/main">
-            <a:r>
               <a:t>[Sources]</a:t>
             </a:r>
           </a:p>
           <a:p xmlns:a="http://schemas.openxmlformats.org/drawingml/2006/main">
             <a:r>
-              <a:t>- lessons/lesson-15/handout.md</a:t>
-            </a:r>
-          </a:p>
-          <a:p xmlns:a="http://schemas.openxmlformats.org/drawingml/2006/main">
-            <a:r>
-              <a:t>- lessons/lesson-15/slides.md</a:t>
-            </a:r>
-          </a:p>
-          <a:p xmlns:a="http://schemas.openxmlformats.org/drawingml/2006/main">
-            <a:r>
-              <a:t>- course/assignments.md</a:t>
-            </a:r>
-          </a:p>
-          <a:p xmlns:a="http://schemas.openxmlformats.org/drawingml/2006/main">
-            <a:r>
-              <a:t>- Smith, A. J. (1990). The Task of the Referee. Computer 23(4), 65–71.</a:t>
+              <a:t/>
+            </a:r>
+          </a:p>
+          <a:p xmlns:a="http://schemas.openxmlformats.org/drawingml/2006/main">
+            <a:r>
+              <a:t>- 本课 handout.md 与 slides.md</a:t>
+            </a:r>
+          </a:p>
+          <a:p xmlns:a="http://schemas.openxmlformats.org/drawingml/2006/main">
+            <a:r>
+              <a:t/>
+            </a:r>
+          </a:p>
+          <a:p xmlns:a="http://schemas.openxmlformats.org/drawingml/2006/main">
+            <a:r>
+              <a:t>- ../../course/reading-card-case.md</a:t>
+            </a:r>
+          </a:p>
+          <a:p xmlns:a="http://schemas.openxmlformats.org/drawingml/2006/main">
+            <a:r>
+              <a:t/>
             </a:r>
           </a:p>
           <a:p xmlns:a="http://schemas.openxmlformats.org/drawingml/2006/main">
@@ -4008,7 +3598,7 @@
           <p:nvPr/>
         </p:nvPicPr>
         <p:blipFill>
-          <a:blip xmlns:r="http://schemas.openxmlformats.org/officeDocument/2006/relationships" xmlns:a="http://schemas.openxmlformats.org/drawingml/2006/main" r:embed="R4f567b0a8c3b417a">
+          <a:blip xmlns:r="http://schemas.openxmlformats.org/officeDocument/2006/relationships" xmlns:a="http://schemas.openxmlformats.org/drawingml/2006/main" r:embed="Rf5621e5a525142db">
             <a:duotone>
               <a:prstClr val="black"/>
               <a:schemeClr val="accent1">
@@ -4186,7 +3776,7 @@
           <p:nvPr/>
         </p:nvPicPr>
         <p:blipFill rotWithShape="1">
-          <a:blip xmlns:r="http://schemas.openxmlformats.org/officeDocument/2006/relationships" xmlns:a="http://schemas.openxmlformats.org/drawingml/2006/main" r:embed="Rdca1d7eeaca44a0d"/>
+          <a:blip xmlns:r="http://schemas.openxmlformats.org/officeDocument/2006/relationships" xmlns:a="http://schemas.openxmlformats.org/drawingml/2006/main" r:embed="Rf7da8f35b7244203"/>
           <a:srcRect xmlns:a="http://schemas.openxmlformats.org/drawingml/2006/main" l="74359" t="0" r="1346" b="0"/>
           <a:stretch xmlns:a="http://schemas.openxmlformats.org/drawingml/2006/main"/>
         </p:blipFill>
@@ -4209,7 +3799,7 @@
           <p:nvPr/>
         </p:nvPicPr>
         <p:blipFill rotWithShape="1">
-          <a:blip xmlns:r="http://schemas.openxmlformats.org/officeDocument/2006/relationships" xmlns:a="http://schemas.openxmlformats.org/drawingml/2006/main" r:embed="R1cae0d96bfbd4be7">
+          <a:blip xmlns:r="http://schemas.openxmlformats.org/officeDocument/2006/relationships" xmlns:a="http://schemas.openxmlformats.org/drawingml/2006/main" r:embed="Rf66b37f1a8974014">
             <a:alphaModFix amt="35000"/>
           </a:blip>
           <a:srcRect xmlns:a="http://schemas.openxmlformats.org/drawingml/2006/main" l="0" t="9831" r="0" b="36385"/>
@@ -4471,7 +4061,7 @@
           <p:nvPr/>
         </p:nvPicPr>
         <p:blipFill>
-          <a:blip xmlns:r="http://schemas.openxmlformats.org/officeDocument/2006/relationships" xmlns:a="http://schemas.openxmlformats.org/drawingml/2006/main" r:embed="Rb4a2b161559a4b45"/>
+          <a:blip xmlns:r="http://schemas.openxmlformats.org/officeDocument/2006/relationships" xmlns:a="http://schemas.openxmlformats.org/drawingml/2006/main" r:embed="R275758a98a3043b0"/>
           <a:srcRect xmlns:a="http://schemas.openxmlformats.org/drawingml/2006/main" l="0" t="0" r="54251" b="0"/>
           <a:stretch xmlns:a="http://schemas.openxmlformats.org/drawingml/2006/main"/>
         </p:blipFill>
@@ -4728,7 +4318,7 @@
           <p:nvPr/>
         </p:nvPicPr>
         <p:blipFill rotWithShape="1">
-          <a:blip xmlns:r="http://schemas.openxmlformats.org/officeDocument/2006/relationships" xmlns:a="http://schemas.openxmlformats.org/drawingml/2006/main" r:embed="R661364ab2a8741dd"/>
+          <a:blip xmlns:r="http://schemas.openxmlformats.org/officeDocument/2006/relationships" xmlns:a="http://schemas.openxmlformats.org/drawingml/2006/main" r:embed="R71c65a631c114145"/>
           <a:srcRect xmlns:a="http://schemas.openxmlformats.org/drawingml/2006/main" l="0" t="0" r="1346" b="0"/>
           <a:stretch xmlns:a="http://schemas.openxmlformats.org/drawingml/2006/main"/>
         </p:blipFill>
@@ -4911,7 +4501,7 @@
           <p:nvPr/>
         </p:nvPicPr>
         <p:blipFill>
-          <a:blip xmlns:r="http://schemas.openxmlformats.org/officeDocument/2006/relationships" xmlns:a="http://schemas.openxmlformats.org/drawingml/2006/main" r:embed="R057b3975cae146a7"/>
+          <a:blip xmlns:r="http://schemas.openxmlformats.org/officeDocument/2006/relationships" xmlns:a="http://schemas.openxmlformats.org/drawingml/2006/main" r:embed="R578840a791704abe"/>
           <a:stretch xmlns:a="http://schemas.openxmlformats.org/drawingml/2006/main">
             <a:fillRect l="0" t="0" r="0" b="0"/>
           </a:stretch>
@@ -5007,7 +4597,7 @@
           <p:nvPr/>
         </p:nvPicPr>
         <p:blipFill>
-          <a:blip xmlns:r="http://schemas.openxmlformats.org/officeDocument/2006/relationships" xmlns:a="http://schemas.openxmlformats.org/drawingml/2006/main" r:embed="R9e8196c588184186">
+          <a:blip xmlns:r="http://schemas.openxmlformats.org/officeDocument/2006/relationships" xmlns:a="http://schemas.openxmlformats.org/drawingml/2006/main" r:embed="Ref35d835950f4b76">
             <a:duotone>
               <a:prstClr val="black"/>
               <a:schemeClr val="accent1">
@@ -5174,7 +4764,7 @@
           <p:nvPr/>
         </p:nvPicPr>
         <p:blipFill rotWithShape="1">
-          <a:blip xmlns:r="http://schemas.openxmlformats.org/officeDocument/2006/relationships" xmlns:a="http://schemas.openxmlformats.org/drawingml/2006/main" r:embed="Rdd4b1108a7e746db">
+          <a:blip xmlns:r="http://schemas.openxmlformats.org/officeDocument/2006/relationships" xmlns:a="http://schemas.openxmlformats.org/drawingml/2006/main" r:embed="R17d504ada779494c">
             <a:alphaModFix amt="20000"/>
             <a:duotone>
               <a:schemeClr val="accent4">
@@ -5272,10 +4862,10 @@
   </p:cSld>
   <p:clrMap bg1="lt1" tx1="dk1" bg2="lt2" tx2="dk2" accent1="accent1" accent2="accent2" accent3="accent3" accent4="accent4" accent5="accent5" accent6="accent6" hlink="hlink" folHlink="folHlink"/>
   <p:sldLayoutIdLst>
-    <p:sldLayoutId xmlns:r="http://schemas.openxmlformats.org/officeDocument/2006/relationships" id="2147483649" r:id="R2fd0088018a8445a"/>
-    <p:sldLayoutId xmlns:r="http://schemas.openxmlformats.org/officeDocument/2006/relationships" id="2147483650" r:id="R6a8151a565ee4756"/>
-    <p:sldLayoutId xmlns:r="http://schemas.openxmlformats.org/officeDocument/2006/relationships" id="2147483651" r:id="R95d7b5e0a4074325"/>
-    <p:sldLayoutId xmlns:r="http://schemas.openxmlformats.org/officeDocument/2006/relationships" id="2147483652" r:id="Rc9dd7fdc9d694bb0"/>
+    <p:sldLayoutId xmlns:r="http://schemas.openxmlformats.org/officeDocument/2006/relationships" id="2147483649" r:id="R3b4df7013c47473f"/>
+    <p:sldLayoutId xmlns:r="http://schemas.openxmlformats.org/officeDocument/2006/relationships" id="2147483650" r:id="R5567a08a5a8842e5"/>
+    <p:sldLayoutId xmlns:r="http://schemas.openxmlformats.org/officeDocument/2006/relationships" id="2147483651" r:id="R83afb35c748740ba"/>
+    <p:sldLayoutId xmlns:r="http://schemas.openxmlformats.org/officeDocument/2006/relationships" id="2147483652" r:id="Rd2186c5d7af3450e"/>
   </p:sldLayoutIdLst>
   <p:hf hdr="0" ftr="0" dt="0"/>
   <p:txStyles>
@@ -5964,22 +5554,22 @@
       </p:sp>
       <p:sp>
         <p:nvSpPr>
-          <p:cNvPr id="6" name="fiction">
-            <a:extLst xmlns:a="http://schemas.openxmlformats.org/drawingml/2006/main">
-              <a:ext uri="{FF2B5EF4-FFF2-40B4-BE49-F238E27FC236}">
-                <a16:creationId xmlns:a16="http://schemas.microsoft.com/office/drawing/2014/main" id="{327A625E-20B2-4EDA-A68A-1D8AA7B0A82F}"/>
-              </a:ext>
-            </a:extLst>
-          </p:cNvPr>
-          <p:cNvSpPr>
-            <a:spLocks xmlns:a="http://schemas.openxmlformats.org/drawingml/2006/main" noGrp="1"/>
-          </p:cNvSpPr>
-          <p:nvPr/>
-        </p:nvSpPr>
-        <p:spPr>
-          <a:xfrm xmlns:a="http://schemas.openxmlformats.org/drawingml/2006/main">
-            <a:off x="609600" y="885825"/>
-            <a:ext cx="10572750" cy="314325"/>
+          <p:cNvPr id="6" name="content-216">
+            <a:extLst xmlns:a="http://schemas.openxmlformats.org/drawingml/2006/main">
+              <a:ext uri="{FF2B5EF4-FFF2-40B4-BE49-F238E27FC236}">
+                <a16:creationId xmlns:a16="http://schemas.microsoft.com/office/drawing/2014/main" id="{1DADE4D9-19F5-4549-92C4-F385C156DA95}"/>
+              </a:ext>
+            </a:extLst>
+          </p:cNvPr>
+          <p:cNvSpPr>
+            <a:spLocks xmlns:a="http://schemas.openxmlformats.org/drawingml/2006/main" noGrp="1"/>
+          </p:cNvSpPr>
+          <p:nvPr/>
+        </p:nvSpPr>
+        <p:spPr>
+          <a:xfrm xmlns:a="http://schemas.openxmlformats.org/drawingml/2006/main">
+            <a:off x="609600" y="1009650"/>
+            <a:ext cx="10972800" cy="342900"/>
           </a:xfrm>
           <a:prstGeom xmlns:a="http://schemas.openxmlformats.org/drawingml/2006/main" prst="rect">
             <a:avLst/>
@@ -6016,59 +5606,29 @@
                 <a:ea typeface="微软雅黑"/>
                 <a:cs typeface="微软雅黑"/>
               </a:rPr>
-              <a:t>课程虚构稿件的文本修改示范</a:t>
-            </a:r>
-          </a:p>
-        </p:txBody>
-      </p:sp>
-      <p:sp>
-        <p:nvSpPr>
-          <p:cNvPr id="7" name="diff-bg">
-            <a:extLst xmlns:a="http://schemas.openxmlformats.org/drawingml/2006/main">
-              <a:ext uri="{FF2B5EF4-FFF2-40B4-BE49-F238E27FC236}">
-                <a16:creationId xmlns:a16="http://schemas.microsoft.com/office/drawing/2014/main" id="{874C9C02-1469-4DBF-AEB7-583739E6DC4D}"/>
-              </a:ext>
-            </a:extLst>
-          </p:cNvPr>
-          <p:cNvSpPr>
-            <a:spLocks xmlns:a="http://schemas.openxmlformats.org/drawingml/2006/main" noGrp="1"/>
-          </p:cNvSpPr>
-          <p:nvPr/>
-        </p:nvSpPr>
-        <p:spPr>
-          <a:xfrm xmlns:a="http://schemas.openxmlformats.org/drawingml/2006/main">
-            <a:off x="609600" y="1619250"/>
-            <a:ext cx="8096250" cy="3333750"/>
-          </a:xfrm>
-          <a:prstGeom xmlns:a="http://schemas.openxmlformats.org/drawingml/2006/main" prst="rect">
-            <a:avLst/>
-          </a:prstGeom>
-          <a:solidFill xmlns:a="http://schemas.openxmlformats.org/drawingml/2006/main">
-            <a:srgbClr val="F4F6F8"/>
-          </a:solidFill>
-          <a:ln xmlns:a="http://schemas.openxmlformats.org/drawingml/2006/main" w="0">
-            <a:noFill/>
-          </a:ln>
-        </p:spPr>
-      </p:sp>
-      <p:sp>
-        <p:nvSpPr>
-          <p:cNvPr id="8" name="diff-0">
-            <a:extLst xmlns:a="http://schemas.openxmlformats.org/drawingml/2006/main">
-              <a:ext uri="{FF2B5EF4-FFF2-40B4-BE49-F238E27FC236}">
-                <a16:creationId xmlns:a16="http://schemas.microsoft.com/office/drawing/2014/main" id="{9C8F6D53-D09A-422A-B396-804238B04F80}"/>
-              </a:ext>
-            </a:extLst>
-          </p:cNvPr>
-          <p:cNvSpPr>
-            <a:spLocks xmlns:a="http://schemas.openxmlformats.org/drawingml/2006/main" noGrp="1"/>
-          </p:cNvSpPr>
-          <p:nvPr/>
-        </p:nvSpPr>
-        <p:spPr>
-          <a:xfrm xmlns:a="http://schemas.openxmlformats.org/drawingml/2006/main">
-            <a:off x="800100" y="1828800"/>
-            <a:ext cx="7715250" cy="666750"/>
+              <a:t>课程虚构稿件的实际文本修改示范</a:t>
+            </a:r>
+          </a:p>
+        </p:txBody>
+      </p:sp>
+      <p:sp>
+        <p:nvSpPr>
+          <p:cNvPr id="7" name="content-217">
+            <a:extLst xmlns:a="http://schemas.openxmlformats.org/drawingml/2006/main">
+              <a:ext uri="{FF2B5EF4-FFF2-40B4-BE49-F238E27FC236}">
+                <a16:creationId xmlns:a16="http://schemas.microsoft.com/office/drawing/2014/main" id="{4E2E4DA3-B993-464E-B5C6-24AC426F0266}"/>
+              </a:ext>
+            </a:extLst>
+          </p:cNvPr>
+          <p:cNvSpPr>
+            <a:spLocks xmlns:a="http://schemas.openxmlformats.org/drawingml/2006/main" noGrp="1"/>
+          </p:cNvSpPr>
+          <p:nvPr/>
+        </p:nvSpPr>
+        <p:spPr>
+          <a:xfrm xmlns:a="http://schemas.openxmlformats.org/drawingml/2006/main">
+            <a:off x="609600" y="1771650"/>
+            <a:ext cx="10972800" cy="619125"/>
           </a:xfrm>
           <a:prstGeom xmlns:a="http://schemas.openxmlformats.org/drawingml/2006/main" prst="rect">
             <a:avLst/>
@@ -6087,7 +5647,7 @@
                 <a:spcPct val="118000"/>
               </a:lnSpc>
               <a:buNone/>
-              <a:defRPr sz="2200" b="0">
+              <a:defRPr sz="2600" b="0">
                 <a:solidFill>
                   <a:srgbClr val="C8161E"/>
                 </a:solidFill>
@@ -6097,7 +5657,7 @@
               </a:defRPr>
             </a:pPr>
             <a:r>
-              <a:rPr sz="2200" b="0">
+              <a:rPr sz="2600" b="0">
                 <a:solidFill>
                   <a:srgbClr val="C8161E"/>
                 </a:solidFill>
@@ -6112,22 +5672,22 @@
       </p:sp>
       <p:sp>
         <p:nvSpPr>
-          <p:cNvPr id="9" name="diff-1">
-            <a:extLst xmlns:a="http://schemas.openxmlformats.org/drawingml/2006/main">
-              <a:ext uri="{FF2B5EF4-FFF2-40B4-BE49-F238E27FC236}">
-                <a16:creationId xmlns:a16="http://schemas.microsoft.com/office/drawing/2014/main" id="{FF2E1129-A480-4602-BD07-03C20A1E51A1}"/>
-              </a:ext>
-            </a:extLst>
-          </p:cNvPr>
-          <p:cNvSpPr>
-            <a:spLocks xmlns:a="http://schemas.openxmlformats.org/drawingml/2006/main" noGrp="1"/>
-          </p:cNvSpPr>
-          <p:nvPr/>
-        </p:nvSpPr>
-        <p:spPr>
-          <a:xfrm xmlns:a="http://schemas.openxmlformats.org/drawingml/2006/main">
-            <a:off x="800100" y="2524125"/>
-            <a:ext cx="7715250" cy="666750"/>
+          <p:cNvPr id="8" name="content-218">
+            <a:extLst xmlns:a="http://schemas.openxmlformats.org/drawingml/2006/main">
+              <a:ext uri="{FF2B5EF4-FFF2-40B4-BE49-F238E27FC236}">
+                <a16:creationId xmlns:a16="http://schemas.microsoft.com/office/drawing/2014/main" id="{5B0EAEB4-CC8D-4FEC-A4CD-A179646D1671}"/>
+              </a:ext>
+            </a:extLst>
+          </p:cNvPr>
+          <p:cNvSpPr>
+            <a:spLocks xmlns:a="http://schemas.openxmlformats.org/drawingml/2006/main" noGrp="1"/>
+          </p:cNvSpPr>
+          <p:nvPr/>
+        </p:nvSpPr>
+        <p:spPr>
+          <a:xfrm xmlns:a="http://schemas.openxmlformats.org/drawingml/2006/main">
+            <a:off x="609600" y="2695575"/>
+            <a:ext cx="10972800" cy="1190625"/>
           </a:xfrm>
           <a:prstGeom xmlns:a="http://schemas.openxmlformats.org/drawingml/2006/main" prst="rect">
             <a:avLst/>
@@ -6146,9 +5706,9 @@
                 <a:spcPct val="118000"/>
               </a:lnSpc>
               <a:buNone/>
-              <a:defRPr sz="2200" b="0">
-                <a:solidFill>
-                  <a:srgbClr val="2E7D5B"/>
+              <a:defRPr sz="2600" b="0">
+                <a:solidFill>
+                  <a:srgbClr val="1F4D78"/>
                 </a:solidFill>
                 <a:latin typeface="微软雅黑"/>
                 <a:ea typeface="微软雅黑"/>
@@ -6156,37 +5716,64 @@
               </a:defRPr>
             </a:pPr>
             <a:r>
-              <a:rPr sz="2200" b="0">
-                <a:solidFill>
-                  <a:srgbClr val="2E7D5B"/>
+              <a:rPr sz="2600" b="0">
+                <a:solidFill>
+                  <a:srgbClr val="1F4D78"/>
                 </a:solidFill>
                 <a:latin typeface="微软雅黑"/>
                 <a:ea typeface="微软雅黑"/>
                 <a:cs typeface="微软雅黑"/>
               </a:rPr>
-              <a:t>+ 本批论文阅读卡组遗漏率较低，</a:t>
-            </a:r>
-          </a:p>
-        </p:txBody>
-      </p:sp>
-      <p:sp>
-        <p:nvSpPr>
-          <p:cNvPr id="10" name="diff-2">
-            <a:extLst xmlns:a="http://schemas.openxmlformats.org/drawingml/2006/main">
-              <a:ext uri="{FF2B5EF4-FFF2-40B4-BE49-F238E27FC236}">
-                <a16:creationId xmlns:a16="http://schemas.microsoft.com/office/drawing/2014/main" id="{76676838-7085-40D5-833B-2A97AC512540}"/>
-              </a:ext>
-            </a:extLst>
-          </p:cNvPr>
-          <p:cNvSpPr>
-            <a:spLocks xmlns:a="http://schemas.openxmlformats.org/drawingml/2006/main" noGrp="1"/>
-          </p:cNvSpPr>
-          <p:nvPr/>
-        </p:nvSpPr>
-        <p:spPr>
-          <a:xfrm xmlns:a="http://schemas.openxmlformats.org/drawingml/2006/main">
-            <a:off x="800100" y="3219450"/>
-            <a:ext cx="7715250" cy="666750"/>
+              <a:t>+ 本构造包中总遗漏率较低，方向与 Q1 一致。</a:t>
+            </a:r>
+          </a:p>
+          <a:p xmlns:a="http://schemas.openxmlformats.org/drawingml/2006/main">
+            <a:pPr algn="l">
+              <a:lnSpc>
+                <a:spcPct val="118000"/>
+              </a:lnSpc>
+              <a:buNone/>
+              <a:defRPr sz="2600" b="0">
+                <a:solidFill>
+                  <a:srgbClr val="1F4D78"/>
+                </a:solidFill>
+                <a:latin typeface="微软雅黑"/>
+                <a:ea typeface="微软雅黑"/>
+                <a:cs typeface="微软雅黑"/>
+              </a:defRPr>
+            </a:pPr>
+            <a:r>
+              <a:rPr sz="2600" b="0">
+                <a:solidFill>
+                  <a:srgbClr val="1F4D78"/>
+                </a:solidFill>
+                <a:latin typeface="微软雅黑"/>
+                <a:ea typeface="微软雅黑"/>
+                <a:cs typeface="微软雅黑"/>
+              </a:rPr>
+              <a:t>   H1/A2 未区分，其他质量未测，范围受限。</a:t>
+            </a:r>
+          </a:p>
+        </p:txBody>
+      </p:sp>
+      <p:sp>
+        <p:nvSpPr>
+          <p:cNvPr id="9" name="content-219">
+            <a:extLst xmlns:a="http://schemas.openxmlformats.org/drawingml/2006/main">
+              <a:ext uri="{FF2B5EF4-FFF2-40B4-BE49-F238E27FC236}">
+                <a16:creationId xmlns:a16="http://schemas.microsoft.com/office/drawing/2014/main" id="{77BF3809-82DB-4222-AB06-0F9149DA6109}"/>
+              </a:ext>
+            </a:extLst>
+          </p:cNvPr>
+          <p:cNvSpPr>
+            <a:spLocks xmlns:a="http://schemas.openxmlformats.org/drawingml/2006/main" noGrp="1"/>
+          </p:cNvSpPr>
+          <p:nvPr/>
+        </p:nvSpPr>
+        <p:spPr>
+          <a:xfrm xmlns:a="http://schemas.openxmlformats.org/drawingml/2006/main">
+            <a:off x="609600" y="4295775"/>
+            <a:ext cx="10972800" cy="523875"/>
           </a:xfrm>
           <a:prstGeom xmlns:a="http://schemas.openxmlformats.org/drawingml/2006/main" prst="rect">
             <a:avLst/>
@@ -6205,9 +5792,9 @@
                 <a:spcPct val="118000"/>
               </a:lnSpc>
               <a:buNone/>
-              <a:defRPr sz="2200" b="0">
-                <a:solidFill>
-                  <a:srgbClr val="2E7D5B"/>
+              <a:defRPr sz="2300" b="0">
+                <a:solidFill>
+                  <a:srgbClr val="27333D"/>
                 </a:solidFill>
                 <a:latin typeface="微软雅黑"/>
                 <a:ea typeface="微软雅黑"/>
@@ -6215,37 +5802,37 @@
               </a:defRPr>
             </a:pPr>
             <a:r>
-              <a:rPr sz="2200" b="0">
-                <a:solidFill>
-                  <a:srgbClr val="2E7D5B"/>
+              <a:rPr sz="2300" b="0">
+                <a:solidFill>
+                  <a:srgbClr val="27333D"/>
                 </a:solidFill>
                 <a:latin typeface="微软雅黑"/>
                 <a:ea typeface="微软雅黑"/>
                 <a:cs typeface="微软雅黑"/>
               </a:rPr>
-              <a:t>+ 方向支持 H1；A1/A2/A3 尚未区分。</a:t>
-            </a:r>
-          </a:p>
-        </p:txBody>
-      </p:sp>
-      <p:sp>
-        <p:nvSpPr>
-          <p:cNvPr id="11" name="diff-3">
-            <a:extLst xmlns:a="http://schemas.openxmlformats.org/drawingml/2006/main">
-              <a:ext uri="{FF2B5EF4-FFF2-40B4-BE49-F238E27FC236}">
-                <a16:creationId xmlns:a16="http://schemas.microsoft.com/office/drawing/2014/main" id="{5138ABB3-7B63-41C1-8D8E-24BB0E0583F4}"/>
-              </a:ext>
-            </a:extLst>
-          </p:cNvPr>
-          <p:cNvSpPr>
-            <a:spLocks xmlns:a="http://schemas.openxmlformats.org/drawingml/2006/main" noGrp="1"/>
-          </p:cNvSpPr>
-          <p:nvPr/>
-        </p:nvSpPr>
-        <p:spPr>
-          <a:xfrm xmlns:a="http://schemas.openxmlformats.org/drawingml/2006/main">
-            <a:off x="800100" y="3914775"/>
-            <a:ext cx="7715250" cy="666750"/>
+              <a:t>工件：review；机制判断：仍不能判断。</a:t>
+            </a:r>
+          </a:p>
+        </p:txBody>
+      </p:sp>
+      <p:sp>
+        <p:nvSpPr>
+          <p:cNvPr id="10" name="content-220">
+            <a:extLst xmlns:a="http://schemas.openxmlformats.org/drawingml/2006/main">
+              <a:ext uri="{FF2B5EF4-FFF2-40B4-BE49-F238E27FC236}">
+                <a16:creationId xmlns:a16="http://schemas.microsoft.com/office/drawing/2014/main" id="{59D1C168-A00B-4D96-AE66-F0276BD9518A}"/>
+              </a:ext>
+            </a:extLst>
+          </p:cNvPr>
+          <p:cNvSpPr>
+            <a:spLocks xmlns:a="http://schemas.openxmlformats.org/drawingml/2006/main" noGrp="1"/>
+          </p:cNvSpPr>
+          <p:nvPr/>
+        </p:nvSpPr>
+        <p:spPr>
+          <a:xfrm xmlns:a="http://schemas.openxmlformats.org/drawingml/2006/main">
+            <a:off x="609600" y="5191125"/>
+            <a:ext cx="10972800" cy="866775"/>
           </a:xfrm>
           <a:prstGeom xmlns:a="http://schemas.openxmlformats.org/drawingml/2006/main" prst="rect">
             <a:avLst/>
@@ -6266,7 +5853,7 @@
               <a:buNone/>
               <a:defRPr sz="2200" b="0">
                 <a:solidFill>
-                  <a:srgbClr val="2E7D5B"/>
+                  <a:srgbClr val="27333D"/>
                 </a:solidFill>
                 <a:latin typeface="微软雅黑"/>
                 <a:ea typeface="微软雅黑"/>
@@ -6276,47 +5863,15 @@
             <a:r>
               <a:rPr sz="2200" b="0">
                 <a:solidFill>
-                  <a:srgbClr val="2E7D5B"/>
+                  <a:srgbClr val="27333D"/>
                 </a:solidFill>
                 <a:latin typeface="微软雅黑"/>
                 <a:ea typeface="微软雅黑"/>
                 <a:cs typeface="微软雅黑"/>
               </a:rPr>
-              <a:t>+ 状态：支持（待验证）。</a:t>
-            </a:r>
-          </a:p>
-        </p:txBody>
-      </p:sp>
-      <p:sp>
-        <p:nvSpPr>
-          <p:cNvPr id="12" name="priorities">
-            <a:extLst xmlns:a="http://schemas.openxmlformats.org/drawingml/2006/main">
-              <a:ext uri="{FF2B5EF4-FFF2-40B4-BE49-F238E27FC236}">
-                <a16:creationId xmlns:a16="http://schemas.microsoft.com/office/drawing/2014/main" id="{2C206DBB-263F-4349-9CF3-636B1F9B284F}"/>
-              </a:ext>
-            </a:extLst>
-          </p:cNvPr>
-          <p:cNvSpPr>
-            <a:spLocks xmlns:a="http://schemas.openxmlformats.org/drawingml/2006/main" noGrp="1"/>
-          </p:cNvSpPr>
-          <p:nvPr/>
-        </p:nvSpPr>
-        <p:spPr>
-          <a:xfrm xmlns:a="http://schemas.openxmlformats.org/drawingml/2006/main">
-            <a:off x="9058275" y="1771650"/>
-            <a:ext cx="2476500" cy="1362075"/>
-          </a:xfrm>
-          <a:prstGeom xmlns:a="http://schemas.openxmlformats.org/drawingml/2006/main" prst="rect">
-            <a:avLst/>
-          </a:prstGeom>
-          <a:noFill xmlns:a="http://schemas.openxmlformats.org/drawingml/2006/main"/>
-          <a:ln xmlns:a="http://schemas.openxmlformats.org/drawingml/2006/main" w="0">
-            <a:noFill/>
-          </a:ln>
-        </p:spPr>
-        <p:txBody>
-          <a:bodyPr xmlns:a="http://schemas.openxmlformats.org/drawingml/2006/main" lIns="0" tIns="0" rIns="0" bIns="0" anchor="t"/>
-          <a:lstStyle xmlns:a="http://schemas.openxmlformats.org/drawingml/2006/main"/>
+              <a:t>优先处理致命问题，再处理重要问题与表达。</a:t>
+            </a:r>
+          </a:p>
           <a:p xmlns:a="http://schemas.openxmlformats.org/drawingml/2006/main">
             <a:pPr algn="l">
               <a:lnSpc>
@@ -6325,7 +5880,7 @@
               <a:buNone/>
               <a:defRPr sz="2200" b="0">
                 <a:solidFill>
-                  <a:srgbClr val="1F4D78"/>
+                  <a:srgbClr val="27333D"/>
                 </a:solidFill>
                 <a:latin typeface="微软雅黑"/>
                 <a:ea typeface="微软雅黑"/>
@@ -6335,298 +5890,13 @@
             <a:r>
               <a:rPr sz="2200" b="0">
                 <a:solidFill>
-                  <a:srgbClr val="1F4D78"/>
+                  <a:srgbClr val="27333D"/>
                 </a:solidFill>
                 <a:latin typeface="微软雅黑"/>
                 <a:ea typeface="微软雅黑"/>
                 <a:cs typeface="微软雅黑"/>
               </a:rPr>
-              <a:t>优先处理</a:t>
-            </a:r>
-          </a:p>
-          <a:p xmlns:a="http://schemas.openxmlformats.org/drawingml/2006/main">
-            <a:pPr algn="l">
-              <a:lnSpc>
-                <a:spcPct val="118000"/>
-              </a:lnSpc>
-              <a:buNone/>
-              <a:defRPr sz="2200" b="0">
-                <a:solidFill>
-                  <a:srgbClr val="1F4D78"/>
-                </a:solidFill>
-                <a:latin typeface="微软雅黑"/>
-                <a:ea typeface="微软雅黑"/>
-                <a:cs typeface="微软雅黑"/>
-              </a:defRPr>
-            </a:pPr>
-            <a:r>
-              <a:rPr sz="2200" b="0">
-                <a:solidFill>
-                  <a:srgbClr val="1F4D78"/>
-                </a:solidFill>
-                <a:latin typeface="微软雅黑"/>
-                <a:ea typeface="微软雅黑"/>
-                <a:cs typeface="微软雅黑"/>
-              </a:rPr>
-              <a:t>致命 → 重要</a:t>
-            </a:r>
-          </a:p>
-          <a:p xmlns:a="http://schemas.openxmlformats.org/drawingml/2006/main">
-            <a:pPr algn="l">
-              <a:lnSpc>
-                <a:spcPct val="118000"/>
-              </a:lnSpc>
-              <a:buNone/>
-              <a:defRPr sz="2200" b="0">
-                <a:solidFill>
-                  <a:srgbClr val="1F4D78"/>
-                </a:solidFill>
-                <a:latin typeface="微软雅黑"/>
-                <a:ea typeface="微软雅黑"/>
-                <a:cs typeface="微软雅黑"/>
-              </a:defRPr>
-            </a:pPr>
-            <a:r>
-              <a:rPr sz="2200" b="0">
-                <a:solidFill>
-                  <a:srgbClr val="1F4D78"/>
-                </a:solidFill>
-                <a:latin typeface="微软雅黑"/>
-                <a:ea typeface="微软雅黑"/>
-                <a:cs typeface="微软雅黑"/>
-              </a:rPr>
-              <a:t>       → 表达</a:t>
-            </a:r>
-          </a:p>
-        </p:txBody>
-      </p:sp>
-      <p:sp>
-        <p:nvSpPr>
-          <p:cNvPr id="13" name="save">
-            <a:extLst xmlns:a="http://schemas.openxmlformats.org/drawingml/2006/main">
-              <a:ext uri="{FF2B5EF4-FFF2-40B4-BE49-F238E27FC236}">
-                <a16:creationId xmlns:a16="http://schemas.microsoft.com/office/drawing/2014/main" id="{460ADB8D-8EB8-4C17-8311-D3486A2CD807}"/>
-              </a:ext>
-            </a:extLst>
-          </p:cNvPr>
-          <p:cNvSpPr>
-            <a:spLocks xmlns:a="http://schemas.openxmlformats.org/drawingml/2006/main" noGrp="1"/>
-          </p:cNvSpPr>
-          <p:nvPr/>
-        </p:nvSpPr>
-        <p:spPr>
-          <a:xfrm xmlns:a="http://schemas.openxmlformats.org/drawingml/2006/main">
-            <a:off x="9058275" y="3648075"/>
-            <a:ext cx="2476500" cy="1362075"/>
-          </a:xfrm>
-          <a:prstGeom xmlns:a="http://schemas.openxmlformats.org/drawingml/2006/main" prst="rect">
-            <a:avLst/>
-          </a:prstGeom>
-          <a:noFill xmlns:a="http://schemas.openxmlformats.org/drawingml/2006/main"/>
-          <a:ln xmlns:a="http://schemas.openxmlformats.org/drawingml/2006/main" w="0">
-            <a:noFill/>
-          </a:ln>
-        </p:spPr>
-        <p:txBody>
-          <a:bodyPr xmlns:a="http://schemas.openxmlformats.org/drawingml/2006/main" lIns="0" tIns="0" rIns="0" bIns="0" anchor="t"/>
-          <a:lstStyle xmlns:a="http://schemas.openxmlformats.org/drawingml/2006/main"/>
-          <a:p xmlns:a="http://schemas.openxmlformats.org/drawingml/2006/main">
-            <a:pPr algn="l">
-              <a:lnSpc>
-                <a:spcPct val="118000"/>
-              </a:lnSpc>
-              <a:buNone/>
-              <a:defRPr sz="2200" b="0">
-                <a:solidFill>
-                  <a:srgbClr val="27333D"/>
-                </a:solidFill>
-                <a:latin typeface="微软雅黑"/>
-                <a:ea typeface="微软雅黑"/>
-                <a:cs typeface="微软雅黑"/>
-              </a:defRPr>
-            </a:pPr>
-            <a:r>
-              <a:rPr sz="2200" b="0">
-                <a:solidFill>
-                  <a:srgbClr val="27333D"/>
-                </a:solidFill>
-                <a:latin typeface="微软雅黑"/>
-                <a:ea typeface="微软雅黑"/>
-                <a:cs typeface="微软雅黑"/>
-              </a:rPr>
-              <a:t>改实际文件</a:t>
-            </a:r>
-          </a:p>
-          <a:p xmlns:a="http://schemas.openxmlformats.org/drawingml/2006/main">
-            <a:pPr algn="l">
-              <a:lnSpc>
-                <a:spcPct val="118000"/>
-              </a:lnSpc>
-              <a:buNone/>
-              <a:defRPr sz="2200" b="0">
-                <a:solidFill>
-                  <a:srgbClr val="27333D"/>
-                </a:solidFill>
-                <a:latin typeface="微软雅黑"/>
-                <a:ea typeface="微软雅黑"/>
-                <a:cs typeface="微软雅黑"/>
-              </a:defRPr>
-            </a:pPr>
-            <a:r>
-              <a:rPr sz="2200" b="0">
-                <a:solidFill>
-                  <a:srgbClr val="27333D"/>
-                </a:solidFill>
-                <a:latin typeface="微软雅黑"/>
-                <a:ea typeface="微软雅黑"/>
-                <a:cs typeface="微软雅黑"/>
-              </a:rPr>
-              <a:t>保存 diff</a:t>
-            </a:r>
-          </a:p>
-          <a:p xmlns:a="http://schemas.openxmlformats.org/drawingml/2006/main">
-            <a:pPr algn="l">
-              <a:lnSpc>
-                <a:spcPct val="118000"/>
-              </a:lnSpc>
-              <a:buNone/>
-              <a:defRPr sz="2200" b="0">
-                <a:solidFill>
-                  <a:srgbClr val="27333D"/>
-                </a:solidFill>
-                <a:latin typeface="微软雅黑"/>
-                <a:ea typeface="微软雅黑"/>
-                <a:cs typeface="微软雅黑"/>
-              </a:defRPr>
-            </a:pPr>
-            <a:r>
-              <a:rPr sz="2200" b="0">
-                <a:solidFill>
-                  <a:srgbClr val="27333D"/>
-                </a:solidFill>
-                <a:latin typeface="微软雅黑"/>
-                <a:ea typeface="微软雅黑"/>
-                <a:cs typeface="微软雅黑"/>
-              </a:rPr>
-              <a:t>更新影响工件</a:t>
-            </a:r>
-          </a:p>
-        </p:txBody>
-      </p:sp>
-      <p:sp>
-        <p:nvSpPr>
-          <p:cNvPr id="14" name="action">
-            <a:extLst xmlns:a="http://schemas.openxmlformats.org/drawingml/2006/main">
-              <a:ext uri="{FF2B5EF4-FFF2-40B4-BE49-F238E27FC236}">
-                <a16:creationId xmlns:a16="http://schemas.microsoft.com/office/drawing/2014/main" id="{90387867-982A-4015-B941-CCE790FFA330}"/>
-              </a:ext>
-            </a:extLst>
-          </p:cNvPr>
-          <p:cNvSpPr>
-            <a:spLocks xmlns:a="http://schemas.openxmlformats.org/drawingml/2006/main" noGrp="1"/>
-          </p:cNvSpPr>
-          <p:nvPr/>
-        </p:nvSpPr>
-        <p:spPr>
-          <a:xfrm xmlns:a="http://schemas.openxmlformats.org/drawingml/2006/main">
-            <a:off x="609600" y="5381625"/>
-            <a:ext cx="10858500" cy="571500"/>
-          </a:xfrm>
-          <a:prstGeom xmlns:a="http://schemas.openxmlformats.org/drawingml/2006/main" prst="rect">
-            <a:avLst/>
-          </a:prstGeom>
-          <a:noFill xmlns:a="http://schemas.openxmlformats.org/drawingml/2006/main"/>
-          <a:ln xmlns:a="http://schemas.openxmlformats.org/drawingml/2006/main" w="0">
-            <a:noFill/>
-          </a:ln>
-        </p:spPr>
-        <p:txBody>
-          <a:bodyPr xmlns:a="http://schemas.openxmlformats.org/drawingml/2006/main" lIns="0" tIns="0" rIns="0" bIns="0" anchor="t"/>
-          <a:lstStyle xmlns:a="http://schemas.openxmlformats.org/drawingml/2006/main"/>
-          <a:p xmlns:a="http://schemas.openxmlformats.org/drawingml/2006/main">
-            <a:pPr algn="l">
-              <a:lnSpc>
-                <a:spcPct val="118000"/>
-              </a:lnSpc>
-              <a:buNone/>
-              <a:defRPr sz="2400" b="0">
-                <a:solidFill>
-                  <a:srgbClr val="1F4D78"/>
-                </a:solidFill>
-                <a:latin typeface="微软雅黑"/>
-                <a:ea typeface="微软雅黑"/>
-                <a:cs typeface="微软雅黑"/>
-              </a:defRPr>
-            </a:pPr>
-            <a:r>
-              <a:rPr sz="2400" b="0">
-                <a:solidFill>
-                  <a:srgbClr val="1F4D78"/>
-                </a:solidFill>
-                <a:latin typeface="微软雅黑"/>
-                <a:ea typeface="微软雅黑"/>
-                <a:cs typeface="微软雅黑"/>
-              </a:rPr>
-              <a:t>请落实一项修改，让评审者看到实际变化。</a:t>
-            </a:r>
-          </a:p>
-        </p:txBody>
-      </p:sp>
-      <p:sp>
-        <p:nvSpPr>
-          <p:cNvPr id="15" name="source">
-            <a:extLst xmlns:a="http://schemas.openxmlformats.org/drawingml/2006/main">
-              <a:ext uri="{FF2B5EF4-FFF2-40B4-BE49-F238E27FC236}">
-                <a16:creationId xmlns:a16="http://schemas.microsoft.com/office/drawing/2014/main" id="{039870C1-6502-41CB-955E-3C0E4ABA2D1B}"/>
-              </a:ext>
-            </a:extLst>
-          </p:cNvPr>
-          <p:cNvSpPr>
-            <a:spLocks xmlns:a="http://schemas.openxmlformats.org/drawingml/2006/main" noGrp="1"/>
-          </p:cNvSpPr>
-          <p:nvPr/>
-        </p:nvSpPr>
-        <p:spPr>
-          <a:xfrm xmlns:a="http://schemas.openxmlformats.org/drawingml/2006/main">
-            <a:off x="609600" y="6067425"/>
-            <a:ext cx="10763250" cy="209550"/>
-          </a:xfrm>
-          <a:prstGeom xmlns:a="http://schemas.openxmlformats.org/drawingml/2006/main" prst="rect">
-            <a:avLst/>
-          </a:prstGeom>
-          <a:noFill xmlns:a="http://schemas.openxmlformats.org/drawingml/2006/main"/>
-          <a:ln xmlns:a="http://schemas.openxmlformats.org/drawingml/2006/main" w="0">
-            <a:noFill/>
-          </a:ln>
-        </p:spPr>
-        <p:txBody>
-          <a:bodyPr xmlns:a="http://schemas.openxmlformats.org/drawingml/2006/main" lIns="0" tIns="0" rIns="0" bIns="0" anchor="t"/>
-          <a:lstStyle xmlns:a="http://schemas.openxmlformats.org/drawingml/2006/main"/>
-          <a:p xmlns:a="http://schemas.openxmlformats.org/drawingml/2006/main">
-            <a:pPr algn="l">
-              <a:lnSpc>
-                <a:spcPct val="118000"/>
-              </a:lnSpc>
-              <a:buNone/>
-              <a:defRPr sz="1100" b="0">
-                <a:solidFill>
-                  <a:srgbClr val="66727D"/>
-                </a:solidFill>
-                <a:latin typeface="微软雅黑"/>
-                <a:ea typeface="微软雅黑"/>
-                <a:cs typeface="微软雅黑"/>
-              </a:defRPr>
-            </a:pPr>
-            <a:r>
-              <a:rPr sz="1100" b="0">
-                <a:solidFill>
-                  <a:srgbClr val="66727D"/>
-                </a:solidFill>
-                <a:latin typeface="微软雅黑"/>
-                <a:ea typeface="微软雅黑"/>
-                <a:cs typeface="微软雅黑"/>
-              </a:rPr>
-              <a:t>来源：本课讲义与课程评审模板；课程研究门规范 · 教学构造样例不冒充学生记录</a:t>
+              <a:t>改实际文件，保存 diff，更新影响工件。</a:t>
             </a:r>
           </a:p>
         </p:txBody>
@@ -6694,7 +5964,7 @@
                 <a:ea typeface="微软雅黑"/>
                 <a:cs typeface="微软雅黑"/>
               </a:rPr>
-              <a:t>把剩余问题正确收口</a:t>
+              <a:t>证据不足，怎样修改主句？</a:t>
             </a:r>
             <a:endParaRPr/>
           </a:p>
@@ -6730,22 +6000,22 @@
       </p:sp>
       <p:sp>
         <p:nvSpPr>
-          <p:cNvPr id="6" name="repair0-key">
-            <a:extLst xmlns:a="http://schemas.openxmlformats.org/drawingml/2006/main">
-              <a:ext uri="{FF2B5EF4-FFF2-40B4-BE49-F238E27FC236}">
-                <a16:creationId xmlns:a16="http://schemas.microsoft.com/office/drawing/2014/main" id="{2555B218-AF48-4819-A75E-FF35864AE3F2}"/>
-              </a:ext>
-            </a:extLst>
-          </p:cNvPr>
-          <p:cNvSpPr>
-            <a:spLocks xmlns:a="http://schemas.openxmlformats.org/drawingml/2006/main" noGrp="1"/>
-          </p:cNvSpPr>
-          <p:nvPr/>
-        </p:nvSpPr>
-        <p:spPr>
-          <a:xfrm xmlns:a="http://schemas.openxmlformats.org/drawingml/2006/main">
-            <a:off x="609600" y="1381125"/>
-            <a:ext cx="3028950" cy="571500"/>
+          <p:cNvPr id="6" name="content-221">
+            <a:extLst xmlns:a="http://schemas.openxmlformats.org/drawingml/2006/main">
+              <a:ext uri="{FF2B5EF4-FFF2-40B4-BE49-F238E27FC236}">
+                <a16:creationId xmlns:a16="http://schemas.microsoft.com/office/drawing/2014/main" id="{8B2BD9E2-6553-469E-9F01-95948DB1B664}"/>
+              </a:ext>
+            </a:extLst>
+          </p:cNvPr>
+          <p:cNvSpPr>
+            <a:spLocks xmlns:a="http://schemas.openxmlformats.org/drawingml/2006/main" noGrp="1"/>
+          </p:cNvSpPr>
+          <p:nvPr/>
+        </p:nvSpPr>
+        <p:spPr>
+          <a:xfrm xmlns:a="http://schemas.openxmlformats.org/drawingml/2006/main">
+            <a:off x="609600" y="1571625"/>
+            <a:ext cx="10972800" cy="432435"/>
           </a:xfrm>
           <a:prstGeom xmlns:a="http://schemas.openxmlformats.org/drawingml/2006/main" prst="rect">
             <a:avLst/>
@@ -6764,9 +6034,9 @@
                 <a:spcPct val="118000"/>
               </a:lnSpc>
               <a:buNone/>
-              <a:defRPr sz="2000" b="1">
-                <a:solidFill>
-                  <a:srgbClr val="1F4D78"/>
+              <a:defRPr sz="2400" b="0">
+                <a:solidFill>
+                  <a:srgbClr val="27333D"/>
                 </a:solidFill>
                 <a:latin typeface="微软雅黑"/>
                 <a:ea typeface="微软雅黑"/>
@@ -6774,37 +6044,37 @@
               </a:defRPr>
             </a:pPr>
             <a:r>
-              <a:rPr sz="2000" b="1">
-                <a:solidFill>
-                  <a:srgbClr val="1F4D78"/>
+              <a:rPr sz="2400" b="0">
+                <a:solidFill>
+                  <a:srgbClr val="27333D"/>
                 </a:solidFill>
                 <a:latin typeface="微软雅黑"/>
                 <a:ea typeface="微软雅黑"/>
                 <a:cs typeface="微软雅黑"/>
               </a:rPr>
-              <a:t>证据不足</a:t>
-            </a:r>
-          </a:p>
-        </p:txBody>
-      </p:sp>
-      <p:sp>
-        <p:nvSpPr>
-          <p:cNvPr id="7" name="repair0-value">
-            <a:extLst xmlns:a="http://schemas.openxmlformats.org/drawingml/2006/main">
-              <a:ext uri="{FF2B5EF4-FFF2-40B4-BE49-F238E27FC236}">
-                <a16:creationId xmlns:a16="http://schemas.microsoft.com/office/drawing/2014/main" id="{DF8AC8FE-67E0-4161-B9E9-E8EC8E1364E0}"/>
-              </a:ext>
-            </a:extLst>
-          </p:cNvPr>
-          <p:cNvSpPr>
-            <a:spLocks xmlns:a="http://schemas.openxmlformats.org/drawingml/2006/main" noGrp="1"/>
-          </p:cNvSpPr>
-          <p:nvPr/>
-        </p:nvSpPr>
-        <p:spPr>
-          <a:xfrm xmlns:a="http://schemas.openxmlformats.org/drawingml/2006/main">
-            <a:off x="3829050" y="1381125"/>
-            <a:ext cx="7639050" cy="762000"/>
+              <a:t>Q1：在构造包中方向一致。</a:t>
+            </a:r>
+          </a:p>
+        </p:txBody>
+      </p:sp>
+      <p:sp>
+        <p:nvSpPr>
+          <p:cNvPr id="7" name="content-222">
+            <a:extLst xmlns:a="http://schemas.openxmlformats.org/drawingml/2006/main">
+              <a:ext uri="{FF2B5EF4-FFF2-40B4-BE49-F238E27FC236}">
+                <a16:creationId xmlns:a16="http://schemas.microsoft.com/office/drawing/2014/main" id="{D85D8A01-D737-4928-9CF7-501463E0E125}"/>
+              </a:ext>
+            </a:extLst>
+          </p:cNvPr>
+          <p:cNvSpPr>
+            <a:spLocks xmlns:a="http://schemas.openxmlformats.org/drawingml/2006/main" noGrp="1"/>
+          </p:cNvSpPr>
+          <p:nvPr/>
+        </p:nvSpPr>
+        <p:spPr>
+          <a:xfrm xmlns:a="http://schemas.openxmlformats.org/drawingml/2006/main">
+            <a:off x="609600" y="2261235"/>
+            <a:ext cx="10972800" cy="432435"/>
           </a:xfrm>
           <a:prstGeom xmlns:a="http://schemas.openxmlformats.org/drawingml/2006/main" prst="rect">
             <a:avLst/>
@@ -6841,59 +6111,29 @@
                 <a:ea typeface="微软雅黑"/>
                 <a:cs typeface="微软雅黑"/>
               </a:rPr>
-              <a:t>→  降为支持（待验证）</a:t>
-            </a:r>
-          </a:p>
-        </p:txBody>
-      </p:sp>
-      <p:sp>
-        <p:nvSpPr>
-          <p:cNvPr id="8" name="repair0-rule">
-            <a:extLst xmlns:a="http://schemas.openxmlformats.org/drawingml/2006/main">
-              <a:ext uri="{FF2B5EF4-FFF2-40B4-BE49-F238E27FC236}">
-                <a16:creationId xmlns:a16="http://schemas.microsoft.com/office/drawing/2014/main" id="{8149DC94-E89F-4483-8F2E-2D69A512063D}"/>
-              </a:ext>
-            </a:extLst>
-          </p:cNvPr>
-          <p:cNvSpPr>
-            <a:spLocks xmlns:a="http://schemas.openxmlformats.org/drawingml/2006/main" noGrp="1"/>
-          </p:cNvSpPr>
-          <p:nvPr/>
-        </p:nvSpPr>
-        <p:spPr>
-          <a:xfrm xmlns:a="http://schemas.openxmlformats.org/drawingml/2006/main">
-            <a:off x="609600" y="2171700"/>
-            <a:ext cx="10858500" cy="14288"/>
-          </a:xfrm>
-          <a:prstGeom xmlns:a="http://schemas.openxmlformats.org/drawingml/2006/main" prst="rect">
-            <a:avLst/>
-          </a:prstGeom>
-          <a:solidFill xmlns:a="http://schemas.openxmlformats.org/drawingml/2006/main">
-            <a:srgbClr val="CDD5DB"/>
-          </a:solidFill>
-          <a:ln xmlns:a="http://schemas.openxmlformats.org/drawingml/2006/main" w="0">
-            <a:noFill/>
-          </a:ln>
-        </p:spPr>
-      </p:sp>
-      <p:sp>
-        <p:nvSpPr>
-          <p:cNvPr id="9" name="repair1-key">
-            <a:extLst xmlns:a="http://schemas.openxmlformats.org/drawingml/2006/main">
-              <a:ext uri="{FF2B5EF4-FFF2-40B4-BE49-F238E27FC236}">
-                <a16:creationId xmlns:a16="http://schemas.microsoft.com/office/drawing/2014/main" id="{6F1FF08A-D972-44A3-BE06-1CC657B9E2D0}"/>
-              </a:ext>
-            </a:extLst>
-          </p:cNvPr>
-          <p:cNvSpPr>
-            <a:spLocks xmlns:a="http://schemas.openxmlformats.org/drawingml/2006/main" noGrp="1"/>
-          </p:cNvSpPr>
-          <p:nvPr/>
-        </p:nvSpPr>
-        <p:spPr>
-          <a:xfrm xmlns:a="http://schemas.openxmlformats.org/drawingml/2006/main">
-            <a:off x="609600" y="2524125"/>
-            <a:ext cx="3028950" cy="571500"/>
+              <a:t>H1/A2：仍不能区分。</a:t>
+            </a:r>
+          </a:p>
+        </p:txBody>
+      </p:sp>
+      <p:sp>
+        <p:nvSpPr>
+          <p:cNvPr id="8" name="content-223">
+            <a:extLst xmlns:a="http://schemas.openxmlformats.org/drawingml/2006/main">
+              <a:ext uri="{FF2B5EF4-FFF2-40B4-BE49-F238E27FC236}">
+                <a16:creationId xmlns:a16="http://schemas.microsoft.com/office/drawing/2014/main" id="{7BB022D5-DB03-4C9F-B54E-8327280A6C97}"/>
+              </a:ext>
+            </a:extLst>
+          </p:cNvPr>
+          <p:cNvSpPr>
+            <a:spLocks xmlns:a="http://schemas.openxmlformats.org/drawingml/2006/main" noGrp="1"/>
+          </p:cNvSpPr>
+          <p:nvPr/>
+        </p:nvSpPr>
+        <p:spPr>
+          <a:xfrm xmlns:a="http://schemas.openxmlformats.org/drawingml/2006/main">
+            <a:off x="609600" y="2950845"/>
+            <a:ext cx="10972800" cy="432435"/>
           </a:xfrm>
           <a:prstGeom xmlns:a="http://schemas.openxmlformats.org/drawingml/2006/main" prst="rect">
             <a:avLst/>
@@ -6912,9 +6152,9 @@
                 <a:spcPct val="118000"/>
               </a:lnSpc>
               <a:buNone/>
-              <a:defRPr sz="2000" b="1">
-                <a:solidFill>
-                  <a:srgbClr val="1F4D78"/>
+              <a:defRPr sz="2400" b="0">
+                <a:solidFill>
+                  <a:srgbClr val="27333D"/>
                 </a:solidFill>
                 <a:latin typeface="微软雅黑"/>
                 <a:ea typeface="微软雅黑"/>
@@ -6922,37 +6162,37 @@
               </a:defRPr>
             </a:pPr>
             <a:r>
-              <a:rPr sz="2000" b="1">
-                <a:solidFill>
-                  <a:srgbClr val="1F4D78"/>
+              <a:rPr sz="2400" b="0">
+                <a:solidFill>
+                  <a:srgbClr val="27333D"/>
                 </a:solidFill>
                 <a:latin typeface="微软雅黑"/>
                 <a:ea typeface="微软雅黑"/>
                 <a:cs typeface="微软雅黑"/>
               </a:rPr>
-              <a:t>缺关键对照</a:t>
-            </a:r>
-          </a:p>
-        </p:txBody>
-      </p:sp>
-      <p:sp>
-        <p:nvSpPr>
-          <p:cNvPr id="10" name="repair1-value">
-            <a:extLst xmlns:a="http://schemas.openxmlformats.org/drawingml/2006/main">
-              <a:ext uri="{FF2B5EF4-FFF2-40B4-BE49-F238E27FC236}">
-                <a16:creationId xmlns:a16="http://schemas.microsoft.com/office/drawing/2014/main" id="{DD5DDD21-8BE2-4A8B-832E-07155C461D11}"/>
-              </a:ext>
-            </a:extLst>
-          </p:cNvPr>
-          <p:cNvSpPr>
-            <a:spLocks xmlns:a="http://schemas.openxmlformats.org/drawingml/2006/main" noGrp="1"/>
-          </p:cNvSpPr>
-          <p:nvPr/>
-        </p:nvSpPr>
-        <p:spPr>
-          <a:xfrm xmlns:a="http://schemas.openxmlformats.org/drawingml/2006/main">
-            <a:off x="3829050" y="2524125"/>
-            <a:ext cx="7639050" cy="762000"/>
+              <a:t>其他质量：尚未测量。</a:t>
+            </a:r>
+          </a:p>
+        </p:txBody>
+      </p:sp>
+      <p:sp>
+        <p:nvSpPr>
+          <p:cNvPr id="9" name="content-224">
+            <a:extLst xmlns:a="http://schemas.openxmlformats.org/drawingml/2006/main">
+              <a:ext uri="{FF2B5EF4-FFF2-40B4-BE49-F238E27FC236}">
+                <a16:creationId xmlns:a16="http://schemas.microsoft.com/office/drawing/2014/main" id="{0C23E53D-2FC2-489C-BFEC-F89D7ECD6A1B}"/>
+              </a:ext>
+            </a:extLst>
+          </p:cNvPr>
+          <p:cNvSpPr>
+            <a:spLocks xmlns:a="http://schemas.openxmlformats.org/drawingml/2006/main" noGrp="1"/>
+          </p:cNvSpPr>
+          <p:nvPr/>
+        </p:nvSpPr>
+        <p:spPr>
+          <a:xfrm xmlns:a="http://schemas.openxmlformats.org/drawingml/2006/main">
+            <a:off x="609600" y="3640455"/>
+            <a:ext cx="10972800" cy="432435"/>
           </a:xfrm>
           <a:prstGeom xmlns:a="http://schemas.openxmlformats.org/drawingml/2006/main" prst="rect">
             <a:avLst/>
@@ -6989,59 +6229,29 @@
                 <a:ea typeface="微软雅黑"/>
                 <a:cs typeface="微软雅黑"/>
               </a:rPr>
-              <a:t>→  写最小补证动作</a:t>
-            </a:r>
-          </a:p>
-        </p:txBody>
-      </p:sp>
-      <p:sp>
-        <p:nvSpPr>
-          <p:cNvPr id="11" name="repair1-rule">
-            <a:extLst xmlns:a="http://schemas.openxmlformats.org/drawingml/2006/main">
-              <a:ext uri="{FF2B5EF4-FFF2-40B4-BE49-F238E27FC236}">
-                <a16:creationId xmlns:a16="http://schemas.microsoft.com/office/drawing/2014/main" id="{FF6D89D2-6BF5-437E-AB97-CA9581CE117B}"/>
-              </a:ext>
-            </a:extLst>
-          </p:cNvPr>
-          <p:cNvSpPr>
-            <a:spLocks xmlns:a="http://schemas.openxmlformats.org/drawingml/2006/main" noGrp="1"/>
-          </p:cNvSpPr>
-          <p:nvPr/>
-        </p:nvSpPr>
-        <p:spPr>
-          <a:xfrm xmlns:a="http://schemas.openxmlformats.org/drawingml/2006/main">
-            <a:off x="609600" y="3314700"/>
-            <a:ext cx="10858500" cy="14288"/>
-          </a:xfrm>
-          <a:prstGeom xmlns:a="http://schemas.openxmlformats.org/drawingml/2006/main" prst="rect">
-            <a:avLst/>
-          </a:prstGeom>
-          <a:solidFill xmlns:a="http://schemas.openxmlformats.org/drawingml/2006/main">
-            <a:srgbClr val="CDD5DB"/>
-          </a:solidFill>
-          <a:ln xmlns:a="http://schemas.openxmlformats.org/drawingml/2006/main" w="0">
-            <a:noFill/>
-          </a:ln>
-        </p:spPr>
-      </p:sp>
-      <p:sp>
-        <p:nvSpPr>
-          <p:cNvPr id="12" name="repair2-key">
-            <a:extLst xmlns:a="http://schemas.openxmlformats.org/drawingml/2006/main">
-              <a:ext uri="{FF2B5EF4-FFF2-40B4-BE49-F238E27FC236}">
-                <a16:creationId xmlns:a16="http://schemas.microsoft.com/office/drawing/2014/main" id="{228343FB-2A9D-4899-A185-311FA5C2D7B6}"/>
-              </a:ext>
-            </a:extLst>
-          </p:cNvPr>
-          <p:cNvSpPr>
-            <a:spLocks xmlns:a="http://schemas.openxmlformats.org/drawingml/2006/main" noGrp="1"/>
-          </p:cNvSpPr>
-          <p:nvPr/>
-        </p:nvSpPr>
-        <p:spPr>
-          <a:xfrm xmlns:a="http://schemas.openxmlformats.org/drawingml/2006/main">
-            <a:off x="609600" y="3667125"/>
-            <a:ext cx="3028950" cy="571500"/>
+              <a:t>范围：保留T03负例，撤回“所有文本”。</a:t>
+            </a:r>
+          </a:p>
+        </p:txBody>
+      </p:sp>
+      <p:sp>
+        <p:nvSpPr>
+          <p:cNvPr id="10" name="content-225">
+            <a:extLst xmlns:a="http://schemas.openxmlformats.org/drawingml/2006/main">
+              <a:ext uri="{FF2B5EF4-FFF2-40B4-BE49-F238E27FC236}">
+                <a16:creationId xmlns:a16="http://schemas.microsoft.com/office/drawing/2014/main" id="{C6A5454B-F99B-4206-9AA8-C9396E250DDF}"/>
+              </a:ext>
+            </a:extLst>
+          </p:cNvPr>
+          <p:cNvSpPr>
+            <a:spLocks xmlns:a="http://schemas.openxmlformats.org/drawingml/2006/main" noGrp="1"/>
+          </p:cNvSpPr>
+          <p:nvPr/>
+        </p:nvSpPr>
+        <p:spPr>
+          <a:xfrm xmlns:a="http://schemas.openxmlformats.org/drawingml/2006/main">
+            <a:off x="609600" y="4330065"/>
+            <a:ext cx="10972800" cy="432435"/>
           </a:xfrm>
           <a:prstGeom xmlns:a="http://schemas.openxmlformats.org/drawingml/2006/main" prst="rect">
             <a:avLst/>
@@ -7060,7 +6270,7 @@
                 <a:spcPct val="118000"/>
               </a:lnSpc>
               <a:buNone/>
-              <a:defRPr sz="2000" b="1">
+              <a:defRPr sz="2400" b="0">
                 <a:solidFill>
                   <a:srgbClr val="1F4D78"/>
                 </a:solidFill>
@@ -7070,7 +6280,7 @@
               </a:defRPr>
             </a:pPr>
             <a:r>
-              <a:rPr sz="2000" b="1">
+              <a:rPr sz="2400" b="0">
                 <a:solidFill>
                   <a:srgbClr val="1F4D78"/>
                 </a:solidFill>
@@ -7078,273 +6288,7 @@
                 <a:ea typeface="微软雅黑"/>
                 <a:cs typeface="微软雅黑"/>
               </a:rPr>
-              <a:t>权限或数据不足</a:t>
-            </a:r>
-          </a:p>
-        </p:txBody>
-      </p:sp>
-      <p:sp>
-        <p:nvSpPr>
-          <p:cNvPr id="13" name="repair2-value">
-            <a:extLst xmlns:a="http://schemas.openxmlformats.org/drawingml/2006/main">
-              <a:ext uri="{FF2B5EF4-FFF2-40B4-BE49-F238E27FC236}">
-                <a16:creationId xmlns:a16="http://schemas.microsoft.com/office/drawing/2014/main" id="{925A9C4F-5B11-4740-AB39-38C9AED21B0D}"/>
-              </a:ext>
-            </a:extLst>
-          </p:cNvPr>
-          <p:cNvSpPr>
-            <a:spLocks xmlns:a="http://schemas.openxmlformats.org/drawingml/2006/main" noGrp="1"/>
-          </p:cNvSpPr>
-          <p:nvPr/>
-        </p:nvSpPr>
-        <p:spPr>
-          <a:xfrm xmlns:a="http://schemas.openxmlformats.org/drawingml/2006/main">
-            <a:off x="3829050" y="3667125"/>
-            <a:ext cx="7639050" cy="762000"/>
-          </a:xfrm>
-          <a:prstGeom xmlns:a="http://schemas.openxmlformats.org/drawingml/2006/main" prst="rect">
-            <a:avLst/>
-          </a:prstGeom>
-          <a:noFill xmlns:a="http://schemas.openxmlformats.org/drawingml/2006/main"/>
-          <a:ln xmlns:a="http://schemas.openxmlformats.org/drawingml/2006/main" w="0">
-            <a:noFill/>
-          </a:ln>
-        </p:spPr>
-        <p:txBody>
-          <a:bodyPr xmlns:a="http://schemas.openxmlformats.org/drawingml/2006/main" lIns="0" tIns="0" rIns="0" bIns="0" anchor="t"/>
-          <a:lstStyle xmlns:a="http://schemas.openxmlformats.org/drawingml/2006/main"/>
-          <a:p xmlns:a="http://schemas.openxmlformats.org/drawingml/2006/main">
-            <a:pPr algn="l">
-              <a:lnSpc>
-                <a:spcPct val="118000"/>
-              </a:lnSpc>
-              <a:buNone/>
-              <a:defRPr sz="2400" b="0">
-                <a:solidFill>
-                  <a:srgbClr val="27333D"/>
-                </a:solidFill>
-                <a:latin typeface="微软雅黑"/>
-                <a:ea typeface="微软雅黑"/>
-                <a:cs typeface="微软雅黑"/>
-              </a:defRPr>
-            </a:pPr>
-            <a:r>
-              <a:rPr sz="2400" b="0">
-                <a:solidFill>
-                  <a:srgbClr val="27333D"/>
-                </a:solidFill>
-                <a:latin typeface="微软雅黑"/>
-                <a:ea typeface="微软雅黑"/>
-                <a:cs typeface="微软雅黑"/>
-              </a:rPr>
-              <a:t>→  写阻塞、风险与复核点</a:t>
-            </a:r>
-          </a:p>
-        </p:txBody>
-      </p:sp>
-      <p:sp>
-        <p:nvSpPr>
-          <p:cNvPr id="14" name="repair2-rule">
-            <a:extLst xmlns:a="http://schemas.openxmlformats.org/drawingml/2006/main">
-              <a:ext uri="{FF2B5EF4-FFF2-40B4-BE49-F238E27FC236}">
-                <a16:creationId xmlns:a16="http://schemas.microsoft.com/office/drawing/2014/main" id="{F6C4024E-F223-4501-8574-A060B61F0B23}"/>
-              </a:ext>
-            </a:extLst>
-          </p:cNvPr>
-          <p:cNvSpPr>
-            <a:spLocks xmlns:a="http://schemas.openxmlformats.org/drawingml/2006/main" noGrp="1"/>
-          </p:cNvSpPr>
-          <p:nvPr/>
-        </p:nvSpPr>
-        <p:spPr>
-          <a:xfrm xmlns:a="http://schemas.openxmlformats.org/drawingml/2006/main">
-            <a:off x="609600" y="4457700"/>
-            <a:ext cx="10858500" cy="14288"/>
-          </a:xfrm>
-          <a:prstGeom xmlns:a="http://schemas.openxmlformats.org/drawingml/2006/main" prst="rect">
-            <a:avLst/>
-          </a:prstGeom>
-          <a:solidFill xmlns:a="http://schemas.openxmlformats.org/drawingml/2006/main">
-            <a:srgbClr val="CDD5DB"/>
-          </a:solidFill>
-          <a:ln xmlns:a="http://schemas.openxmlformats.org/drawingml/2006/main" w="0">
-            <a:noFill/>
-          </a:ln>
-        </p:spPr>
-      </p:sp>
-      <p:sp>
-        <p:nvSpPr>
-          <p:cNvPr id="15" name="technical">
-            <a:extLst xmlns:a="http://schemas.openxmlformats.org/drawingml/2006/main">
-              <a:ext uri="{FF2B5EF4-FFF2-40B4-BE49-F238E27FC236}">
-                <a16:creationId xmlns:a16="http://schemas.microsoft.com/office/drawing/2014/main" id="{68A6A849-23DF-4537-A84C-69C7247C6130}"/>
-              </a:ext>
-            </a:extLst>
-          </p:cNvPr>
-          <p:cNvSpPr>
-            <a:spLocks xmlns:a="http://schemas.openxmlformats.org/drawingml/2006/main" noGrp="1"/>
-          </p:cNvSpPr>
-          <p:nvPr/>
-        </p:nvSpPr>
-        <p:spPr>
-          <a:xfrm xmlns:a="http://schemas.openxmlformats.org/drawingml/2006/main">
-            <a:off x="609600" y="5133975"/>
-            <a:ext cx="10858500" cy="400050"/>
-          </a:xfrm>
-          <a:prstGeom xmlns:a="http://schemas.openxmlformats.org/drawingml/2006/main" prst="rect">
-            <a:avLst/>
-          </a:prstGeom>
-          <a:noFill xmlns:a="http://schemas.openxmlformats.org/drawingml/2006/main"/>
-          <a:ln xmlns:a="http://schemas.openxmlformats.org/drawingml/2006/main" w="0">
-            <a:noFill/>
-          </a:ln>
-        </p:spPr>
-        <p:txBody>
-          <a:bodyPr xmlns:a="http://schemas.openxmlformats.org/drawingml/2006/main" lIns="0" tIns="0" rIns="0" bIns="0" anchor="t"/>
-          <a:lstStyle xmlns:a="http://schemas.openxmlformats.org/drawingml/2006/main"/>
-          <a:p xmlns:a="http://schemas.openxmlformats.org/drawingml/2006/main">
-            <a:pPr algn="l">
-              <a:lnSpc>
-                <a:spcPct val="118000"/>
-              </a:lnSpc>
-              <a:buNone/>
-              <a:defRPr sz="2200" b="0">
-                <a:solidFill>
-                  <a:srgbClr val="1F4D78"/>
-                </a:solidFill>
-                <a:latin typeface="微软雅黑"/>
-                <a:ea typeface="微软雅黑"/>
-                <a:cs typeface="微软雅黑"/>
-              </a:defRPr>
-            </a:pPr>
-            <a:r>
-              <a:rPr sz="2200" b="0">
-                <a:solidFill>
-                  <a:srgbClr val="1F4D78"/>
-                </a:solidFill>
-                <a:latin typeface="微软雅黑"/>
-                <a:ea typeface="微软雅黑"/>
-                <a:cs typeface="微软雅黑"/>
-              </a:rPr>
-              <a:t>普通技术失败 → 修复与复盘</a:t>
-            </a:r>
-          </a:p>
-        </p:txBody>
-      </p:sp>
-      <p:sp>
-        <p:nvSpPr>
-          <p:cNvPr id="16" name="redline">
-            <a:extLst xmlns:a="http://schemas.openxmlformats.org/drawingml/2006/main">
-              <a:ext uri="{FF2B5EF4-FFF2-40B4-BE49-F238E27FC236}">
-                <a16:creationId xmlns:a16="http://schemas.microsoft.com/office/drawing/2014/main" id="{D08DF18A-4049-4963-A7BD-12C2104642D7}"/>
-              </a:ext>
-            </a:extLst>
-          </p:cNvPr>
-          <p:cNvSpPr>
-            <a:spLocks xmlns:a="http://schemas.openxmlformats.org/drawingml/2006/main" noGrp="1"/>
-          </p:cNvSpPr>
-          <p:nvPr/>
-        </p:nvSpPr>
-        <p:spPr>
-          <a:xfrm xmlns:a="http://schemas.openxmlformats.org/drawingml/2006/main">
-            <a:off x="609600" y="5600700"/>
-            <a:ext cx="10858500" cy="409575"/>
-          </a:xfrm>
-          <a:prstGeom xmlns:a="http://schemas.openxmlformats.org/drawingml/2006/main" prst="rect">
-            <a:avLst/>
-          </a:prstGeom>
-          <a:noFill xmlns:a="http://schemas.openxmlformats.org/drawingml/2006/main"/>
-          <a:ln xmlns:a="http://schemas.openxmlformats.org/drawingml/2006/main" w="0">
-            <a:noFill/>
-          </a:ln>
-        </p:spPr>
-        <p:txBody>
-          <a:bodyPr xmlns:a="http://schemas.openxmlformats.org/drawingml/2006/main" lIns="0" tIns="0" rIns="0" bIns="0" anchor="t"/>
-          <a:lstStyle xmlns:a="http://schemas.openxmlformats.org/drawingml/2006/main"/>
-          <a:p xmlns:a="http://schemas.openxmlformats.org/drawingml/2006/main">
-            <a:pPr algn="l">
-              <a:lnSpc>
-                <a:spcPct val="118000"/>
-              </a:lnSpc>
-              <a:buNone/>
-              <a:defRPr sz="2000" b="0">
-                <a:solidFill>
-                  <a:srgbClr val="C8161E"/>
-                </a:solidFill>
-                <a:latin typeface="微软雅黑"/>
-                <a:ea typeface="微软雅黑"/>
-                <a:cs typeface="微软雅黑"/>
-              </a:defRPr>
-            </a:pPr>
-            <a:r>
-              <a:rPr sz="2000" b="0">
-                <a:solidFill>
-                  <a:srgbClr val="C8161E"/>
-                </a:solidFill>
-                <a:latin typeface="微软雅黑"/>
-                <a:ea typeface="微软雅黑"/>
-                <a:cs typeface="微软雅黑"/>
-              </a:rPr>
-              <a:t>编造、隐瞒、越权或伪造记录 → 学术规范红线</a:t>
-            </a:r>
-          </a:p>
-        </p:txBody>
-      </p:sp>
-      <p:sp>
-        <p:nvSpPr>
-          <p:cNvPr id="17" name="source">
-            <a:extLst xmlns:a="http://schemas.openxmlformats.org/drawingml/2006/main">
-              <a:ext uri="{FF2B5EF4-FFF2-40B4-BE49-F238E27FC236}">
-                <a16:creationId xmlns:a16="http://schemas.microsoft.com/office/drawing/2014/main" id="{25F6B060-EBE0-4F7D-9925-4EEAF6FB731A}"/>
-              </a:ext>
-            </a:extLst>
-          </p:cNvPr>
-          <p:cNvSpPr>
-            <a:spLocks xmlns:a="http://schemas.openxmlformats.org/drawingml/2006/main" noGrp="1"/>
-          </p:cNvSpPr>
-          <p:nvPr/>
-        </p:nvSpPr>
-        <p:spPr>
-          <a:xfrm xmlns:a="http://schemas.openxmlformats.org/drawingml/2006/main">
-            <a:off x="609600" y="6067425"/>
-            <a:ext cx="10763250" cy="209550"/>
-          </a:xfrm>
-          <a:prstGeom xmlns:a="http://schemas.openxmlformats.org/drawingml/2006/main" prst="rect">
-            <a:avLst/>
-          </a:prstGeom>
-          <a:noFill xmlns:a="http://schemas.openxmlformats.org/drawingml/2006/main"/>
-          <a:ln xmlns:a="http://schemas.openxmlformats.org/drawingml/2006/main" w="0">
-            <a:noFill/>
-          </a:ln>
-        </p:spPr>
-        <p:txBody>
-          <a:bodyPr xmlns:a="http://schemas.openxmlformats.org/drawingml/2006/main" lIns="0" tIns="0" rIns="0" bIns="0" anchor="t"/>
-          <a:lstStyle xmlns:a="http://schemas.openxmlformats.org/drawingml/2006/main"/>
-          <a:p xmlns:a="http://schemas.openxmlformats.org/drawingml/2006/main">
-            <a:pPr algn="l">
-              <a:lnSpc>
-                <a:spcPct val="118000"/>
-              </a:lnSpc>
-              <a:buNone/>
-              <a:defRPr sz="1100" b="0">
-                <a:solidFill>
-                  <a:srgbClr val="66727D"/>
-                </a:solidFill>
-                <a:latin typeface="微软雅黑"/>
-                <a:ea typeface="微软雅黑"/>
-                <a:cs typeface="微软雅黑"/>
-              </a:defRPr>
-            </a:pPr>
-            <a:r>
-              <a:rPr sz="1100" b="0">
-                <a:solidFill>
-                  <a:srgbClr val="66727D"/>
-                </a:solidFill>
-                <a:latin typeface="微软雅黑"/>
-                <a:ea typeface="微软雅黑"/>
-                <a:cs typeface="微软雅黑"/>
-              </a:rPr>
-              <a:t>来源：本课讲义与课程评审模板；课程研究门规范 · 教学构造样例不冒充学生记录</a:t>
+              <a:t>修改正文，再更新追踪状态。</a:t>
             </a:r>
           </a:p>
         </p:txBody>
@@ -11151,22 +10095,22 @@
       </p:sp>
       <p:sp>
         <p:nvSpPr>
-          <p:cNvPr id="6" name="fiction">
-            <a:extLst xmlns:a="http://schemas.openxmlformats.org/drawingml/2006/main">
-              <a:ext uri="{FF2B5EF4-FFF2-40B4-BE49-F238E27FC236}">
-                <a16:creationId xmlns:a16="http://schemas.microsoft.com/office/drawing/2014/main" id="{52BFE267-02C6-4393-B376-493A89218FAB}"/>
-              </a:ext>
-            </a:extLst>
-          </p:cNvPr>
-          <p:cNvSpPr>
-            <a:spLocks xmlns:a="http://schemas.openxmlformats.org/drawingml/2006/main" noGrp="1"/>
-          </p:cNvSpPr>
-          <p:nvPr/>
-        </p:nvSpPr>
-        <p:spPr>
-          <a:xfrm xmlns:a="http://schemas.openxmlformats.org/drawingml/2006/main">
-            <a:off x="609600" y="885825"/>
-            <a:ext cx="10572750" cy="314325"/>
+          <p:cNvPr id="6" name="content-197">
+            <a:extLst xmlns:a="http://schemas.openxmlformats.org/drawingml/2006/main">
+              <a:ext uri="{FF2B5EF4-FFF2-40B4-BE49-F238E27FC236}">
+                <a16:creationId xmlns:a16="http://schemas.microsoft.com/office/drawing/2014/main" id="{7358901E-261D-48DF-9106-A06C2722E1FB}"/>
+              </a:ext>
+            </a:extLst>
+          </p:cNvPr>
+          <p:cNvSpPr>
+            <a:spLocks xmlns:a="http://schemas.openxmlformats.org/drawingml/2006/main" noGrp="1"/>
+          </p:cNvSpPr>
+          <p:nvPr/>
+        </p:nvSpPr>
+        <p:spPr>
+          <a:xfrm xmlns:a="http://schemas.openxmlformats.org/drawingml/2006/main">
+            <a:off x="609600" y="1571625"/>
+            <a:ext cx="10972800" cy="432435"/>
           </a:xfrm>
           <a:prstGeom xmlns:a="http://schemas.openxmlformats.org/drawingml/2006/main" prst="rect">
             <a:avLst/>
@@ -11185,9 +10129,9 @@
                 <a:spcPct val="118000"/>
               </a:lnSpc>
               <a:buNone/>
-              <a:defRPr sz="1800" b="0">
-                <a:solidFill>
-                  <a:srgbClr val="A96510"/>
+              <a:defRPr sz="2400" b="0">
+                <a:solidFill>
+                  <a:srgbClr val="27333D"/>
                 </a:solidFill>
                 <a:latin typeface="微软雅黑"/>
                 <a:ea typeface="微软雅黑"/>
@@ -11195,9 +10139,9 @@
               </a:defRPr>
             </a:pPr>
             <a:r>
-              <a:rPr sz="1800" b="0">
-                <a:solidFill>
-                  <a:srgbClr val="A96510"/>
+              <a:rPr sz="2400" b="0">
+                <a:solidFill>
+                  <a:srgbClr val="27333D"/>
                 </a:solidFill>
                 <a:latin typeface="微软雅黑"/>
                 <a:ea typeface="微软雅黑"/>
@@ -11210,52 +10154,22 @@
       </p:sp>
       <p:sp>
         <p:nvSpPr>
-          <p:cNvPr id="7" name="diff-bg">
-            <a:extLst xmlns:a="http://schemas.openxmlformats.org/drawingml/2006/main">
-              <a:ext uri="{FF2B5EF4-FFF2-40B4-BE49-F238E27FC236}">
-                <a16:creationId xmlns:a16="http://schemas.microsoft.com/office/drawing/2014/main" id="{6C8324DD-D6D9-4599-8591-2E2EEB62CAC5}"/>
-              </a:ext>
-            </a:extLst>
-          </p:cNvPr>
-          <p:cNvSpPr>
-            <a:spLocks xmlns:a="http://schemas.openxmlformats.org/drawingml/2006/main" noGrp="1"/>
-          </p:cNvSpPr>
-          <p:nvPr/>
-        </p:nvSpPr>
-        <p:spPr>
-          <a:xfrm xmlns:a="http://schemas.openxmlformats.org/drawingml/2006/main">
-            <a:off x="609600" y="1590675"/>
-            <a:ext cx="7981950" cy="3333750"/>
-          </a:xfrm>
-          <a:prstGeom xmlns:a="http://schemas.openxmlformats.org/drawingml/2006/main" prst="rect">
-            <a:avLst/>
-          </a:prstGeom>
-          <a:solidFill xmlns:a="http://schemas.openxmlformats.org/drawingml/2006/main">
-            <a:srgbClr val="F4F6F8"/>
-          </a:solidFill>
-          <a:ln xmlns:a="http://schemas.openxmlformats.org/drawingml/2006/main" w="0">
-            <a:noFill/>
-          </a:ln>
-        </p:spPr>
-      </p:sp>
-      <p:sp>
-        <p:nvSpPr>
-          <p:cNvPr id="8" name="diff-0">
-            <a:extLst xmlns:a="http://schemas.openxmlformats.org/drawingml/2006/main">
-              <a:ext uri="{FF2B5EF4-FFF2-40B4-BE49-F238E27FC236}">
-                <a16:creationId xmlns:a16="http://schemas.microsoft.com/office/drawing/2014/main" id="{93A75894-0E5A-48B6-9DA3-F19BFF5A6DB1}"/>
-              </a:ext>
-            </a:extLst>
-          </p:cNvPr>
-          <p:cNvSpPr>
-            <a:spLocks xmlns:a="http://schemas.openxmlformats.org/drawingml/2006/main" noGrp="1"/>
-          </p:cNvSpPr>
-          <p:nvPr/>
-        </p:nvSpPr>
-        <p:spPr>
-          <a:xfrm xmlns:a="http://schemas.openxmlformats.org/drawingml/2006/main">
-            <a:off x="800100" y="1800225"/>
-            <a:ext cx="7600950" cy="666750"/>
+          <p:cNvPr id="7" name="content-198">
+            <a:extLst xmlns:a="http://schemas.openxmlformats.org/drawingml/2006/main">
+              <a:ext uri="{FF2B5EF4-FFF2-40B4-BE49-F238E27FC236}">
+                <a16:creationId xmlns:a16="http://schemas.microsoft.com/office/drawing/2014/main" id="{707F6B1B-77D0-49DC-994A-B07520BFCB05}"/>
+              </a:ext>
+            </a:extLst>
+          </p:cNvPr>
+          <p:cNvSpPr>
+            <a:spLocks xmlns:a="http://schemas.openxmlformats.org/drawingml/2006/main" noGrp="1"/>
+          </p:cNvSpPr>
+          <p:nvPr/>
+        </p:nvSpPr>
+        <p:spPr>
+          <a:xfrm xmlns:a="http://schemas.openxmlformats.org/drawingml/2006/main">
+            <a:off x="609600" y="2261235"/>
+            <a:ext cx="10972800" cy="432435"/>
           </a:xfrm>
           <a:prstGeom xmlns:a="http://schemas.openxmlformats.org/drawingml/2006/main" prst="rect">
             <a:avLst/>
@@ -11274,9 +10188,9 @@
                 <a:spcPct val="118000"/>
               </a:lnSpc>
               <a:buNone/>
-              <a:defRPr sz="2200" b="0">
-                <a:solidFill>
-                  <a:srgbClr val="C8161E"/>
+              <a:defRPr sz="2400" b="0">
+                <a:solidFill>
+                  <a:srgbClr val="27333D"/>
                 </a:solidFill>
                 <a:latin typeface="微软雅黑"/>
                 <a:ea typeface="微软雅黑"/>
@@ -11284,9 +10198,9 @@
               </a:defRPr>
             </a:pPr>
             <a:r>
-              <a:rPr sz="2200" b="0">
-                <a:solidFill>
-                  <a:srgbClr val="C8161E"/>
+              <a:rPr sz="2400" b="0">
+                <a:solidFill>
+                  <a:srgbClr val="27333D"/>
                 </a:solidFill>
                 <a:latin typeface="微软雅黑"/>
                 <a:ea typeface="微软雅黑"/>
@@ -11299,22 +10213,22 @@
       </p:sp>
       <p:sp>
         <p:nvSpPr>
-          <p:cNvPr id="9" name="diff-1">
-            <a:extLst xmlns:a="http://schemas.openxmlformats.org/drawingml/2006/main">
-              <a:ext uri="{FF2B5EF4-FFF2-40B4-BE49-F238E27FC236}">
-                <a16:creationId xmlns:a16="http://schemas.microsoft.com/office/drawing/2014/main" id="{4B6CD0DD-60AA-4BD3-95B9-5940D1B87DA1}"/>
-              </a:ext>
-            </a:extLst>
-          </p:cNvPr>
-          <p:cNvSpPr>
-            <a:spLocks xmlns:a="http://schemas.openxmlformats.org/drawingml/2006/main" noGrp="1"/>
-          </p:cNvSpPr>
-          <p:nvPr/>
-        </p:nvSpPr>
-        <p:spPr>
-          <a:xfrm xmlns:a="http://schemas.openxmlformats.org/drawingml/2006/main">
-            <a:off x="800100" y="2495550"/>
-            <a:ext cx="7600950" cy="666750"/>
+          <p:cNvPr id="8" name="content-199">
+            <a:extLst xmlns:a="http://schemas.openxmlformats.org/drawingml/2006/main">
+              <a:ext uri="{FF2B5EF4-FFF2-40B4-BE49-F238E27FC236}">
+                <a16:creationId xmlns:a16="http://schemas.microsoft.com/office/drawing/2014/main" id="{4C08204D-104B-4837-BA64-F98E662F6F4D}"/>
+              </a:ext>
+            </a:extLst>
+          </p:cNvPr>
+          <p:cNvSpPr>
+            <a:spLocks xmlns:a="http://schemas.openxmlformats.org/drawingml/2006/main" noGrp="1"/>
+          </p:cNvSpPr>
+          <p:nvPr/>
+        </p:nvSpPr>
+        <p:spPr>
+          <a:xfrm xmlns:a="http://schemas.openxmlformats.org/drawingml/2006/main">
+            <a:off x="609600" y="2950845"/>
+            <a:ext cx="10972800" cy="798195"/>
           </a:xfrm>
           <a:prstGeom xmlns:a="http://schemas.openxmlformats.org/drawingml/2006/main" prst="rect">
             <a:avLst/>
@@ -11333,9 +10247,9 @@
                 <a:spcPct val="118000"/>
               </a:lnSpc>
               <a:buNone/>
-              <a:defRPr sz="2200" b="0">
-                <a:solidFill>
-                  <a:srgbClr val="2E7D5B"/>
+              <a:defRPr sz="2400" b="0">
+                <a:solidFill>
+                  <a:srgbClr val="27333D"/>
                 </a:solidFill>
                 <a:latin typeface="微软雅黑"/>
                 <a:ea typeface="微软雅黑"/>
@@ -11343,37 +10257,37 @@
               </a:defRPr>
             </a:pPr>
             <a:r>
-              <a:rPr sz="2200" b="0">
-                <a:solidFill>
-                  <a:srgbClr val="2E7D5B"/>
+              <a:rPr sz="2400" b="0">
+                <a:solidFill>
+                  <a:srgbClr val="27333D"/>
                 </a:solidFill>
                 <a:latin typeface="微软雅黑"/>
                 <a:ea typeface="微软雅黑"/>
                 <a:cs typeface="微软雅黑"/>
               </a:rPr>
-              <a:t>+ report.md 结果段写“机制已证实”，</a:t>
-            </a:r>
-          </a:p>
-        </p:txBody>
-      </p:sp>
-      <p:sp>
-        <p:nvSpPr>
-          <p:cNvPr id="10" name="diff-2">
-            <a:extLst xmlns:a="http://schemas.openxmlformats.org/drawingml/2006/main">
-              <a:ext uri="{FF2B5EF4-FFF2-40B4-BE49-F238E27FC236}">
-                <a16:creationId xmlns:a16="http://schemas.microsoft.com/office/drawing/2014/main" id="{9ED0CC97-9E65-4C83-A75C-6DD90FE50011}"/>
-              </a:ext>
-            </a:extLst>
-          </p:cNvPr>
-          <p:cNvSpPr>
-            <a:spLocks xmlns:a="http://schemas.openxmlformats.org/drawingml/2006/main" noGrp="1"/>
-          </p:cNvSpPr>
-          <p:nvPr/>
-        </p:nvSpPr>
-        <p:spPr>
-          <a:xfrm xmlns:a="http://schemas.openxmlformats.org/drawingml/2006/main">
-            <a:off x="800100" y="3190875"/>
-            <a:ext cx="7600950" cy="666750"/>
+              <a:t>+ report.md 结果段：主张“机制已证实”，但没有区分 H1/A2，也没有测量其他质量。建议降级结论并补边界。</a:t>
+            </a:r>
+          </a:p>
+        </p:txBody>
+      </p:sp>
+      <p:sp>
+        <p:nvSpPr>
+          <p:cNvPr id="9" name="content-200">
+            <a:extLst xmlns:a="http://schemas.openxmlformats.org/drawingml/2006/main">
+              <a:ext uri="{FF2B5EF4-FFF2-40B4-BE49-F238E27FC236}">
+                <a16:creationId xmlns:a16="http://schemas.microsoft.com/office/drawing/2014/main" id="{AACC0971-376C-4F37-84C2-1D75CD8A20D3}"/>
+              </a:ext>
+            </a:extLst>
+          </p:cNvPr>
+          <p:cNvSpPr>
+            <a:spLocks xmlns:a="http://schemas.openxmlformats.org/drawingml/2006/main" noGrp="1"/>
+          </p:cNvSpPr>
+          <p:nvPr/>
+        </p:nvSpPr>
+        <p:spPr>
+          <a:xfrm xmlns:a="http://schemas.openxmlformats.org/drawingml/2006/main">
+            <a:off x="609600" y="4006215"/>
+            <a:ext cx="10972800" cy="432435"/>
           </a:xfrm>
           <a:prstGeom xmlns:a="http://schemas.openxmlformats.org/drawingml/2006/main" prst="rect">
             <a:avLst/>
@@ -11392,9 +10306,9 @@
                 <a:spcPct val="118000"/>
               </a:lnSpc>
               <a:buNone/>
-              <a:defRPr sz="2200" b="0">
-                <a:solidFill>
-                  <a:srgbClr val="2E7D5B"/>
+              <a:defRPr sz="2400" b="0">
+                <a:solidFill>
+                  <a:srgbClr val="1F4D78"/>
                 </a:solidFill>
                 <a:latin typeface="微软雅黑"/>
                 <a:ea typeface="微软雅黑"/>
@@ -11402,428 +10316,15 @@
               </a:defRPr>
             </a:pPr>
             <a:r>
-              <a:rPr sz="2200" b="0">
-                <a:solidFill>
-                  <a:srgbClr val="2E7D5B"/>
+              <a:rPr sz="2400" b="0">
+                <a:solidFill>
+                  <a:srgbClr val="1F4D78"/>
                 </a:solidFill>
                 <a:latin typeface="微软雅黑"/>
                 <a:ea typeface="微软雅黑"/>
                 <a:cs typeface="微软雅黑"/>
               </a:rPr>
-              <a:t>+ 但没有区分 A1/A2/A3；</a:t>
-            </a:r>
-          </a:p>
-        </p:txBody>
-      </p:sp>
-      <p:sp>
-        <p:nvSpPr>
-          <p:cNvPr id="11" name="diff-3">
-            <a:extLst xmlns:a="http://schemas.openxmlformats.org/drawingml/2006/main">
-              <a:ext uri="{FF2B5EF4-FFF2-40B4-BE49-F238E27FC236}">
-                <a16:creationId xmlns:a16="http://schemas.microsoft.com/office/drawing/2014/main" id="{2B2706E8-6CED-4767-977C-C031430EDE7A}"/>
-              </a:ext>
-            </a:extLst>
-          </p:cNvPr>
-          <p:cNvSpPr>
-            <a:spLocks xmlns:a="http://schemas.openxmlformats.org/drawingml/2006/main" noGrp="1"/>
-          </p:cNvSpPr>
-          <p:nvPr/>
-        </p:nvSpPr>
-        <p:spPr>
-          <a:xfrm xmlns:a="http://schemas.openxmlformats.org/drawingml/2006/main">
-            <a:off x="800100" y="3886200"/>
-            <a:ext cx="7600950" cy="666750"/>
-          </a:xfrm>
-          <a:prstGeom xmlns:a="http://schemas.openxmlformats.org/drawingml/2006/main" prst="rect">
-            <a:avLst/>
-          </a:prstGeom>
-          <a:noFill xmlns:a="http://schemas.openxmlformats.org/drawingml/2006/main"/>
-          <a:ln xmlns:a="http://schemas.openxmlformats.org/drawingml/2006/main" w="0">
-            <a:noFill/>
-          </a:ln>
-        </p:spPr>
-        <p:txBody>
-          <a:bodyPr xmlns:a="http://schemas.openxmlformats.org/drawingml/2006/main" lIns="0" tIns="0" rIns="0" bIns="0" anchor="t"/>
-          <a:lstStyle xmlns:a="http://schemas.openxmlformats.org/drawingml/2006/main"/>
-          <a:p xmlns:a="http://schemas.openxmlformats.org/drawingml/2006/main">
-            <a:pPr algn="l">
-              <a:lnSpc>
-                <a:spcPct val="118000"/>
-              </a:lnSpc>
-              <a:buNone/>
-              <a:defRPr sz="2200" b="0">
-                <a:solidFill>
-                  <a:srgbClr val="2E7D5B"/>
-                </a:solidFill>
-                <a:latin typeface="微软雅黑"/>
-                <a:ea typeface="微软雅黑"/>
-                <a:cs typeface="微软雅黑"/>
-              </a:defRPr>
-            </a:pPr>
-            <a:r>
-              <a:rPr sz="2200" b="0">
-                <a:solidFill>
-                  <a:srgbClr val="2E7D5B"/>
-                </a:solidFill>
-                <a:latin typeface="微软雅黑"/>
-                <a:ea typeface="微软雅黑"/>
-                <a:cs typeface="微软雅黑"/>
-              </a:rPr>
-              <a:t>+ 建议降级结论并补边界。</a:t>
-            </a:r>
-          </a:p>
-        </p:txBody>
-      </p:sp>
-      <p:sp>
-        <p:nvSpPr>
-          <p:cNvPr id="12" name="loc-label">
-            <a:extLst xmlns:a="http://schemas.openxmlformats.org/drawingml/2006/main">
-              <a:ext uri="{FF2B5EF4-FFF2-40B4-BE49-F238E27FC236}">
-                <a16:creationId xmlns:a16="http://schemas.microsoft.com/office/drawing/2014/main" id="{5AECF0E5-2F10-47CB-A6AF-8C118E67774B}"/>
-              </a:ext>
-            </a:extLst>
-          </p:cNvPr>
-          <p:cNvSpPr>
-            <a:spLocks xmlns:a="http://schemas.openxmlformats.org/drawingml/2006/main" noGrp="1"/>
-          </p:cNvSpPr>
-          <p:nvPr/>
-        </p:nvSpPr>
-        <p:spPr>
-          <a:xfrm xmlns:a="http://schemas.openxmlformats.org/drawingml/2006/main">
-            <a:off x="8943975" y="1666875"/>
-            <a:ext cx="2571750" cy="381000"/>
-          </a:xfrm>
-          <a:prstGeom xmlns:a="http://schemas.openxmlformats.org/drawingml/2006/main" prst="rect">
-            <a:avLst/>
-          </a:prstGeom>
-          <a:noFill xmlns:a="http://schemas.openxmlformats.org/drawingml/2006/main"/>
-          <a:ln xmlns:a="http://schemas.openxmlformats.org/drawingml/2006/main" w="0">
-            <a:noFill/>
-          </a:ln>
-        </p:spPr>
-        <p:txBody>
-          <a:bodyPr xmlns:a="http://schemas.openxmlformats.org/drawingml/2006/main" lIns="0" tIns="0" rIns="0" bIns="0" anchor="t"/>
-          <a:lstStyle xmlns:a="http://schemas.openxmlformats.org/drawingml/2006/main"/>
-          <a:p xmlns:a="http://schemas.openxmlformats.org/drawingml/2006/main">
-            <a:pPr algn="l">
-              <a:lnSpc>
-                <a:spcPct val="118000"/>
-              </a:lnSpc>
-              <a:buNone/>
-              <a:defRPr sz="2000" b="1">
-                <a:solidFill>
-                  <a:srgbClr val="1F4D78"/>
-                </a:solidFill>
-                <a:latin typeface="微软雅黑"/>
-                <a:ea typeface="微软雅黑"/>
-                <a:cs typeface="微软雅黑"/>
-              </a:defRPr>
-            </a:pPr>
-            <a:r>
-              <a:rPr sz="2000" b="1">
-                <a:solidFill>
-                  <a:srgbClr val="1F4D78"/>
-                </a:solidFill>
-                <a:latin typeface="微软雅黑"/>
-                <a:ea typeface="微软雅黑"/>
-                <a:cs typeface="微软雅黑"/>
-              </a:rPr>
-              <a:t>位置</a:t>
-            </a:r>
-          </a:p>
-        </p:txBody>
-      </p:sp>
-      <p:sp>
-        <p:nvSpPr>
-          <p:cNvPr id="13" name="loc-body">
-            <a:extLst xmlns:a="http://schemas.openxmlformats.org/drawingml/2006/main">
-              <a:ext uri="{FF2B5EF4-FFF2-40B4-BE49-F238E27FC236}">
-                <a16:creationId xmlns:a16="http://schemas.microsoft.com/office/drawing/2014/main" id="{659C627D-8A73-48A0-AE20-E772E00497CF}"/>
-              </a:ext>
-            </a:extLst>
-          </p:cNvPr>
-          <p:cNvSpPr>
-            <a:spLocks xmlns:a="http://schemas.openxmlformats.org/drawingml/2006/main" noGrp="1"/>
-          </p:cNvSpPr>
-          <p:nvPr/>
-        </p:nvSpPr>
-        <p:spPr>
-          <a:xfrm xmlns:a="http://schemas.openxmlformats.org/drawingml/2006/main">
-            <a:off x="8943975" y="2171700"/>
-            <a:ext cx="2571750" cy="1381125"/>
-          </a:xfrm>
-          <a:prstGeom xmlns:a="http://schemas.openxmlformats.org/drawingml/2006/main" prst="rect">
-            <a:avLst/>
-          </a:prstGeom>
-          <a:noFill xmlns:a="http://schemas.openxmlformats.org/drawingml/2006/main"/>
-          <a:ln xmlns:a="http://schemas.openxmlformats.org/drawingml/2006/main" w="0">
-            <a:noFill/>
-          </a:ln>
-        </p:spPr>
-        <p:txBody>
-          <a:bodyPr xmlns:a="http://schemas.openxmlformats.org/drawingml/2006/main" lIns="0" tIns="0" rIns="0" bIns="0" anchor="t"/>
-          <a:lstStyle xmlns:a="http://schemas.openxmlformats.org/drawingml/2006/main"/>
-          <a:p xmlns:a="http://schemas.openxmlformats.org/drawingml/2006/main">
-            <a:pPr algn="l">
-              <a:lnSpc>
-                <a:spcPct val="118000"/>
-              </a:lnSpc>
-              <a:buNone/>
-              <a:defRPr sz="2400" b="0">
-                <a:solidFill>
-                  <a:srgbClr val="27333D"/>
-                </a:solidFill>
-                <a:latin typeface="微软雅黑"/>
-                <a:ea typeface="微软雅黑"/>
-                <a:cs typeface="微软雅黑"/>
-              </a:defRPr>
-            </a:pPr>
-            <a:r>
-              <a:rPr sz="2400" b="0">
-                <a:solidFill>
-                  <a:srgbClr val="27333D"/>
-                </a:solidFill>
-                <a:latin typeface="微软雅黑"/>
-                <a:ea typeface="微软雅黑"/>
-                <a:cs typeface="微软雅黑"/>
-              </a:rPr>
-              <a:t>report.md 结果段</a:t>
-            </a:r>
-          </a:p>
-        </p:txBody>
-      </p:sp>
-      <p:sp>
-        <p:nvSpPr>
-          <p:cNvPr id="14" name="review-label">
-            <a:extLst xmlns:a="http://schemas.openxmlformats.org/drawingml/2006/main">
-              <a:ext uri="{FF2B5EF4-FFF2-40B4-BE49-F238E27FC236}">
-                <a16:creationId xmlns:a16="http://schemas.microsoft.com/office/drawing/2014/main" id="{E2B8539A-CAF3-4BA9-98EA-C94B23281B72}"/>
-              </a:ext>
-            </a:extLst>
-          </p:cNvPr>
-          <p:cNvSpPr>
-            <a:spLocks xmlns:a="http://schemas.openxmlformats.org/drawingml/2006/main" noGrp="1"/>
-          </p:cNvSpPr>
-          <p:nvPr/>
-        </p:nvSpPr>
-        <p:spPr>
-          <a:xfrm xmlns:a="http://schemas.openxmlformats.org/drawingml/2006/main">
-            <a:off x="8943975" y="3524250"/>
-            <a:ext cx="2571750" cy="381000"/>
-          </a:xfrm>
-          <a:prstGeom xmlns:a="http://schemas.openxmlformats.org/drawingml/2006/main" prst="rect">
-            <a:avLst/>
-          </a:prstGeom>
-          <a:noFill xmlns:a="http://schemas.openxmlformats.org/drawingml/2006/main"/>
-          <a:ln xmlns:a="http://schemas.openxmlformats.org/drawingml/2006/main" w="0">
-            <a:noFill/>
-          </a:ln>
-        </p:spPr>
-        <p:txBody>
-          <a:bodyPr xmlns:a="http://schemas.openxmlformats.org/drawingml/2006/main" lIns="0" tIns="0" rIns="0" bIns="0" anchor="t"/>
-          <a:lstStyle xmlns:a="http://schemas.openxmlformats.org/drawingml/2006/main"/>
-          <a:p xmlns:a="http://schemas.openxmlformats.org/drawingml/2006/main">
-            <a:pPr algn="l">
-              <a:lnSpc>
-                <a:spcPct val="118000"/>
-              </a:lnSpc>
-              <a:buNone/>
-              <a:defRPr sz="2000" b="1">
-                <a:solidFill>
-                  <a:srgbClr val="1F4D78"/>
-                </a:solidFill>
-                <a:latin typeface="微软雅黑"/>
-                <a:ea typeface="微软雅黑"/>
-                <a:cs typeface="微软雅黑"/>
-              </a:defRPr>
-            </a:pPr>
-            <a:r>
-              <a:rPr sz="2000" b="1">
-                <a:solidFill>
-                  <a:srgbClr val="1F4D78"/>
-                </a:solidFill>
-                <a:latin typeface="微软雅黑"/>
-                <a:ea typeface="微软雅黑"/>
-                <a:cs typeface="微软雅黑"/>
-              </a:rPr>
-              <a:t>建议</a:t>
-            </a:r>
-          </a:p>
-        </p:txBody>
-      </p:sp>
-      <p:sp>
-        <p:nvSpPr>
-          <p:cNvPr id="15" name="review-body">
-            <a:extLst xmlns:a="http://schemas.openxmlformats.org/drawingml/2006/main">
-              <a:ext uri="{FF2B5EF4-FFF2-40B4-BE49-F238E27FC236}">
-                <a16:creationId xmlns:a16="http://schemas.microsoft.com/office/drawing/2014/main" id="{82BF1565-EDA0-4D10-B1C7-186A8184E450}"/>
-              </a:ext>
-            </a:extLst>
-          </p:cNvPr>
-          <p:cNvSpPr>
-            <a:spLocks xmlns:a="http://schemas.openxmlformats.org/drawingml/2006/main" noGrp="1"/>
-          </p:cNvSpPr>
-          <p:nvPr/>
-        </p:nvSpPr>
-        <p:spPr>
-          <a:xfrm xmlns:a="http://schemas.openxmlformats.org/drawingml/2006/main">
-            <a:off x="8943975" y="4029075"/>
-            <a:ext cx="2571750" cy="1381125"/>
-          </a:xfrm>
-          <a:prstGeom xmlns:a="http://schemas.openxmlformats.org/drawingml/2006/main" prst="rect">
-            <a:avLst/>
-          </a:prstGeom>
-          <a:noFill xmlns:a="http://schemas.openxmlformats.org/drawingml/2006/main"/>
-          <a:ln xmlns:a="http://schemas.openxmlformats.org/drawingml/2006/main" w="0">
-            <a:noFill/>
-          </a:ln>
-        </p:spPr>
-        <p:txBody>
-          <a:bodyPr xmlns:a="http://schemas.openxmlformats.org/drawingml/2006/main" lIns="0" tIns="0" rIns="0" bIns="0" anchor="t"/>
-          <a:lstStyle xmlns:a="http://schemas.openxmlformats.org/drawingml/2006/main"/>
-          <a:p xmlns:a="http://schemas.openxmlformats.org/drawingml/2006/main">
-            <a:pPr algn="l">
-              <a:lnSpc>
-                <a:spcPct val="118000"/>
-              </a:lnSpc>
-              <a:buNone/>
-              <a:defRPr sz="2400" b="0">
-                <a:solidFill>
-                  <a:srgbClr val="27333D"/>
-                </a:solidFill>
-                <a:latin typeface="微软雅黑"/>
-                <a:ea typeface="微软雅黑"/>
-                <a:cs typeface="微软雅黑"/>
-              </a:defRPr>
-            </a:pPr>
-            <a:r>
-              <a:rPr sz="2400" b="0">
-                <a:solidFill>
-                  <a:srgbClr val="27333D"/>
-                </a:solidFill>
-                <a:latin typeface="微软雅黑"/>
-                <a:ea typeface="微软雅黑"/>
-                <a:cs typeface="微软雅黑"/>
-              </a:rPr>
-              <a:t>降级并补边界</a:t>
-            </a:r>
-          </a:p>
-        </p:txBody>
-      </p:sp>
-      <p:sp>
-        <p:nvSpPr>
-          <p:cNvPr id="16" name="ethics">
-            <a:extLst xmlns:a="http://schemas.openxmlformats.org/drawingml/2006/main">
-              <a:ext uri="{FF2B5EF4-FFF2-40B4-BE49-F238E27FC236}">
-                <a16:creationId xmlns:a16="http://schemas.microsoft.com/office/drawing/2014/main" id="{F0742191-F073-4552-8646-2E3D747E5532}"/>
-              </a:ext>
-            </a:extLst>
-          </p:cNvPr>
-          <p:cNvSpPr>
-            <a:spLocks xmlns:a="http://schemas.openxmlformats.org/drawingml/2006/main" noGrp="1"/>
-          </p:cNvSpPr>
-          <p:nvPr/>
-        </p:nvSpPr>
-        <p:spPr>
-          <a:xfrm xmlns:a="http://schemas.openxmlformats.org/drawingml/2006/main">
-            <a:off x="609600" y="5305425"/>
-            <a:ext cx="10858500" cy="666750"/>
-          </a:xfrm>
-          <a:prstGeom xmlns:a="http://schemas.openxmlformats.org/drawingml/2006/main" prst="rect">
-            <a:avLst/>
-          </a:prstGeom>
-          <a:noFill xmlns:a="http://schemas.openxmlformats.org/drawingml/2006/main"/>
-          <a:ln xmlns:a="http://schemas.openxmlformats.org/drawingml/2006/main" w="0">
-            <a:noFill/>
-          </a:ln>
-        </p:spPr>
-        <p:txBody>
-          <a:bodyPr xmlns:a="http://schemas.openxmlformats.org/drawingml/2006/main" lIns="0" tIns="0" rIns="0" bIns="0" anchor="t"/>
-          <a:lstStyle xmlns:a="http://schemas.openxmlformats.org/drawingml/2006/main"/>
-          <a:p xmlns:a="http://schemas.openxmlformats.org/drawingml/2006/main">
-            <a:pPr algn="l">
-              <a:lnSpc>
-                <a:spcPct val="118000"/>
-              </a:lnSpc>
-              <a:buNone/>
-              <a:defRPr sz="2200" b="0">
-                <a:solidFill>
-                  <a:srgbClr val="27333D"/>
-                </a:solidFill>
-                <a:latin typeface="微软雅黑"/>
-                <a:ea typeface="微软雅黑"/>
-                <a:cs typeface="微软雅黑"/>
-              </a:defRPr>
-            </a:pPr>
-            <a:r>
-              <a:rPr sz="2200" b="0">
-                <a:solidFill>
-                  <a:srgbClr val="27333D"/>
-                </a:solidFill>
-                <a:latin typeface="微软雅黑"/>
-                <a:ea typeface="微软雅黑"/>
-                <a:cs typeface="微软雅黑"/>
-              </a:rPr>
-              <a:t>指向工作，不评价人格或选题时髦度；作者保留判断责任。</a:t>
-            </a:r>
-          </a:p>
-        </p:txBody>
-      </p:sp>
-      <p:sp>
-        <p:nvSpPr>
-          <p:cNvPr id="17" name="source">
-            <a:extLst xmlns:a="http://schemas.openxmlformats.org/drawingml/2006/main">
-              <a:ext uri="{FF2B5EF4-FFF2-40B4-BE49-F238E27FC236}">
-                <a16:creationId xmlns:a16="http://schemas.microsoft.com/office/drawing/2014/main" id="{0315B495-044E-4217-ADC9-4266EDE717F2}"/>
-              </a:ext>
-            </a:extLst>
-          </p:cNvPr>
-          <p:cNvSpPr>
-            <a:spLocks xmlns:a="http://schemas.openxmlformats.org/drawingml/2006/main" noGrp="1"/>
-          </p:cNvSpPr>
-          <p:nvPr/>
-        </p:nvSpPr>
-        <p:spPr>
-          <a:xfrm xmlns:a="http://schemas.openxmlformats.org/drawingml/2006/main">
-            <a:off x="609600" y="6067425"/>
-            <a:ext cx="10763250" cy="209550"/>
-          </a:xfrm>
-          <a:prstGeom xmlns:a="http://schemas.openxmlformats.org/drawingml/2006/main" prst="rect">
-            <a:avLst/>
-          </a:prstGeom>
-          <a:noFill xmlns:a="http://schemas.openxmlformats.org/drawingml/2006/main"/>
-          <a:ln xmlns:a="http://schemas.openxmlformats.org/drawingml/2006/main" w="0">
-            <a:noFill/>
-          </a:ln>
-        </p:spPr>
-        <p:txBody>
-          <a:bodyPr xmlns:a="http://schemas.openxmlformats.org/drawingml/2006/main" lIns="0" tIns="0" rIns="0" bIns="0" anchor="t"/>
-          <a:lstStyle xmlns:a="http://schemas.openxmlformats.org/drawingml/2006/main"/>
-          <a:p xmlns:a="http://schemas.openxmlformats.org/drawingml/2006/main">
-            <a:pPr algn="l">
-              <a:lnSpc>
-                <a:spcPct val="118000"/>
-              </a:lnSpc>
-              <a:buNone/>
-              <a:defRPr sz="1100" b="0">
-                <a:solidFill>
-                  <a:srgbClr val="66727D"/>
-                </a:solidFill>
-                <a:latin typeface="微软雅黑"/>
-                <a:ea typeface="微软雅黑"/>
-                <a:cs typeface="微软雅黑"/>
-              </a:defRPr>
-            </a:pPr>
-            <a:r>
-              <a:rPr sz="1100" b="0">
-                <a:solidFill>
-                  <a:srgbClr val="66727D"/>
-                </a:solidFill>
-                <a:latin typeface="微软雅黑"/>
-                <a:ea typeface="微软雅黑"/>
-                <a:cs typeface="微软雅黑"/>
-              </a:rPr>
-              <a:t>Smith (1990), The Task of the Referee, Computer 23(4):65–71 · 本课五维 rubric 为课程改编</a:t>
+              <a:t>指向工作，不评价作者人格或选题时髦度；作者保留判断责任。</a:t>
             </a:r>
           </a:p>
         </p:txBody>
@@ -12786,7 +11287,7 @@
                 <a:ea typeface="微软雅黑"/>
                 <a:cs typeface="微软雅黑"/>
               </a:rPr>
-              <a:t>这条结论应当怎样降级？</a:t>
+              <a:t>给三处错误排优先级</a:t>
             </a:r>
             <a:endParaRPr/>
           </a:p>
@@ -12822,22 +11323,22 @@
       </p:sp>
       <p:sp>
         <p:nvSpPr>
-          <p:cNvPr id="6" name="fiction">
-            <a:extLst xmlns:a="http://schemas.openxmlformats.org/drawingml/2006/main">
-              <a:ext uri="{FF2B5EF4-FFF2-40B4-BE49-F238E27FC236}">
-                <a16:creationId xmlns:a16="http://schemas.microsoft.com/office/drawing/2014/main" id="{8DE662DD-C1D0-4B49-AD73-DE1147E92D4F}"/>
-              </a:ext>
-            </a:extLst>
-          </p:cNvPr>
-          <p:cNvSpPr>
-            <a:spLocks xmlns:a="http://schemas.openxmlformats.org/drawingml/2006/main" noGrp="1"/>
-          </p:cNvSpPr>
-          <p:nvPr/>
-        </p:nvSpPr>
-        <p:spPr>
-          <a:xfrm xmlns:a="http://schemas.openxmlformats.org/drawingml/2006/main">
-            <a:off x="609600" y="885825"/>
-            <a:ext cx="10572750" cy="314325"/>
+          <p:cNvPr id="6" name="content-201">
+            <a:extLst xmlns:a="http://schemas.openxmlformats.org/drawingml/2006/main">
+              <a:ext uri="{FF2B5EF4-FFF2-40B4-BE49-F238E27FC236}">
+                <a16:creationId xmlns:a16="http://schemas.microsoft.com/office/drawing/2014/main" id="{297CD03F-BB99-4F45-8989-ECA0FA81D8FC}"/>
+              </a:ext>
+            </a:extLst>
+          </p:cNvPr>
+          <p:cNvSpPr>
+            <a:spLocks xmlns:a="http://schemas.openxmlformats.org/drawingml/2006/main" noGrp="1"/>
+          </p:cNvSpPr>
+          <p:nvPr/>
+        </p:nvSpPr>
+        <p:spPr>
+          <a:xfrm xmlns:a="http://schemas.openxmlformats.org/drawingml/2006/main">
+            <a:off x="609600" y="1571625"/>
+            <a:ext cx="10972800" cy="432435"/>
           </a:xfrm>
           <a:prstGeom xmlns:a="http://schemas.openxmlformats.org/drawingml/2006/main" prst="rect">
             <a:avLst/>
@@ -12856,9 +11357,9 @@
                 <a:spcPct val="118000"/>
               </a:lnSpc>
               <a:buNone/>
-              <a:defRPr sz="1800" b="0">
-                <a:solidFill>
-                  <a:srgbClr val="A96510"/>
+              <a:defRPr sz="2400" b="0">
+                <a:solidFill>
+                  <a:srgbClr val="27333D"/>
                 </a:solidFill>
                 <a:latin typeface="微软雅黑"/>
                 <a:ea typeface="微软雅黑"/>
@@ -12866,37 +11367,37 @@
               </a:defRPr>
             </a:pPr>
             <a:r>
-              <a:rPr sz="1800" b="0">
-                <a:solidFill>
-                  <a:srgbClr val="A96510"/>
+              <a:rPr sz="2400" b="0">
+                <a:solidFill>
+                  <a:srgbClr val="27333D"/>
                 </a:solidFill>
                 <a:latin typeface="微软雅黑"/>
                 <a:ea typeface="微软雅黑"/>
                 <a:cs typeface="微软雅黑"/>
               </a:rPr>
-              <a:t>教师故意含错的虚构版本</a:t>
-            </a:r>
-          </a:p>
-        </p:txBody>
-      </p:sp>
-      <p:sp>
-        <p:nvSpPr>
-          <p:cNvPr id="7" name="statement">
-            <a:extLst xmlns:a="http://schemas.openxmlformats.org/drawingml/2006/main">
-              <a:ext uri="{FF2B5EF4-FFF2-40B4-BE49-F238E27FC236}">
-                <a16:creationId xmlns:a16="http://schemas.microsoft.com/office/drawing/2014/main" id="{BC88A199-00CF-4692-B789-8119A528222C}"/>
-              </a:ext>
-            </a:extLst>
-          </p:cNvPr>
-          <p:cNvSpPr>
-            <a:spLocks xmlns:a="http://schemas.openxmlformats.org/drawingml/2006/main" noGrp="1"/>
-          </p:cNvSpPr>
-          <p:nvPr/>
-        </p:nvSpPr>
-        <p:spPr>
-          <a:xfrm xmlns:a="http://schemas.openxmlformats.org/drawingml/2006/main">
-            <a:off x="609600" y="1743075"/>
-            <a:ext cx="10820400" cy="590550"/>
+              <a:t>D1：“证明机制，对所有文本有效，stable。”</a:t>
+            </a:r>
+          </a:p>
+        </p:txBody>
+      </p:sp>
+      <p:sp>
+        <p:nvSpPr>
+          <p:cNvPr id="7" name="content-202">
+            <a:extLst xmlns:a="http://schemas.openxmlformats.org/drawingml/2006/main">
+              <a:ext uri="{FF2B5EF4-FFF2-40B4-BE49-F238E27FC236}">
+                <a16:creationId xmlns:a16="http://schemas.microsoft.com/office/drawing/2014/main" id="{12B97342-63B0-4BDE-ACE2-5B9B1A029476}"/>
+              </a:ext>
+            </a:extLst>
+          </p:cNvPr>
+          <p:cNvSpPr>
+            <a:spLocks xmlns:a="http://schemas.openxmlformats.org/drawingml/2006/main" noGrp="1"/>
+          </p:cNvSpPr>
+          <p:nvPr/>
+        </p:nvSpPr>
+        <p:spPr>
+          <a:xfrm xmlns:a="http://schemas.openxmlformats.org/drawingml/2006/main">
+            <a:off x="609600" y="2261235"/>
+            <a:ext cx="10972800" cy="432435"/>
           </a:xfrm>
           <a:prstGeom xmlns:a="http://schemas.openxmlformats.org/drawingml/2006/main" prst="rect">
             <a:avLst/>
@@ -12915,7 +11416,7 @@
                 <a:spcPct val="118000"/>
               </a:lnSpc>
               <a:buNone/>
-              <a:defRPr sz="3000" b="0">
+              <a:defRPr sz="2400" b="0">
                 <a:solidFill>
                   <a:srgbClr val="27333D"/>
                 </a:solidFill>
@@ -12925,7 +11426,7 @@
               </a:defRPr>
             </a:pPr>
             <a:r>
-              <a:rPr sz="3000" b="0">
+              <a:rPr sz="2400" b="0">
                 <a:solidFill>
                   <a:srgbClr val="27333D"/>
                 </a:solidFill>
@@ -12933,29 +11434,29 @@
                 <a:ea typeface="微软雅黑"/>
                 <a:cs typeface="微软雅黑"/>
               </a:rPr>
-              <a:t>20 篇论文的阅读卡组更好，</a:t>
-            </a:r>
-          </a:p>
-        </p:txBody>
-      </p:sp>
-      <p:sp>
-        <p:nvSpPr>
-          <p:cNvPr id="8" name="error">
-            <a:extLst xmlns:a="http://schemas.openxmlformats.org/drawingml/2006/main">
-              <a:ext uri="{FF2B5EF4-FFF2-40B4-BE49-F238E27FC236}">
-                <a16:creationId xmlns:a16="http://schemas.microsoft.com/office/drawing/2014/main" id="{ABCF675D-21F4-489F-9F85-ADCA514A2714}"/>
-              </a:ext>
-            </a:extLst>
-          </p:cNvPr>
-          <p:cNvSpPr>
-            <a:spLocks xmlns:a="http://schemas.openxmlformats.org/drawingml/2006/main" noGrp="1"/>
-          </p:cNvSpPr>
-          <p:nvPr/>
-        </p:nvSpPr>
-        <p:spPr>
-          <a:xfrm xmlns:a="http://schemas.openxmlformats.org/drawingml/2006/main">
-            <a:off x="609600" y="2438400"/>
-            <a:ext cx="10820400" cy="628650"/>
+              <a:t>D2：只给百分比，没有分母和原始记录位置。</a:t>
+            </a:r>
+          </a:p>
+        </p:txBody>
+      </p:sp>
+      <p:sp>
+        <p:nvSpPr>
+          <p:cNvPr id="8" name="content-203">
+            <a:extLst xmlns:a="http://schemas.openxmlformats.org/drawingml/2006/main">
+              <a:ext uri="{FF2B5EF4-FFF2-40B4-BE49-F238E27FC236}">
+                <a16:creationId xmlns:a16="http://schemas.microsoft.com/office/drawing/2014/main" id="{50DA49D8-EEC1-4F97-AA82-F5A1E621CF66}"/>
+              </a:ext>
+            </a:extLst>
+          </p:cNvPr>
+          <p:cNvSpPr>
+            <a:spLocks xmlns:a="http://schemas.openxmlformats.org/drawingml/2006/main" noGrp="1"/>
+          </p:cNvSpPr>
+          <p:nvPr/>
+        </p:nvSpPr>
+        <p:spPr>
+          <a:xfrm xmlns:a="http://schemas.openxmlformats.org/drawingml/2006/main">
+            <a:off x="609600" y="2950845"/>
+            <a:ext cx="10972800" cy="432435"/>
           </a:xfrm>
           <a:prstGeom xmlns:a="http://schemas.openxmlformats.org/drawingml/2006/main" prst="rect">
             <a:avLst/>
@@ -12974,9 +11475,9 @@
                 <a:spcPct val="118000"/>
               </a:lnSpc>
               <a:buNone/>
-              <a:defRPr sz="3000" b="1">
-                <a:solidFill>
-                  <a:srgbClr val="C8161E"/>
+              <a:defRPr sz="2400" b="0">
+                <a:solidFill>
+                  <a:srgbClr val="27333D"/>
                 </a:solidFill>
                 <a:latin typeface="微软雅黑"/>
                 <a:ea typeface="微软雅黑"/>
@@ -12984,67 +11485,37 @@
               </a:defRPr>
             </a:pPr>
             <a:r>
-              <a:rPr sz="3000" b="1">
-                <a:solidFill>
-                  <a:srgbClr val="C8161E"/>
+              <a:rPr sz="2400" b="0">
+                <a:solidFill>
+                  <a:srgbClr val="27333D"/>
                 </a:solidFill>
                 <a:latin typeface="微软雅黑"/>
                 <a:ea typeface="微软雅黑"/>
                 <a:cs typeface="微软雅黑"/>
               </a:rPr>
-              <a:t>因此机制已证实，状态 stable。</a:t>
-            </a:r>
-          </a:p>
-        </p:txBody>
-      </p:sp>
-      <p:sp>
-        <p:nvSpPr>
-          <p:cNvPr id="9" name="below">
-            <a:extLst xmlns:a="http://schemas.openxmlformats.org/drawingml/2006/main">
-              <a:ext uri="{FF2B5EF4-FFF2-40B4-BE49-F238E27FC236}">
-                <a16:creationId xmlns:a16="http://schemas.microsoft.com/office/drawing/2014/main" id="{D1802B38-246A-4BB1-A136-A4DCC2A6580C}"/>
-              </a:ext>
-            </a:extLst>
-          </p:cNvPr>
-          <p:cNvSpPr>
-            <a:spLocks xmlns:a="http://schemas.openxmlformats.org/drawingml/2006/main" noGrp="1"/>
-          </p:cNvSpPr>
-          <p:nvPr/>
-        </p:nvSpPr>
-        <p:spPr>
-          <a:xfrm xmlns:a="http://schemas.openxmlformats.org/drawingml/2006/main">
-            <a:off x="609600" y="3381375"/>
-            <a:ext cx="10858500" cy="14288"/>
-          </a:xfrm>
-          <a:prstGeom xmlns:a="http://schemas.openxmlformats.org/drawingml/2006/main" prst="rect">
-            <a:avLst/>
-          </a:prstGeom>
-          <a:solidFill xmlns:a="http://schemas.openxmlformats.org/drawingml/2006/main">
-            <a:srgbClr val="CDD5DB"/>
-          </a:solidFill>
-          <a:ln xmlns:a="http://schemas.openxmlformats.org/drawingml/2006/main" w="0">
-            <a:noFill/>
-          </a:ln>
-        </p:spPr>
-      </p:sp>
-      <p:sp>
-        <p:nvSpPr>
-          <p:cNvPr id="10" name="question">
-            <a:extLst xmlns:a="http://schemas.openxmlformats.org/drawingml/2006/main">
-              <a:ext uri="{FF2B5EF4-FFF2-40B4-BE49-F238E27FC236}">
-                <a16:creationId xmlns:a16="http://schemas.microsoft.com/office/drawing/2014/main" id="{36CC2F9E-2A26-4C09-9F6C-84FACBA8316C}"/>
-              </a:ext>
-            </a:extLst>
-          </p:cNvPr>
-          <p:cNvSpPr>
-            <a:spLocks xmlns:a="http://schemas.openxmlformats.org/drawingml/2006/main" noGrp="1"/>
-          </p:cNvSpPr>
-          <p:nvPr/>
-        </p:nvSpPr>
-        <p:spPr>
-          <a:xfrm xmlns:a="http://schemas.openxmlformats.org/drawingml/2006/main">
-            <a:off x="609600" y="3714750"/>
-            <a:ext cx="10858500" cy="695325"/>
+              <a:t>图1：“组一/组二”，指标和范围不明。</a:t>
+            </a:r>
+          </a:p>
+        </p:txBody>
+      </p:sp>
+      <p:sp>
+        <p:nvSpPr>
+          <p:cNvPr id="9" name="content-204">
+            <a:extLst xmlns:a="http://schemas.openxmlformats.org/drawingml/2006/main">
+              <a:ext uri="{FF2B5EF4-FFF2-40B4-BE49-F238E27FC236}">
+                <a16:creationId xmlns:a16="http://schemas.microsoft.com/office/drawing/2014/main" id="{B1419711-54CD-4FFA-A60C-4C9AADC7B885}"/>
+              </a:ext>
+            </a:extLst>
+          </p:cNvPr>
+          <p:cNvSpPr>
+            <a:spLocks xmlns:a="http://schemas.openxmlformats.org/drawingml/2006/main" noGrp="1"/>
+          </p:cNvSpPr>
+          <p:nvPr/>
+        </p:nvSpPr>
+        <p:spPr>
+          <a:xfrm xmlns:a="http://schemas.openxmlformats.org/drawingml/2006/main">
+            <a:off x="609600" y="3640455"/>
+            <a:ext cx="10972800" cy="432435"/>
           </a:xfrm>
           <a:prstGeom xmlns:a="http://schemas.openxmlformats.org/drawingml/2006/main" prst="rect">
             <a:avLst/>
@@ -13063,7 +11534,7 @@
                 <a:spcPct val="118000"/>
               </a:lnSpc>
               <a:buNone/>
-              <a:defRPr sz="2600" b="0">
+              <a:defRPr sz="2400" b="0">
                 <a:solidFill>
                   <a:srgbClr val="1F4D78"/>
                 </a:solidFill>
@@ -13073,7 +11544,7 @@
               </a:defRPr>
             </a:pPr>
             <a:r>
-              <a:rPr sz="2600" b="0">
+              <a:rPr sz="2400" b="0">
                 <a:solidFill>
                   <a:srgbClr val="1F4D78"/>
                 </a:solidFill>
@@ -13081,152 +11552,7 @@
                 <a:ea typeface="微软雅黑"/>
                 <a:cs typeface="微软雅黑"/>
               </a:rPr>
-              <a:t>请标注：致命／重要／表达？依据在哪里？</a:t>
-            </a:r>
-          </a:p>
-        </p:txBody>
-      </p:sp>
-      <p:sp>
-        <p:nvSpPr>
-          <p:cNvPr id="11" name="record">
-            <a:extLst xmlns:a="http://schemas.openxmlformats.org/drawingml/2006/main">
-              <a:ext uri="{FF2B5EF4-FFF2-40B4-BE49-F238E27FC236}">
-                <a16:creationId xmlns:a16="http://schemas.microsoft.com/office/drawing/2014/main" id="{564C8493-CE7F-4B52-AB0F-09F932C6D8AA}"/>
-              </a:ext>
-            </a:extLst>
-          </p:cNvPr>
-          <p:cNvSpPr>
-            <a:spLocks xmlns:a="http://schemas.openxmlformats.org/drawingml/2006/main" noGrp="1"/>
-          </p:cNvSpPr>
-          <p:nvPr/>
-        </p:nvSpPr>
-        <p:spPr>
-          <a:xfrm xmlns:a="http://schemas.openxmlformats.org/drawingml/2006/main">
-            <a:off x="609600" y="4857750"/>
-            <a:ext cx="10858500" cy="1009650"/>
-          </a:xfrm>
-          <a:prstGeom xmlns:a="http://schemas.openxmlformats.org/drawingml/2006/main" prst="rect">
-            <a:avLst/>
-          </a:prstGeom>
-          <a:noFill xmlns:a="http://schemas.openxmlformats.org/drawingml/2006/main"/>
-          <a:ln xmlns:a="http://schemas.openxmlformats.org/drawingml/2006/main" w="0">
-            <a:noFill/>
-          </a:ln>
-        </p:spPr>
-        <p:txBody>
-          <a:bodyPr xmlns:a="http://schemas.openxmlformats.org/drawingml/2006/main" lIns="0" tIns="0" rIns="0" bIns="0" anchor="t"/>
-          <a:lstStyle xmlns:a="http://schemas.openxmlformats.org/drawingml/2006/main"/>
-          <a:p xmlns:a="http://schemas.openxmlformats.org/drawingml/2006/main">
-            <a:pPr algn="l">
-              <a:lnSpc>
-                <a:spcPct val="118000"/>
-              </a:lnSpc>
-              <a:buNone/>
-              <a:defRPr sz="2200" b="0">
-                <a:solidFill>
-                  <a:srgbClr val="27333D"/>
-                </a:solidFill>
-                <a:latin typeface="微软雅黑"/>
-                <a:ea typeface="微软雅黑"/>
-                <a:cs typeface="微软雅黑"/>
-              </a:defRPr>
-            </a:pPr>
-            <a:r>
-              <a:rPr sz="2200" b="0">
-                <a:solidFill>
-                  <a:srgbClr val="27333D"/>
-                </a:solidFill>
-                <a:latin typeface="微软雅黑"/>
-                <a:ea typeface="微软雅黑"/>
-                <a:cs typeface="微软雅黑"/>
-              </a:rPr>
-              <a:t>核验：同一批 20 篇 × 2 条件 × 3 次 = 120 次输出</a:t>
-            </a:r>
-          </a:p>
-          <a:p xmlns:a="http://schemas.openxmlformats.org/drawingml/2006/main">
-            <a:pPr algn="l">
-              <a:lnSpc>
-                <a:spcPct val="118000"/>
-              </a:lnSpc>
-              <a:buNone/>
-              <a:defRPr sz="2200" b="0">
-                <a:solidFill>
-                  <a:srgbClr val="27333D"/>
-                </a:solidFill>
-                <a:latin typeface="微软雅黑"/>
-                <a:ea typeface="微软雅黑"/>
-                <a:cs typeface="微软雅黑"/>
-              </a:defRPr>
-            </a:pPr>
-            <a:r>
-              <a:rPr sz="2200" b="0">
-                <a:solidFill>
-                  <a:srgbClr val="27333D"/>
-                </a:solidFill>
-                <a:latin typeface="微软雅黑"/>
-                <a:ea typeface="微软雅黑"/>
-                <a:cs typeface="微软雅黑"/>
-              </a:rPr>
-              <a:t>A1 / A2 / A3 尚未充分区分。</a:t>
-            </a:r>
-          </a:p>
-        </p:txBody>
-      </p:sp>
-      <p:sp>
-        <p:nvSpPr>
-          <p:cNvPr id="12" name="source">
-            <a:extLst xmlns:a="http://schemas.openxmlformats.org/drawingml/2006/main">
-              <a:ext uri="{FF2B5EF4-FFF2-40B4-BE49-F238E27FC236}">
-                <a16:creationId xmlns:a16="http://schemas.microsoft.com/office/drawing/2014/main" id="{F4E85E8B-AABE-44B8-8355-CB746068A01B}"/>
-              </a:ext>
-            </a:extLst>
-          </p:cNvPr>
-          <p:cNvSpPr>
-            <a:spLocks xmlns:a="http://schemas.openxmlformats.org/drawingml/2006/main" noGrp="1"/>
-          </p:cNvSpPr>
-          <p:nvPr/>
-        </p:nvSpPr>
-        <p:spPr>
-          <a:xfrm xmlns:a="http://schemas.openxmlformats.org/drawingml/2006/main">
-            <a:off x="609600" y="6067425"/>
-            <a:ext cx="10763250" cy="209550"/>
-          </a:xfrm>
-          <a:prstGeom xmlns:a="http://schemas.openxmlformats.org/drawingml/2006/main" prst="rect">
-            <a:avLst/>
-          </a:prstGeom>
-          <a:noFill xmlns:a="http://schemas.openxmlformats.org/drawingml/2006/main"/>
-          <a:ln xmlns:a="http://schemas.openxmlformats.org/drawingml/2006/main" w="0">
-            <a:noFill/>
-          </a:ln>
-        </p:spPr>
-        <p:txBody>
-          <a:bodyPr xmlns:a="http://schemas.openxmlformats.org/drawingml/2006/main" lIns="0" tIns="0" rIns="0" bIns="0" anchor="t"/>
-          <a:lstStyle xmlns:a="http://schemas.openxmlformats.org/drawingml/2006/main"/>
-          <a:p xmlns:a="http://schemas.openxmlformats.org/drawingml/2006/main">
-            <a:pPr algn="l">
-              <a:lnSpc>
-                <a:spcPct val="118000"/>
-              </a:lnSpc>
-              <a:buNone/>
-              <a:defRPr sz="1100" b="0">
-                <a:solidFill>
-                  <a:srgbClr val="66727D"/>
-                </a:solidFill>
-                <a:latin typeface="微软雅黑"/>
-                <a:ea typeface="微软雅黑"/>
-                <a:cs typeface="微软雅黑"/>
-              </a:defRPr>
-            </a:pPr>
-            <a:r>
-              <a:rPr sz="1100" b="0">
-                <a:solidFill>
-                  <a:srgbClr val="66727D"/>
-                </a:solidFill>
-                <a:latin typeface="微软雅黑"/>
-                <a:ea typeface="微软雅黑"/>
-                <a:cs typeface="微软雅黑"/>
-              </a:rPr>
-              <a:t>来源：本课讲义与课程评审模板；课程研究门规范 · 教学构造样例不冒充学生记录</a:t>
+              <a:t>先处理结论越界，再补追踪与图表说明。</a:t>
             </a:r>
           </a:p>
         </p:txBody>
@@ -14285,22 +12611,22 @@
       </p:sp>
       <p:sp>
         <p:nvSpPr>
-          <p:cNvPr id="6" name="fiction">
-            <a:extLst xmlns:a="http://schemas.openxmlformats.org/drawingml/2006/main">
-              <a:ext uri="{FF2B5EF4-FFF2-40B4-BE49-F238E27FC236}">
-                <a16:creationId xmlns:a16="http://schemas.microsoft.com/office/drawing/2014/main" id="{37DC5961-DDE8-4753-89CB-B2BF5AF7E309}"/>
-              </a:ext>
-            </a:extLst>
-          </p:cNvPr>
-          <p:cNvSpPr>
-            <a:spLocks xmlns:a="http://schemas.openxmlformats.org/drawingml/2006/main" noGrp="1"/>
-          </p:cNvSpPr>
-          <p:nvPr/>
-        </p:nvSpPr>
-        <p:spPr>
-          <a:xfrm xmlns:a="http://schemas.openxmlformats.org/drawingml/2006/main">
-            <a:off x="609600" y="885825"/>
-            <a:ext cx="10572750" cy="314325"/>
+          <p:cNvPr id="6" name="content-205">
+            <a:extLst xmlns:a="http://schemas.openxmlformats.org/drawingml/2006/main">
+              <a:ext uri="{FF2B5EF4-FFF2-40B4-BE49-F238E27FC236}">
+                <a16:creationId xmlns:a16="http://schemas.microsoft.com/office/drawing/2014/main" id="{2981A15C-69DF-427C-B0A7-0909342AD10E}"/>
+              </a:ext>
+            </a:extLst>
+          </p:cNvPr>
+          <p:cNvSpPr>
+            <a:spLocks xmlns:a="http://schemas.openxmlformats.org/drawingml/2006/main" noGrp="1"/>
+          </p:cNvSpPr>
+          <p:nvPr/>
+        </p:nvSpPr>
+        <p:spPr>
+          <a:xfrm xmlns:a="http://schemas.openxmlformats.org/drawingml/2006/main">
+            <a:off x="609600" y="1571625"/>
+            <a:ext cx="10972800" cy="432435"/>
           </a:xfrm>
           <a:prstGeom xmlns:a="http://schemas.openxmlformats.org/drawingml/2006/main" prst="rect">
             <a:avLst/>
@@ -14319,9 +12645,9 @@
                 <a:spcPct val="118000"/>
               </a:lnSpc>
               <a:buNone/>
-              <a:defRPr sz="1800" b="0">
-                <a:solidFill>
-                  <a:srgbClr val="A96510"/>
+              <a:defRPr sz="2400" b="0">
+                <a:solidFill>
+                  <a:srgbClr val="27333D"/>
                 </a:solidFill>
                 <a:latin typeface="微软雅黑"/>
                 <a:ea typeface="微软雅黑"/>
@@ -14329,67 +12655,37 @@
               </a:defRPr>
             </a:pPr>
             <a:r>
-              <a:rPr sz="1800" b="0">
-                <a:solidFill>
-                  <a:srgbClr val="A96510"/>
+              <a:rPr sz="2400" b="0">
+                <a:solidFill>
+                  <a:srgbClr val="27333D"/>
                 </a:solidFill>
                 <a:latin typeface="微软雅黑"/>
                 <a:ea typeface="微软雅黑"/>
                 <a:cs typeface="微软雅黑"/>
               </a:rPr>
-              <a:t>课程虚构稿件节选</a:t>
-            </a:r>
-          </a:p>
-        </p:txBody>
-      </p:sp>
-      <p:sp>
-        <p:nvSpPr>
-          <p:cNvPr id="7" name="manuscript-top">
-            <a:extLst xmlns:a="http://schemas.openxmlformats.org/drawingml/2006/main">
-              <a:ext uri="{FF2B5EF4-FFF2-40B4-BE49-F238E27FC236}">
-                <a16:creationId xmlns:a16="http://schemas.microsoft.com/office/drawing/2014/main" id="{FB46D986-2602-4885-8256-BD4F54C9885C}"/>
-              </a:ext>
-            </a:extLst>
-          </p:cNvPr>
-          <p:cNvSpPr>
-            <a:spLocks xmlns:a="http://schemas.openxmlformats.org/drawingml/2006/main" noGrp="1"/>
-          </p:cNvSpPr>
-          <p:nvPr/>
-        </p:nvSpPr>
-        <p:spPr>
-          <a:xfrm xmlns:a="http://schemas.openxmlformats.org/drawingml/2006/main">
-            <a:off x="609600" y="1495425"/>
-            <a:ext cx="5476875" cy="14288"/>
-          </a:xfrm>
-          <a:prstGeom xmlns:a="http://schemas.openxmlformats.org/drawingml/2006/main" prst="rect">
-            <a:avLst/>
-          </a:prstGeom>
-          <a:solidFill xmlns:a="http://schemas.openxmlformats.org/drawingml/2006/main">
-            <a:srgbClr val="1F4D78"/>
-          </a:solidFill>
-          <a:ln xmlns:a="http://schemas.openxmlformats.org/drawingml/2006/main" w="0">
-            <a:noFill/>
-          </a:ln>
-        </p:spPr>
-      </p:sp>
-      <p:sp>
-        <p:nvSpPr>
-          <p:cNvPr id="8" name="manuscript-file">
-            <a:extLst xmlns:a="http://schemas.openxmlformats.org/drawingml/2006/main">
-              <a:ext uri="{FF2B5EF4-FFF2-40B4-BE49-F238E27FC236}">
-                <a16:creationId xmlns:a16="http://schemas.microsoft.com/office/drawing/2014/main" id="{980CD958-5F0A-4B95-9E0E-100A4998C531}"/>
-              </a:ext>
-            </a:extLst>
-          </p:cNvPr>
-          <p:cNvSpPr>
-            <a:spLocks xmlns:a="http://schemas.openxmlformats.org/drawingml/2006/main" noGrp="1"/>
-          </p:cNvSpPr>
-          <p:nvPr/>
-        </p:nvSpPr>
-        <p:spPr>
-          <a:xfrm xmlns:a="http://schemas.openxmlformats.org/drawingml/2006/main">
-            <a:off x="609600" y="1647825"/>
-            <a:ext cx="5476875" cy="333375"/>
+              <a:t>留下三条能执行的反馈：</a:t>
+            </a:r>
+          </a:p>
+        </p:txBody>
+      </p:sp>
+      <p:sp>
+        <p:nvSpPr>
+          <p:cNvPr id="7" name="content-206">
+            <a:extLst xmlns:a="http://schemas.openxmlformats.org/drawingml/2006/main">
+              <a:ext uri="{FF2B5EF4-FFF2-40B4-BE49-F238E27FC236}">
+                <a16:creationId xmlns:a16="http://schemas.microsoft.com/office/drawing/2014/main" id="{CDF84AC0-AEFB-482D-B4B6-F8F5A64BF34A}"/>
+              </a:ext>
+            </a:extLst>
+          </p:cNvPr>
+          <p:cNvSpPr>
+            <a:spLocks xmlns:a="http://schemas.openxmlformats.org/drawingml/2006/main" noGrp="1"/>
+          </p:cNvSpPr>
+          <p:nvPr/>
+        </p:nvSpPr>
+        <p:spPr>
+          <a:xfrm xmlns:a="http://schemas.openxmlformats.org/drawingml/2006/main">
+            <a:off x="609600" y="2261235"/>
+            <a:ext cx="10972800" cy="432435"/>
           </a:xfrm>
           <a:prstGeom xmlns:a="http://schemas.openxmlformats.org/drawingml/2006/main" prst="rect">
             <a:avLst/>
@@ -14408,47 +12704,47 @@
                 <a:spcPct val="118000"/>
               </a:lnSpc>
               <a:buNone/>
-              <a:defRPr sz="1800" b="0">
-                <a:solidFill>
-                  <a:srgbClr val="1F4D78"/>
-                </a:solidFill>
-                <a:latin typeface="Consolas"/>
-                <a:ea typeface="Consolas"/>
-                <a:cs typeface="Consolas"/>
+              <a:defRPr sz="2400" b="0">
+                <a:solidFill>
+                  <a:srgbClr val="27333D"/>
+                </a:solidFill>
+                <a:latin typeface="微软雅黑"/>
+                <a:ea typeface="微软雅黑"/>
+                <a:cs typeface="微软雅黑"/>
               </a:defRPr>
             </a:pPr>
             <a:r>
-              <a:rPr sz="1800" b="0">
-                <a:solidFill>
-                  <a:srgbClr val="1F4D78"/>
-                </a:solidFill>
-                <a:latin typeface="Consolas"/>
-                <a:ea typeface="Consolas"/>
-                <a:cs typeface="Consolas"/>
+              <a:rPr sz="2400" b="0">
+                <a:solidFill>
+                  <a:srgbClr val="27333D"/>
+                </a:solidFill>
+                <a:latin typeface="微软雅黑"/>
+                <a:ea typeface="微软雅黑"/>
+                <a:cs typeface="微软雅黑"/>
               </a:rPr>
-              <a:t>report.md · 结果段</a:t>
-            </a:r>
-          </a:p>
-        </p:txBody>
-      </p:sp>
-      <p:sp>
-        <p:nvSpPr>
-          <p:cNvPr id="9" name="manuscript-line0">
-            <a:extLst xmlns:a="http://schemas.openxmlformats.org/drawingml/2006/main">
-              <a:ext uri="{FF2B5EF4-FFF2-40B4-BE49-F238E27FC236}">
-                <a16:creationId xmlns:a16="http://schemas.microsoft.com/office/drawing/2014/main" id="{24FF1E95-CC99-41F4-948D-D88AF981783D}"/>
-              </a:ext>
-            </a:extLst>
-          </p:cNvPr>
-          <p:cNvSpPr>
-            <a:spLocks xmlns:a="http://schemas.openxmlformats.org/drawingml/2006/main" noGrp="1"/>
-          </p:cNvSpPr>
-          <p:nvPr/>
-        </p:nvSpPr>
-        <p:spPr>
-          <a:xfrm xmlns:a="http://schemas.openxmlformats.org/drawingml/2006/main">
-            <a:off x="723900" y="2181225"/>
-            <a:ext cx="5248275" cy="685800"/>
+              <a:t>最强处：证据在哪里？</a:t>
+            </a:r>
+          </a:p>
+        </p:txBody>
+      </p:sp>
+      <p:sp>
+        <p:nvSpPr>
+          <p:cNvPr id="8" name="content-207">
+            <a:extLst xmlns:a="http://schemas.openxmlformats.org/drawingml/2006/main">
+              <a:ext uri="{FF2B5EF4-FFF2-40B4-BE49-F238E27FC236}">
+                <a16:creationId xmlns:a16="http://schemas.microsoft.com/office/drawing/2014/main" id="{7B3FAC74-D72C-4FBA-B282-193BE92545E9}"/>
+              </a:ext>
+            </a:extLst>
+          </p:cNvPr>
+          <p:cNvSpPr>
+            <a:spLocks xmlns:a="http://schemas.openxmlformats.org/drawingml/2006/main" noGrp="1"/>
+          </p:cNvSpPr>
+          <p:nvPr/>
+        </p:nvSpPr>
+        <p:spPr>
+          <a:xfrm xmlns:a="http://schemas.openxmlformats.org/drawingml/2006/main">
+            <a:off x="609600" y="2950845"/>
+            <a:ext cx="10972800" cy="432435"/>
           </a:xfrm>
           <a:prstGeom xmlns:a="http://schemas.openxmlformats.org/drawingml/2006/main" prst="rect">
             <a:avLst/>
@@ -14467,7 +12763,7 @@
                 <a:spcPct val="118000"/>
               </a:lnSpc>
               <a:buNone/>
-              <a:defRPr sz="2200" b="0">
+              <a:defRPr sz="2400" b="0">
                 <a:solidFill>
                   <a:srgbClr val="27333D"/>
                 </a:solidFill>
@@ -14477,7 +12773,7 @@
               </a:defRPr>
             </a:pPr>
             <a:r>
-              <a:rPr sz="2200" b="0">
+              <a:rPr sz="2400" b="0">
                 <a:solidFill>
                   <a:srgbClr val="27333D"/>
                 </a:solidFill>
@@ -14485,29 +12781,29 @@
                 <a:ea typeface="微软雅黑"/>
                 <a:cs typeface="微软雅黑"/>
               </a:rPr>
-              <a:t>C1：阅读卡组遗漏率较低。</a:t>
-            </a:r>
-          </a:p>
-        </p:txBody>
-      </p:sp>
-      <p:sp>
-        <p:nvSpPr>
-          <p:cNvPr id="10" name="manuscript-line1">
-            <a:extLst xmlns:a="http://schemas.openxmlformats.org/drawingml/2006/main">
-              <a:ext uri="{FF2B5EF4-FFF2-40B4-BE49-F238E27FC236}">
-                <a16:creationId xmlns:a16="http://schemas.microsoft.com/office/drawing/2014/main" id="{1F66F735-8090-4EC5-8116-44A0BDE65EF1}"/>
-              </a:ext>
-            </a:extLst>
-          </p:cNvPr>
-          <p:cNvSpPr>
-            <a:spLocks xmlns:a="http://schemas.openxmlformats.org/drawingml/2006/main" noGrp="1"/>
-          </p:cNvSpPr>
-          <p:nvPr/>
-        </p:nvSpPr>
-        <p:spPr>
-          <a:xfrm xmlns:a="http://schemas.openxmlformats.org/drawingml/2006/main">
-            <a:off x="723900" y="2867025"/>
-            <a:ext cx="5248275" cy="685800"/>
+              <a:t>最大风险：会卡住哪条门条件？</a:t>
+            </a:r>
+          </a:p>
+        </p:txBody>
+      </p:sp>
+      <p:sp>
+        <p:nvSpPr>
+          <p:cNvPr id="9" name="content-208">
+            <a:extLst xmlns:a="http://schemas.openxmlformats.org/drawingml/2006/main">
+              <a:ext uri="{FF2B5EF4-FFF2-40B4-BE49-F238E27FC236}">
+                <a16:creationId xmlns:a16="http://schemas.microsoft.com/office/drawing/2014/main" id="{8081188F-56F5-41EC-8B85-A4821511359B}"/>
+              </a:ext>
+            </a:extLst>
+          </p:cNvPr>
+          <p:cNvSpPr>
+            <a:spLocks xmlns:a="http://schemas.openxmlformats.org/drawingml/2006/main" noGrp="1"/>
+          </p:cNvSpPr>
+          <p:nvPr/>
+        </p:nvSpPr>
+        <p:spPr>
+          <a:xfrm xmlns:a="http://schemas.openxmlformats.org/drawingml/2006/main">
+            <a:off x="609600" y="3640455"/>
+            <a:ext cx="10972800" cy="432435"/>
           </a:xfrm>
           <a:prstGeom xmlns:a="http://schemas.openxmlformats.org/drawingml/2006/main" prst="rect">
             <a:avLst/>
@@ -14526,7 +12822,7 @@
                 <a:spcPct val="118000"/>
               </a:lnSpc>
               <a:buNone/>
-              <a:defRPr sz="2200" b="0">
+              <a:defRPr sz="2400" b="0">
                 <a:solidFill>
                   <a:srgbClr val="27333D"/>
                 </a:solidFill>
@@ -14536,7 +12832,7 @@
               </a:defRPr>
             </a:pPr>
             <a:r>
-              <a:rPr sz="2200" b="0">
+              <a:rPr sz="2400" b="0">
                 <a:solidFill>
                   <a:srgbClr val="27333D"/>
                 </a:solidFill>
@@ -14544,29 +12840,29 @@
                 <a:ea typeface="微软雅黑"/>
                 <a:cs typeface="微软雅黑"/>
               </a:rPr>
-              <a:t>证据：评价报告 §2。</a:t>
-            </a:r>
-          </a:p>
-        </p:txBody>
-      </p:sp>
-      <p:sp>
-        <p:nvSpPr>
-          <p:cNvPr id="11" name="manuscript-line2">
-            <a:extLst xmlns:a="http://schemas.openxmlformats.org/drawingml/2006/main">
-              <a:ext uri="{FF2B5EF4-FFF2-40B4-BE49-F238E27FC236}">
-                <a16:creationId xmlns:a16="http://schemas.microsoft.com/office/drawing/2014/main" id="{11935DB6-70E6-4FCE-BDCE-24CD635B5765}"/>
-              </a:ext>
-            </a:extLst>
-          </p:cNvPr>
-          <p:cNvSpPr>
-            <a:spLocks xmlns:a="http://schemas.openxmlformats.org/drawingml/2006/main" noGrp="1"/>
-          </p:cNvSpPr>
-          <p:nvPr/>
-        </p:nvSpPr>
-        <p:spPr>
-          <a:xfrm xmlns:a="http://schemas.openxmlformats.org/drawingml/2006/main">
-            <a:off x="723900" y="3552825"/>
-            <a:ext cx="5248275" cy="685800"/>
+              <a:t>可执行建议：最小改动是什么？</a:t>
+            </a:r>
+          </a:p>
+        </p:txBody>
+      </p:sp>
+      <p:sp>
+        <p:nvSpPr>
+          <p:cNvPr id="10" name="content-209">
+            <a:extLst xmlns:a="http://schemas.openxmlformats.org/drawingml/2006/main">
+              <a:ext uri="{FF2B5EF4-FFF2-40B4-BE49-F238E27FC236}">
+                <a16:creationId xmlns:a16="http://schemas.microsoft.com/office/drawing/2014/main" id="{0732160F-3A9E-4858-BD0A-AB6DAF7FE562}"/>
+              </a:ext>
+            </a:extLst>
+          </p:cNvPr>
+          <p:cNvSpPr>
+            <a:spLocks xmlns:a="http://schemas.openxmlformats.org/drawingml/2006/main" noGrp="1"/>
+          </p:cNvSpPr>
+          <p:nvPr/>
+        </p:nvSpPr>
+        <p:spPr>
+          <a:xfrm xmlns:a="http://schemas.openxmlformats.org/drawingml/2006/main">
+            <a:off x="609600" y="4330065"/>
+            <a:ext cx="10972800" cy="432435"/>
           </a:xfrm>
           <a:prstGeom xmlns:a="http://schemas.openxmlformats.org/drawingml/2006/main" prst="rect">
             <a:avLst/>
@@ -14585,7 +12881,7 @@
                 <a:spcPct val="118000"/>
               </a:lnSpc>
               <a:buNone/>
-              <a:defRPr sz="2200" b="0">
+              <a:defRPr sz="2400" b="0">
                 <a:solidFill>
                   <a:srgbClr val="27333D"/>
                 </a:solidFill>
@@ -14595,7 +12891,7 @@
               </a:defRPr>
             </a:pPr>
             <a:r>
-              <a:rPr sz="2200" b="0">
+              <a:rPr sz="2400" b="0">
                 <a:solidFill>
                   <a:srgbClr val="27333D"/>
                 </a:solidFill>
@@ -14603,29 +12899,29 @@
                 <a:ea typeface="微软雅黑"/>
                 <a:cs typeface="微软雅黑"/>
               </a:rPr>
-              <a:t>状态：支持（待验证）。</a:t>
-            </a:r>
-          </a:p>
-        </p:txBody>
-      </p:sp>
-      <p:sp>
-        <p:nvSpPr>
-          <p:cNvPr id="12" name="manuscript-line3">
-            <a:extLst xmlns:a="http://schemas.openxmlformats.org/drawingml/2006/main">
-              <a:ext uri="{FF2B5EF4-FFF2-40B4-BE49-F238E27FC236}">
-                <a16:creationId xmlns:a16="http://schemas.microsoft.com/office/drawing/2014/main" id="{5DA59B69-0131-4BEA-8441-31F13D930E44}"/>
-              </a:ext>
-            </a:extLst>
-          </p:cNvPr>
-          <p:cNvSpPr>
-            <a:spLocks xmlns:a="http://schemas.openxmlformats.org/drawingml/2006/main" noGrp="1"/>
-          </p:cNvSpPr>
-          <p:nvPr/>
-        </p:nvSpPr>
-        <p:spPr>
-          <a:xfrm xmlns:a="http://schemas.openxmlformats.org/drawingml/2006/main">
-            <a:off x="723900" y="4238625"/>
-            <a:ext cx="5248275" cy="685800"/>
+              <a:t>指向具体段落、表、证据项或运行记录。</a:t>
+            </a:r>
+          </a:p>
+        </p:txBody>
+      </p:sp>
+      <p:sp>
+        <p:nvSpPr>
+          <p:cNvPr id="11" name="content-210">
+            <a:extLst xmlns:a="http://schemas.openxmlformats.org/drawingml/2006/main">
+              <a:ext uri="{FF2B5EF4-FFF2-40B4-BE49-F238E27FC236}">
+                <a16:creationId xmlns:a16="http://schemas.microsoft.com/office/drawing/2014/main" id="{75AD6FB3-5992-4E33-BBD6-796B2425D72D}"/>
+              </a:ext>
+            </a:extLst>
+          </p:cNvPr>
+          <p:cNvSpPr>
+            <a:spLocks xmlns:a="http://schemas.openxmlformats.org/drawingml/2006/main" noGrp="1"/>
+          </p:cNvSpPr>
+          <p:nvPr/>
+        </p:nvSpPr>
+        <p:spPr>
+          <a:xfrm xmlns:a="http://schemas.openxmlformats.org/drawingml/2006/main">
+            <a:off x="609600" y="5019675"/>
+            <a:ext cx="10972800" cy="432435"/>
           </a:xfrm>
           <a:prstGeom xmlns:a="http://schemas.openxmlformats.org/drawingml/2006/main" prst="rect">
             <a:avLst/>
@@ -14644,9 +12940,9 @@
                 <a:spcPct val="118000"/>
               </a:lnSpc>
               <a:buNone/>
-              <a:defRPr sz="2200" b="0">
-                <a:solidFill>
-                  <a:srgbClr val="27333D"/>
+              <a:defRPr sz="2400" b="0">
+                <a:solidFill>
+                  <a:srgbClr val="1F4D78"/>
                 </a:solidFill>
                 <a:latin typeface="微软雅黑"/>
                 <a:ea typeface="微软雅黑"/>
@@ -14654,487 +12950,15 @@
               </a:defRPr>
             </a:pPr>
             <a:r>
-              <a:rPr sz="2200" b="0">
-                <a:solidFill>
-                  <a:srgbClr val="27333D"/>
+              <a:rPr sz="2400" b="0">
+                <a:solidFill>
+                  <a:srgbClr val="1F4D78"/>
                 </a:solidFill>
                 <a:latin typeface="微软雅黑"/>
                 <a:ea typeface="微软雅黑"/>
                 <a:cs typeface="微软雅黑"/>
               </a:rPr>
-              <a:t>边界：A1/A2/A3 尚未区分。</a:t>
-            </a:r>
-          </a:p>
-        </p:txBody>
-      </p:sp>
-      <p:sp>
-        <p:nvSpPr>
-          <p:cNvPr id="13" name="q-label0">
-            <a:extLst xmlns:a="http://schemas.openxmlformats.org/drawingml/2006/main">
-              <a:ext uri="{FF2B5EF4-FFF2-40B4-BE49-F238E27FC236}">
-                <a16:creationId xmlns:a16="http://schemas.microsoft.com/office/drawing/2014/main" id="{F18600BB-A7AE-46BB-AC73-0D98FFF89C45}"/>
-              </a:ext>
-            </a:extLst>
-          </p:cNvPr>
-          <p:cNvSpPr>
-            <a:spLocks xmlns:a="http://schemas.openxmlformats.org/drawingml/2006/main" noGrp="1"/>
-          </p:cNvSpPr>
-          <p:nvPr/>
-        </p:nvSpPr>
-        <p:spPr>
-          <a:xfrm xmlns:a="http://schemas.openxmlformats.org/drawingml/2006/main">
-            <a:off x="6934200" y="1600200"/>
-            <a:ext cx="4572000" cy="428625"/>
-          </a:xfrm>
-          <a:prstGeom xmlns:a="http://schemas.openxmlformats.org/drawingml/2006/main" prst="rect">
-            <a:avLst/>
-          </a:prstGeom>
-          <a:noFill xmlns:a="http://schemas.openxmlformats.org/drawingml/2006/main"/>
-          <a:ln xmlns:a="http://schemas.openxmlformats.org/drawingml/2006/main" w="0">
-            <a:noFill/>
-          </a:ln>
-        </p:spPr>
-        <p:txBody>
-          <a:bodyPr xmlns:a="http://schemas.openxmlformats.org/drawingml/2006/main" lIns="0" tIns="0" rIns="0" bIns="0" anchor="t"/>
-          <a:lstStyle xmlns:a="http://schemas.openxmlformats.org/drawingml/2006/main"/>
-          <a:p xmlns:a="http://schemas.openxmlformats.org/drawingml/2006/main">
-            <a:pPr algn="l">
-              <a:lnSpc>
-                <a:spcPct val="118000"/>
-              </a:lnSpc>
-              <a:buNone/>
-              <a:defRPr sz="2200" b="1">
-                <a:solidFill>
-                  <a:srgbClr val="1F4D78"/>
-                </a:solidFill>
-                <a:latin typeface="微软雅黑"/>
-                <a:ea typeface="微软雅黑"/>
-                <a:cs typeface="微软雅黑"/>
-              </a:defRPr>
-            </a:pPr>
-            <a:r>
-              <a:rPr sz="2200" b="1">
-                <a:solidFill>
-                  <a:srgbClr val="1F4D78"/>
-                </a:solidFill>
-                <a:latin typeface="微软雅黑"/>
-                <a:ea typeface="微软雅黑"/>
-                <a:cs typeface="微软雅黑"/>
-              </a:rPr>
-              <a:t>最强处</a:t>
-            </a:r>
-          </a:p>
-        </p:txBody>
-      </p:sp>
-      <p:sp>
-        <p:nvSpPr>
-          <p:cNvPr id="14" name="q-value0">
-            <a:extLst xmlns:a="http://schemas.openxmlformats.org/drawingml/2006/main">
-              <a:ext uri="{FF2B5EF4-FFF2-40B4-BE49-F238E27FC236}">
-                <a16:creationId xmlns:a16="http://schemas.microsoft.com/office/drawing/2014/main" id="{5686028B-4B80-4C47-9824-A895391AAD88}"/>
-              </a:ext>
-            </a:extLst>
-          </p:cNvPr>
-          <p:cNvSpPr>
-            <a:spLocks xmlns:a="http://schemas.openxmlformats.org/drawingml/2006/main" noGrp="1"/>
-          </p:cNvSpPr>
-          <p:nvPr/>
-        </p:nvSpPr>
-        <p:spPr>
-          <a:xfrm xmlns:a="http://schemas.openxmlformats.org/drawingml/2006/main">
-            <a:off x="6934200" y="2085975"/>
-            <a:ext cx="4572000" cy="685800"/>
-          </a:xfrm>
-          <a:prstGeom xmlns:a="http://schemas.openxmlformats.org/drawingml/2006/main" prst="rect">
-            <a:avLst/>
-          </a:prstGeom>
-          <a:noFill xmlns:a="http://schemas.openxmlformats.org/drawingml/2006/main"/>
-          <a:ln xmlns:a="http://schemas.openxmlformats.org/drawingml/2006/main" w="0">
-            <a:noFill/>
-          </a:ln>
-        </p:spPr>
-        <p:txBody>
-          <a:bodyPr xmlns:a="http://schemas.openxmlformats.org/drawingml/2006/main" lIns="0" tIns="0" rIns="0" bIns="0" anchor="t"/>
-          <a:lstStyle xmlns:a="http://schemas.openxmlformats.org/drawingml/2006/main"/>
-          <a:p xmlns:a="http://schemas.openxmlformats.org/drawingml/2006/main">
-            <a:pPr algn="l">
-              <a:lnSpc>
-                <a:spcPct val="118000"/>
-              </a:lnSpc>
-              <a:buNone/>
-              <a:defRPr sz="2400" b="0">
-                <a:solidFill>
-                  <a:srgbClr val="27333D"/>
-                </a:solidFill>
-                <a:latin typeface="微软雅黑"/>
-                <a:ea typeface="微软雅黑"/>
-                <a:cs typeface="微软雅黑"/>
-              </a:defRPr>
-            </a:pPr>
-            <a:r>
-              <a:rPr sz="2400" b="0">
-                <a:solidFill>
-                  <a:srgbClr val="27333D"/>
-                </a:solidFill>
-                <a:latin typeface="微软雅黑"/>
-                <a:ea typeface="微软雅黑"/>
-                <a:cs typeface="微软雅黑"/>
-              </a:rPr>
-              <a:t>证据在哪里？</a:t>
-            </a:r>
-          </a:p>
-        </p:txBody>
-      </p:sp>
-      <p:sp>
-        <p:nvSpPr>
-          <p:cNvPr id="15" name="q-label1">
-            <a:extLst xmlns:a="http://schemas.openxmlformats.org/drawingml/2006/main">
-              <a:ext uri="{FF2B5EF4-FFF2-40B4-BE49-F238E27FC236}">
-                <a16:creationId xmlns:a16="http://schemas.microsoft.com/office/drawing/2014/main" id="{5CF0F910-AB3A-423F-A641-9C06FF1883E3}"/>
-              </a:ext>
-            </a:extLst>
-          </p:cNvPr>
-          <p:cNvSpPr>
-            <a:spLocks xmlns:a="http://schemas.openxmlformats.org/drawingml/2006/main" noGrp="1"/>
-          </p:cNvSpPr>
-          <p:nvPr/>
-        </p:nvSpPr>
-        <p:spPr>
-          <a:xfrm xmlns:a="http://schemas.openxmlformats.org/drawingml/2006/main">
-            <a:off x="6934200" y="2914650"/>
-            <a:ext cx="4572000" cy="428625"/>
-          </a:xfrm>
-          <a:prstGeom xmlns:a="http://schemas.openxmlformats.org/drawingml/2006/main" prst="rect">
-            <a:avLst/>
-          </a:prstGeom>
-          <a:noFill xmlns:a="http://schemas.openxmlformats.org/drawingml/2006/main"/>
-          <a:ln xmlns:a="http://schemas.openxmlformats.org/drawingml/2006/main" w="0">
-            <a:noFill/>
-          </a:ln>
-        </p:spPr>
-        <p:txBody>
-          <a:bodyPr xmlns:a="http://schemas.openxmlformats.org/drawingml/2006/main" lIns="0" tIns="0" rIns="0" bIns="0" anchor="t"/>
-          <a:lstStyle xmlns:a="http://schemas.openxmlformats.org/drawingml/2006/main"/>
-          <a:p xmlns:a="http://schemas.openxmlformats.org/drawingml/2006/main">
-            <a:pPr algn="l">
-              <a:lnSpc>
-                <a:spcPct val="118000"/>
-              </a:lnSpc>
-              <a:buNone/>
-              <a:defRPr sz="2200" b="1">
-                <a:solidFill>
-                  <a:srgbClr val="1F4D78"/>
-                </a:solidFill>
-                <a:latin typeface="微软雅黑"/>
-                <a:ea typeface="微软雅黑"/>
-                <a:cs typeface="微软雅黑"/>
-              </a:defRPr>
-            </a:pPr>
-            <a:r>
-              <a:rPr sz="2200" b="1">
-                <a:solidFill>
-                  <a:srgbClr val="1F4D78"/>
-                </a:solidFill>
-                <a:latin typeface="微软雅黑"/>
-                <a:ea typeface="微软雅黑"/>
-                <a:cs typeface="微软雅黑"/>
-              </a:rPr>
-              <a:t>最大风险</a:t>
-            </a:r>
-          </a:p>
-        </p:txBody>
-      </p:sp>
-      <p:sp>
-        <p:nvSpPr>
-          <p:cNvPr id="16" name="q-value1">
-            <a:extLst xmlns:a="http://schemas.openxmlformats.org/drawingml/2006/main">
-              <a:ext uri="{FF2B5EF4-FFF2-40B4-BE49-F238E27FC236}">
-                <a16:creationId xmlns:a16="http://schemas.microsoft.com/office/drawing/2014/main" id="{4EE840D7-0955-4238-9A9B-E0B667035FE1}"/>
-              </a:ext>
-            </a:extLst>
-          </p:cNvPr>
-          <p:cNvSpPr>
-            <a:spLocks xmlns:a="http://schemas.openxmlformats.org/drawingml/2006/main" noGrp="1"/>
-          </p:cNvSpPr>
-          <p:nvPr/>
-        </p:nvSpPr>
-        <p:spPr>
-          <a:xfrm xmlns:a="http://schemas.openxmlformats.org/drawingml/2006/main">
-            <a:off x="6934200" y="3400425"/>
-            <a:ext cx="4572000" cy="685800"/>
-          </a:xfrm>
-          <a:prstGeom xmlns:a="http://schemas.openxmlformats.org/drawingml/2006/main" prst="rect">
-            <a:avLst/>
-          </a:prstGeom>
-          <a:noFill xmlns:a="http://schemas.openxmlformats.org/drawingml/2006/main"/>
-          <a:ln xmlns:a="http://schemas.openxmlformats.org/drawingml/2006/main" w="0">
-            <a:noFill/>
-          </a:ln>
-        </p:spPr>
-        <p:txBody>
-          <a:bodyPr xmlns:a="http://schemas.openxmlformats.org/drawingml/2006/main" lIns="0" tIns="0" rIns="0" bIns="0" anchor="t"/>
-          <a:lstStyle xmlns:a="http://schemas.openxmlformats.org/drawingml/2006/main"/>
-          <a:p xmlns:a="http://schemas.openxmlformats.org/drawingml/2006/main">
-            <a:pPr algn="l">
-              <a:lnSpc>
-                <a:spcPct val="118000"/>
-              </a:lnSpc>
-              <a:buNone/>
-              <a:defRPr sz="2400" b="0">
-                <a:solidFill>
-                  <a:srgbClr val="27333D"/>
-                </a:solidFill>
-                <a:latin typeface="微软雅黑"/>
-                <a:ea typeface="微软雅黑"/>
-                <a:cs typeface="微软雅黑"/>
-              </a:defRPr>
-            </a:pPr>
-            <a:r>
-              <a:rPr sz="2400" b="0">
-                <a:solidFill>
-                  <a:srgbClr val="27333D"/>
-                </a:solidFill>
-                <a:latin typeface="微软雅黑"/>
-                <a:ea typeface="微软雅黑"/>
-                <a:cs typeface="微软雅黑"/>
-              </a:rPr>
-              <a:t>会卡住哪条门条件？</a:t>
-            </a:r>
-          </a:p>
-        </p:txBody>
-      </p:sp>
-      <p:sp>
-        <p:nvSpPr>
-          <p:cNvPr id="17" name="q-label2">
-            <a:extLst xmlns:a="http://schemas.openxmlformats.org/drawingml/2006/main">
-              <a:ext uri="{FF2B5EF4-FFF2-40B4-BE49-F238E27FC236}">
-                <a16:creationId xmlns:a16="http://schemas.microsoft.com/office/drawing/2014/main" id="{E0E19A4C-2528-4BBE-B9B4-D2EB573C7C90}"/>
-              </a:ext>
-            </a:extLst>
-          </p:cNvPr>
-          <p:cNvSpPr>
-            <a:spLocks xmlns:a="http://schemas.openxmlformats.org/drawingml/2006/main" noGrp="1"/>
-          </p:cNvSpPr>
-          <p:nvPr/>
-        </p:nvSpPr>
-        <p:spPr>
-          <a:xfrm xmlns:a="http://schemas.openxmlformats.org/drawingml/2006/main">
-            <a:off x="6934200" y="4229100"/>
-            <a:ext cx="4572000" cy="428625"/>
-          </a:xfrm>
-          <a:prstGeom xmlns:a="http://schemas.openxmlformats.org/drawingml/2006/main" prst="rect">
-            <a:avLst/>
-          </a:prstGeom>
-          <a:noFill xmlns:a="http://schemas.openxmlformats.org/drawingml/2006/main"/>
-          <a:ln xmlns:a="http://schemas.openxmlformats.org/drawingml/2006/main" w="0">
-            <a:noFill/>
-          </a:ln>
-        </p:spPr>
-        <p:txBody>
-          <a:bodyPr xmlns:a="http://schemas.openxmlformats.org/drawingml/2006/main" lIns="0" tIns="0" rIns="0" bIns="0" anchor="t"/>
-          <a:lstStyle xmlns:a="http://schemas.openxmlformats.org/drawingml/2006/main"/>
-          <a:p xmlns:a="http://schemas.openxmlformats.org/drawingml/2006/main">
-            <a:pPr algn="l">
-              <a:lnSpc>
-                <a:spcPct val="118000"/>
-              </a:lnSpc>
-              <a:buNone/>
-              <a:defRPr sz="2200" b="1">
-                <a:solidFill>
-                  <a:srgbClr val="1F4D78"/>
-                </a:solidFill>
-                <a:latin typeface="微软雅黑"/>
-                <a:ea typeface="微软雅黑"/>
-                <a:cs typeface="微软雅黑"/>
-              </a:defRPr>
-            </a:pPr>
-            <a:r>
-              <a:rPr sz="2200" b="1">
-                <a:solidFill>
-                  <a:srgbClr val="1F4D78"/>
-                </a:solidFill>
-                <a:latin typeface="微软雅黑"/>
-                <a:ea typeface="微软雅黑"/>
-                <a:cs typeface="微软雅黑"/>
-              </a:rPr>
-              <a:t>可执行建议</a:t>
-            </a:r>
-          </a:p>
-        </p:txBody>
-      </p:sp>
-      <p:sp>
-        <p:nvSpPr>
-          <p:cNvPr id="18" name="q-value2">
-            <a:extLst xmlns:a="http://schemas.openxmlformats.org/drawingml/2006/main">
-              <a:ext uri="{FF2B5EF4-FFF2-40B4-BE49-F238E27FC236}">
-                <a16:creationId xmlns:a16="http://schemas.microsoft.com/office/drawing/2014/main" id="{8F21577B-577E-4F7E-AF85-662C80BFF52F}"/>
-              </a:ext>
-            </a:extLst>
-          </p:cNvPr>
-          <p:cNvSpPr>
-            <a:spLocks xmlns:a="http://schemas.openxmlformats.org/drawingml/2006/main" noGrp="1"/>
-          </p:cNvSpPr>
-          <p:nvPr/>
-        </p:nvSpPr>
-        <p:spPr>
-          <a:xfrm xmlns:a="http://schemas.openxmlformats.org/drawingml/2006/main">
-            <a:off x="6934200" y="4714875"/>
-            <a:ext cx="4572000" cy="685800"/>
-          </a:xfrm>
-          <a:prstGeom xmlns:a="http://schemas.openxmlformats.org/drawingml/2006/main" prst="rect">
-            <a:avLst/>
-          </a:prstGeom>
-          <a:noFill xmlns:a="http://schemas.openxmlformats.org/drawingml/2006/main"/>
-          <a:ln xmlns:a="http://schemas.openxmlformats.org/drawingml/2006/main" w="0">
-            <a:noFill/>
-          </a:ln>
-        </p:spPr>
-        <p:txBody>
-          <a:bodyPr xmlns:a="http://schemas.openxmlformats.org/drawingml/2006/main" lIns="0" tIns="0" rIns="0" bIns="0" anchor="t"/>
-          <a:lstStyle xmlns:a="http://schemas.openxmlformats.org/drawingml/2006/main"/>
-          <a:p xmlns:a="http://schemas.openxmlformats.org/drawingml/2006/main">
-            <a:pPr algn="l">
-              <a:lnSpc>
-                <a:spcPct val="118000"/>
-              </a:lnSpc>
-              <a:buNone/>
-              <a:defRPr sz="2400" b="0">
-                <a:solidFill>
-                  <a:srgbClr val="27333D"/>
-                </a:solidFill>
-                <a:latin typeface="微软雅黑"/>
-                <a:ea typeface="微软雅黑"/>
-                <a:cs typeface="微软雅黑"/>
-              </a:defRPr>
-            </a:pPr>
-            <a:r>
-              <a:rPr sz="2400" b="0">
-                <a:solidFill>
-                  <a:srgbClr val="27333D"/>
-                </a:solidFill>
-                <a:latin typeface="微软雅黑"/>
-                <a:ea typeface="微软雅黑"/>
-                <a:cs typeface="微软雅黑"/>
-              </a:rPr>
-              <a:t>最小改动是什么？</a:t>
-            </a:r>
-          </a:p>
-        </p:txBody>
-      </p:sp>
-      <p:sp>
-        <p:nvSpPr>
-          <p:cNvPr id="19" name="where">
-            <a:extLst xmlns:a="http://schemas.openxmlformats.org/drawingml/2006/main">
-              <a:ext uri="{FF2B5EF4-FFF2-40B4-BE49-F238E27FC236}">
-                <a16:creationId xmlns:a16="http://schemas.microsoft.com/office/drawing/2014/main" id="{65C906DC-CD30-4B05-A0F3-ECA3C7A19F85}"/>
-              </a:ext>
-            </a:extLst>
-          </p:cNvPr>
-          <p:cNvSpPr>
-            <a:spLocks xmlns:a="http://schemas.openxmlformats.org/drawingml/2006/main" noGrp="1"/>
-          </p:cNvSpPr>
-          <p:nvPr/>
-        </p:nvSpPr>
-        <p:spPr>
-          <a:xfrm xmlns:a="http://schemas.openxmlformats.org/drawingml/2006/main">
-            <a:off x="609600" y="5705475"/>
-            <a:ext cx="10858500" cy="381000"/>
-          </a:xfrm>
-          <a:prstGeom xmlns:a="http://schemas.openxmlformats.org/drawingml/2006/main" prst="rect">
-            <a:avLst/>
-          </a:prstGeom>
-          <a:noFill xmlns:a="http://schemas.openxmlformats.org/drawingml/2006/main"/>
-          <a:ln xmlns:a="http://schemas.openxmlformats.org/drawingml/2006/main" w="0">
-            <a:noFill/>
-          </a:ln>
-        </p:spPr>
-        <p:txBody>
-          <a:bodyPr xmlns:a="http://schemas.openxmlformats.org/drawingml/2006/main" lIns="0" tIns="0" rIns="0" bIns="0" anchor="t"/>
-          <a:lstStyle xmlns:a="http://schemas.openxmlformats.org/drawingml/2006/main"/>
-          <a:p xmlns:a="http://schemas.openxmlformats.org/drawingml/2006/main">
-            <a:pPr algn="l">
-              <a:lnSpc>
-                <a:spcPct val="118000"/>
-              </a:lnSpc>
-              <a:buNone/>
-              <a:defRPr sz="1800" b="0">
-                <a:solidFill>
-                  <a:srgbClr val="27333D"/>
-                </a:solidFill>
-                <a:latin typeface="微软雅黑"/>
-                <a:ea typeface="微软雅黑"/>
-                <a:cs typeface="微软雅黑"/>
-              </a:defRPr>
-            </a:pPr>
-            <a:r>
-              <a:rPr sz="1800" b="0">
-                <a:solidFill>
-                  <a:srgbClr val="27333D"/>
-                </a:solidFill>
-                <a:latin typeface="微软雅黑"/>
-                <a:ea typeface="微软雅黑"/>
-                <a:cs typeface="微软雅黑"/>
-              </a:rPr>
-              <a:t>所有意见必须指出具体段落、表、证据项或运行记录。</a:t>
-            </a:r>
-          </a:p>
-        </p:txBody>
-      </p:sp>
-      <p:sp>
-        <p:nvSpPr>
-          <p:cNvPr id="20" name="source">
-            <a:extLst xmlns:a="http://schemas.openxmlformats.org/drawingml/2006/main">
-              <a:ext uri="{FF2B5EF4-FFF2-40B4-BE49-F238E27FC236}">
-                <a16:creationId xmlns:a16="http://schemas.microsoft.com/office/drawing/2014/main" id="{4D28F0BF-78B8-4DED-A821-AD7D7D2A690B}"/>
-              </a:ext>
-            </a:extLst>
-          </p:cNvPr>
-          <p:cNvSpPr>
-            <a:spLocks xmlns:a="http://schemas.openxmlformats.org/drawingml/2006/main" noGrp="1"/>
-          </p:cNvSpPr>
-          <p:nvPr/>
-        </p:nvSpPr>
-        <p:spPr>
-          <a:xfrm xmlns:a="http://schemas.openxmlformats.org/drawingml/2006/main">
-            <a:off x="609600" y="6067425"/>
-            <a:ext cx="10763250" cy="209550"/>
-          </a:xfrm>
-          <a:prstGeom xmlns:a="http://schemas.openxmlformats.org/drawingml/2006/main" prst="rect">
-            <a:avLst/>
-          </a:prstGeom>
-          <a:noFill xmlns:a="http://schemas.openxmlformats.org/drawingml/2006/main"/>
-          <a:ln xmlns:a="http://schemas.openxmlformats.org/drawingml/2006/main" w="0">
-            <a:noFill/>
-          </a:ln>
-        </p:spPr>
-        <p:txBody>
-          <a:bodyPr xmlns:a="http://schemas.openxmlformats.org/drawingml/2006/main" lIns="0" tIns="0" rIns="0" bIns="0" anchor="t"/>
-          <a:lstStyle xmlns:a="http://schemas.openxmlformats.org/drawingml/2006/main"/>
-          <a:p xmlns:a="http://schemas.openxmlformats.org/drawingml/2006/main">
-            <a:pPr algn="l">
-              <a:lnSpc>
-                <a:spcPct val="118000"/>
-              </a:lnSpc>
-              <a:buNone/>
-              <a:defRPr sz="1100" b="0">
-                <a:solidFill>
-                  <a:srgbClr val="66727D"/>
-                </a:solidFill>
-                <a:latin typeface="微软雅黑"/>
-                <a:ea typeface="微软雅黑"/>
-                <a:cs typeface="微软雅黑"/>
-              </a:defRPr>
-            </a:pPr>
-            <a:r>
-              <a:rPr sz="1100" b="0">
-                <a:solidFill>
-                  <a:srgbClr val="66727D"/>
-                </a:solidFill>
-                <a:latin typeface="微软雅黑"/>
-                <a:ea typeface="微软雅黑"/>
-                <a:cs typeface="微软雅黑"/>
-              </a:rPr>
-              <a:t>Smith (1990), The Task of the Referee, Computer 23(4):65–71 · 本课五维 rubric 为课程改编</a:t>
+              <a:t>本例核对点：Q1 包内一致；H1/A2 未决；质量与范围仍有缺口。</a:t>
             </a:r>
           </a:p>
         </p:txBody>
@@ -17258,22 +15082,22 @@
       </p:sp>
       <p:sp>
         <p:nvSpPr>
-          <p:cNvPr id="6" name="fiction">
-            <a:extLst xmlns:a="http://schemas.openxmlformats.org/drawingml/2006/main">
-              <a:ext uri="{FF2B5EF4-FFF2-40B4-BE49-F238E27FC236}">
-                <a16:creationId xmlns:a16="http://schemas.microsoft.com/office/drawing/2014/main" id="{EDAC4521-BB52-4885-820D-A1DAC4E49470}"/>
-              </a:ext>
-            </a:extLst>
-          </p:cNvPr>
-          <p:cNvSpPr>
-            <a:spLocks xmlns:a="http://schemas.openxmlformats.org/drawingml/2006/main" noGrp="1"/>
-          </p:cNvSpPr>
-          <p:nvPr/>
-        </p:nvSpPr>
-        <p:spPr>
-          <a:xfrm xmlns:a="http://schemas.openxmlformats.org/drawingml/2006/main">
-            <a:off x="609600" y="885825"/>
-            <a:ext cx="10572750" cy="314325"/>
+          <p:cNvPr id="6" name="content-211">
+            <a:extLst xmlns:a="http://schemas.openxmlformats.org/drawingml/2006/main">
+              <a:ext uri="{FF2B5EF4-FFF2-40B4-BE49-F238E27FC236}">
+                <a16:creationId xmlns:a16="http://schemas.microsoft.com/office/drawing/2014/main" id="{AC09D240-4C4E-40CA-80BF-A72C3513C201}"/>
+              </a:ext>
+            </a:extLst>
+          </p:cNvPr>
+          <p:cNvSpPr>
+            <a:spLocks xmlns:a="http://schemas.openxmlformats.org/drawingml/2006/main" noGrp="1"/>
+          </p:cNvSpPr>
+          <p:nvPr/>
+        </p:nvSpPr>
+        <p:spPr>
+          <a:xfrm xmlns:a="http://schemas.openxmlformats.org/drawingml/2006/main">
+            <a:off x="609600" y="1571625"/>
+            <a:ext cx="10972800" cy="432435"/>
           </a:xfrm>
           <a:prstGeom xmlns:a="http://schemas.openxmlformats.org/drawingml/2006/main" prst="rect">
             <a:avLst/>
@@ -17292,9 +15116,9 @@
                 <a:spcPct val="118000"/>
               </a:lnSpc>
               <a:buNone/>
-              <a:defRPr sz="1800" b="0">
-                <a:solidFill>
-                  <a:srgbClr val="A96510"/>
+              <a:defRPr sz="2400" b="0">
+                <a:solidFill>
+                  <a:srgbClr val="27333D"/>
                 </a:solidFill>
                 <a:latin typeface="微软雅黑"/>
                 <a:ea typeface="微软雅黑"/>
@@ -17302,9 +15126,9 @@
               </a:defRPr>
             </a:pPr>
             <a:r>
-              <a:rPr sz="1800" b="0">
-                <a:solidFill>
-                  <a:srgbClr val="A96510"/>
+              <a:rPr sz="2400" b="0">
+                <a:solidFill>
+                  <a:srgbClr val="27333D"/>
                 </a:solidFill>
                 <a:latin typeface="微软雅黑"/>
                 <a:ea typeface="微软雅黑"/>
@@ -17317,22 +15141,22 @@
       </p:sp>
       <p:sp>
         <p:nvSpPr>
-          <p:cNvPr id="7" name="feedback">
-            <a:extLst xmlns:a="http://schemas.openxmlformats.org/drawingml/2006/main">
-              <a:ext uri="{FF2B5EF4-FFF2-40B4-BE49-F238E27FC236}">
-                <a16:creationId xmlns:a16="http://schemas.microsoft.com/office/drawing/2014/main" id="{C0623A31-10FC-47AE-BBCA-2A07BAF84D9E}"/>
-              </a:ext>
-            </a:extLst>
-          </p:cNvPr>
-          <p:cNvSpPr>
-            <a:spLocks xmlns:a="http://schemas.openxmlformats.org/drawingml/2006/main" noGrp="1"/>
-          </p:cNvSpPr>
-          <p:nvPr/>
-        </p:nvSpPr>
-        <p:spPr>
-          <a:xfrm xmlns:a="http://schemas.openxmlformats.org/drawingml/2006/main">
-            <a:off x="609600" y="1438275"/>
-            <a:ext cx="10858500" cy="590550"/>
+          <p:cNvPr id="7" name="content-212">
+            <a:extLst xmlns:a="http://schemas.openxmlformats.org/drawingml/2006/main">
+              <a:ext uri="{FF2B5EF4-FFF2-40B4-BE49-F238E27FC236}">
+                <a16:creationId xmlns:a16="http://schemas.microsoft.com/office/drawing/2014/main" id="{CD69D12A-DD16-4BA6-AA26-39D18EC4A216}"/>
+              </a:ext>
+            </a:extLst>
+          </p:cNvPr>
+          <p:cNvSpPr>
+            <a:spLocks xmlns:a="http://schemas.openxmlformats.org/drawingml/2006/main" noGrp="1"/>
+          </p:cNvSpPr>
+          <p:nvPr/>
+        </p:nvSpPr>
+        <p:spPr>
+          <a:xfrm xmlns:a="http://schemas.openxmlformats.org/drawingml/2006/main">
+            <a:off x="609600" y="2261235"/>
+            <a:ext cx="10972800" cy="432435"/>
           </a:xfrm>
           <a:prstGeom xmlns:a="http://schemas.openxmlformats.org/drawingml/2006/main" prst="rect">
             <a:avLst/>
@@ -17351,9 +15175,9 @@
                 <a:spcPct val="118000"/>
               </a:lnSpc>
               <a:buNone/>
-              <a:defRPr sz="2600" b="1">
-                <a:solidFill>
-                  <a:srgbClr val="1F4D78"/>
+              <a:defRPr sz="2400" b="0">
+                <a:solidFill>
+                  <a:srgbClr val="27333D"/>
                 </a:solidFill>
                 <a:latin typeface="微软雅黑"/>
                 <a:ea typeface="微软雅黑"/>
@@ -17361,37 +15185,37 @@
               </a:defRPr>
             </a:pPr>
             <a:r>
-              <a:rPr sz="2600" b="1">
-                <a:solidFill>
-                  <a:srgbClr val="1F4D78"/>
+              <a:rPr sz="2400" b="0">
+                <a:solidFill>
+                  <a:srgbClr val="27333D"/>
                 </a:solidFill>
                 <a:latin typeface="微软雅黑"/>
                 <a:ea typeface="微软雅黑"/>
                 <a:cs typeface="微软雅黑"/>
               </a:rPr>
-              <a:t>收到意见：机制结论超过当前证据。</a:t>
-            </a:r>
-          </a:p>
-        </p:txBody>
-      </p:sp>
-      <p:sp>
-        <p:nvSpPr>
-          <p:cNvPr id="8" name="response0-key">
-            <a:extLst xmlns:a="http://schemas.openxmlformats.org/drawingml/2006/main">
-              <a:ext uri="{FF2B5EF4-FFF2-40B4-BE49-F238E27FC236}">
-                <a16:creationId xmlns:a16="http://schemas.microsoft.com/office/drawing/2014/main" id="{A85CE05E-690E-4AE1-9C27-C7DA833968F2}"/>
-              </a:ext>
-            </a:extLst>
-          </p:cNvPr>
-          <p:cNvSpPr>
-            <a:spLocks xmlns:a="http://schemas.openxmlformats.org/drawingml/2006/main" noGrp="1"/>
-          </p:cNvSpPr>
-          <p:nvPr/>
-        </p:nvSpPr>
-        <p:spPr>
-          <a:xfrm xmlns:a="http://schemas.openxmlformats.org/drawingml/2006/main">
-            <a:off x="609600" y="2362200"/>
-            <a:ext cx="2876550" cy="571500"/>
+              <a:t>动作：采纳；理由：当前证据不能排除替代解释。</a:t>
+            </a:r>
+          </a:p>
+        </p:txBody>
+      </p:sp>
+      <p:sp>
+        <p:nvSpPr>
+          <p:cNvPr id="8" name="content-213">
+            <a:extLst xmlns:a="http://schemas.openxmlformats.org/drawingml/2006/main">
+              <a:ext uri="{FF2B5EF4-FFF2-40B4-BE49-F238E27FC236}">
+                <a16:creationId xmlns:a16="http://schemas.microsoft.com/office/drawing/2014/main" id="{85A17E1E-4C67-40FC-BACB-731F6824B7F7}"/>
+              </a:ext>
+            </a:extLst>
+          </p:cNvPr>
+          <p:cNvSpPr>
+            <a:spLocks xmlns:a="http://schemas.openxmlformats.org/drawingml/2006/main" noGrp="1"/>
+          </p:cNvSpPr>
+          <p:nvPr/>
+        </p:nvSpPr>
+        <p:spPr>
+          <a:xfrm xmlns:a="http://schemas.openxmlformats.org/drawingml/2006/main">
+            <a:off x="609600" y="2950845"/>
+            <a:ext cx="10972800" cy="432435"/>
           </a:xfrm>
           <a:prstGeom xmlns:a="http://schemas.openxmlformats.org/drawingml/2006/main" prst="rect">
             <a:avLst/>
@@ -17410,9 +15234,9 @@
                 <a:spcPct val="118000"/>
               </a:lnSpc>
               <a:buNone/>
-              <a:defRPr sz="2000" b="1">
-                <a:solidFill>
-                  <a:srgbClr val="1F4D78"/>
+              <a:defRPr sz="2400" b="0">
+                <a:solidFill>
+                  <a:srgbClr val="27333D"/>
                 </a:solidFill>
                 <a:latin typeface="微软雅黑"/>
                 <a:ea typeface="微软雅黑"/>
@@ -17420,37 +15244,37 @@
               </a:defRPr>
             </a:pPr>
             <a:r>
-              <a:rPr sz="2000" b="1">
-                <a:solidFill>
-                  <a:srgbClr val="1F4D78"/>
+              <a:rPr sz="2400" b="0">
+                <a:solidFill>
+                  <a:srgbClr val="27333D"/>
                 </a:solidFill>
                 <a:latin typeface="微软雅黑"/>
                 <a:ea typeface="微软雅黑"/>
                 <a:cs typeface="微软雅黑"/>
               </a:rPr>
-              <a:t>处理动作／理由</a:t>
-            </a:r>
-          </a:p>
-        </p:txBody>
-      </p:sp>
-      <p:sp>
-        <p:nvSpPr>
-          <p:cNvPr id="9" name="response0-value">
-            <a:extLst xmlns:a="http://schemas.openxmlformats.org/drawingml/2006/main">
-              <a:ext uri="{FF2B5EF4-FFF2-40B4-BE49-F238E27FC236}">
-                <a16:creationId xmlns:a16="http://schemas.microsoft.com/office/drawing/2014/main" id="{B0960386-2E7E-4C79-BC1C-7E926528CD20}"/>
-              </a:ext>
-            </a:extLst>
-          </p:cNvPr>
-          <p:cNvSpPr>
-            <a:spLocks xmlns:a="http://schemas.openxmlformats.org/drawingml/2006/main" noGrp="1"/>
-          </p:cNvSpPr>
-          <p:nvPr/>
-        </p:nvSpPr>
-        <p:spPr>
-          <a:xfrm xmlns:a="http://schemas.openxmlformats.org/drawingml/2006/main">
-            <a:off x="3676650" y="2362200"/>
-            <a:ext cx="7791450" cy="762000"/>
+              <a:t>边界：同一批 3 份构造源文本；依据：评价报告 §2。</a:t>
+            </a:r>
+          </a:p>
+        </p:txBody>
+      </p:sp>
+      <p:sp>
+        <p:nvSpPr>
+          <p:cNvPr id="9" name="content-214">
+            <a:extLst xmlns:a="http://schemas.openxmlformats.org/drawingml/2006/main">
+              <a:ext uri="{FF2B5EF4-FFF2-40B4-BE49-F238E27FC236}">
+                <a16:creationId xmlns:a16="http://schemas.microsoft.com/office/drawing/2014/main" id="{EE8A3F9E-98DA-4CA2-A2B7-C085654298FA}"/>
+              </a:ext>
+            </a:extLst>
+          </p:cNvPr>
+          <p:cNvSpPr>
+            <a:spLocks xmlns:a="http://schemas.openxmlformats.org/drawingml/2006/main" noGrp="1"/>
+          </p:cNvSpPr>
+          <p:nvPr/>
+        </p:nvSpPr>
+        <p:spPr>
+          <a:xfrm xmlns:a="http://schemas.openxmlformats.org/drawingml/2006/main">
+            <a:off x="609600" y="3640455"/>
+            <a:ext cx="10972800" cy="798195"/>
           </a:xfrm>
           <a:prstGeom xmlns:a="http://schemas.openxmlformats.org/drawingml/2006/main" prst="rect">
             <a:avLst/>
@@ -17469,7 +15293,7 @@
                 <a:spcPct val="118000"/>
               </a:lnSpc>
               <a:buNone/>
-              <a:defRPr sz="2200" b="0">
+              <a:defRPr sz="2400" b="0">
                 <a:solidFill>
                   <a:srgbClr val="27333D"/>
                 </a:solidFill>
@@ -17479,7 +15303,7 @@
               </a:defRPr>
             </a:pPr>
             <a:r>
-              <a:rPr sz="2200" b="0">
+              <a:rPr sz="2400" b="0">
                 <a:solidFill>
                   <a:srgbClr val="27333D"/>
                 </a:solidFill>
@@ -17487,59 +15311,29 @@
                 <a:ea typeface="微软雅黑"/>
                 <a:cs typeface="微软雅黑"/>
               </a:rPr>
-              <a:t>采纳；证据不能排除替代解释。</a:t>
-            </a:r>
-          </a:p>
-        </p:txBody>
-      </p:sp>
-      <p:sp>
-        <p:nvSpPr>
-          <p:cNvPr id="10" name="response0-rule">
-            <a:extLst xmlns:a="http://schemas.openxmlformats.org/drawingml/2006/main">
-              <a:ext uri="{FF2B5EF4-FFF2-40B4-BE49-F238E27FC236}">
-                <a16:creationId xmlns:a16="http://schemas.microsoft.com/office/drawing/2014/main" id="{9ACE7935-6F84-412A-946B-A4CEB3A20B2E}"/>
-              </a:ext>
-            </a:extLst>
-          </p:cNvPr>
-          <p:cNvSpPr>
-            <a:spLocks xmlns:a="http://schemas.openxmlformats.org/drawingml/2006/main" noGrp="1"/>
-          </p:cNvSpPr>
-          <p:nvPr/>
-        </p:nvSpPr>
-        <p:spPr>
-          <a:xfrm xmlns:a="http://schemas.openxmlformats.org/drawingml/2006/main">
-            <a:off x="609600" y="3152775"/>
-            <a:ext cx="10858500" cy="14288"/>
-          </a:xfrm>
-          <a:prstGeom xmlns:a="http://schemas.openxmlformats.org/drawingml/2006/main" prst="rect">
-            <a:avLst/>
-          </a:prstGeom>
-          <a:solidFill xmlns:a="http://schemas.openxmlformats.org/drawingml/2006/main">
-            <a:srgbClr val="CDD5DB"/>
-          </a:solidFill>
-          <a:ln xmlns:a="http://schemas.openxmlformats.org/drawingml/2006/main" w="0">
-            <a:noFill/>
-          </a:ln>
-        </p:spPr>
-      </p:sp>
-      <p:sp>
-        <p:nvSpPr>
-          <p:cNvPr id="11" name="response1-key">
-            <a:extLst xmlns:a="http://schemas.openxmlformats.org/drawingml/2006/main">
-              <a:ext uri="{FF2B5EF4-FFF2-40B4-BE49-F238E27FC236}">
-                <a16:creationId xmlns:a16="http://schemas.microsoft.com/office/drawing/2014/main" id="{19813283-0F28-4E1D-B9AD-8BF6801B649A}"/>
-              </a:ext>
-            </a:extLst>
-          </p:cNvPr>
-          <p:cNvSpPr>
-            <a:spLocks xmlns:a="http://schemas.openxmlformats.org/drawingml/2006/main" noGrp="1"/>
-          </p:cNvSpPr>
-          <p:nvPr/>
-        </p:nvSpPr>
-        <p:spPr>
-          <a:xfrm xmlns:a="http://schemas.openxmlformats.org/drawingml/2006/main">
-            <a:off x="609600" y="3343275"/>
-            <a:ext cx="2876550" cy="571500"/>
+              <a:t>主张方向：Q1 包内一致、H1/A2 未决；工件：review；影响工件：report.md、结论追踪记录。</a:t>
+            </a:r>
+          </a:p>
+        </p:txBody>
+      </p:sp>
+      <p:sp>
+        <p:nvSpPr>
+          <p:cNvPr id="10" name="content-215">
+            <a:extLst xmlns:a="http://schemas.openxmlformats.org/drawingml/2006/main">
+              <a:ext uri="{FF2B5EF4-FFF2-40B4-BE49-F238E27FC236}">
+                <a16:creationId xmlns:a16="http://schemas.microsoft.com/office/drawing/2014/main" id="{ED0BF685-C103-4EFA-BA23-B51E0EE421AF}"/>
+              </a:ext>
+            </a:extLst>
+          </p:cNvPr>
+          <p:cNvSpPr>
+            <a:spLocks xmlns:a="http://schemas.openxmlformats.org/drawingml/2006/main" noGrp="1"/>
+          </p:cNvSpPr>
+          <p:nvPr/>
+        </p:nvSpPr>
+        <p:spPr>
+          <a:xfrm xmlns:a="http://schemas.openxmlformats.org/drawingml/2006/main">
+            <a:off x="609600" y="4695825"/>
+            <a:ext cx="10972800" cy="432435"/>
           </a:xfrm>
           <a:prstGeom xmlns:a="http://schemas.openxmlformats.org/drawingml/2006/main" prst="rect">
             <a:avLst/>
@@ -17558,7 +15352,7 @@
                 <a:spcPct val="118000"/>
               </a:lnSpc>
               <a:buNone/>
-              <a:defRPr sz="2000" b="1">
+              <a:defRPr sz="2400" b="0">
                 <a:solidFill>
                   <a:srgbClr val="1F4D78"/>
                 </a:solidFill>
@@ -17568,7 +15362,7 @@
               </a:defRPr>
             </a:pPr>
             <a:r>
-              <a:rPr sz="2000" b="1">
+              <a:rPr sz="2400" b="0">
                 <a:solidFill>
                   <a:srgbClr val="1F4D78"/>
                 </a:solidFill>
@@ -17576,362 +15370,7 @@
                 <a:ea typeface="微软雅黑"/>
                 <a:cs typeface="微软雅黑"/>
               </a:rPr>
-              <a:t>适用边界／依据</a:t>
-            </a:r>
-          </a:p>
-        </p:txBody>
-      </p:sp>
-      <p:sp>
-        <p:nvSpPr>
-          <p:cNvPr id="12" name="response1-value">
-            <a:extLst xmlns:a="http://schemas.openxmlformats.org/drawingml/2006/main">
-              <a:ext uri="{FF2B5EF4-FFF2-40B4-BE49-F238E27FC236}">
-                <a16:creationId xmlns:a16="http://schemas.microsoft.com/office/drawing/2014/main" id="{9694076B-DFDB-49F8-8787-26E65BB97629}"/>
-              </a:ext>
-            </a:extLst>
-          </p:cNvPr>
-          <p:cNvSpPr>
-            <a:spLocks xmlns:a="http://schemas.openxmlformats.org/drawingml/2006/main" noGrp="1"/>
-          </p:cNvSpPr>
-          <p:nvPr/>
-        </p:nvSpPr>
-        <p:spPr>
-          <a:xfrm xmlns:a="http://schemas.openxmlformats.org/drawingml/2006/main">
-            <a:off x="3676650" y="3343275"/>
-            <a:ext cx="7791450" cy="762000"/>
-          </a:xfrm>
-          <a:prstGeom xmlns:a="http://schemas.openxmlformats.org/drawingml/2006/main" prst="rect">
-            <a:avLst/>
-          </a:prstGeom>
-          <a:noFill xmlns:a="http://schemas.openxmlformats.org/drawingml/2006/main"/>
-          <a:ln xmlns:a="http://schemas.openxmlformats.org/drawingml/2006/main" w="0">
-            <a:noFill/>
-          </a:ln>
-        </p:spPr>
-        <p:txBody>
-          <a:bodyPr xmlns:a="http://schemas.openxmlformats.org/drawingml/2006/main" lIns="0" tIns="0" rIns="0" bIns="0" anchor="t"/>
-          <a:lstStyle xmlns:a="http://schemas.openxmlformats.org/drawingml/2006/main"/>
-          <a:p xmlns:a="http://schemas.openxmlformats.org/drawingml/2006/main">
-            <a:pPr algn="l">
-              <a:lnSpc>
-                <a:spcPct val="118000"/>
-              </a:lnSpc>
-              <a:buNone/>
-              <a:defRPr sz="2200" b="0">
-                <a:solidFill>
-                  <a:srgbClr val="27333D"/>
-                </a:solidFill>
-                <a:latin typeface="微软雅黑"/>
-                <a:ea typeface="微软雅黑"/>
-                <a:cs typeface="微软雅黑"/>
-              </a:defRPr>
-            </a:pPr>
-            <a:r>
-              <a:rPr sz="2200" b="0">
-                <a:solidFill>
-                  <a:srgbClr val="27333D"/>
-                </a:solidFill>
-                <a:latin typeface="微软雅黑"/>
-                <a:ea typeface="微软雅黑"/>
-                <a:cs typeface="微软雅黑"/>
-              </a:rPr>
-              <a:t>本批 20 篇 CS 论文；评价报告 §2。</a:t>
-            </a:r>
-          </a:p>
-        </p:txBody>
-      </p:sp>
-      <p:sp>
-        <p:nvSpPr>
-          <p:cNvPr id="13" name="response1-rule">
-            <a:extLst xmlns:a="http://schemas.openxmlformats.org/drawingml/2006/main">
-              <a:ext uri="{FF2B5EF4-FFF2-40B4-BE49-F238E27FC236}">
-                <a16:creationId xmlns:a16="http://schemas.microsoft.com/office/drawing/2014/main" id="{8031DBF1-19DD-4F0B-9489-14FBE7C199FD}"/>
-              </a:ext>
-            </a:extLst>
-          </p:cNvPr>
-          <p:cNvSpPr>
-            <a:spLocks xmlns:a="http://schemas.openxmlformats.org/drawingml/2006/main" noGrp="1"/>
-          </p:cNvSpPr>
-          <p:nvPr/>
-        </p:nvSpPr>
-        <p:spPr>
-          <a:xfrm xmlns:a="http://schemas.openxmlformats.org/drawingml/2006/main">
-            <a:off x="609600" y="4133850"/>
-            <a:ext cx="10858500" cy="14288"/>
-          </a:xfrm>
-          <a:prstGeom xmlns:a="http://schemas.openxmlformats.org/drawingml/2006/main" prst="rect">
-            <a:avLst/>
-          </a:prstGeom>
-          <a:solidFill xmlns:a="http://schemas.openxmlformats.org/drawingml/2006/main">
-            <a:srgbClr val="CDD5DB"/>
-          </a:solidFill>
-          <a:ln xmlns:a="http://schemas.openxmlformats.org/drawingml/2006/main" w="0">
-            <a:noFill/>
-          </a:ln>
-        </p:spPr>
-      </p:sp>
-      <p:sp>
-        <p:nvSpPr>
-          <p:cNvPr id="14" name="response2-key">
-            <a:extLst xmlns:a="http://schemas.openxmlformats.org/drawingml/2006/main">
-              <a:ext uri="{FF2B5EF4-FFF2-40B4-BE49-F238E27FC236}">
-                <a16:creationId xmlns:a16="http://schemas.microsoft.com/office/drawing/2014/main" id="{BA186BE2-C846-4B73-9781-A4FC387C0482}"/>
-              </a:ext>
-            </a:extLst>
-          </p:cNvPr>
-          <p:cNvSpPr>
-            <a:spLocks xmlns:a="http://schemas.openxmlformats.org/drawingml/2006/main" noGrp="1"/>
-          </p:cNvSpPr>
-          <p:nvPr/>
-        </p:nvSpPr>
-        <p:spPr>
-          <a:xfrm xmlns:a="http://schemas.openxmlformats.org/drawingml/2006/main">
-            <a:off x="609600" y="4324350"/>
-            <a:ext cx="2876550" cy="571500"/>
-          </a:xfrm>
-          <a:prstGeom xmlns:a="http://schemas.openxmlformats.org/drawingml/2006/main" prst="rect">
-            <a:avLst/>
-          </a:prstGeom>
-          <a:noFill xmlns:a="http://schemas.openxmlformats.org/drawingml/2006/main"/>
-          <a:ln xmlns:a="http://schemas.openxmlformats.org/drawingml/2006/main" w="0">
-            <a:noFill/>
-          </a:ln>
-        </p:spPr>
-        <p:txBody>
-          <a:bodyPr xmlns:a="http://schemas.openxmlformats.org/drawingml/2006/main" lIns="0" tIns="0" rIns="0" bIns="0" anchor="t"/>
-          <a:lstStyle xmlns:a="http://schemas.openxmlformats.org/drawingml/2006/main"/>
-          <a:p xmlns:a="http://schemas.openxmlformats.org/drawingml/2006/main">
-            <a:pPr algn="l">
-              <a:lnSpc>
-                <a:spcPct val="118000"/>
-              </a:lnSpc>
-              <a:buNone/>
-              <a:defRPr sz="2000" b="1">
-                <a:solidFill>
-                  <a:srgbClr val="1F4D78"/>
-                </a:solidFill>
-                <a:latin typeface="微软雅黑"/>
-                <a:ea typeface="微软雅黑"/>
-                <a:cs typeface="微软雅黑"/>
-              </a:defRPr>
-            </a:pPr>
-            <a:r>
-              <a:rPr sz="2000" b="1">
-                <a:solidFill>
-                  <a:srgbClr val="1F4D78"/>
-                </a:solidFill>
-                <a:latin typeface="微软雅黑"/>
-                <a:ea typeface="微软雅黑"/>
-                <a:cs typeface="微软雅黑"/>
-              </a:rPr>
-              <a:t>状态／影响工件</a:t>
-            </a:r>
-          </a:p>
-        </p:txBody>
-      </p:sp>
-      <p:sp>
-        <p:nvSpPr>
-          <p:cNvPr id="15" name="response2-value">
-            <a:extLst xmlns:a="http://schemas.openxmlformats.org/drawingml/2006/main">
-              <a:ext uri="{FF2B5EF4-FFF2-40B4-BE49-F238E27FC236}">
-                <a16:creationId xmlns:a16="http://schemas.microsoft.com/office/drawing/2014/main" id="{C7E3C38A-4B15-4D2F-B377-B2D6E4AD059E}"/>
-              </a:ext>
-            </a:extLst>
-          </p:cNvPr>
-          <p:cNvSpPr>
-            <a:spLocks xmlns:a="http://schemas.openxmlformats.org/drawingml/2006/main" noGrp="1"/>
-          </p:cNvSpPr>
-          <p:nvPr/>
-        </p:nvSpPr>
-        <p:spPr>
-          <a:xfrm xmlns:a="http://schemas.openxmlformats.org/drawingml/2006/main">
-            <a:off x="3676650" y="4324350"/>
-            <a:ext cx="7791450" cy="762000"/>
-          </a:xfrm>
-          <a:prstGeom xmlns:a="http://schemas.openxmlformats.org/drawingml/2006/main" prst="rect">
-            <a:avLst/>
-          </a:prstGeom>
-          <a:noFill xmlns:a="http://schemas.openxmlformats.org/drawingml/2006/main"/>
-          <a:ln xmlns:a="http://schemas.openxmlformats.org/drawingml/2006/main" w="0">
-            <a:noFill/>
-          </a:ln>
-        </p:spPr>
-        <p:txBody>
-          <a:bodyPr xmlns:a="http://schemas.openxmlformats.org/drawingml/2006/main" lIns="0" tIns="0" rIns="0" bIns="0" anchor="t"/>
-          <a:lstStyle xmlns:a="http://schemas.openxmlformats.org/drawingml/2006/main"/>
-          <a:p xmlns:a="http://schemas.openxmlformats.org/drawingml/2006/main">
-            <a:pPr algn="l">
-              <a:lnSpc>
-                <a:spcPct val="118000"/>
-              </a:lnSpc>
-              <a:buNone/>
-              <a:defRPr sz="2200" b="0">
-                <a:solidFill>
-                  <a:srgbClr val="27333D"/>
-                </a:solidFill>
-                <a:latin typeface="微软雅黑"/>
-                <a:ea typeface="微软雅黑"/>
-                <a:cs typeface="微软雅黑"/>
-              </a:defRPr>
-            </a:pPr>
-            <a:r>
-              <a:rPr sz="2200" b="0">
-                <a:solidFill>
-                  <a:srgbClr val="27333D"/>
-                </a:solidFill>
-                <a:latin typeface="微软雅黑"/>
-                <a:ea typeface="微软雅黑"/>
-                <a:cs typeface="微软雅黑"/>
-              </a:rPr>
-              <a:t>支持（待验证）；report.md、结论追踪记录。</a:t>
-            </a:r>
-          </a:p>
-        </p:txBody>
-      </p:sp>
-      <p:sp>
-        <p:nvSpPr>
-          <p:cNvPr id="16" name="response2-rule">
-            <a:extLst xmlns:a="http://schemas.openxmlformats.org/drawingml/2006/main">
-              <a:ext uri="{FF2B5EF4-FFF2-40B4-BE49-F238E27FC236}">
-                <a16:creationId xmlns:a16="http://schemas.microsoft.com/office/drawing/2014/main" id="{250DCB38-A398-4815-B34D-E270EF80DEFB}"/>
-              </a:ext>
-            </a:extLst>
-          </p:cNvPr>
-          <p:cNvSpPr>
-            <a:spLocks xmlns:a="http://schemas.openxmlformats.org/drawingml/2006/main" noGrp="1"/>
-          </p:cNvSpPr>
-          <p:nvPr/>
-        </p:nvSpPr>
-        <p:spPr>
-          <a:xfrm xmlns:a="http://schemas.openxmlformats.org/drawingml/2006/main">
-            <a:off x="609600" y="5114925"/>
-            <a:ext cx="10858500" cy="14288"/>
-          </a:xfrm>
-          <a:prstGeom xmlns:a="http://schemas.openxmlformats.org/drawingml/2006/main" prst="rect">
-            <a:avLst/>
-          </a:prstGeom>
-          <a:solidFill xmlns:a="http://schemas.openxmlformats.org/drawingml/2006/main">
-            <a:srgbClr val="CDD5DB"/>
-          </a:solidFill>
-          <a:ln xmlns:a="http://schemas.openxmlformats.org/drawingml/2006/main" w="0">
-            <a:noFill/>
-          </a:ln>
-        </p:spPr>
-      </p:sp>
-      <p:sp>
-        <p:nvSpPr>
-          <p:cNvPr id="17" name="save">
-            <a:extLst xmlns:a="http://schemas.openxmlformats.org/drawingml/2006/main">
-              <a:ext uri="{FF2B5EF4-FFF2-40B4-BE49-F238E27FC236}">
-                <a16:creationId xmlns:a16="http://schemas.microsoft.com/office/drawing/2014/main" id="{EC2CE3A1-10DD-4450-9FFC-B2CA6AA1AA17}"/>
-              </a:ext>
-            </a:extLst>
-          </p:cNvPr>
-          <p:cNvSpPr>
-            <a:spLocks xmlns:a="http://schemas.openxmlformats.org/drawingml/2006/main" noGrp="1"/>
-          </p:cNvSpPr>
-          <p:nvPr/>
-        </p:nvSpPr>
-        <p:spPr>
-          <a:xfrm xmlns:a="http://schemas.openxmlformats.org/drawingml/2006/main">
-            <a:off x="609600" y="5610225"/>
-            <a:ext cx="10858500" cy="419100"/>
-          </a:xfrm>
-          <a:prstGeom xmlns:a="http://schemas.openxmlformats.org/drawingml/2006/main" prst="rect">
-            <a:avLst/>
-          </a:prstGeom>
-          <a:noFill xmlns:a="http://schemas.openxmlformats.org/drawingml/2006/main"/>
-          <a:ln xmlns:a="http://schemas.openxmlformats.org/drawingml/2006/main" w="0">
-            <a:noFill/>
-          </a:ln>
-        </p:spPr>
-        <p:txBody>
-          <a:bodyPr xmlns:a="http://schemas.openxmlformats.org/drawingml/2006/main" lIns="0" tIns="0" rIns="0" bIns="0" anchor="t"/>
-          <a:lstStyle xmlns:a="http://schemas.openxmlformats.org/drawingml/2006/main"/>
-          <a:p xmlns:a="http://schemas.openxmlformats.org/drawingml/2006/main">
-            <a:pPr algn="l">
-              <a:lnSpc>
-                <a:spcPct val="118000"/>
-              </a:lnSpc>
-              <a:buNone/>
-              <a:defRPr sz="2000" b="0">
-                <a:solidFill>
-                  <a:srgbClr val="1F4D78"/>
-                </a:solidFill>
-                <a:latin typeface="微软雅黑"/>
-                <a:ea typeface="微软雅黑"/>
-                <a:cs typeface="微软雅黑"/>
-              </a:defRPr>
-            </a:pPr>
-            <a:r>
-              <a:rPr sz="2000" b="0">
-                <a:solidFill>
-                  <a:srgbClr val="1F4D78"/>
-                </a:solidFill>
-                <a:latin typeface="微软雅黑"/>
-                <a:ea typeface="微软雅黑"/>
-                <a:cs typeface="微软雅黑"/>
-              </a:rPr>
-              <a:t>回应 → peer-review.md；优先级 → revision-plan.md</a:t>
-            </a:r>
-          </a:p>
-        </p:txBody>
-      </p:sp>
-      <p:sp>
-        <p:nvSpPr>
-          <p:cNvPr id="18" name="source">
-            <a:extLst xmlns:a="http://schemas.openxmlformats.org/drawingml/2006/main">
-              <a:ext uri="{FF2B5EF4-FFF2-40B4-BE49-F238E27FC236}">
-                <a16:creationId xmlns:a16="http://schemas.microsoft.com/office/drawing/2014/main" id="{82CB96B4-0DB7-4B8C-9A7D-30F0E7761E5D}"/>
-              </a:ext>
-            </a:extLst>
-          </p:cNvPr>
-          <p:cNvSpPr>
-            <a:spLocks xmlns:a="http://schemas.openxmlformats.org/drawingml/2006/main" noGrp="1"/>
-          </p:cNvSpPr>
-          <p:nvPr/>
-        </p:nvSpPr>
-        <p:spPr>
-          <a:xfrm xmlns:a="http://schemas.openxmlformats.org/drawingml/2006/main">
-            <a:off x="609600" y="6067425"/>
-            <a:ext cx="10763250" cy="209550"/>
-          </a:xfrm>
-          <a:prstGeom xmlns:a="http://schemas.openxmlformats.org/drawingml/2006/main" prst="rect">
-            <a:avLst/>
-          </a:prstGeom>
-          <a:noFill xmlns:a="http://schemas.openxmlformats.org/drawingml/2006/main"/>
-          <a:ln xmlns:a="http://schemas.openxmlformats.org/drawingml/2006/main" w="0">
-            <a:noFill/>
-          </a:ln>
-        </p:spPr>
-        <p:txBody>
-          <a:bodyPr xmlns:a="http://schemas.openxmlformats.org/drawingml/2006/main" lIns="0" tIns="0" rIns="0" bIns="0" anchor="t"/>
-          <a:lstStyle xmlns:a="http://schemas.openxmlformats.org/drawingml/2006/main"/>
-          <a:p xmlns:a="http://schemas.openxmlformats.org/drawingml/2006/main">
-            <a:pPr algn="l">
-              <a:lnSpc>
-                <a:spcPct val="118000"/>
-              </a:lnSpc>
-              <a:buNone/>
-              <a:defRPr sz="1100" b="0">
-                <a:solidFill>
-                  <a:srgbClr val="66727D"/>
-                </a:solidFill>
-                <a:latin typeface="微软雅黑"/>
-                <a:ea typeface="微软雅黑"/>
-                <a:cs typeface="微软雅黑"/>
-              </a:defRPr>
-            </a:pPr>
-            <a:r>
-              <a:rPr sz="1100" b="0">
-                <a:solidFill>
-                  <a:srgbClr val="66727D"/>
-                </a:solidFill>
-                <a:latin typeface="微软雅黑"/>
-                <a:ea typeface="微软雅黑"/>
-                <a:cs typeface="微软雅黑"/>
-              </a:rPr>
-              <a:t>来源：本课讲义与课程评审模板；课程研究门规范 · 教学构造样例不冒充学生记录</a:t>
+              <a:t>回应写入 peer-review.md；优先级写入 revision-plan.md。</a:t>
             </a:r>
           </a:p>
         </p:txBody>

--- a/lessons/lesson-15/slides.pptx
+++ b/lessons/lesson-15/slides.pptx
@@ -412,7 +412,7 @@
           </a:p>
           <a:p xmlns:a="http://schemas.openxmlformats.org/drawingml/2006/main">
             <a:r>
-              <a:t>讲义位置：本课讲义；见逐页母稿映射表</a:t>
+              <a:t>讲述与校准：</a:t>
             </a:r>
           </a:p>
           <a:p xmlns:a="http://schemas.openxmlformats.org/drawingml/2006/main">
@@ -422,27 +422,17 @@
           </a:p>
           <a:p xmlns:a="http://schemas.openxmlformats.org/drawingml/2006/main">
             <a:r>
-              <a:t>屏显核对：</a:t>
-            </a:r>
-          </a:p>
-          <a:p xmlns:a="http://schemas.openxmlformats.org/drawingml/2006/main">
-            <a:r>
-              <a:t>第15讲 同行评审、论证门预检与修改工作坊</a:t>
-            </a:r>
-          </a:p>
-          <a:p xmlns:a="http://schemas.openxmlformats.org/drawingml/2006/main">
-            <a:r>
               <a:t/>
             </a:r>
           </a:p>
           <a:p xmlns:a="http://schemas.openxmlformats.org/drawingml/2006/main">
             <a:r>
-              <a:t>教师讲述：</a:t>
-            </a:r>
-          </a:p>
-          <a:p xmlns:a="http://schemas.openxmlformats.org/drawingml/2006/main">
-            <a:r>
-              <a:t>学生打开第 14 课 `report.md` 初版。本课不新增正式提交。</a:t>
+              <a:t>学生动作：</a:t>
+            </a:r>
+          </a:p>
+          <a:p xmlns:a="http://schemas.openxmlformats.org/drawingml/2006/main">
+            <a:r>
+              <a:t>依据本页方法检查本人项目；按需参考。</a:t>
             </a:r>
           </a:p>
           <a:p xmlns:a="http://schemas.openxmlformats.org/drawingml/2006/main">
@@ -452,7 +442,7 @@
           </a:p>
           <a:p xmlns:a="http://schemas.openxmlformats.org/drawingml/2006/main">
             <a:r>
-              <a:t>学生动作：</a:t>
+              <a:t>课堂安排：按 teaching-plan.md 专用课堂时段安排；换场计入对应时段。</a:t>
             </a:r>
           </a:p>
           <a:p xmlns:a="http://schemas.openxmlformats.org/drawingml/2006/main">
@@ -462,52 +452,12 @@
           </a:p>
           <a:p xmlns:a="http://schemas.openxmlformats.org/drawingml/2006/main">
             <a:r>
-              <a:t/>
-            </a:r>
-          </a:p>
-          <a:p xmlns:a="http://schemas.openxmlformats.org/drawingml/2006/main">
-            <a:r>
-              <a:t>来源与边界：</a:t>
-            </a:r>
-          </a:p>
-          <a:p xmlns:a="http://schemas.openxmlformats.org/drawingml/2006/main">
-            <a:r>
-              <a:t>讲义导读；assignments.md 第 15 课。</a:t>
-            </a:r>
-          </a:p>
-          <a:p xmlns:a="http://schemas.openxmlformats.org/drawingml/2006/main">
-            <a:r>
-              <a:t/>
-            </a:r>
-          </a:p>
-          <a:p xmlns:a="http://schemas.openxmlformats.org/drawingml/2006/main">
-            <a:r>
               <a:t>[Sources]</a:t>
             </a:r>
           </a:p>
           <a:p xmlns:a="http://schemas.openxmlformats.org/drawingml/2006/main">
             <a:r>
-              <a:t/>
-            </a:r>
-          </a:p>
-          <a:p xmlns:a="http://schemas.openxmlformats.org/drawingml/2006/main">
-            <a:r>
-              <a:t>- 本课 handout.md 与 slides.md</a:t>
-            </a:r>
-          </a:p>
-          <a:p xmlns:a="http://schemas.openxmlformats.org/drawingml/2006/main">
-            <a:r>
-              <a:t/>
-            </a:r>
-          </a:p>
-          <a:p xmlns:a="http://schemas.openxmlformats.org/drawingml/2006/main">
-            <a:r>
-              <a:t>- ../../course/reading-card-case.md</a:t>
-            </a:r>
-          </a:p>
-          <a:p xmlns:a="http://schemas.openxmlformats.org/drawingml/2006/main">
-            <a:r>
-              <a:t/>
+              <a:t>本课 handout.md、judgment-task.md；../../course/judgment-path.md。</a:t>
             </a:r>
           </a:p>
           <a:p xmlns:a="http://schemas.openxmlformats.org/drawingml/2006/main">
@@ -582,7 +532,7 @@
           <a:lstStyle xmlns:a="http://schemas.openxmlformats.org/drawingml/2006/main"/>
           <a:p xmlns:a="http://schemas.openxmlformats.org/drawingml/2006/main">
             <a:r>
-              <a:t>页面：P10 现在修改最可能卡门的一项</a:t>
+              <a:t>页面：P10 本人项目：决定、核验与回写</a:t>
             </a:r>
           </a:p>
           <a:p xmlns:a="http://schemas.openxmlformats.org/drawingml/2006/main">
@@ -592,7 +542,12 @@
           </a:p>
           <a:p xmlns:a="http://schemas.openxmlformats.org/drawingml/2006/main">
             <a:r>
-              <a:t>讲义位置：本课讲义；见逐页母稿映射表</a:t>
+              <a:t>讲述与校准：</a:t>
+            </a:r>
+          </a:p>
+          <a:p xmlns:a="http://schemas.openxmlformats.org/drawingml/2006/main">
+            <a:r>
+              <a:t>A 同时涉及单位事实和效度，应优先实际修订；B 为次级表达问题；C 忽略了确定性回放，可用方法与版本证据澄清。保留异议需要定位事实，不能以“时间不够”反驳实质错误。 按本课专用90分钟流程进行，不套用普通课时间。</a:t>
             </a:r>
           </a:p>
           <a:p xmlns:a="http://schemas.openxmlformats.org/drawingml/2006/main">
@@ -602,12 +557,12 @@
           </a:p>
           <a:p xmlns:a="http://schemas.openxmlformats.org/drawingml/2006/main">
             <a:r>
-              <a:t>屏显核对：</a:t>
-            </a:r>
-          </a:p>
-          <a:p xmlns:a="http://schemas.openxmlformats.org/drawingml/2006/main">
-            <a:r>
-              <a:t>课程虚构稿件的实际文本修改示范</a:t>
+              <a:t>学生动作：</a:t>
+            </a:r>
+          </a:p>
+          <a:p xmlns:a="http://schemas.openxmlformats.org/drawingml/2006/main">
+            <a:r>
+              <a:t>保留两轮真实互评和现场修改。作者对意见接受、澄清、补证、保留异议或暂缓，至少完成一项影响论证的实际修订。</a:t>
             </a:r>
           </a:p>
           <a:p xmlns:a="http://schemas.openxmlformats.org/drawingml/2006/main">
@@ -617,7 +572,7 @@
           </a:p>
           <a:p xmlns:a="http://schemas.openxmlformats.org/drawingml/2006/main">
             <a:r>
-              <a:t>− 阅读卡机制已证实，状态 stable。</a:t>
+              <a:t>课堂安排：按 teaching-plan.md 专用课堂时段安排；换场计入对应时段。</a:t>
             </a:r>
           </a:p>
           <a:p xmlns:a="http://schemas.openxmlformats.org/drawingml/2006/main">
@@ -627,107 +582,12 @@
           </a:p>
           <a:p xmlns:a="http://schemas.openxmlformats.org/drawingml/2006/main">
             <a:r>
-              <a:t>+ 本教学构造包中阅读卡组总遗漏率较低，方向与 Q1 一致，H1 机制未决。</a:t>
-            </a:r>
-          </a:p>
-          <a:p xmlns:a="http://schemas.openxmlformats.org/drawingml/2006/main">
-            <a:r>
-              <a:t/>
-            </a:r>
-          </a:p>
-          <a:p xmlns:a="http://schemas.openxmlformats.org/drawingml/2006/main">
-            <a:r>
-              <a:t>+ H1/A2 尚未区分，A1 质量代价未评价，A3 范围受限；工件：review；机制判断：仍不能判断。</a:t>
-            </a:r>
-          </a:p>
-          <a:p xmlns:a="http://schemas.openxmlformats.org/drawingml/2006/main">
-            <a:r>
-              <a:t/>
-            </a:r>
-          </a:p>
-          <a:p xmlns:a="http://schemas.openxmlformats.org/drawingml/2006/main">
-            <a:r>
-              <a:t>优先：致命 → 重要 → 表达。改实际文件，保存 diff，更新影响工件。</a:t>
-            </a:r>
-          </a:p>
-          <a:p xmlns:a="http://schemas.openxmlformats.org/drawingml/2006/main">
-            <a:r>
-              <a:t/>
-            </a:r>
-          </a:p>
-          <a:p xmlns:a="http://schemas.openxmlformats.org/drawingml/2006/main">
-            <a:r>
-              <a:t>教师讲述：</a:t>
-            </a:r>
-          </a:p>
-          <a:p xmlns:a="http://schemas.openxmlformats.org/drawingml/2006/main">
-            <a:r>
-              <a:t>实践停留页。普通技术失败进入修复与复盘，不自动视为学术不端。</a:t>
-            </a:r>
-          </a:p>
-          <a:p xmlns:a="http://schemas.openxmlformats.org/drawingml/2006/main">
-            <a:r>
-              <a:t/>
-            </a:r>
-          </a:p>
-          <a:p xmlns:a="http://schemas.openxmlformats.org/drawingml/2006/main">
-            <a:r>
-              <a:t>学生动作：</a:t>
-            </a:r>
-          </a:p>
-          <a:p xmlns:a="http://schemas.openxmlformats.org/drawingml/2006/main">
-            <a:r>
-              <a:t/>
-            </a:r>
-          </a:p>
-          <a:p xmlns:a="http://schemas.openxmlformats.org/drawingml/2006/main">
-            <a:r>
-              <a:t/>
-            </a:r>
-          </a:p>
-          <a:p xmlns:a="http://schemas.openxmlformats.org/drawingml/2006/main">
-            <a:r>
-              <a:t>来源与边界：</a:t>
-            </a:r>
-          </a:p>
-          <a:p xmlns:a="http://schemas.openxmlformats.org/drawingml/2006/main">
-            <a:r>
-              <a:t>讲义 §四—五；assessment.md 学术规范。</a:t>
-            </a:r>
-          </a:p>
-          <a:p xmlns:a="http://schemas.openxmlformats.org/drawingml/2006/main">
-            <a:r>
-              <a:t/>
-            </a:r>
-          </a:p>
-          <a:p xmlns:a="http://schemas.openxmlformats.org/drawingml/2006/main">
-            <a:r>
               <a:t>[Sources]</a:t>
             </a:r>
           </a:p>
           <a:p xmlns:a="http://schemas.openxmlformats.org/drawingml/2006/main">
             <a:r>
-              <a:t/>
-            </a:r>
-          </a:p>
-          <a:p xmlns:a="http://schemas.openxmlformats.org/drawingml/2006/main">
-            <a:r>
-              <a:t>- 本课 handout.md 与 slides.md</a:t>
-            </a:r>
-          </a:p>
-          <a:p xmlns:a="http://schemas.openxmlformats.org/drawingml/2006/main">
-            <a:r>
-              <a:t/>
-            </a:r>
-          </a:p>
-          <a:p xmlns:a="http://schemas.openxmlformats.org/drawingml/2006/main">
-            <a:r>
-              <a:t>- ../../course/reading-card-case.md</a:t>
-            </a:r>
-          </a:p>
-          <a:p xmlns:a="http://schemas.openxmlformats.org/drawingml/2006/main">
-            <a:r>
-              <a:t/>
+              <a:t>本课 handout.md、judgment-task.md；../../course/judgment-path.md。教学构造仅用于方法判断；本人结果以实际记录为准。</a:t>
             </a:r>
           </a:p>
           <a:p xmlns:a="http://schemas.openxmlformats.org/drawingml/2006/main">
@@ -812,7 +672,12 @@
           </a:p>
           <a:p xmlns:a="http://schemas.openxmlformats.org/drawingml/2006/main">
             <a:r>
-              <a:t>讲义位置：handout.md §七、贯穿案例：从第 14 课初稿到同行评审</a:t>
+              <a:t>讲述与校准：</a:t>
+            </a:r>
+          </a:p>
+          <a:p xmlns:a="http://schemas.openxmlformats.org/drawingml/2006/main">
+            <a:r>
+              <a:t>不要把“机制已证明”简单改成“支持待验证”。证据没有回答机制时，状态应为不能判断；工件成熟度另行检查。修改动作需落到文件并形成diff。</a:t>
             </a:r>
           </a:p>
           <a:p xmlns:a="http://schemas.openxmlformats.org/drawingml/2006/main">
@@ -822,27 +687,12 @@
           </a:p>
           <a:p xmlns:a="http://schemas.openxmlformats.org/drawingml/2006/main">
             <a:r>
-              <a:t>屏显核对：</a:t>
-            </a:r>
-          </a:p>
-          <a:p xmlns:a="http://schemas.openxmlformats.org/drawingml/2006/main">
-            <a:r>
-              <a:t>Q1：在构造包中方向一致。</a:t>
-            </a:r>
-          </a:p>
-          <a:p xmlns:a="http://schemas.openxmlformats.org/drawingml/2006/main">
-            <a:r>
-              <a:t>H1/A2：仍不能区分。</a:t>
-            </a:r>
-          </a:p>
-          <a:p xmlns:a="http://schemas.openxmlformats.org/drawingml/2006/main">
-            <a:r>
-              <a:t>其他质量：尚未测量。</a:t>
-            </a:r>
-          </a:p>
-          <a:p xmlns:a="http://schemas.openxmlformats.org/drawingml/2006/main">
-            <a:r>
-              <a:t>范围：保留T03负例，撤回“所有文本”。</a:t>
+              <a:t>学生动作：</a:t>
+            </a:r>
+          </a:p>
+          <a:p xmlns:a="http://schemas.openxmlformats.org/drawingml/2006/main">
+            <a:r>
+              <a:t>核对一条作者回应是否已经改变正文与追踪记录。</a:t>
             </a:r>
           </a:p>
           <a:p xmlns:a="http://schemas.openxmlformats.org/drawingml/2006/main">
@@ -852,7 +702,7 @@
           </a:p>
           <a:p xmlns:a="http://schemas.openxmlformats.org/drawingml/2006/main">
             <a:r>
-              <a:t>修改正文，再更新追踪状态。</a:t>
+              <a:t>课堂安排：按 teaching-plan.md 专用课堂时段安排；换场计入对应时段。</a:t>
             </a:r>
           </a:p>
           <a:p xmlns:a="http://schemas.openxmlformats.org/drawingml/2006/main">
@@ -862,12 +712,12 @@
           </a:p>
           <a:p xmlns:a="http://schemas.openxmlformats.org/drawingml/2006/main">
             <a:r>
-              <a:t>教师讲述：</a:t>
-            </a:r>
-          </a:p>
-          <a:p xmlns:a="http://schemas.openxmlformats.org/drawingml/2006/main">
-            <a:r>
-              <a:t>不要把“机制已证明”简单改成“支持待验证”。证据没有回答机制时，状态应为不能判断；工件成熟度另行检查。修改动作需落到文件并形成diff。</a:t>
+              <a:t>[Sources]</a:t>
+            </a:r>
+          </a:p>
+          <a:p xmlns:a="http://schemas.openxmlformats.org/drawingml/2006/main">
+            <a:r>
+              <a:t>./handout.md；课堂示例与构造数据见 ../../course/reading-card-case.md</a:t>
             </a:r>
           </a:p>
           <a:p xmlns:a="http://schemas.openxmlformats.org/drawingml/2006/main">
@@ -877,62 +727,7 @@
           </a:p>
           <a:p xmlns:a="http://schemas.openxmlformats.org/drawingml/2006/main">
             <a:r>
-              <a:t>学生动作：</a:t>
-            </a:r>
-          </a:p>
-          <a:p xmlns:a="http://schemas.openxmlformats.org/drawingml/2006/main">
-            <a:r>
-              <a:t>核对一条作者回应是否已经改变正文与追踪记录。</a:t>
-            </a:r>
-          </a:p>
-          <a:p xmlns:a="http://schemas.openxmlformats.org/drawingml/2006/main">
-            <a:r>
-              <a:t/>
-            </a:r>
-          </a:p>
-          <a:p xmlns:a="http://schemas.openxmlformats.org/drawingml/2006/main">
-            <a:r>
-              <a:t>来源与边界：</a:t>
-            </a:r>
-          </a:p>
-          <a:p xmlns:a="http://schemas.openxmlformats.org/drawingml/2006/main">
-            <a:r>
-              <a:t>./handout.md；课堂示例与构造数据见 ../../course/reading-card-case.md</a:t>
-            </a:r>
-          </a:p>
-          <a:p xmlns:a="http://schemas.openxmlformats.org/drawingml/2006/main">
-            <a:r>
-              <a:t/>
-            </a:r>
-          </a:p>
-          <a:p xmlns:a="http://schemas.openxmlformats.org/drawingml/2006/main">
-            <a:r>
-              <a:t>[Sources]</a:t>
-            </a:r>
-          </a:p>
-          <a:p xmlns:a="http://schemas.openxmlformats.org/drawingml/2006/main">
-            <a:r>
-              <a:t/>
-            </a:r>
-          </a:p>
-          <a:p xmlns:a="http://schemas.openxmlformats.org/drawingml/2006/main">
-            <a:r>
-              <a:t>- 本课 handout.md 与 slides.md</a:t>
-            </a:r>
-          </a:p>
-          <a:p xmlns:a="http://schemas.openxmlformats.org/drawingml/2006/main">
-            <a:r>
-              <a:t/>
-            </a:r>
-          </a:p>
-          <a:p xmlns:a="http://schemas.openxmlformats.org/drawingml/2006/main">
-            <a:r>
-              <a:t>- ../../course/reading-card-case.md</a:t>
-            </a:r>
-          </a:p>
-          <a:p xmlns:a="http://schemas.openxmlformats.org/drawingml/2006/main">
-            <a:r>
-              <a:t/>
+              <a:t>本课 handout.md、judgment-task.md；../../course/judgment-path.md。</a:t>
             </a:r>
           </a:p>
           <a:p xmlns:a="http://schemas.openxmlformats.org/drawingml/2006/main">
@@ -1017,7 +812,7 @@
           </a:p>
           <a:p xmlns:a="http://schemas.openxmlformats.org/drawingml/2006/main">
             <a:r>
-              <a:t>讲义位置：本课讲义；见逐页母稿映射表</a:t>
+              <a:t>讲述与校准：</a:t>
             </a:r>
           </a:p>
           <a:p xmlns:a="http://schemas.openxmlformats.org/drawingml/2006/main">
@@ -1027,22 +822,17 @@
           </a:p>
           <a:p xmlns:a="http://schemas.openxmlformats.org/drawingml/2006/main">
             <a:r>
-              <a:t>屏显核对：</a:t>
-            </a:r>
-          </a:p>
-          <a:p xmlns:a="http://schemas.openxmlformats.org/drawingml/2006/main">
-            <a:r>
-              <a:t>从当前稿件选一项：第二项高优先级修改／证据定位／结论降级与边界／AI 与伦理披露。</a:t>
-            </a:r>
-          </a:p>
-          <a:p xmlns:a="http://schemas.openxmlformats.org/drawingml/2006/main">
-            <a:r>
               <a:t/>
             </a:r>
           </a:p>
           <a:p xmlns:a="http://schemas.openxmlformats.org/drawingml/2006/main">
             <a:r>
-              <a:t>保存到相应项目文件。</a:t>
+              <a:t>学生动作：</a:t>
+            </a:r>
+          </a:p>
+          <a:p xmlns:a="http://schemas.openxmlformats.org/drawingml/2006/main">
+            <a:r>
+              <a:t>依据本页方法检查本人项目；按需参考。</a:t>
             </a:r>
           </a:p>
           <a:p xmlns:a="http://schemas.openxmlformats.org/drawingml/2006/main">
@@ -1052,7 +842,7 @@
           </a:p>
           <a:p xmlns:a="http://schemas.openxmlformats.org/drawingml/2006/main">
             <a:r>
-              <a:t>完成样例（课程构造）：未能补做对照 → 暂缓机制结论 → 记录缺口和复核点。</a:t>
+              <a:t>课堂安排：按 teaching-plan.md 专用课堂时段安排；换场计入对应时段。</a:t>
             </a:r>
           </a:p>
           <a:p xmlns:a="http://schemas.openxmlformats.org/drawingml/2006/main">
@@ -1062,87 +852,12 @@
           </a:p>
           <a:p xmlns:a="http://schemas.openxmlformats.org/drawingml/2006/main">
             <a:r>
-              <a:t>完成标志：文件已保存，剩余风险可定位。</a:t>
-            </a:r>
-          </a:p>
-          <a:p xmlns:a="http://schemas.openxmlformats.org/drawingml/2006/main">
-            <a:r>
-              <a:t/>
-            </a:r>
-          </a:p>
-          <a:p xmlns:a="http://schemas.openxmlformats.org/drawingml/2006/main">
-            <a:r>
-              <a:t>教师讲述：</a:t>
-            </a:r>
-          </a:p>
-          <a:p xmlns:a="http://schemas.openxmlformats.org/drawingml/2006/main">
-            <a:r>
-              <a:t>实践停留页。结束时检查文件已保存。</a:t>
-            </a:r>
-          </a:p>
-          <a:p xmlns:a="http://schemas.openxmlformats.org/drawingml/2006/main">
-            <a:r>
-              <a:t/>
-            </a:r>
-          </a:p>
-          <a:p xmlns:a="http://schemas.openxmlformats.org/drawingml/2006/main">
-            <a:r>
-              <a:t>学生动作：</a:t>
-            </a:r>
-          </a:p>
-          <a:p xmlns:a="http://schemas.openxmlformats.org/drawingml/2006/main">
-            <a:r>
-              <a:t/>
-            </a:r>
-          </a:p>
-          <a:p xmlns:a="http://schemas.openxmlformats.org/drawingml/2006/main">
-            <a:r>
-              <a:t/>
-            </a:r>
-          </a:p>
-          <a:p xmlns:a="http://schemas.openxmlformats.org/drawingml/2006/main">
-            <a:r>
-              <a:t>来源与边界：</a:t>
-            </a:r>
-          </a:p>
-          <a:p xmlns:a="http://schemas.openxmlformats.org/drawingml/2006/main">
-            <a:r>
-              <a:t>讲义 §五—六。</a:t>
-            </a:r>
-          </a:p>
-          <a:p xmlns:a="http://schemas.openxmlformats.org/drawingml/2006/main">
-            <a:r>
-              <a:t/>
-            </a:r>
-          </a:p>
-          <a:p xmlns:a="http://schemas.openxmlformats.org/drawingml/2006/main">
-            <a:r>
               <a:t>[Sources]</a:t>
             </a:r>
           </a:p>
           <a:p xmlns:a="http://schemas.openxmlformats.org/drawingml/2006/main">
             <a:r>
-              <a:t/>
-            </a:r>
-          </a:p>
-          <a:p xmlns:a="http://schemas.openxmlformats.org/drawingml/2006/main">
-            <a:r>
-              <a:t>- 本课 handout.md 与 slides.md</a:t>
-            </a:r>
-          </a:p>
-          <a:p xmlns:a="http://schemas.openxmlformats.org/drawingml/2006/main">
-            <a:r>
-              <a:t/>
-            </a:r>
-          </a:p>
-          <a:p xmlns:a="http://schemas.openxmlformats.org/drawingml/2006/main">
-            <a:r>
-              <a:t>- ../../course/reading-card-case.md</a:t>
-            </a:r>
-          </a:p>
-          <a:p xmlns:a="http://schemas.openxmlformats.org/drawingml/2006/main">
-            <a:r>
-              <a:t/>
+              <a:t>本课 handout.md、judgment-task.md；../../course/judgment-path.md。</a:t>
             </a:r>
           </a:p>
           <a:p xmlns:a="http://schemas.openxmlformats.org/drawingml/2006/main">
@@ -1227,7 +942,7 @@
           </a:p>
           <a:p xmlns:a="http://schemas.openxmlformats.org/drawingml/2006/main">
             <a:r>
-              <a:t>讲义位置：本课讲义；见逐页母稿映射表</a:t>
+              <a:t>讲述与校准：</a:t>
             </a:r>
           </a:p>
           <a:p xmlns:a="http://schemas.openxmlformats.org/drawingml/2006/main">
@@ -1237,22 +952,17 @@
           </a:p>
           <a:p xmlns:a="http://schemas.openxmlformats.org/drawingml/2006/main">
             <a:r>
-              <a:t>屏显核对：</a:t>
-            </a:r>
-          </a:p>
-          <a:p xmlns:a="http://schemas.openxmlformats.org/drawingml/2006/main">
-            <a:r>
-              <a:t>只标：已满足／部分满足／未覆盖。</a:t>
-            </a:r>
-          </a:p>
-          <a:p xmlns:a="http://schemas.openxmlformats.org/drawingml/2006/main">
-            <a:r>
               <a:t/>
             </a:r>
           </a:p>
           <a:p xmlns:a="http://schemas.openxmlformats.org/drawingml/2006/main">
             <a:r>
-              <a:t>关键结论可追溯；stable 符合证据条件；工作流含运行、权限、评价与失败；伦理、许可、贡献与 AI 完整；工件状态与门检一致。</a:t>
+              <a:t>学生动作：</a:t>
+            </a:r>
+          </a:p>
+          <a:p xmlns:a="http://schemas.openxmlformats.org/drawingml/2006/main">
+            <a:r>
+              <a:t>依据本页方法检查本人项目；按需参考。</a:t>
             </a:r>
           </a:p>
           <a:p xmlns:a="http://schemas.openxmlformats.org/drawingml/2006/main">
@@ -1262,7 +972,7 @@
           </a:p>
           <a:p xmlns:a="http://schemas.openxmlformats.org/drawingml/2006/main">
             <a:r>
-              <a:t>把剩余缺口写入 revision-plan.md。</a:t>
+              <a:t>课堂安排：按 teaching-plan.md 专用课堂时段安排；换场计入对应时段。</a:t>
             </a:r>
           </a:p>
           <a:p xmlns:a="http://schemas.openxmlformats.org/drawingml/2006/main">
@@ -1272,77 +982,12 @@
           </a:p>
           <a:p xmlns:a="http://schemas.openxmlformats.org/drawingml/2006/main">
             <a:r>
-              <a:t>教师讲述：</a:t>
-            </a:r>
-          </a:p>
-          <a:p xmlns:a="http://schemas.openxmlformats.org/drawingml/2006/main">
-            <a:r>
-              <a:t>本课完成主要预检，不要求在课堂假装全部通过。</a:t>
-            </a:r>
-          </a:p>
-          <a:p xmlns:a="http://schemas.openxmlformats.org/drawingml/2006/main">
-            <a:r>
-              <a:t/>
-            </a:r>
-          </a:p>
-          <a:p xmlns:a="http://schemas.openxmlformats.org/drawingml/2006/main">
-            <a:r>
-              <a:t>学生动作：</a:t>
-            </a:r>
-          </a:p>
-          <a:p xmlns:a="http://schemas.openxmlformats.org/drawingml/2006/main">
-            <a:r>
-              <a:t/>
-            </a:r>
-          </a:p>
-          <a:p xmlns:a="http://schemas.openxmlformats.org/drawingml/2006/main">
-            <a:r>
-              <a:t/>
-            </a:r>
-          </a:p>
-          <a:p xmlns:a="http://schemas.openxmlformats.org/drawingml/2006/main">
-            <a:r>
-              <a:t>来源与边界：</a:t>
-            </a:r>
-          </a:p>
-          <a:p xmlns:a="http://schemas.openxmlformats.org/drawingml/2006/main">
-            <a:r>
-              <a:t>assignments.md Checkpoint 4；讲义 §六。</a:t>
-            </a:r>
-          </a:p>
-          <a:p xmlns:a="http://schemas.openxmlformats.org/drawingml/2006/main">
-            <a:r>
-              <a:t/>
-            </a:r>
-          </a:p>
-          <a:p xmlns:a="http://schemas.openxmlformats.org/drawingml/2006/main">
-            <a:r>
               <a:t>[Sources]</a:t>
             </a:r>
           </a:p>
           <a:p xmlns:a="http://schemas.openxmlformats.org/drawingml/2006/main">
             <a:r>
-              <a:t/>
-            </a:r>
-          </a:p>
-          <a:p xmlns:a="http://schemas.openxmlformats.org/drawingml/2006/main">
-            <a:r>
-              <a:t>- 本课 handout.md 与 slides.md</a:t>
-            </a:r>
-          </a:p>
-          <a:p xmlns:a="http://schemas.openxmlformats.org/drawingml/2006/main">
-            <a:r>
-              <a:t/>
-            </a:r>
-          </a:p>
-          <a:p xmlns:a="http://schemas.openxmlformats.org/drawingml/2006/main">
-            <a:r>
-              <a:t>- ../../course/reading-card-case.md</a:t>
-            </a:r>
-          </a:p>
-          <a:p xmlns:a="http://schemas.openxmlformats.org/drawingml/2006/main">
-            <a:r>
-              <a:t/>
+              <a:t>本课 handout.md、judgment-task.md；../../course/judgment-path.md。</a:t>
             </a:r>
           </a:p>
           <a:p xmlns:a="http://schemas.openxmlformats.org/drawingml/2006/main">
@@ -1427,7 +1072,7 @@
           </a:p>
           <a:p xmlns:a="http://schemas.openxmlformats.org/drawingml/2006/main">
             <a:r>
-              <a:t>讲义位置：本课讲义；见逐页母稿映射表</a:t>
+              <a:t>讲述与校准：</a:t>
             </a:r>
           </a:p>
           <a:p xmlns:a="http://schemas.openxmlformats.org/drawingml/2006/main">
@@ -1437,22 +1082,17 @@
           </a:p>
           <a:p xmlns:a="http://schemas.openxmlformats.org/drawingml/2006/main">
             <a:r>
-              <a:t>屏显核对：</a:t>
-            </a:r>
-          </a:p>
-          <a:p xmlns:a="http://schemas.openxmlformats.org/drawingml/2006/main">
-            <a:r>
-              <a:t>真实意见 → 处理决定 → 实际修改 → 剩余边界</a:t>
-            </a:r>
-          </a:p>
-          <a:p xmlns:a="http://schemas.openxmlformats.org/drawingml/2006/main">
-            <a:r>
               <a:t/>
             </a:r>
           </a:p>
           <a:p xmlns:a="http://schemas.openxmlformats.org/drawingml/2006/main">
             <a:r>
-              <a:t>反馈不替代作者判断；理由回到证据和约束。</a:t>
+              <a:t>学生动作：</a:t>
+            </a:r>
+          </a:p>
+          <a:p xmlns:a="http://schemas.openxmlformats.org/drawingml/2006/main">
+            <a:r>
+              <a:t>依据本页方法检查本人项目；按需参考。</a:t>
             </a:r>
           </a:p>
           <a:p xmlns:a="http://schemas.openxmlformats.org/drawingml/2006/main">
@@ -1462,7 +1102,7 @@
           </a:p>
           <a:p xmlns:a="http://schemas.openxmlformats.org/drawingml/2006/main">
             <a:r>
-              <a:t>完成标志是修改证据，不只是修改计划。</a:t>
+              <a:t>课堂安排：按 teaching-plan.md 专用课堂时段安排；换场计入对应时段。</a:t>
             </a:r>
           </a:p>
           <a:p xmlns:a="http://schemas.openxmlformats.org/drawingml/2006/main">
@@ -1472,77 +1112,12 @@
           </a:p>
           <a:p xmlns:a="http://schemas.openxmlformats.org/drawingml/2006/main">
             <a:r>
-              <a:t>教师讲述：</a:t>
-            </a:r>
-          </a:p>
-          <a:p xmlns:a="http://schemas.openxmlformats.org/drawingml/2006/main">
-            <a:r>
-              <a:t>退出动作：学生指出已改的一处和仍待处理的一处。</a:t>
-            </a:r>
-          </a:p>
-          <a:p xmlns:a="http://schemas.openxmlformats.org/drawingml/2006/main">
-            <a:r>
-              <a:t/>
-            </a:r>
-          </a:p>
-          <a:p xmlns:a="http://schemas.openxmlformats.org/drawingml/2006/main">
-            <a:r>
-              <a:t>学生动作：</a:t>
-            </a:r>
-          </a:p>
-          <a:p xmlns:a="http://schemas.openxmlformats.org/drawingml/2006/main">
-            <a:r>
-              <a:t/>
-            </a:r>
-          </a:p>
-          <a:p xmlns:a="http://schemas.openxmlformats.org/drawingml/2006/main">
-            <a:r>
-              <a:t/>
-            </a:r>
-          </a:p>
-          <a:p xmlns:a="http://schemas.openxmlformats.org/drawingml/2006/main">
-            <a:r>
-              <a:t>来源与边界：</a:t>
-            </a:r>
-          </a:p>
-          <a:p xmlns:a="http://schemas.openxmlformats.org/drawingml/2006/main">
-            <a:r>
-              <a:t>讲义总结；Booth et al.；assignments.md。</a:t>
-            </a:r>
-          </a:p>
-          <a:p xmlns:a="http://schemas.openxmlformats.org/drawingml/2006/main">
-            <a:r>
-              <a:t/>
-            </a:r>
-          </a:p>
-          <a:p xmlns:a="http://schemas.openxmlformats.org/drawingml/2006/main">
-            <a:r>
               <a:t>[Sources]</a:t>
             </a:r>
           </a:p>
           <a:p xmlns:a="http://schemas.openxmlformats.org/drawingml/2006/main">
             <a:r>
-              <a:t/>
-            </a:r>
-          </a:p>
-          <a:p xmlns:a="http://schemas.openxmlformats.org/drawingml/2006/main">
-            <a:r>
-              <a:t>- 本课 handout.md 与 slides.md</a:t>
-            </a:r>
-          </a:p>
-          <a:p xmlns:a="http://schemas.openxmlformats.org/drawingml/2006/main">
-            <a:r>
-              <a:t/>
-            </a:r>
-          </a:p>
-          <a:p xmlns:a="http://schemas.openxmlformats.org/drawingml/2006/main">
-            <a:r>
-              <a:t>- ../../course/reading-card-case.md</a:t>
-            </a:r>
-          </a:p>
-          <a:p xmlns:a="http://schemas.openxmlformats.org/drawingml/2006/main">
-            <a:r>
-              <a:t/>
+              <a:t>本课 handout.md、judgment-task.md；../../course/judgment-path.md。</a:t>
             </a:r>
           </a:p>
           <a:p xmlns:a="http://schemas.openxmlformats.org/drawingml/2006/main">
@@ -1617,7 +1192,7 @@
           <a:lstStyle xmlns:a="http://schemas.openxmlformats.org/drawingml/2006/main"/>
           <a:p xmlns:a="http://schemas.openxmlformats.org/drawingml/2006/main">
             <a:r>
-              <a:t>页面：P15 带齐展示与抽查材料</a:t>
+              <a:t>页面：P15 保留本课决定，准备下一课输入</a:t>
             </a:r>
           </a:p>
           <a:p xmlns:a="http://schemas.openxmlformats.org/drawingml/2006/main">
@@ -1627,7 +1202,12 @@
           </a:p>
           <a:p xmlns:a="http://schemas.openxmlformats.org/drawingml/2006/main">
             <a:r>
-              <a:t>讲义位置：本课讲义；见逐页母稿映射表</a:t>
+              <a:t>讲述与校准：</a:t>
+            </a:r>
+          </a:p>
+          <a:p xmlns:a="http://schemas.openxmlformats.org/drawingml/2006/main">
+            <a:r>
+              <a:t>按优先级修订既有初稿；从现有图表挑展示材料并检查可打开。 每课课外最多60分钟；详见讲义。</a:t>
             </a:r>
           </a:p>
           <a:p xmlns:a="http://schemas.openxmlformats.org/drawingml/2006/main">
@@ -1637,12 +1217,12 @@
           </a:p>
           <a:p xmlns:a="http://schemas.openxmlformats.org/drawingml/2006/main">
             <a:r>
-              <a:t>屏显核对：</a:t>
-            </a:r>
-          </a:p>
-          <a:p xmlns:a="http://schemas.openxmlformats.org/drawingml/2006/main">
-            <a:r>
-              <a:t>全员闪电报告：研究问题、关键结果、结论边界。</a:t>
+              <a:t>学生动作：</a:t>
+            </a:r>
+          </a:p>
+          <a:p xmlns:a="http://schemas.openxmlformats.org/drawingml/2006/main">
+            <a:r>
+              <a:t>定位实际工件与下一项动作；按既定预算收口。</a:t>
             </a:r>
           </a:p>
           <a:p xmlns:a="http://schemas.openxmlformats.org/drawingml/2006/main">
@@ -1652,7 +1232,7 @@
           </a:p>
           <a:p xmlns:a="http://schemas.openxmlformats.org/drawingml/2006/main">
             <a:r>
-              <a:t>分组证据／工作流演示：证据定位、真实作用、失败与人工判断。</a:t>
+              <a:t>课堂安排：按 teaching-plan.md 专用课堂时段安排；换场计入对应时段。</a:t>
             </a:r>
           </a:p>
           <a:p xmlns:a="http://schemas.openxmlformats.org/drawingml/2006/main">
@@ -1662,97 +1242,12 @@
           </a:p>
           <a:p xmlns:a="http://schemas.openxmlformats.org/drawingml/2006/main">
             <a:r>
-              <a:t>教师抽查：实验 ID、引用或工作流 trace。</a:t>
-            </a:r>
-          </a:p>
-          <a:p xmlns:a="http://schemas.openxmlformats.org/drawingml/2006/main">
-            <a:r>
-              <a:t/>
-            </a:r>
-          </a:p>
-          <a:p xmlns:a="http://schemas.openxmlformats.org/drawingml/2006/main">
-            <a:r>
-              <a:t>第 16 课使用现有项目材料，不新增独立汇报文档。</a:t>
-            </a:r>
-          </a:p>
-          <a:p xmlns:a="http://schemas.openxmlformats.org/drawingml/2006/main">
-            <a:r>
-              <a:t/>
-            </a:r>
-          </a:p>
-          <a:p xmlns:a="http://schemas.openxmlformats.org/drawingml/2006/main">
-            <a:r>
-              <a:t>教师讲述：</a:t>
-            </a:r>
-          </a:p>
-          <a:p xmlns:a="http://schemas.openxmlformats.org/drawingml/2006/main">
-            <a:r>
-              <a:t>确认每人材料位置；不再安排新的独立汇报文档。</a:t>
-            </a:r>
-          </a:p>
-          <a:p xmlns:a="http://schemas.openxmlformats.org/drawingml/2006/main">
-            <a:r>
-              <a:t/>
-            </a:r>
-          </a:p>
-          <a:p xmlns:a="http://schemas.openxmlformats.org/drawingml/2006/main">
-            <a:r>
-              <a:t>学生动作：</a:t>
-            </a:r>
-          </a:p>
-          <a:p xmlns:a="http://schemas.openxmlformats.org/drawingml/2006/main">
-            <a:r>
-              <a:t/>
-            </a:r>
-          </a:p>
-          <a:p xmlns:a="http://schemas.openxmlformats.org/drawingml/2006/main">
-            <a:r>
-              <a:t/>
-            </a:r>
-          </a:p>
-          <a:p xmlns:a="http://schemas.openxmlformats.org/drawingml/2006/main">
-            <a:r>
-              <a:t>来源与边界：</a:t>
-            </a:r>
-          </a:p>
-          <a:p xmlns:a="http://schemas.openxmlformats.org/drawingml/2006/main">
-            <a:r>
-              <a:t>第 16 课讲义；assignments.md。</a:t>
-            </a:r>
-          </a:p>
-          <a:p xmlns:a="http://schemas.openxmlformats.org/drawingml/2006/main">
-            <a:r>
-              <a:t/>
-            </a:r>
-          </a:p>
-          <a:p xmlns:a="http://schemas.openxmlformats.org/drawingml/2006/main">
-            <a:r>
               <a:t>[Sources]</a:t>
             </a:r>
           </a:p>
           <a:p xmlns:a="http://schemas.openxmlformats.org/drawingml/2006/main">
             <a:r>
-              <a:t/>
-            </a:r>
-          </a:p>
-          <a:p xmlns:a="http://schemas.openxmlformats.org/drawingml/2006/main">
-            <a:r>
-              <a:t>- 本课 handout.md 与 slides.md</a:t>
-            </a:r>
-          </a:p>
-          <a:p xmlns:a="http://schemas.openxmlformats.org/drawingml/2006/main">
-            <a:r>
-              <a:t/>
-            </a:r>
-          </a:p>
-          <a:p xmlns:a="http://schemas.openxmlformats.org/drawingml/2006/main">
-            <a:r>
-              <a:t>- ../../course/reading-card-case.md</a:t>
-            </a:r>
-          </a:p>
-          <a:p xmlns:a="http://schemas.openxmlformats.org/drawingml/2006/main">
-            <a:r>
-              <a:t/>
+              <a:t>本课 handout.md、judgment-task.md；../../course/judgment-path.md。教学构造仅用于方法判断；本人结果以实际记录为准。</a:t>
             </a:r>
           </a:p>
           <a:p xmlns:a="http://schemas.openxmlformats.org/drawingml/2006/main">
@@ -1837,7 +1332,7 @@
           </a:p>
           <a:p xmlns:a="http://schemas.openxmlformats.org/drawingml/2006/main">
             <a:r>
-              <a:t>讲义位置：本课讲义；见逐页母稿映射表</a:t>
+              <a:t>讲述与校准：</a:t>
             </a:r>
           </a:p>
           <a:p xmlns:a="http://schemas.openxmlformats.org/drawingml/2006/main">
@@ -1847,22 +1342,17 @@
           </a:p>
           <a:p xmlns:a="http://schemas.openxmlformats.org/drawingml/2006/main">
             <a:r>
-              <a:t>屏显核对：</a:t>
-            </a:r>
-          </a:p>
-          <a:p xmlns:a="http://schemas.openxmlformats.org/drawingml/2006/main">
-            <a:r>
-              <a:t>课程构造的评审表达示例</a:t>
-            </a:r>
-          </a:p>
-          <a:p xmlns:a="http://schemas.openxmlformats.org/drawingml/2006/main">
-            <a:r>
               <a:t/>
             </a:r>
           </a:p>
           <a:p xmlns:a="http://schemas.openxmlformats.org/drawingml/2006/main">
             <a:r>
-              <a:t>− 论证不严谨。</a:t>
+              <a:t>学生动作：</a:t>
+            </a:r>
+          </a:p>
+          <a:p xmlns:a="http://schemas.openxmlformats.org/drawingml/2006/main">
+            <a:r>
+              <a:t>依据本页方法检查本人项目；按需参考。</a:t>
             </a:r>
           </a:p>
           <a:p xmlns:a="http://schemas.openxmlformats.org/drawingml/2006/main">
@@ -1872,7 +1362,7 @@
           </a:p>
           <a:p xmlns:a="http://schemas.openxmlformats.org/drawingml/2006/main">
             <a:r>
-              <a:t>+ report.md 结果段：主张“机制已证实”，但没有区分 H1/A2，也没有测量其他质量。建议降级结论并补边界。</a:t>
+              <a:t>课堂安排：按 teaching-plan.md 专用课堂时段安排；换场计入对应时段。</a:t>
             </a:r>
           </a:p>
           <a:p xmlns:a="http://schemas.openxmlformats.org/drawingml/2006/main">
@@ -1882,142 +1372,12 @@
           </a:p>
           <a:p xmlns:a="http://schemas.openxmlformats.org/drawingml/2006/main">
             <a:r>
-              <a:t>指向工作，不评价作者人格或选题时髦度；作者保留判断责任。</a:t>
-            </a:r>
-          </a:p>
-          <a:p xmlns:a="http://schemas.openxmlformats.org/drawingml/2006/main">
-            <a:r>
-              <a:t/>
-            </a:r>
-          </a:p>
-          <a:p xmlns:a="http://schemas.openxmlformats.org/drawingml/2006/main">
-            <a:r>
-              <a:t>教师讲述：</a:t>
-            </a:r>
-          </a:p>
-          <a:p xmlns:a="http://schemas.openxmlformats.org/drawingml/2006/main">
-            <a:r>
-              <a:t>把“论证不严谨”改写为可定位句子。</a:t>
-            </a:r>
-          </a:p>
-          <a:p xmlns:a="http://schemas.openxmlformats.org/drawingml/2006/main">
-            <a:r>
-              <a:t/>
-            </a:r>
-          </a:p>
-          <a:p xmlns:a="http://schemas.openxmlformats.org/drawingml/2006/main">
-            <a:r>
-              <a:t>学生动作：</a:t>
-            </a:r>
-          </a:p>
-          <a:p xmlns:a="http://schemas.openxmlformats.org/drawingml/2006/main">
-            <a:r>
-              <a:t/>
-            </a:r>
-          </a:p>
-          <a:p xmlns:a="http://schemas.openxmlformats.org/drawingml/2006/main">
-            <a:r>
-              <a:t/>
-            </a:r>
-          </a:p>
-          <a:p xmlns:a="http://schemas.openxmlformats.org/drawingml/2006/main">
-            <a:r>
-              <a:t>本课板书、诊断与串词：</a:t>
-            </a:r>
-          </a:p>
-          <a:p xmlns:a="http://schemas.openxmlformats.org/drawingml/2006/main">
-            <a:r>
-              <a:t>本节替换同类口头提示，不增加既有时段。开场诊断嵌入现有开场/回顾，后续再沿原实践时段操作。</a:t>
-            </a:r>
-          </a:p>
-          <a:p xmlns:a="http://schemas.openxmlformats.org/drawingml/2006/main">
-            <a:r>
-              <a:t/>
-            </a:r>
-          </a:p>
-          <a:p xmlns:a="http://schemas.openxmlformats.org/drawingml/2006/main">
-            <a:r>
-              <a:t>- **板书主线**：意见定位 → 严重度 → 回应理由 → 实际diff → 未决项。</a:t>
-            </a:r>
-          </a:p>
-          <a:p xmlns:a="http://schemas.openxmlformats.org/drawingml/2006/main">
-            <a:r>
-              <a:t>- **诊断问题**：写了修改计划，是否就算处理完意见？</a:t>
-            </a:r>
-          </a:p>
-          <a:p xmlns:a="http://schemas.openxmlformats.org/drawingml/2006/main">
-            <a:r>
-              <a:t>- **预期回答**：要看正文或工件的实际修改；未完成需标缺口。</a:t>
-            </a:r>
-          </a:p>
-          <a:p xmlns:a="http://schemas.openxmlformats.org/drawingml/2006/main">
-            <a:r>
-              <a:t>- **常见误答后的追问**：如所有意见都写接受，核对依据，允许合理拒绝或暂缓。</a:t>
-            </a:r>
-          </a:p>
-          <a:p xmlns:a="http://schemas.openxmlformats.org/drawingml/2006/main">
-            <a:r>
-              <a:t>- **过渡串词**：“第16课会抽查这些修改后的真实记录，而非只看汇报表述。”</a:t>
-            </a:r>
-          </a:p>
-          <a:p xmlns:a="http://schemas.openxmlformats.org/drawingml/2006/main">
-            <a:r>
-              <a:t>- **当堂最小产出**：真实互评、作者回应、一项已落盘修改与剩余清单。</a:t>
-            </a:r>
-          </a:p>
-          <a:p xmlns:a="http://schemas.openxmlformats.org/drawingml/2006/main">
-            <a:r>
-              <a:t>- **退出记录**：写“已完成的动作、本人项目仍缺的证据/工件、下次补齐位置”。使用教师包时标明课堂方法练习，不能据此宣称本人研究门通过；正式提交课次仍为第 6、9、13、16 课。</a:t>
-            </a:r>
-          </a:p>
-          <a:p xmlns:a="http://schemas.openxmlformats.org/drawingml/2006/main">
-            <a:r>
-              <a:t/>
-            </a:r>
-          </a:p>
-          <a:p xmlns:a="http://schemas.openxmlformats.org/drawingml/2006/main">
-            <a:r>
-              <a:t>来源与边界：</a:t>
-            </a:r>
-          </a:p>
-          <a:p xmlns:a="http://schemas.openxmlformats.org/drawingml/2006/main">
-            <a:r>
-              <a:t>Smith 1990；Stanford Scientific Writing Unit 8；讲义 §四。</a:t>
-            </a:r>
-          </a:p>
-          <a:p xmlns:a="http://schemas.openxmlformats.org/drawingml/2006/main">
-            <a:r>
-              <a:t/>
-            </a:r>
-          </a:p>
-          <a:p xmlns:a="http://schemas.openxmlformats.org/drawingml/2006/main">
-            <a:r>
               <a:t>[Sources]</a:t>
             </a:r>
           </a:p>
           <a:p xmlns:a="http://schemas.openxmlformats.org/drawingml/2006/main">
             <a:r>
-              <a:t/>
-            </a:r>
-          </a:p>
-          <a:p xmlns:a="http://schemas.openxmlformats.org/drawingml/2006/main">
-            <a:r>
-              <a:t>- 本课 handout.md 与 slides.md</a:t>
-            </a:r>
-          </a:p>
-          <a:p xmlns:a="http://schemas.openxmlformats.org/drawingml/2006/main">
-            <a:r>
-              <a:t/>
-            </a:r>
-          </a:p>
-          <a:p xmlns:a="http://schemas.openxmlformats.org/drawingml/2006/main">
-            <a:r>
-              <a:t>- ../../course/reading-card-case.md</a:t>
-            </a:r>
-          </a:p>
-          <a:p xmlns:a="http://schemas.openxmlformats.org/drawingml/2006/main">
-            <a:r>
-              <a:t/>
+              <a:t>本课 handout.md、judgment-task.md；../../course/judgment-path.md。</a:t>
             </a:r>
           </a:p>
           <a:p xmlns:a="http://schemas.openxmlformats.org/drawingml/2006/main">
@@ -2102,7 +1462,7 @@
           </a:p>
           <a:p xmlns:a="http://schemas.openxmlformats.org/drawingml/2006/main">
             <a:r>
-              <a:t>讲义位置：本课讲义；见逐页母稿映射表</a:t>
+              <a:t>讲述与校准：</a:t>
             </a:r>
           </a:p>
           <a:p xmlns:a="http://schemas.openxmlformats.org/drawingml/2006/main">
@@ -2112,22 +1472,17 @@
           </a:p>
           <a:p xmlns:a="http://schemas.openxmlformats.org/drawingml/2006/main">
             <a:r>
-              <a:t>屏显核对：</a:t>
-            </a:r>
-          </a:p>
-          <a:p xmlns:a="http://schemas.openxmlformats.org/drawingml/2006/main">
-            <a:r>
-              <a:t>peer-review.md：具体意见 → 处理决定与理由</a:t>
-            </a:r>
-          </a:p>
-          <a:p xmlns:a="http://schemas.openxmlformats.org/drawingml/2006/main">
-            <a:r>
               <a:t/>
             </a:r>
           </a:p>
           <a:p xmlns:a="http://schemas.openxmlformats.org/drawingml/2006/main">
             <a:r>
-              <a:t>实际文件 diff：至少一项落实修改</a:t>
+              <a:t>学生动作：</a:t>
+            </a:r>
+          </a:p>
+          <a:p xmlns:a="http://schemas.openxmlformats.org/drawingml/2006/main">
+            <a:r>
+              <a:t>依据本页方法检查本人项目；按需参考。</a:t>
             </a:r>
           </a:p>
           <a:p xmlns:a="http://schemas.openxmlformats.org/drawingml/2006/main">
@@ -2137,7 +1492,7 @@
           </a:p>
           <a:p xmlns:a="http://schemas.openxmlformats.org/drawingml/2006/main">
             <a:r>
-              <a:t>revision-plan.md：剩余预检缺口</a:t>
+              <a:t>课堂安排：按 teaching-plan.md 专用课堂时段安排；换场计入对应时段。</a:t>
             </a:r>
           </a:p>
           <a:p xmlns:a="http://schemas.openxmlformats.org/drawingml/2006/main">
@@ -2147,97 +1502,12 @@
           </a:p>
           <a:p xmlns:a="http://schemas.openxmlformats.org/drawingml/2006/main">
             <a:r>
-              <a:t>这些工件直接进入第 16 课；真实意见不足时处理全部，不虚构反馈。</a:t>
-            </a:r>
-          </a:p>
-          <a:p xmlns:a="http://schemas.openxmlformats.org/drawingml/2006/main">
-            <a:r>
-              <a:t/>
-            </a:r>
-          </a:p>
-          <a:p xmlns:a="http://schemas.openxmlformats.org/drawingml/2006/main">
-            <a:r>
-              <a:t>课程虚构工件示例：评审指出结果段结论越界；作者采纳并将 `stable` 改为“支持（待验证）”；修改计划保留替代解释对照缺口。</a:t>
-            </a:r>
-          </a:p>
-          <a:p xmlns:a="http://schemas.openxmlformats.org/drawingml/2006/main">
-            <a:r>
-              <a:t/>
-            </a:r>
-          </a:p>
-          <a:p xmlns:a="http://schemas.openxmlformats.org/drawingml/2006/main">
-            <a:r>
-              <a:t>教师讲述：</a:t>
-            </a:r>
-          </a:p>
-          <a:p xmlns:a="http://schemas.openxmlformats.org/drawingml/2006/main">
-            <a:r>
-              <a:t>若真实反馈少于两条，处理全部并记录缺口，不虚构意见。</a:t>
-            </a:r>
-          </a:p>
-          <a:p xmlns:a="http://schemas.openxmlformats.org/drawingml/2006/main">
-            <a:r>
-              <a:t/>
-            </a:r>
-          </a:p>
-          <a:p xmlns:a="http://schemas.openxmlformats.org/drawingml/2006/main">
-            <a:r>
-              <a:t>学生动作：</a:t>
-            </a:r>
-          </a:p>
-          <a:p xmlns:a="http://schemas.openxmlformats.org/drawingml/2006/main">
-            <a:r>
-              <a:t/>
-            </a:r>
-          </a:p>
-          <a:p xmlns:a="http://schemas.openxmlformats.org/drawingml/2006/main">
-            <a:r>
-              <a:t/>
-            </a:r>
-          </a:p>
-          <a:p xmlns:a="http://schemas.openxmlformats.org/drawingml/2006/main">
-            <a:r>
-              <a:t>来源与边界：</a:t>
-            </a:r>
-          </a:p>
-          <a:p xmlns:a="http://schemas.openxmlformats.org/drawingml/2006/main">
-            <a:r>
-              <a:t>讲义导读、§五—六。</a:t>
-            </a:r>
-          </a:p>
-          <a:p xmlns:a="http://schemas.openxmlformats.org/drawingml/2006/main">
-            <a:r>
-              <a:t/>
-            </a:r>
-          </a:p>
-          <a:p xmlns:a="http://schemas.openxmlformats.org/drawingml/2006/main">
-            <a:r>
               <a:t>[Sources]</a:t>
             </a:r>
           </a:p>
           <a:p xmlns:a="http://schemas.openxmlformats.org/drawingml/2006/main">
             <a:r>
-              <a:t/>
-            </a:r>
-          </a:p>
-          <a:p xmlns:a="http://schemas.openxmlformats.org/drawingml/2006/main">
-            <a:r>
-              <a:t>- 本课 handout.md 与 slides.md</a:t>
-            </a:r>
-          </a:p>
-          <a:p xmlns:a="http://schemas.openxmlformats.org/drawingml/2006/main">
-            <a:r>
-              <a:t/>
-            </a:r>
-          </a:p>
-          <a:p xmlns:a="http://schemas.openxmlformats.org/drawingml/2006/main">
-            <a:r>
-              <a:t>- ../../course/reading-card-case.md</a:t>
-            </a:r>
-          </a:p>
-          <a:p xmlns:a="http://schemas.openxmlformats.org/drawingml/2006/main">
-            <a:r>
-              <a:t/>
+              <a:t>本课 handout.md、judgment-task.md；../../course/judgment-path.md。</a:t>
             </a:r>
           </a:p>
           <a:p xmlns:a="http://schemas.openxmlformats.org/drawingml/2006/main">
@@ -2312,7 +1582,7 @@
           <a:lstStyle xmlns:a="http://schemas.openxmlformats.org/drawingml/2006/main"/>
           <a:p xmlns:a="http://schemas.openxmlformats.org/drawingml/2006/main">
             <a:r>
-              <a:t>页面：P04 给三处错误排优先级</a:t>
+              <a:t>页面：P04 哪条评审应先处理</a:t>
             </a:r>
           </a:p>
           <a:p xmlns:a="http://schemas.openxmlformats.org/drawingml/2006/main">
@@ -2322,7 +1592,12 @@
           </a:p>
           <a:p xmlns:a="http://schemas.openxmlformats.org/drawingml/2006/main">
             <a:r>
-              <a:t>讲义位置：handout.md §七、贯穿案例：从第 14 课初稿到同行评审</a:t>
+              <a:t>讲述与校准：</a:t>
+            </a:r>
+          </a:p>
+          <a:p xmlns:a="http://schemas.openxmlformats.org/drawingml/2006/main">
+            <a:r>
+              <a:t>先独立作答，再同伴比较；以下依据只在校准时揭示。</a:t>
             </a:r>
           </a:p>
           <a:p xmlns:a="http://schemas.openxmlformats.org/drawingml/2006/main">
@@ -2332,22 +1607,7 @@
           </a:p>
           <a:p xmlns:a="http://schemas.openxmlformats.org/drawingml/2006/main">
             <a:r>
-              <a:t>屏显核对：</a:t>
-            </a:r>
-          </a:p>
-          <a:p xmlns:a="http://schemas.openxmlformats.org/drawingml/2006/main">
-            <a:r>
-              <a:t>D1：“证明机制，对所有文本有效，stable。”</a:t>
-            </a:r>
-          </a:p>
-          <a:p xmlns:a="http://schemas.openxmlformats.org/drawingml/2006/main">
-            <a:r>
-              <a:t>D2：只给百分比，没有分母和原始记录位置。</a:t>
-            </a:r>
-          </a:p>
-          <a:p xmlns:a="http://schemas.openxmlformats.org/drawingml/2006/main">
-            <a:r>
-              <a:t>图1：“组一/组二”，指标和范围不明。</a:t>
+              <a:t>A 同时涉及单位事实和效度，应优先实际修订；B 为次级表达问题；C 忽略了确定性回放，可用方法与版本证据澄清。保留异议需要定位事实，不能以“时间不够”反驳实质错误。</a:t>
             </a:r>
           </a:p>
           <a:p xmlns:a="http://schemas.openxmlformats.org/drawingml/2006/main">
@@ -2357,7 +1617,12 @@
           </a:p>
           <a:p xmlns:a="http://schemas.openxmlformats.org/drawingml/2006/main">
             <a:r>
-              <a:t>先处理结论越界，再补追踪与图表说明。</a:t>
+              <a:t>学生动作：</a:t>
+            </a:r>
+          </a:p>
+          <a:p xmlns:a="http://schemas.openxmlformats.org/drawingml/2006/main">
+            <a:r>
+              <a:t>先独立写决定和证据，后同伴比较；校准后再回写。</a:t>
             </a:r>
           </a:p>
           <a:p xmlns:a="http://schemas.openxmlformats.org/drawingml/2006/main">
@@ -2367,12 +1632,7 @@
           </a:p>
           <a:p xmlns:a="http://schemas.openxmlformats.org/drawingml/2006/main">
             <a:r>
-              <a:t>教师讲述：</a:t>
-            </a:r>
-          </a:p>
-          <a:p xmlns:a="http://schemas.openxmlformats.org/drawingml/2006/main">
-            <a:r>
-              <a:t>打开calibration-pack完整含错版本。三条意见须分别指出位置、问题、影响和修订动作。标准答案只作教师校准；本课主体仍是学生真实互评。</a:t>
+              <a:t>课堂安排：按 teaching-plan.md 专用课堂时段安排；换场计入对应时段。</a:t>
             </a:r>
           </a:p>
           <a:p xmlns:a="http://schemas.openxmlformats.org/drawingml/2006/main">
@@ -2382,12 +1642,12 @@
           </a:p>
           <a:p xmlns:a="http://schemas.openxmlformats.org/drawingml/2006/main">
             <a:r>
-              <a:t>学生动作：</a:t>
-            </a:r>
-          </a:p>
-          <a:p xmlns:a="http://schemas.openxmlformats.org/drawingml/2006/main">
-            <a:r>
-              <a:t>各写一条可执行意见，与教师参考意见比较优先级。</a:t>
+              <a:t>[Sources]</a:t>
+            </a:r>
+          </a:p>
+          <a:p xmlns:a="http://schemas.openxmlformats.org/drawingml/2006/main">
+            <a:r>
+              <a:t>./handout.md；课堂示例与构造数据见 ../../course/reading-card-case.md</a:t>
             </a:r>
           </a:p>
           <a:p xmlns:a="http://schemas.openxmlformats.org/drawingml/2006/main">
@@ -2397,47 +1657,7 @@
           </a:p>
           <a:p xmlns:a="http://schemas.openxmlformats.org/drawingml/2006/main">
             <a:r>
-              <a:t>来源与边界：</a:t>
-            </a:r>
-          </a:p>
-          <a:p xmlns:a="http://schemas.openxmlformats.org/drawingml/2006/main">
-            <a:r>
-              <a:t>./handout.md；课堂示例与构造数据见 ../../course/reading-card-case.md</a:t>
-            </a:r>
-          </a:p>
-          <a:p xmlns:a="http://schemas.openxmlformats.org/drawingml/2006/main">
-            <a:r>
-              <a:t/>
-            </a:r>
-          </a:p>
-          <a:p xmlns:a="http://schemas.openxmlformats.org/drawingml/2006/main">
-            <a:r>
-              <a:t>[Sources]</a:t>
-            </a:r>
-          </a:p>
-          <a:p xmlns:a="http://schemas.openxmlformats.org/drawingml/2006/main">
-            <a:r>
-              <a:t/>
-            </a:r>
-          </a:p>
-          <a:p xmlns:a="http://schemas.openxmlformats.org/drawingml/2006/main">
-            <a:r>
-              <a:t>- 本课 handout.md 与 slides.md</a:t>
-            </a:r>
-          </a:p>
-          <a:p xmlns:a="http://schemas.openxmlformats.org/drawingml/2006/main">
-            <a:r>
-              <a:t/>
-            </a:r>
-          </a:p>
-          <a:p xmlns:a="http://schemas.openxmlformats.org/drawingml/2006/main">
-            <a:r>
-              <a:t>- ../../course/reading-card-case.md</a:t>
-            </a:r>
-          </a:p>
-          <a:p xmlns:a="http://schemas.openxmlformats.org/drawingml/2006/main">
-            <a:r>
-              <a:t/>
+              <a:t>本课 handout.md、judgment-task.md；../../course/judgment-path.md。教学构造仅用于方法判断；本人结果以实际记录为准。</a:t>
             </a:r>
           </a:p>
           <a:p xmlns:a="http://schemas.openxmlformats.org/drawingml/2006/main">
@@ -2522,7 +1742,7 @@
           </a:p>
           <a:p xmlns:a="http://schemas.openxmlformats.org/drawingml/2006/main">
             <a:r>
-              <a:t>讲义位置：本课讲义；见逐页母稿映射表</a:t>
+              <a:t>讲述与校准：</a:t>
             </a:r>
           </a:p>
           <a:p xmlns:a="http://schemas.openxmlformats.org/drawingml/2006/main">
@@ -2532,22 +1752,17 @@
           </a:p>
           <a:p xmlns:a="http://schemas.openxmlformats.org/drawingml/2006/main">
             <a:r>
-              <a:t>屏显核对：</a:t>
-            </a:r>
-          </a:p>
-          <a:p xmlns:a="http://schemas.openxmlformats.org/drawingml/2006/main">
-            <a:r>
-              <a:t>论证链：主张能反查证据与上游判断吗？</a:t>
-            </a:r>
-          </a:p>
-          <a:p xmlns:a="http://schemas.openxmlformats.org/drawingml/2006/main">
-            <a:r>
               <a:t/>
             </a:r>
           </a:p>
           <a:p xmlns:a="http://schemas.openxmlformats.org/drawingml/2006/main">
             <a:r>
-              <a:t>证据充分：强度匹配吗，失败保留吗？</a:t>
+              <a:t>学生动作：</a:t>
+            </a:r>
+          </a:p>
+          <a:p xmlns:a="http://schemas.openxmlformats.org/drawingml/2006/main">
+            <a:r>
+              <a:t>依据本页方法检查本人项目；按需参考。</a:t>
             </a:r>
           </a:p>
           <a:p xmlns:a="http://schemas.openxmlformats.org/drawingml/2006/main">
@@ -2557,7 +1772,7 @@
           </a:p>
           <a:p xmlns:a="http://schemas.openxmlformats.org/drawingml/2006/main">
             <a:r>
-              <a:t>局限：替代解释与边界具体吗？</a:t>
+              <a:t>课堂安排：按 teaching-plan.md 专用课堂时段安排；换场计入对应时段。</a:t>
             </a:r>
           </a:p>
           <a:p xmlns:a="http://schemas.openxmlformats.org/drawingml/2006/main">
@@ -2567,107 +1782,12 @@
           </a:p>
           <a:p xmlns:a="http://schemas.openxmlformats.org/drawingml/2006/main">
             <a:r>
-              <a:t>可复现：表图能定位运行记录吗？</a:t>
-            </a:r>
-          </a:p>
-          <a:p xmlns:a="http://schemas.openxmlformats.org/drawingml/2006/main">
-            <a:r>
-              <a:t/>
-            </a:r>
-          </a:p>
-          <a:p xmlns:a="http://schemas.openxmlformats.org/drawingml/2006/main">
-            <a:r>
-              <a:t>伦理：数据、权限、贡献与 AI 披露透明吗？</a:t>
-            </a:r>
-          </a:p>
-          <a:p xmlns:a="http://schemas.openxmlformats.org/drawingml/2006/main">
-            <a:r>
-              <a:t/>
-            </a:r>
-          </a:p>
-          <a:p xmlns:a="http://schemas.openxmlformats.org/drawingml/2006/main">
-            <a:r>
-              <a:t>rubric 用于诊断，不打总分。</a:t>
-            </a:r>
-          </a:p>
-          <a:p xmlns:a="http://schemas.openxmlformats.org/drawingml/2006/main">
-            <a:r>
-              <a:t/>
-            </a:r>
-          </a:p>
-          <a:p xmlns:a="http://schemas.openxmlformats.org/drawingml/2006/main">
-            <a:r>
-              <a:t>教师讲述：</a:t>
-            </a:r>
-          </a:p>
-          <a:p xmlns:a="http://schemas.openxmlformats.org/drawingml/2006/main">
-            <a:r>
-              <a:t>rubric 是诊断工具，不打总分。</a:t>
-            </a:r>
-          </a:p>
-          <a:p xmlns:a="http://schemas.openxmlformats.org/drawingml/2006/main">
-            <a:r>
-              <a:t/>
-            </a:r>
-          </a:p>
-          <a:p xmlns:a="http://schemas.openxmlformats.org/drawingml/2006/main">
-            <a:r>
-              <a:t>学生动作：</a:t>
-            </a:r>
-          </a:p>
-          <a:p xmlns:a="http://schemas.openxmlformats.org/drawingml/2006/main">
-            <a:r>
-              <a:t/>
-            </a:r>
-          </a:p>
-          <a:p xmlns:a="http://schemas.openxmlformats.org/drawingml/2006/main">
-            <a:r>
-              <a:t/>
-            </a:r>
-          </a:p>
-          <a:p xmlns:a="http://schemas.openxmlformats.org/drawingml/2006/main">
-            <a:r>
-              <a:t>来源与边界：</a:t>
-            </a:r>
-          </a:p>
-          <a:p xmlns:a="http://schemas.openxmlformats.org/drawingml/2006/main">
-            <a:r>
-              <a:t>讲义 §二；assignments.md Checkpoint 4。</a:t>
-            </a:r>
-          </a:p>
-          <a:p xmlns:a="http://schemas.openxmlformats.org/drawingml/2006/main">
-            <a:r>
-              <a:t/>
-            </a:r>
-          </a:p>
-          <a:p xmlns:a="http://schemas.openxmlformats.org/drawingml/2006/main">
-            <a:r>
               <a:t>[Sources]</a:t>
             </a:r>
           </a:p>
           <a:p xmlns:a="http://schemas.openxmlformats.org/drawingml/2006/main">
             <a:r>
-              <a:t/>
-            </a:r>
-          </a:p>
-          <a:p xmlns:a="http://schemas.openxmlformats.org/drawingml/2006/main">
-            <a:r>
-              <a:t>- 本课 handout.md 与 slides.md</a:t>
-            </a:r>
-          </a:p>
-          <a:p xmlns:a="http://schemas.openxmlformats.org/drawingml/2006/main">
-            <a:r>
-              <a:t/>
-            </a:r>
-          </a:p>
-          <a:p xmlns:a="http://schemas.openxmlformats.org/drawingml/2006/main">
-            <a:r>
-              <a:t>- ../../course/reading-card-case.md</a:t>
-            </a:r>
-          </a:p>
-          <a:p xmlns:a="http://schemas.openxmlformats.org/drawingml/2006/main">
-            <a:r>
-              <a:t/>
+              <a:t>本课 handout.md、judgment-task.md；../../course/judgment-path.md。</a:t>
             </a:r>
           </a:p>
           <a:p xmlns:a="http://schemas.openxmlformats.org/drawingml/2006/main">
@@ -2752,7 +1872,7 @@
           </a:p>
           <a:p xmlns:a="http://schemas.openxmlformats.org/drawingml/2006/main">
             <a:r>
-              <a:t>讲义位置：本课讲义；见逐页母稿映射表</a:t>
+              <a:t>讲述与校准：</a:t>
             </a:r>
           </a:p>
           <a:p xmlns:a="http://schemas.openxmlformats.org/drawingml/2006/main">
@@ -2762,32 +1882,17 @@
           </a:p>
           <a:p xmlns:a="http://schemas.openxmlformats.org/drawingml/2006/main">
             <a:r>
-              <a:t>屏显核对：</a:t>
-            </a:r>
-          </a:p>
-          <a:p xmlns:a="http://schemas.openxmlformats.org/drawingml/2006/main">
-            <a:r>
-              <a:t>留下三条能执行的反馈：</a:t>
-            </a:r>
-          </a:p>
-          <a:p xmlns:a="http://schemas.openxmlformats.org/drawingml/2006/main">
-            <a:r>
               <a:t/>
             </a:r>
           </a:p>
           <a:p xmlns:a="http://schemas.openxmlformats.org/drawingml/2006/main">
             <a:r>
-              <a:t>最强处：证据在哪里？</a:t>
-            </a:r>
-          </a:p>
-          <a:p xmlns:a="http://schemas.openxmlformats.org/drawingml/2006/main">
-            <a:r>
-              <a:t>最大风险：会卡住哪条门条件？</a:t>
-            </a:r>
-          </a:p>
-          <a:p xmlns:a="http://schemas.openxmlformats.org/drawingml/2006/main">
-            <a:r>
-              <a:t>可执行建议：最小改动是什么？</a:t>
+              <a:t>学生动作：</a:t>
+            </a:r>
+          </a:p>
+          <a:p xmlns:a="http://schemas.openxmlformats.org/drawingml/2006/main">
+            <a:r>
+              <a:t>依据本页方法检查本人项目；按需参考。</a:t>
             </a:r>
           </a:p>
           <a:p xmlns:a="http://schemas.openxmlformats.org/drawingml/2006/main">
@@ -2797,12 +1902,7 @@
           </a:p>
           <a:p xmlns:a="http://schemas.openxmlformats.org/drawingml/2006/main">
             <a:r>
-              <a:t>指向具体段落、表、证据项或运行记录。</a:t>
-            </a:r>
-          </a:p>
-          <a:p xmlns:a="http://schemas.openxmlformats.org/drawingml/2006/main">
-            <a:r>
-              <a:t>本例核对点：Q1 包内一致；H1/A2 未决；质量与范围仍有缺口。</a:t>
+              <a:t>课堂安排：按 teaching-plan.md 专用课堂时段安排；换场计入对应时段。</a:t>
             </a:r>
           </a:p>
           <a:p xmlns:a="http://schemas.openxmlformats.org/drawingml/2006/main">
@@ -2812,77 +1912,12 @@
           </a:p>
           <a:p xmlns:a="http://schemas.openxmlformats.org/drawingml/2006/main">
             <a:r>
-              <a:t>教师讲述：</a:t>
-            </a:r>
-          </a:p>
-          <a:p xmlns:a="http://schemas.openxmlformats.org/drawingml/2006/main">
-            <a:r>
-              <a:t>禁止“挺好”“不严谨”“建议多做实验”这类无位置反馈。</a:t>
-            </a:r>
-          </a:p>
-          <a:p xmlns:a="http://schemas.openxmlformats.org/drawingml/2006/main">
-            <a:r>
-              <a:t/>
-            </a:r>
-          </a:p>
-          <a:p xmlns:a="http://schemas.openxmlformats.org/drawingml/2006/main">
-            <a:r>
-              <a:t>学生动作：</a:t>
-            </a:r>
-          </a:p>
-          <a:p xmlns:a="http://schemas.openxmlformats.org/drawingml/2006/main">
-            <a:r>
-              <a:t/>
-            </a:r>
-          </a:p>
-          <a:p xmlns:a="http://schemas.openxmlformats.org/drawingml/2006/main">
-            <a:r>
-              <a:t/>
-            </a:r>
-          </a:p>
-          <a:p xmlns:a="http://schemas.openxmlformats.org/drawingml/2006/main">
-            <a:r>
-              <a:t>来源与边界：</a:t>
-            </a:r>
-          </a:p>
-          <a:p xmlns:a="http://schemas.openxmlformats.org/drawingml/2006/main">
-            <a:r>
-              <a:t>讲义 §三—四。</a:t>
-            </a:r>
-          </a:p>
-          <a:p xmlns:a="http://schemas.openxmlformats.org/drawingml/2006/main">
-            <a:r>
-              <a:t/>
-            </a:r>
-          </a:p>
-          <a:p xmlns:a="http://schemas.openxmlformats.org/drawingml/2006/main">
-            <a:r>
               <a:t>[Sources]</a:t>
             </a:r>
           </a:p>
           <a:p xmlns:a="http://schemas.openxmlformats.org/drawingml/2006/main">
             <a:r>
-              <a:t/>
-            </a:r>
-          </a:p>
-          <a:p xmlns:a="http://schemas.openxmlformats.org/drawingml/2006/main">
-            <a:r>
-              <a:t>- 本课 handout.md 与 slides.md</a:t>
-            </a:r>
-          </a:p>
-          <a:p xmlns:a="http://schemas.openxmlformats.org/drawingml/2006/main">
-            <a:r>
-              <a:t/>
-            </a:r>
-          </a:p>
-          <a:p xmlns:a="http://schemas.openxmlformats.org/drawingml/2006/main">
-            <a:r>
-              <a:t>- ../../course/reading-card-case.md</a:t>
-            </a:r>
-          </a:p>
-          <a:p xmlns:a="http://schemas.openxmlformats.org/drawingml/2006/main">
-            <a:r>
-              <a:t/>
+              <a:t>本课 handout.md、judgment-task.md；../../course/judgment-path.md。</a:t>
             </a:r>
           </a:p>
           <a:p xmlns:a="http://schemas.openxmlformats.org/drawingml/2006/main">
@@ -2967,7 +2002,7 @@
           </a:p>
           <a:p xmlns:a="http://schemas.openxmlformats.org/drawingml/2006/main">
             <a:r>
-              <a:t>讲义位置：本课讲义；见逐页母稿映射表</a:t>
+              <a:t>讲述与校准：</a:t>
             </a:r>
           </a:p>
           <a:p xmlns:a="http://schemas.openxmlformats.org/drawingml/2006/main">
@@ -2977,22 +2012,17 @@
           </a:p>
           <a:p xmlns:a="http://schemas.openxmlformats.org/drawingml/2006/main">
             <a:r>
-              <a:t>屏显核对：</a:t>
-            </a:r>
-          </a:p>
-          <a:p xmlns:a="http://schemas.openxmlformats.org/drawingml/2006/main">
-            <a:r>
-              <a:t>输入：固定同伴 A 的真实初稿；第二轮换同伴 B 或三人组轮转。</a:t>
-            </a:r>
-          </a:p>
-          <a:p xmlns:a="http://schemas.openxmlformats.org/drawingml/2006/main">
-            <a:r>
               <a:t/>
             </a:r>
           </a:p>
           <a:p xmlns:a="http://schemas.openxmlformats.org/drawingml/2006/main">
             <a:r>
-              <a:t>保存：peer-review.md。</a:t>
+              <a:t>学生动作：</a:t>
+            </a:r>
+          </a:p>
+          <a:p xmlns:a="http://schemas.openxmlformats.org/drawingml/2006/main">
+            <a:r>
+              <a:t>依据本页方法检查本人项目；按需参考。</a:t>
             </a:r>
           </a:p>
           <a:p xmlns:a="http://schemas.openxmlformats.org/drawingml/2006/main">
@@ -3002,7 +2032,7 @@
           </a:p>
           <a:p xmlns:a="http://schemas.openxmlformats.org/drawingml/2006/main">
             <a:r>
-              <a:t>完成样例（课程构造）：位置=结果段；观察=把待验证写成 stable；风险=证据强度越界；建议=降级并补替代解释。</a:t>
+              <a:t>课堂安排：按 teaching-plan.md 专用课堂时段安排；换场计入对应时段。</a:t>
             </a:r>
           </a:p>
           <a:p xmlns:a="http://schemas.openxmlformats.org/drawingml/2006/main">
@@ -3012,87 +2042,12 @@
           </a:p>
           <a:p xmlns:a="http://schemas.openxmlformats.org/drawingml/2006/main">
             <a:r>
-              <a:t>记录版本、位置、观察、风险与建议；只记录，不当场辩论。</a:t>
-            </a:r>
-          </a:p>
-          <a:p xmlns:a="http://schemas.openxmlformats.org/drawingml/2006/main">
-            <a:r>
-              <a:t/>
-            </a:r>
-          </a:p>
-          <a:p xmlns:a="http://schemas.openxmlformats.org/drawingml/2006/main">
-            <a:r>
-              <a:t>教师讲述：</a:t>
-            </a:r>
-          </a:p>
-          <a:p xmlns:a="http://schemas.openxmlformats.org/drawingml/2006/main">
-            <a:r>
-              <a:t>实践停留页。每轮结束时提醒交换角色；教师只纠正泛化反馈。</a:t>
-            </a:r>
-          </a:p>
-          <a:p xmlns:a="http://schemas.openxmlformats.org/drawingml/2006/main">
-            <a:r>
-              <a:t/>
-            </a:r>
-          </a:p>
-          <a:p xmlns:a="http://schemas.openxmlformats.org/drawingml/2006/main">
-            <a:r>
-              <a:t>学生动作：</a:t>
-            </a:r>
-          </a:p>
-          <a:p xmlns:a="http://schemas.openxmlformats.org/drawingml/2006/main">
-            <a:r>
-              <a:t/>
-            </a:r>
-          </a:p>
-          <a:p xmlns:a="http://schemas.openxmlformats.org/drawingml/2006/main">
-            <a:r>
-              <a:t/>
-            </a:r>
-          </a:p>
-          <a:p xmlns:a="http://schemas.openxmlformats.org/drawingml/2006/main">
-            <a:r>
-              <a:t>来源与边界：</a:t>
-            </a:r>
-          </a:p>
-          <a:p xmlns:a="http://schemas.openxmlformats.org/drawingml/2006/main">
-            <a:r>
-              <a:t>讲义 §三、练习 3；分组沿用第 8 课。</a:t>
-            </a:r>
-          </a:p>
-          <a:p xmlns:a="http://schemas.openxmlformats.org/drawingml/2006/main">
-            <a:r>
-              <a:t/>
-            </a:r>
-          </a:p>
-          <a:p xmlns:a="http://schemas.openxmlformats.org/drawingml/2006/main">
-            <a:r>
               <a:t>[Sources]</a:t>
             </a:r>
           </a:p>
           <a:p xmlns:a="http://schemas.openxmlformats.org/drawingml/2006/main">
             <a:r>
-              <a:t/>
-            </a:r>
-          </a:p>
-          <a:p xmlns:a="http://schemas.openxmlformats.org/drawingml/2006/main">
-            <a:r>
-              <a:t>- 本课 handout.md 与 slides.md</a:t>
-            </a:r>
-          </a:p>
-          <a:p xmlns:a="http://schemas.openxmlformats.org/drawingml/2006/main">
-            <a:r>
-              <a:t/>
-            </a:r>
-          </a:p>
-          <a:p xmlns:a="http://schemas.openxmlformats.org/drawingml/2006/main">
-            <a:r>
-              <a:t>- ../../course/reading-card-case.md</a:t>
-            </a:r>
-          </a:p>
-          <a:p xmlns:a="http://schemas.openxmlformats.org/drawingml/2006/main">
-            <a:r>
-              <a:t/>
+              <a:t>本课 handout.md、judgment-task.md；../../course/judgment-path.md。</a:t>
             </a:r>
           </a:p>
           <a:p xmlns:a="http://schemas.openxmlformats.org/drawingml/2006/main">
@@ -3177,7 +2132,7 @@
           </a:p>
           <a:p xmlns:a="http://schemas.openxmlformats.org/drawingml/2006/main">
             <a:r>
-              <a:t>讲义位置：本课讲义；见逐页母稿映射表</a:t>
+              <a:t>讲述与校准：</a:t>
             </a:r>
           </a:p>
           <a:p xmlns:a="http://schemas.openxmlformats.org/drawingml/2006/main">
@@ -3187,22 +2142,17 @@
           </a:p>
           <a:p xmlns:a="http://schemas.openxmlformats.org/drawingml/2006/main">
             <a:r>
-              <a:t>屏显核对：</a:t>
-            </a:r>
-          </a:p>
-          <a:p xmlns:a="http://schemas.openxmlformats.org/drawingml/2006/main">
-            <a:r>
-              <a:t>采纳：缺陷成立，直接修改。</a:t>
-            </a:r>
-          </a:p>
-          <a:p xmlns:a="http://schemas.openxmlformats.org/drawingml/2006/main">
-            <a:r>
               <a:t/>
             </a:r>
           </a:p>
           <a:p xmlns:a="http://schemas.openxmlformats.org/drawingml/2006/main">
             <a:r>
-              <a:t>澄清：已有内容被误读。</a:t>
+              <a:t>学生动作：</a:t>
+            </a:r>
+          </a:p>
+          <a:p xmlns:a="http://schemas.openxmlformats.org/drawingml/2006/main">
+            <a:r>
+              <a:t>依据本页方法检查本人项目；按需参考。</a:t>
             </a:r>
           </a:p>
           <a:p xmlns:a="http://schemas.openxmlformats.org/drawingml/2006/main">
@@ -3212,7 +2162,7 @@
           </a:p>
           <a:p xmlns:a="http://schemas.openxmlformats.org/drawingml/2006/main">
             <a:r>
-              <a:t>补证：需要新增证据或实验。</a:t>
+              <a:t>课堂安排：按 teaching-plan.md 专用课堂时段安排；换场计入对应时段。</a:t>
             </a:r>
           </a:p>
           <a:p xmlns:a="http://schemas.openxmlformats.org/drawingml/2006/main">
@@ -3222,107 +2172,12 @@
           </a:p>
           <a:p xmlns:a="http://schemas.openxmlformats.org/drawingml/2006/main">
             <a:r>
-              <a:t>保留异议：意见与证据或约束冲突。</a:t>
-            </a:r>
-          </a:p>
-          <a:p xmlns:a="http://schemas.openxmlformats.org/drawingml/2006/main">
-            <a:r>
-              <a:t/>
-            </a:r>
-          </a:p>
-          <a:p xmlns:a="http://schemas.openxmlformats.org/drawingml/2006/main">
-            <a:r>
-              <a:t>暂缓：当前条件不足，写阻塞、风险与复核点。</a:t>
-            </a:r>
-          </a:p>
-          <a:p xmlns:a="http://schemas.openxmlformats.org/drawingml/2006/main">
-            <a:r>
-              <a:t/>
-            </a:r>
-          </a:p>
-          <a:p xmlns:a="http://schemas.openxmlformats.org/drawingml/2006/main">
-            <a:r>
-              <a:t>不要求五类齐全，也不要求机械拒绝。</a:t>
-            </a:r>
-          </a:p>
-          <a:p xmlns:a="http://schemas.openxmlformats.org/drawingml/2006/main">
-            <a:r>
-              <a:t/>
-            </a:r>
-          </a:p>
-          <a:p xmlns:a="http://schemas.openxmlformats.org/drawingml/2006/main">
-            <a:r>
-              <a:t>教师讲述：</a:t>
-            </a:r>
-          </a:p>
-          <a:p xmlns:a="http://schemas.openxmlformats.org/drawingml/2006/main">
-            <a:r>
-              <a:t>暂缓不等于搁置：写明阻塞、风险和下次复核点。</a:t>
-            </a:r>
-          </a:p>
-          <a:p xmlns:a="http://schemas.openxmlformats.org/drawingml/2006/main">
-            <a:r>
-              <a:t/>
-            </a:r>
-          </a:p>
-          <a:p xmlns:a="http://schemas.openxmlformats.org/drawingml/2006/main">
-            <a:r>
-              <a:t>学生动作：</a:t>
-            </a:r>
-          </a:p>
-          <a:p xmlns:a="http://schemas.openxmlformats.org/drawingml/2006/main">
-            <a:r>
-              <a:t/>
-            </a:r>
-          </a:p>
-          <a:p xmlns:a="http://schemas.openxmlformats.org/drawingml/2006/main">
-            <a:r>
-              <a:t/>
-            </a:r>
-          </a:p>
-          <a:p xmlns:a="http://schemas.openxmlformats.org/drawingml/2006/main">
-            <a:r>
-              <a:t>来源与边界：</a:t>
-            </a:r>
-          </a:p>
-          <a:p xmlns:a="http://schemas.openxmlformats.org/drawingml/2006/main">
-            <a:r>
-              <a:t>讲义 §五；Booth et al. Ch. 9, 11。</a:t>
-            </a:r>
-          </a:p>
-          <a:p xmlns:a="http://schemas.openxmlformats.org/drawingml/2006/main">
-            <a:r>
-              <a:t/>
-            </a:r>
-          </a:p>
-          <a:p xmlns:a="http://schemas.openxmlformats.org/drawingml/2006/main">
-            <a:r>
               <a:t>[Sources]</a:t>
             </a:r>
           </a:p>
           <a:p xmlns:a="http://schemas.openxmlformats.org/drawingml/2006/main">
             <a:r>
-              <a:t/>
-            </a:r>
-          </a:p>
-          <a:p xmlns:a="http://schemas.openxmlformats.org/drawingml/2006/main">
-            <a:r>
-              <a:t>- 本课 handout.md 与 slides.md</a:t>
-            </a:r>
-          </a:p>
-          <a:p xmlns:a="http://schemas.openxmlformats.org/drawingml/2006/main">
-            <a:r>
-              <a:t/>
-            </a:r>
-          </a:p>
-          <a:p xmlns:a="http://schemas.openxmlformats.org/drawingml/2006/main">
-            <a:r>
-              <a:t>- ../../course/reading-card-case.md</a:t>
-            </a:r>
-          </a:p>
-          <a:p xmlns:a="http://schemas.openxmlformats.org/drawingml/2006/main">
-            <a:r>
-              <a:t/>
+              <a:t>本课 handout.md、judgment-task.md；../../course/judgment-path.md。</a:t>
             </a:r>
           </a:p>
           <a:p xmlns:a="http://schemas.openxmlformats.org/drawingml/2006/main">
@@ -3407,7 +2262,7 @@
           </a:p>
           <a:p xmlns:a="http://schemas.openxmlformats.org/drawingml/2006/main">
             <a:r>
-              <a:t>讲义位置：本课讲义；见逐页母稿映射表</a:t>
+              <a:t>讲述与校准：</a:t>
             </a:r>
           </a:p>
           <a:p xmlns:a="http://schemas.openxmlformats.org/drawingml/2006/main">
@@ -3417,22 +2272,17 @@
           </a:p>
           <a:p xmlns:a="http://schemas.openxmlformats.org/drawingml/2006/main">
             <a:r>
-              <a:t>屏显核对：</a:t>
-            </a:r>
-          </a:p>
-          <a:p xmlns:a="http://schemas.openxmlformats.org/drawingml/2006/main">
-            <a:r>
-              <a:t>课程虚构回应样例</a:t>
-            </a:r>
-          </a:p>
-          <a:p xmlns:a="http://schemas.openxmlformats.org/drawingml/2006/main">
-            <a:r>
               <a:t/>
             </a:r>
           </a:p>
           <a:p xmlns:a="http://schemas.openxmlformats.org/drawingml/2006/main">
             <a:r>
-              <a:t>动作：采纳；理由：当前证据不能排除替代解释。</a:t>
+              <a:t>学生动作：</a:t>
+            </a:r>
+          </a:p>
+          <a:p xmlns:a="http://schemas.openxmlformats.org/drawingml/2006/main">
+            <a:r>
+              <a:t>依据本页方法检查本人项目；按需参考。</a:t>
             </a:r>
           </a:p>
           <a:p xmlns:a="http://schemas.openxmlformats.org/drawingml/2006/main">
@@ -3442,7 +2292,7 @@
           </a:p>
           <a:p xmlns:a="http://schemas.openxmlformats.org/drawingml/2006/main">
             <a:r>
-              <a:t>边界：同一批 3 份构造源文本；依据：评价报告 §2。</a:t>
+              <a:t>课堂安排：按 teaching-plan.md 专用课堂时段安排；换场计入对应时段。</a:t>
             </a:r>
           </a:p>
           <a:p xmlns:a="http://schemas.openxmlformats.org/drawingml/2006/main">
@@ -3452,97 +2302,12 @@
           </a:p>
           <a:p xmlns:a="http://schemas.openxmlformats.org/drawingml/2006/main">
             <a:r>
-              <a:t>主张方向：Q1 包内一致、H1/A2 未决；工件：review；影响工件：report.md、结论追踪记录。</a:t>
-            </a:r>
-          </a:p>
-          <a:p xmlns:a="http://schemas.openxmlformats.org/drawingml/2006/main">
-            <a:r>
-              <a:t/>
-            </a:r>
-          </a:p>
-          <a:p xmlns:a="http://schemas.openxmlformats.org/drawingml/2006/main">
-            <a:r>
-              <a:t>回应写入 peer-review.md；优先级写入 revision-plan.md。</a:t>
-            </a:r>
-          </a:p>
-          <a:p xmlns:a="http://schemas.openxmlformats.org/drawingml/2006/main">
-            <a:r>
-              <a:t/>
-            </a:r>
-          </a:p>
-          <a:p xmlns:a="http://schemas.openxmlformats.org/drawingml/2006/main">
-            <a:r>
-              <a:t>教师讲述：</a:t>
-            </a:r>
-          </a:p>
-          <a:p xmlns:a="http://schemas.openxmlformats.org/drawingml/2006/main">
-            <a:r>
-              <a:t>实践停留页。作者处理收到的真实意见；不凑类别。</a:t>
-            </a:r>
-          </a:p>
-          <a:p xmlns:a="http://schemas.openxmlformats.org/drawingml/2006/main">
-            <a:r>
-              <a:t/>
-            </a:r>
-          </a:p>
-          <a:p xmlns:a="http://schemas.openxmlformats.org/drawingml/2006/main">
-            <a:r>
-              <a:t>学生动作：</a:t>
-            </a:r>
-          </a:p>
-          <a:p xmlns:a="http://schemas.openxmlformats.org/drawingml/2006/main">
-            <a:r>
-              <a:t/>
-            </a:r>
-          </a:p>
-          <a:p xmlns:a="http://schemas.openxmlformats.org/drawingml/2006/main">
-            <a:r>
-              <a:t/>
-            </a:r>
-          </a:p>
-          <a:p xmlns:a="http://schemas.openxmlformats.org/drawingml/2006/main">
-            <a:r>
-              <a:t>来源与边界：</a:t>
-            </a:r>
-          </a:p>
-          <a:p xmlns:a="http://schemas.openxmlformats.org/drawingml/2006/main">
-            <a:r>
-              <a:t>讲义 §五；模板文件。</a:t>
-            </a:r>
-          </a:p>
-          <a:p xmlns:a="http://schemas.openxmlformats.org/drawingml/2006/main">
-            <a:r>
-              <a:t/>
-            </a:r>
-          </a:p>
-          <a:p xmlns:a="http://schemas.openxmlformats.org/drawingml/2006/main">
-            <a:r>
               <a:t>[Sources]</a:t>
             </a:r>
           </a:p>
           <a:p xmlns:a="http://schemas.openxmlformats.org/drawingml/2006/main">
             <a:r>
-              <a:t/>
-            </a:r>
-          </a:p>
-          <a:p xmlns:a="http://schemas.openxmlformats.org/drawingml/2006/main">
-            <a:r>
-              <a:t>- 本课 handout.md 与 slides.md</a:t>
-            </a:r>
-          </a:p>
-          <a:p xmlns:a="http://schemas.openxmlformats.org/drawingml/2006/main">
-            <a:r>
-              <a:t/>
-            </a:r>
-          </a:p>
-          <a:p xmlns:a="http://schemas.openxmlformats.org/drawingml/2006/main">
-            <a:r>
-              <a:t>- ../../course/reading-card-case.md</a:t>
-            </a:r>
-          </a:p>
-          <a:p xmlns:a="http://schemas.openxmlformats.org/drawingml/2006/main">
-            <a:r>
-              <a:t/>
+              <a:t>本课 handout.md、judgment-task.md；../../course/judgment-path.md。</a:t>
             </a:r>
           </a:p>
           <a:p xmlns:a="http://schemas.openxmlformats.org/drawingml/2006/main">
@@ -5479,35 +4244,55 @@
       </p:grpSpPr>
       <p:sp>
         <p:nvSpPr>
-          <p:cNvPr id="4" name="Text Placeholder 3">
-            <a:extLst xmlns:a="http://schemas.openxmlformats.org/drawingml/2006/main">
-              <a:ext uri="{FF2B5EF4-FFF2-40B4-BE49-F238E27FC236}">
-                <a16:creationId xmlns:a16="http://schemas.microsoft.com/office/drawing/2014/main" id="{4D941B40-7A0A-534E-3563-CA11753C8E3F}"/>
-              </a:ext>
-            </a:extLst>
-          </p:cNvPr>
-          <p:cNvSpPr>
-            <a:spLocks xmlns:a="http://schemas.openxmlformats.org/drawingml/2006/main" noGrp="1"/>
-          </p:cNvSpPr>
-          <p:nvPr>
-            <p:ph type="body" idx="14"/>
-          </p:nvPr>
-        </p:nvSpPr>
-        <p:spPr>
-          <a:xfrm xmlns:a="http://schemas.openxmlformats.org/drawingml/2006/main">
-            <a:off x="1028700" y="57150"/>
-            <a:ext cx="10668000" cy="571500"/>
-          </a:xfrm>
-        </p:spPr>
-        <p:txBody>
-          <a:bodyPr xmlns:a="http://schemas.openxmlformats.org/drawingml/2006/main" lIns="0" tIns="0" rIns="0" bIns="0" anchor="ctr"/>
-          <a:lstStyle xmlns:a="http://schemas.openxmlformats.org/drawingml/2006/main"/>
+          <p:cNvPr id="7" name="judgment-title">
+            <a:extLst xmlns:a="http://schemas.openxmlformats.org/drawingml/2006/main">
+              <a:ext uri="{FF2B5EF4-FFF2-40B4-BE49-F238E27FC236}">
+                <a16:creationId xmlns:a16="http://schemas.microsoft.com/office/drawing/2014/main" id="{38D8EBAA-C889-4DC1-A1A1-D806DA4F3F2A}"/>
+              </a:ext>
+            </a:extLst>
+          </p:cNvPr>
+          <p:cNvSpPr>
+            <a:spLocks xmlns:a="http://schemas.openxmlformats.org/drawingml/2006/main" noGrp="1"/>
+          </p:cNvSpPr>
+          <p:nvPr/>
+        </p:nvSpPr>
+        <p:spPr>
+          <a:xfrm xmlns:a="http://schemas.openxmlformats.org/drawingml/2006/main">
+            <a:off x="1028700" y="76200"/>
+            <a:ext cx="10687050" cy="514350"/>
+          </a:xfrm>
+          <a:prstGeom xmlns:a="http://schemas.openxmlformats.org/drawingml/2006/main" prst="rect">
+            <a:avLst/>
+          </a:prstGeom>
+          <a:noFill xmlns:a="http://schemas.openxmlformats.org/drawingml/2006/main"/>
+          <a:ln xmlns:a="http://schemas.openxmlformats.org/drawingml/2006/main" w="0">
+            <a:noFill/>
+          </a:ln>
+        </p:spPr>
+        <p:txBody>
+          <a:bodyPr xmlns:a="http://schemas.openxmlformats.org/drawingml/2006/main" lIns="0" tIns="0" rIns="0" bIns="0" anchor="t"/>
+          <a:lstStyle xmlns:a="http://schemas.openxmlformats.org/drawingml/2006/main">
+            <a:defPPr algn="l">
+              <a:defRPr sz="3000" b="1">
+                <a:solidFill>
+                  <a:srgbClr val="FFFFFF"/>
+                </a:solidFill>
+                <a:latin typeface="微软雅黑"/>
+                <a:ea typeface="微软雅黑"/>
+                <a:cs typeface="微软雅黑"/>
+              </a:defRPr>
+            </a:defPPr>
+          </a:lstStyle>
           <a:p xmlns:a="http://schemas.openxmlformats.org/drawingml/2006/main">
             <a:pPr algn="l">
-              <a:lnSpc>
-                <a:spcPct val="118000"/>
-              </a:lnSpc>
-              <a:buNone/>
+              <a:defRPr sz="3000" b="1">
+                <a:solidFill>
+                  <a:srgbClr val="FFFFFF"/>
+                </a:solidFill>
+                <a:latin typeface="微软雅黑"/>
+                <a:ea typeface="微软雅黑"/>
+                <a:cs typeface="微软雅黑"/>
+              </a:defRPr>
             </a:pPr>
             <a:r>
               <a:rPr sz="3000" b="1">
@@ -5518,385 +4303,337 @@
                 <a:ea typeface="微软雅黑"/>
                 <a:cs typeface="微软雅黑"/>
               </a:rPr>
-              <a:t>现在修改最可能卡门的一项</a:t>
-            </a:r>
-            <a:endParaRPr/>
-          </a:p>
-        </p:txBody>
-      </p:sp>
-      <p:sp>
-        <p:nvSpPr>
-          <p:cNvPr id="5" name="Slide Number Placeholder 4">
-            <a:extLst xmlns:a="http://schemas.openxmlformats.org/drawingml/2006/main">
-              <a:ext uri="{FF2B5EF4-FFF2-40B4-BE49-F238E27FC236}">
-                <a16:creationId xmlns:a16="http://schemas.microsoft.com/office/drawing/2014/main" id="{EBA5909F-738E-F60C-BE8C-B3F1D94548E5}"/>
-              </a:ext>
-            </a:extLst>
-          </p:cNvPr>
-          <p:cNvSpPr>
-            <a:spLocks xmlns:a="http://schemas.openxmlformats.org/drawingml/2006/main" noGrp="1"/>
-          </p:cNvSpPr>
-          <p:nvPr>
-            <p:ph type="sldNum" idx="10"/>
-          </p:nvPr>
-        </p:nvSpPr>
-        <p:spPr/>
-        <p:txBody>
-          <a:bodyPr xmlns:a="http://schemas.openxmlformats.org/drawingml/2006/main"/>
-          <a:lstStyle xmlns:a="http://schemas.openxmlformats.org/drawingml/2006/main"/>
-          <a:p xmlns:a="http://schemas.openxmlformats.org/drawingml/2006/main">
-            <a:fld id="{DB7BEEEC-A170-5376-2B6E-CB54687B0CB1}" type="slidenum">
+              <a:t>本人项目：决定、核验与回写</a:t>
+            </a:r>
+          </a:p>
+        </p:txBody>
+      </p:sp>
+      <p:sp>
+        <p:nvSpPr>
+          <p:cNvPr id="2" name="judgment-body-0">
+            <a:extLst xmlns:a="http://schemas.openxmlformats.org/drawingml/2006/main">
+              <a:ext uri="{FF2B5EF4-FFF2-40B4-BE49-F238E27FC236}">
+                <a16:creationId xmlns:a16="http://schemas.microsoft.com/office/drawing/2014/main" id="{5F7D3881-668A-487A-AB4A-A677B3BB492A}"/>
+              </a:ext>
+            </a:extLst>
+          </p:cNvPr>
+          <p:cNvSpPr>
+            <a:spLocks xmlns:a="http://schemas.openxmlformats.org/drawingml/2006/main" noGrp="1"/>
+          </p:cNvSpPr>
+          <p:nvPr/>
+        </p:nvSpPr>
+        <p:spPr>
+          <a:xfrm xmlns:a="http://schemas.openxmlformats.org/drawingml/2006/main">
+            <a:off x="666750" y="1066800"/>
+            <a:ext cx="10858500" cy="1476375"/>
+          </a:xfrm>
+          <a:prstGeom xmlns:a="http://schemas.openxmlformats.org/drawingml/2006/main" prst="rect">
+            <a:avLst/>
+          </a:prstGeom>
+          <a:noFill xmlns:a="http://schemas.openxmlformats.org/drawingml/2006/main"/>
+          <a:ln xmlns:a="http://schemas.openxmlformats.org/drawingml/2006/main" w="0">
+            <a:noFill/>
+          </a:ln>
+        </p:spPr>
+        <p:txBody>
+          <a:bodyPr xmlns:a="http://schemas.openxmlformats.org/drawingml/2006/main" lIns="0" tIns="0" rIns="0" bIns="0" anchor="t"/>
+          <a:lstStyle xmlns:a="http://schemas.openxmlformats.org/drawingml/2006/main">
+            <a:defPPr algn="l">
+              <a:defRPr sz="2400" b="0">
+                <a:solidFill>
+                  <a:srgbClr val="263746"/>
+                </a:solidFill>
+                <a:latin typeface="微软雅黑"/>
+                <a:ea typeface="微软雅黑"/>
+                <a:cs typeface="微软雅黑"/>
+              </a:defRPr>
+            </a:defPPr>
+          </a:lstStyle>
+          <a:p xmlns:a="http://schemas.openxmlformats.org/drawingml/2006/main">
+            <a:pPr algn="l">
+              <a:defRPr sz="2400" b="0">
+                <a:solidFill>
+                  <a:srgbClr val="263746"/>
+                </a:solidFill>
+                <a:latin typeface="微软雅黑"/>
+                <a:ea typeface="微软雅黑"/>
+                <a:cs typeface="微软雅黑"/>
+              </a:defRPr>
+            </a:pPr>
+            <a:r>
+              <a:rPr sz="2400" b="0">
+                <a:solidFill>
+                  <a:srgbClr val="263746"/>
+                </a:solidFill>
+                <a:latin typeface="微软雅黑"/>
+                <a:ea typeface="微软雅黑"/>
+                <a:cs typeface="微软雅黑"/>
+              </a:rPr>
+              <a:t>保留两轮真实互评和现场修改。作者对意见接受、澄清、补证、保留异议或暂缓，至少完成一项影响论证的实际修订。</a:t>
+            </a:r>
+          </a:p>
+        </p:txBody>
+      </p:sp>
+      <p:sp>
+        <p:nvSpPr>
+          <p:cNvPr id="3" name="judgment-body-1">
+            <a:extLst xmlns:a="http://schemas.openxmlformats.org/drawingml/2006/main">
+              <a:ext uri="{FF2B5EF4-FFF2-40B4-BE49-F238E27FC236}">
+                <a16:creationId xmlns:a16="http://schemas.microsoft.com/office/drawing/2014/main" id="{911509BA-F02E-416E-B23B-10AA36468D45}"/>
+              </a:ext>
+            </a:extLst>
+          </p:cNvPr>
+          <p:cNvSpPr>
+            <a:spLocks xmlns:a="http://schemas.openxmlformats.org/drawingml/2006/main" noGrp="1"/>
+          </p:cNvSpPr>
+          <p:nvPr/>
+        </p:nvSpPr>
+        <p:spPr>
+          <a:xfrm xmlns:a="http://schemas.openxmlformats.org/drawingml/2006/main">
+            <a:off x="666750" y="2724150"/>
+            <a:ext cx="10858500" cy="1524000"/>
+          </a:xfrm>
+          <a:prstGeom xmlns:a="http://schemas.openxmlformats.org/drawingml/2006/main" prst="rect">
+            <a:avLst/>
+          </a:prstGeom>
+          <a:noFill xmlns:a="http://schemas.openxmlformats.org/drawingml/2006/main"/>
+          <a:ln xmlns:a="http://schemas.openxmlformats.org/drawingml/2006/main" w="0">
+            <a:noFill/>
+          </a:ln>
+        </p:spPr>
+        <p:txBody>
+          <a:bodyPr xmlns:a="http://schemas.openxmlformats.org/drawingml/2006/main" lIns="0" tIns="0" rIns="0" bIns="0" anchor="t"/>
+          <a:lstStyle xmlns:a="http://schemas.openxmlformats.org/drawingml/2006/main">
+            <a:defPPr algn="l">
+              <a:defRPr sz="2400" b="0">
+                <a:solidFill>
+                  <a:srgbClr val="263746"/>
+                </a:solidFill>
+                <a:latin typeface="微软雅黑"/>
+                <a:ea typeface="微软雅黑"/>
+                <a:cs typeface="微软雅黑"/>
+              </a:defRPr>
+            </a:defPPr>
+          </a:lstStyle>
+          <a:p xmlns:a="http://schemas.openxmlformats.org/drawingml/2006/main">
+            <a:pPr algn="l">
+              <a:defRPr sz="2400" b="0">
+                <a:solidFill>
+                  <a:srgbClr val="263746"/>
+                </a:solidFill>
+                <a:latin typeface="微软雅黑"/>
+                <a:ea typeface="微软雅黑"/>
+                <a:cs typeface="微软雅黑"/>
+              </a:defRPr>
+            </a:pPr>
+            <a:r>
+              <a:rPr sz="2400" b="0">
+                <a:solidFill>
+                  <a:srgbClr val="263746"/>
+                </a:solidFill>
+                <a:latin typeface="微软雅黑"/>
+                <a:ea typeface="微软雅黑"/>
+                <a:cs typeface="微软雅黑"/>
+              </a:rPr>
+              <a:t>检查正文与表格、追踪记录、状态同时更新；真实意见逐条回应，处理类别不凑数；剩余缺口在 L16 抽查中可解释。</a:t>
+            </a:r>
+          </a:p>
+        </p:txBody>
+      </p:sp>
+      <p:sp>
+        <p:nvSpPr>
+          <p:cNvPr id="4" name="judgment-body-2">
+            <a:extLst xmlns:a="http://schemas.openxmlformats.org/drawingml/2006/main">
+              <a:ext uri="{FF2B5EF4-FFF2-40B4-BE49-F238E27FC236}">
+                <a16:creationId xmlns:a16="http://schemas.microsoft.com/office/drawing/2014/main" id="{9854EBBC-AEF7-4876-A9BF-E79E3B2B494F}"/>
+              </a:ext>
+            </a:extLst>
+          </p:cNvPr>
+          <p:cNvSpPr>
+            <a:spLocks xmlns:a="http://schemas.openxmlformats.org/drawingml/2006/main" noGrp="1"/>
+          </p:cNvSpPr>
+          <p:nvPr/>
+        </p:nvSpPr>
+        <p:spPr>
+          <a:xfrm xmlns:a="http://schemas.openxmlformats.org/drawingml/2006/main">
+            <a:off x="666750" y="4457700"/>
+            <a:ext cx="10858500" cy="1466850"/>
+          </a:xfrm>
+          <a:prstGeom xmlns:a="http://schemas.openxmlformats.org/drawingml/2006/main" prst="rect">
+            <a:avLst/>
+          </a:prstGeom>
+          <a:noFill xmlns:a="http://schemas.openxmlformats.org/drawingml/2006/main"/>
+          <a:ln xmlns:a="http://schemas.openxmlformats.org/drawingml/2006/main" w="0">
+            <a:noFill/>
+          </a:ln>
+        </p:spPr>
+        <p:txBody>
+          <a:bodyPr xmlns:a="http://schemas.openxmlformats.org/drawingml/2006/main" lIns="0" tIns="0" rIns="0" bIns="0" anchor="t"/>
+          <a:lstStyle xmlns:a="http://schemas.openxmlformats.org/drawingml/2006/main">
+            <a:defPPr algn="l">
+              <a:defRPr sz="2200" b="0">
+                <a:solidFill>
+                  <a:srgbClr val="1F4D78"/>
+                </a:solidFill>
+                <a:latin typeface="微软雅黑"/>
+                <a:ea typeface="微软雅黑"/>
+                <a:cs typeface="微软雅黑"/>
+              </a:defRPr>
+            </a:defPPr>
+          </a:lstStyle>
+          <a:p xmlns:a="http://schemas.openxmlformats.org/drawingml/2006/main">
+            <a:pPr algn="l">
+              <a:defRPr sz="2200" b="0">
+                <a:solidFill>
+                  <a:srgbClr val="1F4D78"/>
+                </a:solidFill>
+                <a:latin typeface="微软雅黑"/>
+                <a:ea typeface="微软雅黑"/>
+                <a:cs typeface="微软雅黑"/>
+              </a:defRPr>
+            </a:pPr>
+            <a:r>
+              <a:rPr sz="2200" b="0">
+                <a:solidFill>
+                  <a:srgbClr val="1F4D78"/>
+                </a:solidFill>
+                <a:latin typeface="微软雅黑"/>
+                <a:ea typeface="微软雅黑"/>
+                <a:cs typeface="微软雅黑"/>
+              </a:rPr>
+              <a:t>保存：真实评审意见、处理理由、实际 diff 与论证门预检</a:t>
+            </a:r>
+          </a:p>
+        </p:txBody>
+      </p:sp>
+      <p:sp>
+        <p:nvSpPr>
+          <p:cNvPr id="5" name="judgment-source">
+            <a:extLst xmlns:a="http://schemas.openxmlformats.org/drawingml/2006/main">
+              <a:ext uri="{FF2B5EF4-FFF2-40B4-BE49-F238E27FC236}">
+                <a16:creationId xmlns:a16="http://schemas.microsoft.com/office/drawing/2014/main" id="{255FBC3D-A212-4073-B2FF-6A3152AF5C41}"/>
+              </a:ext>
+            </a:extLst>
+          </p:cNvPr>
+          <p:cNvSpPr>
+            <a:spLocks xmlns:a="http://schemas.openxmlformats.org/drawingml/2006/main" noGrp="1"/>
+          </p:cNvSpPr>
+          <p:nvPr/>
+        </p:nvSpPr>
+        <p:spPr>
+          <a:xfrm xmlns:a="http://schemas.openxmlformats.org/drawingml/2006/main">
+            <a:off x="666750" y="6276975"/>
+            <a:ext cx="10572750" cy="209550"/>
+          </a:xfrm>
+          <a:prstGeom xmlns:a="http://schemas.openxmlformats.org/drawingml/2006/main" prst="rect">
+            <a:avLst/>
+          </a:prstGeom>
+          <a:noFill xmlns:a="http://schemas.openxmlformats.org/drawingml/2006/main"/>
+          <a:ln xmlns:a="http://schemas.openxmlformats.org/drawingml/2006/main" w="0">
+            <a:noFill/>
+          </a:ln>
+        </p:spPr>
+        <p:txBody>
+          <a:bodyPr xmlns:a="http://schemas.openxmlformats.org/drawingml/2006/main" lIns="0" tIns="0" rIns="0" bIns="0" anchor="t"/>
+          <a:lstStyle xmlns:a="http://schemas.openxmlformats.org/drawingml/2006/main">
+            <a:defPPr algn="l">
+              <a:defRPr sz="1100" b="0">
+                <a:solidFill>
+                  <a:srgbClr val="667684"/>
+                </a:solidFill>
+                <a:latin typeface="微软雅黑"/>
+                <a:ea typeface="微软雅黑"/>
+                <a:cs typeface="微软雅黑"/>
+              </a:defRPr>
+            </a:defPPr>
+          </a:lstStyle>
+          <a:p xmlns:a="http://schemas.openxmlformats.org/drawingml/2006/main">
+            <a:pPr algn="l">
+              <a:defRPr sz="1100" b="0">
+                <a:solidFill>
+                  <a:srgbClr val="667684"/>
+                </a:solidFill>
+                <a:latin typeface="微软雅黑"/>
+                <a:ea typeface="微软雅黑"/>
+                <a:cs typeface="微软雅黑"/>
+              </a:defRPr>
+            </a:pPr>
+            <a:r>
+              <a:rPr sz="1100" b="0">
+                <a:solidFill>
+                  <a:srgbClr val="667684"/>
+                </a:solidFill>
+                <a:latin typeface="微软雅黑"/>
+                <a:ea typeface="微软雅黑"/>
+                <a:cs typeface="微软雅黑"/>
+              </a:rPr>
+              <a:t>来源：本课判断任务与讲义；构造材料及真实来源按材料包标识</a:t>
+            </a:r>
+          </a:p>
+        </p:txBody>
+      </p:sp>
+      <p:sp>
+        <p:nvSpPr>
+          <p:cNvPr id="6" name="judgment-page">
+            <a:extLst xmlns:a="http://schemas.openxmlformats.org/drawingml/2006/main">
+              <a:ext uri="{FF2B5EF4-FFF2-40B4-BE49-F238E27FC236}">
+                <a16:creationId xmlns:a16="http://schemas.microsoft.com/office/drawing/2014/main" id="{07EBA216-9E69-4B77-8487-26732FC06FB8}"/>
+              </a:ext>
+            </a:extLst>
+          </p:cNvPr>
+          <p:cNvSpPr>
+            <a:spLocks xmlns:a="http://schemas.openxmlformats.org/drawingml/2006/main" noGrp="1"/>
+          </p:cNvSpPr>
+          <p:nvPr/>
+        </p:nvSpPr>
+        <p:spPr>
+          <a:xfrm xmlns:a="http://schemas.openxmlformats.org/drawingml/2006/main">
+            <a:off x="11715750" y="6562725"/>
+            <a:ext cx="238125" cy="171450"/>
+          </a:xfrm>
+          <a:prstGeom xmlns:a="http://schemas.openxmlformats.org/drawingml/2006/main" prst="rect">
+            <a:avLst/>
+          </a:prstGeom>
+          <a:noFill xmlns:a="http://schemas.openxmlformats.org/drawingml/2006/main"/>
+          <a:ln xmlns:a="http://schemas.openxmlformats.org/drawingml/2006/main" w="0">
+            <a:noFill/>
+          </a:ln>
+        </p:spPr>
+        <p:txBody>
+          <a:bodyPr xmlns:a="http://schemas.openxmlformats.org/drawingml/2006/main" lIns="0" tIns="0" rIns="0" bIns="0" anchor="t"/>
+          <a:lstStyle xmlns:a="http://schemas.openxmlformats.org/drawingml/2006/main">
+            <a:defPPr algn="l">
+              <a:defRPr sz="900" b="0">
+                <a:solidFill>
+                  <a:srgbClr val="A5A5A5"/>
+                </a:solidFill>
+                <a:latin typeface="微软雅黑"/>
+                <a:ea typeface="微软雅黑"/>
+                <a:cs typeface="微软雅黑"/>
+              </a:defRPr>
+            </a:defPPr>
+          </a:lstStyle>
+          <a:p xmlns:a="http://schemas.openxmlformats.org/drawingml/2006/main">
+            <a:pPr algn="l">
+              <a:defRPr sz="900" b="0">
+                <a:solidFill>
+                  <a:srgbClr val="A5A5A5"/>
+                </a:solidFill>
+                <a:latin typeface="微软雅黑"/>
+                <a:ea typeface="微软雅黑"/>
+                <a:cs typeface="微软雅黑"/>
+              </a:defRPr>
+            </a:pPr>
+            <a:r>
+              <a:rPr sz="900" b="0">
+                <a:solidFill>
+                  <a:srgbClr val="A5A5A5"/>
+                </a:solidFill>
+                <a:latin typeface="微软雅黑"/>
+                <a:ea typeface="微软雅黑"/>
+                <a:cs typeface="微软雅黑"/>
+              </a:rPr>
               <a:t>10</a:t>
-            </a:fld>
-            <a:endParaRPr/>
-          </a:p>
-        </p:txBody>
-      </p:sp>
-      <p:sp>
-        <p:nvSpPr>
-          <p:cNvPr id="6" name="content-216">
-            <a:extLst xmlns:a="http://schemas.openxmlformats.org/drawingml/2006/main">
-              <a:ext uri="{FF2B5EF4-FFF2-40B4-BE49-F238E27FC236}">
-                <a16:creationId xmlns:a16="http://schemas.microsoft.com/office/drawing/2014/main" id="{1DADE4D9-19F5-4549-92C4-F385C156DA95}"/>
-              </a:ext>
-            </a:extLst>
-          </p:cNvPr>
-          <p:cNvSpPr>
-            <a:spLocks xmlns:a="http://schemas.openxmlformats.org/drawingml/2006/main" noGrp="1"/>
-          </p:cNvSpPr>
-          <p:nvPr/>
-        </p:nvSpPr>
-        <p:spPr>
-          <a:xfrm xmlns:a="http://schemas.openxmlformats.org/drawingml/2006/main">
-            <a:off x="609600" y="1009650"/>
-            <a:ext cx="10972800" cy="342900"/>
-          </a:xfrm>
-          <a:prstGeom xmlns:a="http://schemas.openxmlformats.org/drawingml/2006/main" prst="rect">
-            <a:avLst/>
-          </a:prstGeom>
-          <a:noFill xmlns:a="http://schemas.openxmlformats.org/drawingml/2006/main"/>
-          <a:ln xmlns:a="http://schemas.openxmlformats.org/drawingml/2006/main" w="0">
-            <a:noFill/>
-          </a:ln>
-        </p:spPr>
-        <p:txBody>
-          <a:bodyPr xmlns:a="http://schemas.openxmlformats.org/drawingml/2006/main" lIns="0" tIns="0" rIns="0" bIns="0" anchor="t"/>
-          <a:lstStyle xmlns:a="http://schemas.openxmlformats.org/drawingml/2006/main"/>
-          <a:p xmlns:a="http://schemas.openxmlformats.org/drawingml/2006/main">
-            <a:pPr algn="l">
-              <a:lnSpc>
-                <a:spcPct val="118000"/>
-              </a:lnSpc>
-              <a:buNone/>
-              <a:defRPr sz="1800" b="0">
-                <a:solidFill>
-                  <a:srgbClr val="A96510"/>
-                </a:solidFill>
-                <a:latin typeface="微软雅黑"/>
-                <a:ea typeface="微软雅黑"/>
-                <a:cs typeface="微软雅黑"/>
-              </a:defRPr>
-            </a:pPr>
-            <a:r>
-              <a:rPr sz="1800" b="0">
-                <a:solidFill>
-                  <a:srgbClr val="A96510"/>
-                </a:solidFill>
-                <a:latin typeface="微软雅黑"/>
-                <a:ea typeface="微软雅黑"/>
-                <a:cs typeface="微软雅黑"/>
-              </a:rPr>
-              <a:t>课程虚构稿件的实际文本修改示范</a:t>
-            </a:r>
-          </a:p>
-        </p:txBody>
-      </p:sp>
-      <p:sp>
-        <p:nvSpPr>
-          <p:cNvPr id="7" name="content-217">
-            <a:extLst xmlns:a="http://schemas.openxmlformats.org/drawingml/2006/main">
-              <a:ext uri="{FF2B5EF4-FFF2-40B4-BE49-F238E27FC236}">
-                <a16:creationId xmlns:a16="http://schemas.microsoft.com/office/drawing/2014/main" id="{4E2E4DA3-B993-464E-B5C6-24AC426F0266}"/>
-              </a:ext>
-            </a:extLst>
-          </p:cNvPr>
-          <p:cNvSpPr>
-            <a:spLocks xmlns:a="http://schemas.openxmlformats.org/drawingml/2006/main" noGrp="1"/>
-          </p:cNvSpPr>
-          <p:nvPr/>
-        </p:nvSpPr>
-        <p:spPr>
-          <a:xfrm xmlns:a="http://schemas.openxmlformats.org/drawingml/2006/main">
-            <a:off x="609600" y="1771650"/>
-            <a:ext cx="10972800" cy="619125"/>
-          </a:xfrm>
-          <a:prstGeom xmlns:a="http://schemas.openxmlformats.org/drawingml/2006/main" prst="rect">
-            <a:avLst/>
-          </a:prstGeom>
-          <a:noFill xmlns:a="http://schemas.openxmlformats.org/drawingml/2006/main"/>
-          <a:ln xmlns:a="http://schemas.openxmlformats.org/drawingml/2006/main" w="0">
-            <a:noFill/>
-          </a:ln>
-        </p:spPr>
-        <p:txBody>
-          <a:bodyPr xmlns:a="http://schemas.openxmlformats.org/drawingml/2006/main" lIns="0" tIns="0" rIns="0" bIns="0" anchor="t"/>
-          <a:lstStyle xmlns:a="http://schemas.openxmlformats.org/drawingml/2006/main"/>
-          <a:p xmlns:a="http://schemas.openxmlformats.org/drawingml/2006/main">
-            <a:pPr algn="l">
-              <a:lnSpc>
-                <a:spcPct val="118000"/>
-              </a:lnSpc>
-              <a:buNone/>
-              <a:defRPr sz="2600" b="0">
-                <a:solidFill>
-                  <a:srgbClr val="C8161E"/>
-                </a:solidFill>
-                <a:latin typeface="微软雅黑"/>
-                <a:ea typeface="微软雅黑"/>
-                <a:cs typeface="微软雅黑"/>
-              </a:defRPr>
-            </a:pPr>
-            <a:r>
-              <a:rPr sz="2600" b="0">
-                <a:solidFill>
-                  <a:srgbClr val="C8161E"/>
-                </a:solidFill>
-                <a:latin typeface="微软雅黑"/>
-                <a:ea typeface="微软雅黑"/>
-                <a:cs typeface="微软雅黑"/>
-              </a:rPr>
-              <a:t>− 阅读卡机制已证实，状态 stable。</a:t>
-            </a:r>
-          </a:p>
-        </p:txBody>
-      </p:sp>
-      <p:sp>
-        <p:nvSpPr>
-          <p:cNvPr id="8" name="content-218">
-            <a:extLst xmlns:a="http://schemas.openxmlformats.org/drawingml/2006/main">
-              <a:ext uri="{FF2B5EF4-FFF2-40B4-BE49-F238E27FC236}">
-                <a16:creationId xmlns:a16="http://schemas.microsoft.com/office/drawing/2014/main" id="{5B0EAEB4-CC8D-4FEC-A4CD-A179646D1671}"/>
-              </a:ext>
-            </a:extLst>
-          </p:cNvPr>
-          <p:cNvSpPr>
-            <a:spLocks xmlns:a="http://schemas.openxmlformats.org/drawingml/2006/main" noGrp="1"/>
-          </p:cNvSpPr>
-          <p:nvPr/>
-        </p:nvSpPr>
-        <p:spPr>
-          <a:xfrm xmlns:a="http://schemas.openxmlformats.org/drawingml/2006/main">
-            <a:off x="609600" y="2695575"/>
-            <a:ext cx="10972800" cy="1190625"/>
-          </a:xfrm>
-          <a:prstGeom xmlns:a="http://schemas.openxmlformats.org/drawingml/2006/main" prst="rect">
-            <a:avLst/>
-          </a:prstGeom>
-          <a:noFill xmlns:a="http://schemas.openxmlformats.org/drawingml/2006/main"/>
-          <a:ln xmlns:a="http://schemas.openxmlformats.org/drawingml/2006/main" w="0">
-            <a:noFill/>
-          </a:ln>
-        </p:spPr>
-        <p:txBody>
-          <a:bodyPr xmlns:a="http://schemas.openxmlformats.org/drawingml/2006/main" lIns="0" tIns="0" rIns="0" bIns="0" anchor="t"/>
-          <a:lstStyle xmlns:a="http://schemas.openxmlformats.org/drawingml/2006/main"/>
-          <a:p xmlns:a="http://schemas.openxmlformats.org/drawingml/2006/main">
-            <a:pPr algn="l">
-              <a:lnSpc>
-                <a:spcPct val="118000"/>
-              </a:lnSpc>
-              <a:buNone/>
-              <a:defRPr sz="2600" b="0">
-                <a:solidFill>
-                  <a:srgbClr val="1F4D78"/>
-                </a:solidFill>
-                <a:latin typeface="微软雅黑"/>
-                <a:ea typeface="微软雅黑"/>
-                <a:cs typeface="微软雅黑"/>
-              </a:defRPr>
-            </a:pPr>
-            <a:r>
-              <a:rPr sz="2600" b="0">
-                <a:solidFill>
-                  <a:srgbClr val="1F4D78"/>
-                </a:solidFill>
-                <a:latin typeface="微软雅黑"/>
-                <a:ea typeface="微软雅黑"/>
-                <a:cs typeface="微软雅黑"/>
-              </a:rPr>
-              <a:t>+ 本构造包中总遗漏率较低，方向与 Q1 一致。</a:t>
-            </a:r>
-          </a:p>
-          <a:p xmlns:a="http://schemas.openxmlformats.org/drawingml/2006/main">
-            <a:pPr algn="l">
-              <a:lnSpc>
-                <a:spcPct val="118000"/>
-              </a:lnSpc>
-              <a:buNone/>
-              <a:defRPr sz="2600" b="0">
-                <a:solidFill>
-                  <a:srgbClr val="1F4D78"/>
-                </a:solidFill>
-                <a:latin typeface="微软雅黑"/>
-                <a:ea typeface="微软雅黑"/>
-                <a:cs typeface="微软雅黑"/>
-              </a:defRPr>
-            </a:pPr>
-            <a:r>
-              <a:rPr sz="2600" b="0">
-                <a:solidFill>
-                  <a:srgbClr val="1F4D78"/>
-                </a:solidFill>
-                <a:latin typeface="微软雅黑"/>
-                <a:ea typeface="微软雅黑"/>
-                <a:cs typeface="微软雅黑"/>
-              </a:rPr>
-              <a:t>   H1/A2 未区分，其他质量未测，范围受限。</a:t>
-            </a:r>
-          </a:p>
-        </p:txBody>
-      </p:sp>
-      <p:sp>
-        <p:nvSpPr>
-          <p:cNvPr id="9" name="content-219">
-            <a:extLst xmlns:a="http://schemas.openxmlformats.org/drawingml/2006/main">
-              <a:ext uri="{FF2B5EF4-FFF2-40B4-BE49-F238E27FC236}">
-                <a16:creationId xmlns:a16="http://schemas.microsoft.com/office/drawing/2014/main" id="{77BF3809-82DB-4222-AB06-0F9149DA6109}"/>
-              </a:ext>
-            </a:extLst>
-          </p:cNvPr>
-          <p:cNvSpPr>
-            <a:spLocks xmlns:a="http://schemas.openxmlformats.org/drawingml/2006/main" noGrp="1"/>
-          </p:cNvSpPr>
-          <p:nvPr/>
-        </p:nvSpPr>
-        <p:spPr>
-          <a:xfrm xmlns:a="http://schemas.openxmlformats.org/drawingml/2006/main">
-            <a:off x="609600" y="4295775"/>
-            <a:ext cx="10972800" cy="523875"/>
-          </a:xfrm>
-          <a:prstGeom xmlns:a="http://schemas.openxmlformats.org/drawingml/2006/main" prst="rect">
-            <a:avLst/>
-          </a:prstGeom>
-          <a:noFill xmlns:a="http://schemas.openxmlformats.org/drawingml/2006/main"/>
-          <a:ln xmlns:a="http://schemas.openxmlformats.org/drawingml/2006/main" w="0">
-            <a:noFill/>
-          </a:ln>
-        </p:spPr>
-        <p:txBody>
-          <a:bodyPr xmlns:a="http://schemas.openxmlformats.org/drawingml/2006/main" lIns="0" tIns="0" rIns="0" bIns="0" anchor="t"/>
-          <a:lstStyle xmlns:a="http://schemas.openxmlformats.org/drawingml/2006/main"/>
-          <a:p xmlns:a="http://schemas.openxmlformats.org/drawingml/2006/main">
-            <a:pPr algn="l">
-              <a:lnSpc>
-                <a:spcPct val="118000"/>
-              </a:lnSpc>
-              <a:buNone/>
-              <a:defRPr sz="2300" b="0">
-                <a:solidFill>
-                  <a:srgbClr val="27333D"/>
-                </a:solidFill>
-                <a:latin typeface="微软雅黑"/>
-                <a:ea typeface="微软雅黑"/>
-                <a:cs typeface="微软雅黑"/>
-              </a:defRPr>
-            </a:pPr>
-            <a:r>
-              <a:rPr sz="2300" b="0">
-                <a:solidFill>
-                  <a:srgbClr val="27333D"/>
-                </a:solidFill>
-                <a:latin typeface="微软雅黑"/>
-                <a:ea typeface="微软雅黑"/>
-                <a:cs typeface="微软雅黑"/>
-              </a:rPr>
-              <a:t>工件：review；机制判断：仍不能判断。</a:t>
-            </a:r>
-          </a:p>
-        </p:txBody>
-      </p:sp>
-      <p:sp>
-        <p:nvSpPr>
-          <p:cNvPr id="10" name="content-220">
-            <a:extLst xmlns:a="http://schemas.openxmlformats.org/drawingml/2006/main">
-              <a:ext uri="{FF2B5EF4-FFF2-40B4-BE49-F238E27FC236}">
-                <a16:creationId xmlns:a16="http://schemas.microsoft.com/office/drawing/2014/main" id="{59D1C168-A00B-4D96-AE66-F0276BD9518A}"/>
-              </a:ext>
-            </a:extLst>
-          </p:cNvPr>
-          <p:cNvSpPr>
-            <a:spLocks xmlns:a="http://schemas.openxmlformats.org/drawingml/2006/main" noGrp="1"/>
-          </p:cNvSpPr>
-          <p:nvPr/>
-        </p:nvSpPr>
-        <p:spPr>
-          <a:xfrm xmlns:a="http://schemas.openxmlformats.org/drawingml/2006/main">
-            <a:off x="609600" y="5191125"/>
-            <a:ext cx="10972800" cy="866775"/>
-          </a:xfrm>
-          <a:prstGeom xmlns:a="http://schemas.openxmlformats.org/drawingml/2006/main" prst="rect">
-            <a:avLst/>
-          </a:prstGeom>
-          <a:noFill xmlns:a="http://schemas.openxmlformats.org/drawingml/2006/main"/>
-          <a:ln xmlns:a="http://schemas.openxmlformats.org/drawingml/2006/main" w="0">
-            <a:noFill/>
-          </a:ln>
-        </p:spPr>
-        <p:txBody>
-          <a:bodyPr xmlns:a="http://schemas.openxmlformats.org/drawingml/2006/main" lIns="0" tIns="0" rIns="0" bIns="0" anchor="t"/>
-          <a:lstStyle xmlns:a="http://schemas.openxmlformats.org/drawingml/2006/main"/>
-          <a:p xmlns:a="http://schemas.openxmlformats.org/drawingml/2006/main">
-            <a:pPr algn="l">
-              <a:lnSpc>
-                <a:spcPct val="118000"/>
-              </a:lnSpc>
-              <a:buNone/>
-              <a:defRPr sz="2200" b="0">
-                <a:solidFill>
-                  <a:srgbClr val="27333D"/>
-                </a:solidFill>
-                <a:latin typeface="微软雅黑"/>
-                <a:ea typeface="微软雅黑"/>
-                <a:cs typeface="微软雅黑"/>
-              </a:defRPr>
-            </a:pPr>
-            <a:r>
-              <a:rPr sz="2200" b="0">
-                <a:solidFill>
-                  <a:srgbClr val="27333D"/>
-                </a:solidFill>
-                <a:latin typeface="微软雅黑"/>
-                <a:ea typeface="微软雅黑"/>
-                <a:cs typeface="微软雅黑"/>
-              </a:rPr>
-              <a:t>优先处理致命问题，再处理重要问题与表达。</a:t>
-            </a:r>
-          </a:p>
-          <a:p xmlns:a="http://schemas.openxmlformats.org/drawingml/2006/main">
-            <a:pPr algn="l">
-              <a:lnSpc>
-                <a:spcPct val="118000"/>
-              </a:lnSpc>
-              <a:buNone/>
-              <a:defRPr sz="2200" b="0">
-                <a:solidFill>
-                  <a:srgbClr val="27333D"/>
-                </a:solidFill>
-                <a:latin typeface="微软雅黑"/>
-                <a:ea typeface="微软雅黑"/>
-                <a:cs typeface="微软雅黑"/>
-              </a:defRPr>
-            </a:pPr>
-            <a:r>
-              <a:rPr sz="2200" b="0">
-                <a:solidFill>
-                  <a:srgbClr val="27333D"/>
-                </a:solidFill>
-                <a:latin typeface="微软雅黑"/>
-                <a:ea typeface="微软雅黑"/>
-                <a:cs typeface="微软雅黑"/>
-              </a:rPr>
-              <a:t>改实际文件，保存 diff，更新影响工件。</a:t>
             </a:r>
           </a:p>
         </p:txBody>
@@ -9259,35 +7996,55 @@
       </p:grpSpPr>
       <p:sp>
         <p:nvSpPr>
-          <p:cNvPr id="4" name="Text Placeholder 3">
-            <a:extLst xmlns:a="http://schemas.openxmlformats.org/drawingml/2006/main">
-              <a:ext uri="{FF2B5EF4-FFF2-40B4-BE49-F238E27FC236}">
-                <a16:creationId xmlns:a16="http://schemas.microsoft.com/office/drawing/2014/main" id="{4D941B40-7A0A-534E-3563-CA11753C8E3F}"/>
-              </a:ext>
-            </a:extLst>
-          </p:cNvPr>
-          <p:cNvSpPr>
-            <a:spLocks xmlns:a="http://schemas.openxmlformats.org/drawingml/2006/main" noGrp="1"/>
-          </p:cNvSpPr>
-          <p:nvPr>
-            <p:ph type="body" idx="14"/>
-          </p:nvPr>
-        </p:nvSpPr>
-        <p:spPr>
-          <a:xfrm xmlns:a="http://schemas.openxmlformats.org/drawingml/2006/main">
-            <a:off x="1028700" y="57150"/>
-            <a:ext cx="10668000" cy="571500"/>
-          </a:xfrm>
-        </p:spPr>
-        <p:txBody>
-          <a:bodyPr xmlns:a="http://schemas.openxmlformats.org/drawingml/2006/main" lIns="0" tIns="0" rIns="0" bIns="0" anchor="ctr"/>
-          <a:lstStyle xmlns:a="http://schemas.openxmlformats.org/drawingml/2006/main"/>
+          <p:cNvPr id="7" name="judgment-title">
+            <a:extLst xmlns:a="http://schemas.openxmlformats.org/drawingml/2006/main">
+              <a:ext uri="{FF2B5EF4-FFF2-40B4-BE49-F238E27FC236}">
+                <a16:creationId xmlns:a16="http://schemas.microsoft.com/office/drawing/2014/main" id="{EFCB6525-4EB2-4E49-B70A-7E551D809670}"/>
+              </a:ext>
+            </a:extLst>
+          </p:cNvPr>
+          <p:cNvSpPr>
+            <a:spLocks xmlns:a="http://schemas.openxmlformats.org/drawingml/2006/main" noGrp="1"/>
+          </p:cNvSpPr>
+          <p:nvPr/>
+        </p:nvSpPr>
+        <p:spPr>
+          <a:xfrm xmlns:a="http://schemas.openxmlformats.org/drawingml/2006/main">
+            <a:off x="1028700" y="76200"/>
+            <a:ext cx="10687050" cy="514350"/>
+          </a:xfrm>
+          <a:prstGeom xmlns:a="http://schemas.openxmlformats.org/drawingml/2006/main" prst="rect">
+            <a:avLst/>
+          </a:prstGeom>
+          <a:noFill xmlns:a="http://schemas.openxmlformats.org/drawingml/2006/main"/>
+          <a:ln xmlns:a="http://schemas.openxmlformats.org/drawingml/2006/main" w="0">
+            <a:noFill/>
+          </a:ln>
+        </p:spPr>
+        <p:txBody>
+          <a:bodyPr xmlns:a="http://schemas.openxmlformats.org/drawingml/2006/main" lIns="0" tIns="0" rIns="0" bIns="0" anchor="t"/>
+          <a:lstStyle xmlns:a="http://schemas.openxmlformats.org/drawingml/2006/main">
+            <a:defPPr algn="l">
+              <a:defRPr sz="3000" b="1">
+                <a:solidFill>
+                  <a:srgbClr val="FFFFFF"/>
+                </a:solidFill>
+                <a:latin typeface="微软雅黑"/>
+                <a:ea typeface="微软雅黑"/>
+                <a:cs typeface="微软雅黑"/>
+              </a:defRPr>
+            </a:defPPr>
+          </a:lstStyle>
           <a:p xmlns:a="http://schemas.openxmlformats.org/drawingml/2006/main">
             <a:pPr algn="l">
-              <a:lnSpc>
-                <a:spcPct val="118000"/>
-              </a:lnSpc>
-              <a:buNone/>
+              <a:defRPr sz="3000" b="1">
+                <a:solidFill>
+                  <a:srgbClr val="FFFFFF"/>
+                </a:solidFill>
+                <a:latin typeface="微软雅黑"/>
+                <a:ea typeface="微软雅黑"/>
+                <a:cs typeface="微软雅黑"/>
+              </a:defRPr>
             </a:pPr>
             <a:r>
               <a:rPr sz="3000" b="1">
@@ -9298,700 +8055,337 @@
                 <a:ea typeface="微软雅黑"/>
                 <a:cs typeface="微软雅黑"/>
               </a:rPr>
-              <a:t>带齐展示与抽查材料</a:t>
-            </a:r>
-            <a:endParaRPr/>
-          </a:p>
-        </p:txBody>
-      </p:sp>
-      <p:sp>
-        <p:nvSpPr>
-          <p:cNvPr id="5" name="Slide Number Placeholder 4">
-            <a:extLst xmlns:a="http://schemas.openxmlformats.org/drawingml/2006/main">
-              <a:ext uri="{FF2B5EF4-FFF2-40B4-BE49-F238E27FC236}">
-                <a16:creationId xmlns:a16="http://schemas.microsoft.com/office/drawing/2014/main" id="{EBA5909F-738E-F60C-BE8C-B3F1D94548E5}"/>
-              </a:ext>
-            </a:extLst>
-          </p:cNvPr>
-          <p:cNvSpPr>
-            <a:spLocks xmlns:a="http://schemas.openxmlformats.org/drawingml/2006/main" noGrp="1"/>
-          </p:cNvSpPr>
-          <p:nvPr>
-            <p:ph type="sldNum" idx="10"/>
-          </p:nvPr>
-        </p:nvSpPr>
-        <p:spPr/>
-        <p:txBody>
-          <a:bodyPr xmlns:a="http://schemas.openxmlformats.org/drawingml/2006/main"/>
-          <a:lstStyle xmlns:a="http://schemas.openxmlformats.org/drawingml/2006/main"/>
-          <a:p xmlns:a="http://schemas.openxmlformats.org/drawingml/2006/main">
-            <a:fld id="{EA83FA91-883A-0168-8075-96CEB9DCA3C2}" type="slidenum">
+              <a:t>保留本课决定，准备下一课输入</a:t>
+            </a:r>
+          </a:p>
+        </p:txBody>
+      </p:sp>
+      <p:sp>
+        <p:nvSpPr>
+          <p:cNvPr id="2" name="judgment-body-0">
+            <a:extLst xmlns:a="http://schemas.openxmlformats.org/drawingml/2006/main">
+              <a:ext uri="{FF2B5EF4-FFF2-40B4-BE49-F238E27FC236}">
+                <a16:creationId xmlns:a16="http://schemas.microsoft.com/office/drawing/2014/main" id="{AB5B977B-7F7A-4A1A-B93B-B6B490217DC7}"/>
+              </a:ext>
+            </a:extLst>
+          </p:cNvPr>
+          <p:cNvSpPr>
+            <a:spLocks xmlns:a="http://schemas.openxmlformats.org/drawingml/2006/main" noGrp="1"/>
+          </p:cNvSpPr>
+          <p:nvPr/>
+        </p:nvSpPr>
+        <p:spPr>
+          <a:xfrm xmlns:a="http://schemas.openxmlformats.org/drawingml/2006/main">
+            <a:off x="666750" y="1066800"/>
+            <a:ext cx="10858500" cy="1009650"/>
+          </a:xfrm>
+          <a:prstGeom xmlns:a="http://schemas.openxmlformats.org/drawingml/2006/main" prst="rect">
+            <a:avLst/>
+          </a:prstGeom>
+          <a:noFill xmlns:a="http://schemas.openxmlformats.org/drawingml/2006/main"/>
+          <a:ln xmlns:a="http://schemas.openxmlformats.org/drawingml/2006/main" w="0">
+            <a:noFill/>
+          </a:ln>
+        </p:spPr>
+        <p:txBody>
+          <a:bodyPr xmlns:a="http://schemas.openxmlformats.org/drawingml/2006/main" lIns="0" tIns="0" rIns="0" bIns="0" anchor="t"/>
+          <a:lstStyle xmlns:a="http://schemas.openxmlformats.org/drawingml/2006/main">
+            <a:defPPr algn="l">
+              <a:defRPr sz="2400" b="0">
+                <a:solidFill>
+                  <a:srgbClr val="263746"/>
+                </a:solidFill>
+                <a:latin typeface="微软雅黑"/>
+                <a:ea typeface="微软雅黑"/>
+                <a:cs typeface="微软雅黑"/>
+              </a:defRPr>
+            </a:defPPr>
+          </a:lstStyle>
+          <a:p xmlns:a="http://schemas.openxmlformats.org/drawingml/2006/main">
+            <a:pPr algn="l">
+              <a:defRPr sz="2400" b="0">
+                <a:solidFill>
+                  <a:srgbClr val="263746"/>
+                </a:solidFill>
+                <a:latin typeface="微软雅黑"/>
+                <a:ea typeface="微软雅黑"/>
+                <a:cs typeface="微软雅黑"/>
+              </a:defRPr>
+            </a:pPr>
+            <a:r>
+              <a:rPr sz="2400" b="0">
+                <a:solidFill>
+                  <a:srgbClr val="263746"/>
+                </a:solidFill>
+                <a:latin typeface="微软雅黑"/>
+                <a:ea typeface="微软雅黑"/>
+                <a:cs typeface="微软雅黑"/>
+              </a:rPr>
+              <a:t>L16 展示现有结论与工件，不另起展示项目。</a:t>
+            </a:r>
+          </a:p>
+        </p:txBody>
+      </p:sp>
+      <p:sp>
+        <p:nvSpPr>
+          <p:cNvPr id="3" name="judgment-body-1">
+            <a:extLst xmlns:a="http://schemas.openxmlformats.org/drawingml/2006/main">
+              <a:ext uri="{FF2B5EF4-FFF2-40B4-BE49-F238E27FC236}">
+                <a16:creationId xmlns:a16="http://schemas.microsoft.com/office/drawing/2014/main" id="{950BF108-FDB8-436D-8B91-1BFDEBBA0569}"/>
+              </a:ext>
+            </a:extLst>
+          </p:cNvPr>
+          <p:cNvSpPr>
+            <a:spLocks xmlns:a="http://schemas.openxmlformats.org/drawingml/2006/main" noGrp="1"/>
+          </p:cNvSpPr>
+          <p:nvPr/>
+        </p:nvSpPr>
+        <p:spPr>
+          <a:xfrm xmlns:a="http://schemas.openxmlformats.org/drawingml/2006/main">
+            <a:off x="666750" y="2238375"/>
+            <a:ext cx="10858500" cy="2076450"/>
+          </a:xfrm>
+          <a:prstGeom xmlns:a="http://schemas.openxmlformats.org/drawingml/2006/main" prst="rect">
+            <a:avLst/>
+          </a:prstGeom>
+          <a:noFill xmlns:a="http://schemas.openxmlformats.org/drawingml/2006/main"/>
+          <a:ln xmlns:a="http://schemas.openxmlformats.org/drawingml/2006/main" w="0">
+            <a:noFill/>
+          </a:ln>
+        </p:spPr>
+        <p:txBody>
+          <a:bodyPr xmlns:a="http://schemas.openxmlformats.org/drawingml/2006/main" lIns="0" tIns="0" rIns="0" bIns="0" anchor="t"/>
+          <a:lstStyle xmlns:a="http://schemas.openxmlformats.org/drawingml/2006/main">
+            <a:defPPr algn="l">
+              <a:defRPr sz="2400" b="0">
+                <a:solidFill>
+                  <a:srgbClr val="263746"/>
+                </a:solidFill>
+                <a:latin typeface="微软雅黑"/>
+                <a:ea typeface="微软雅黑"/>
+                <a:cs typeface="微软雅黑"/>
+              </a:defRPr>
+            </a:defPPr>
+          </a:lstStyle>
+          <a:p xmlns:a="http://schemas.openxmlformats.org/drawingml/2006/main">
+            <a:pPr algn="l">
+              <a:defRPr sz="2400" b="0">
+                <a:solidFill>
+                  <a:srgbClr val="263746"/>
+                </a:solidFill>
+                <a:latin typeface="微软雅黑"/>
+                <a:ea typeface="微软雅黑"/>
+                <a:cs typeface="微软雅黑"/>
+              </a:defRPr>
+            </a:pPr>
+            <a:r>
+              <a:rPr sz="2400" b="0">
+                <a:solidFill>
+                  <a:srgbClr val="263746"/>
+                </a:solidFill>
+                <a:latin typeface="微软雅黑"/>
+                <a:ea typeface="微软雅黑"/>
+                <a:cs typeface="微软雅黑"/>
+              </a:rPr>
+              <a:t>回写已有项目：真实评审意见、处理理由、实际 diff 与论证门预检</a:t>
+            </a:r>
+          </a:p>
+        </p:txBody>
+      </p:sp>
+      <p:sp>
+        <p:nvSpPr>
+          <p:cNvPr id="4" name="judgment-body-2">
+            <a:extLst xmlns:a="http://schemas.openxmlformats.org/drawingml/2006/main">
+              <a:ext uri="{FF2B5EF4-FFF2-40B4-BE49-F238E27FC236}">
+                <a16:creationId xmlns:a16="http://schemas.microsoft.com/office/drawing/2014/main" id="{AC92A75D-E89C-429F-B0D5-ADA5F317D095}"/>
+              </a:ext>
+            </a:extLst>
+          </p:cNvPr>
+          <p:cNvSpPr>
+            <a:spLocks xmlns:a="http://schemas.openxmlformats.org/drawingml/2006/main" noGrp="1"/>
+          </p:cNvSpPr>
+          <p:nvPr/>
+        </p:nvSpPr>
+        <p:spPr>
+          <a:xfrm xmlns:a="http://schemas.openxmlformats.org/drawingml/2006/main">
+            <a:off x="666750" y="4495800"/>
+            <a:ext cx="10858500" cy="1409700"/>
+          </a:xfrm>
+          <a:prstGeom xmlns:a="http://schemas.openxmlformats.org/drawingml/2006/main" prst="rect">
+            <a:avLst/>
+          </a:prstGeom>
+          <a:noFill xmlns:a="http://schemas.openxmlformats.org/drawingml/2006/main"/>
+          <a:ln xmlns:a="http://schemas.openxmlformats.org/drawingml/2006/main" w="0">
+            <a:noFill/>
+          </a:ln>
+        </p:spPr>
+        <p:txBody>
+          <a:bodyPr xmlns:a="http://schemas.openxmlformats.org/drawingml/2006/main" lIns="0" tIns="0" rIns="0" bIns="0" anchor="t"/>
+          <a:lstStyle xmlns:a="http://schemas.openxmlformats.org/drawingml/2006/main">
+            <a:defPPr algn="l">
+              <a:defRPr sz="2200" b="0">
+                <a:solidFill>
+                  <a:srgbClr val="1F4D78"/>
+                </a:solidFill>
+                <a:latin typeface="微软雅黑"/>
+                <a:ea typeface="微软雅黑"/>
+                <a:cs typeface="微软雅黑"/>
+              </a:defRPr>
+            </a:defPPr>
+          </a:lstStyle>
+          <a:p xmlns:a="http://schemas.openxmlformats.org/drawingml/2006/main">
+            <a:pPr algn="l">
+              <a:defRPr sz="2200" b="0">
+                <a:solidFill>
+                  <a:srgbClr val="1F4D78"/>
+                </a:solidFill>
+                <a:latin typeface="微软雅黑"/>
+                <a:ea typeface="微软雅黑"/>
+                <a:cs typeface="微软雅黑"/>
+              </a:defRPr>
+            </a:pPr>
+            <a:r>
+              <a:rPr sz="2200" b="0">
+                <a:solidFill>
+                  <a:srgbClr val="1F4D78"/>
+                </a:solidFill>
+                <a:latin typeface="微软雅黑"/>
+                <a:ea typeface="微软雅黑"/>
+                <a:cs typeface="微软雅黑"/>
+              </a:rPr>
+              <a:t>只读指定段落，补课堂留下的真实缺口。安装与排障计入课外总预算。</a:t>
+            </a:r>
+          </a:p>
+        </p:txBody>
+      </p:sp>
+      <p:sp>
+        <p:nvSpPr>
+          <p:cNvPr id="5" name="judgment-source">
+            <a:extLst xmlns:a="http://schemas.openxmlformats.org/drawingml/2006/main">
+              <a:ext uri="{FF2B5EF4-FFF2-40B4-BE49-F238E27FC236}">
+                <a16:creationId xmlns:a16="http://schemas.microsoft.com/office/drawing/2014/main" id="{6E4DC6F3-ACF5-4D2E-BBE8-7463F490100C}"/>
+              </a:ext>
+            </a:extLst>
+          </p:cNvPr>
+          <p:cNvSpPr>
+            <a:spLocks xmlns:a="http://schemas.openxmlformats.org/drawingml/2006/main" noGrp="1"/>
+          </p:cNvSpPr>
+          <p:nvPr/>
+        </p:nvSpPr>
+        <p:spPr>
+          <a:xfrm xmlns:a="http://schemas.openxmlformats.org/drawingml/2006/main">
+            <a:off x="666750" y="6276975"/>
+            <a:ext cx="10572750" cy="209550"/>
+          </a:xfrm>
+          <a:prstGeom xmlns:a="http://schemas.openxmlformats.org/drawingml/2006/main" prst="rect">
+            <a:avLst/>
+          </a:prstGeom>
+          <a:noFill xmlns:a="http://schemas.openxmlformats.org/drawingml/2006/main"/>
+          <a:ln xmlns:a="http://schemas.openxmlformats.org/drawingml/2006/main" w="0">
+            <a:noFill/>
+          </a:ln>
+        </p:spPr>
+        <p:txBody>
+          <a:bodyPr xmlns:a="http://schemas.openxmlformats.org/drawingml/2006/main" lIns="0" tIns="0" rIns="0" bIns="0" anchor="t"/>
+          <a:lstStyle xmlns:a="http://schemas.openxmlformats.org/drawingml/2006/main">
+            <a:defPPr algn="l">
+              <a:defRPr sz="1100" b="0">
+                <a:solidFill>
+                  <a:srgbClr val="667684"/>
+                </a:solidFill>
+                <a:latin typeface="微软雅黑"/>
+                <a:ea typeface="微软雅黑"/>
+                <a:cs typeface="微软雅黑"/>
+              </a:defRPr>
+            </a:defPPr>
+          </a:lstStyle>
+          <a:p xmlns:a="http://schemas.openxmlformats.org/drawingml/2006/main">
+            <a:pPr algn="l">
+              <a:defRPr sz="1100" b="0">
+                <a:solidFill>
+                  <a:srgbClr val="667684"/>
+                </a:solidFill>
+                <a:latin typeface="微软雅黑"/>
+                <a:ea typeface="微软雅黑"/>
+                <a:cs typeface="微软雅黑"/>
+              </a:defRPr>
+            </a:pPr>
+            <a:r>
+              <a:rPr sz="1100" b="0">
+                <a:solidFill>
+                  <a:srgbClr val="667684"/>
+                </a:solidFill>
+                <a:latin typeface="微软雅黑"/>
+                <a:ea typeface="微软雅黑"/>
+                <a:cs typeface="微软雅黑"/>
+              </a:rPr>
+              <a:t>来源：本课判断任务与讲义；构造材料及真实来源按材料包标识</a:t>
+            </a:r>
+          </a:p>
+        </p:txBody>
+      </p:sp>
+      <p:sp>
+        <p:nvSpPr>
+          <p:cNvPr id="6" name="judgment-page">
+            <a:extLst xmlns:a="http://schemas.openxmlformats.org/drawingml/2006/main">
+              <a:ext uri="{FF2B5EF4-FFF2-40B4-BE49-F238E27FC236}">
+                <a16:creationId xmlns:a16="http://schemas.microsoft.com/office/drawing/2014/main" id="{B2245186-B031-4DE3-AA89-AC86C6090485}"/>
+              </a:ext>
+            </a:extLst>
+          </p:cNvPr>
+          <p:cNvSpPr>
+            <a:spLocks xmlns:a="http://schemas.openxmlformats.org/drawingml/2006/main" noGrp="1"/>
+          </p:cNvSpPr>
+          <p:nvPr/>
+        </p:nvSpPr>
+        <p:spPr>
+          <a:xfrm xmlns:a="http://schemas.openxmlformats.org/drawingml/2006/main">
+            <a:off x="11715750" y="6562725"/>
+            <a:ext cx="238125" cy="171450"/>
+          </a:xfrm>
+          <a:prstGeom xmlns:a="http://schemas.openxmlformats.org/drawingml/2006/main" prst="rect">
+            <a:avLst/>
+          </a:prstGeom>
+          <a:noFill xmlns:a="http://schemas.openxmlformats.org/drawingml/2006/main"/>
+          <a:ln xmlns:a="http://schemas.openxmlformats.org/drawingml/2006/main" w="0">
+            <a:noFill/>
+          </a:ln>
+        </p:spPr>
+        <p:txBody>
+          <a:bodyPr xmlns:a="http://schemas.openxmlformats.org/drawingml/2006/main" lIns="0" tIns="0" rIns="0" bIns="0" anchor="t"/>
+          <a:lstStyle xmlns:a="http://schemas.openxmlformats.org/drawingml/2006/main">
+            <a:defPPr algn="l">
+              <a:defRPr sz="900" b="0">
+                <a:solidFill>
+                  <a:srgbClr val="A5A5A5"/>
+                </a:solidFill>
+                <a:latin typeface="微软雅黑"/>
+                <a:ea typeface="微软雅黑"/>
+                <a:cs typeface="微软雅黑"/>
+              </a:defRPr>
+            </a:defPPr>
+          </a:lstStyle>
+          <a:p xmlns:a="http://schemas.openxmlformats.org/drawingml/2006/main">
+            <a:pPr algn="l">
+              <a:defRPr sz="900" b="0">
+                <a:solidFill>
+                  <a:srgbClr val="A5A5A5"/>
+                </a:solidFill>
+                <a:latin typeface="微软雅黑"/>
+                <a:ea typeface="微软雅黑"/>
+                <a:cs typeface="微软雅黑"/>
+              </a:defRPr>
+            </a:pPr>
+            <a:r>
+              <a:rPr sz="900" b="0">
+                <a:solidFill>
+                  <a:srgbClr val="A5A5A5"/>
+                </a:solidFill>
+                <a:latin typeface="微软雅黑"/>
+                <a:ea typeface="微软雅黑"/>
+                <a:cs typeface="微软雅黑"/>
+              </a:rPr>
               <a:t>15</a:t>
-            </a:fld>
-            <a:endParaRPr/>
-          </a:p>
-        </p:txBody>
-      </p:sp>
-      <p:sp>
-        <p:nvSpPr>
-          <p:cNvPr id="6" name="lightning-label">
-            <a:extLst xmlns:a="http://schemas.openxmlformats.org/drawingml/2006/main">
-              <a:ext uri="{FF2B5EF4-FFF2-40B4-BE49-F238E27FC236}">
-                <a16:creationId xmlns:a16="http://schemas.microsoft.com/office/drawing/2014/main" id="{A95A015C-F509-4DF1-9234-9C490129997C}"/>
-              </a:ext>
-            </a:extLst>
-          </p:cNvPr>
-          <p:cNvSpPr>
-            <a:spLocks xmlns:a="http://schemas.openxmlformats.org/drawingml/2006/main" noGrp="1"/>
-          </p:cNvSpPr>
-          <p:nvPr/>
-        </p:nvSpPr>
-        <p:spPr>
-          <a:xfrm xmlns:a="http://schemas.openxmlformats.org/drawingml/2006/main">
-            <a:off x="609600" y="1419225"/>
-            <a:ext cx="4695825" cy="381000"/>
-          </a:xfrm>
-          <a:prstGeom xmlns:a="http://schemas.openxmlformats.org/drawingml/2006/main" prst="rect">
-            <a:avLst/>
-          </a:prstGeom>
-          <a:noFill xmlns:a="http://schemas.openxmlformats.org/drawingml/2006/main"/>
-          <a:ln xmlns:a="http://schemas.openxmlformats.org/drawingml/2006/main" w="0">
-            <a:noFill/>
-          </a:ln>
-        </p:spPr>
-        <p:txBody>
-          <a:bodyPr xmlns:a="http://schemas.openxmlformats.org/drawingml/2006/main" lIns="0" tIns="0" rIns="0" bIns="0" anchor="t"/>
-          <a:lstStyle xmlns:a="http://schemas.openxmlformats.org/drawingml/2006/main"/>
-          <a:p xmlns:a="http://schemas.openxmlformats.org/drawingml/2006/main">
-            <a:pPr algn="l">
-              <a:lnSpc>
-                <a:spcPct val="118000"/>
-              </a:lnSpc>
-              <a:buNone/>
-              <a:defRPr sz="2000" b="1">
-                <a:solidFill>
-                  <a:srgbClr val="1F4D78"/>
-                </a:solidFill>
-                <a:latin typeface="微软雅黑"/>
-                <a:ea typeface="微软雅黑"/>
-                <a:cs typeface="微软雅黑"/>
-              </a:defRPr>
-            </a:pPr>
-            <a:r>
-              <a:rPr sz="2000" b="1">
-                <a:solidFill>
-                  <a:srgbClr val="1F4D78"/>
-                </a:solidFill>
-                <a:latin typeface="微软雅黑"/>
-                <a:ea typeface="微软雅黑"/>
-                <a:cs typeface="微软雅黑"/>
-              </a:rPr>
-              <a:t>全员闪电报告</a:t>
-            </a:r>
-          </a:p>
-        </p:txBody>
-      </p:sp>
-      <p:sp>
-        <p:nvSpPr>
-          <p:cNvPr id="7" name="lightning-body">
-            <a:extLst xmlns:a="http://schemas.openxmlformats.org/drawingml/2006/main">
-              <a:ext uri="{FF2B5EF4-FFF2-40B4-BE49-F238E27FC236}">
-                <a16:creationId xmlns:a16="http://schemas.microsoft.com/office/drawing/2014/main" id="{59D0B415-55D4-4B3A-A44D-59C4D8120766}"/>
-              </a:ext>
-            </a:extLst>
-          </p:cNvPr>
-          <p:cNvSpPr>
-            <a:spLocks xmlns:a="http://schemas.openxmlformats.org/drawingml/2006/main" noGrp="1"/>
-          </p:cNvSpPr>
-          <p:nvPr/>
-        </p:nvSpPr>
-        <p:spPr>
-          <a:xfrm xmlns:a="http://schemas.openxmlformats.org/drawingml/2006/main">
-            <a:off x="609600" y="1924050"/>
-            <a:ext cx="4695825" cy="1381125"/>
-          </a:xfrm>
-          <a:prstGeom xmlns:a="http://schemas.openxmlformats.org/drawingml/2006/main" prst="rect">
-            <a:avLst/>
-          </a:prstGeom>
-          <a:noFill xmlns:a="http://schemas.openxmlformats.org/drawingml/2006/main"/>
-          <a:ln xmlns:a="http://schemas.openxmlformats.org/drawingml/2006/main" w="0">
-            <a:noFill/>
-          </a:ln>
-        </p:spPr>
-        <p:txBody>
-          <a:bodyPr xmlns:a="http://schemas.openxmlformats.org/drawingml/2006/main" lIns="0" tIns="0" rIns="0" bIns="0" anchor="t"/>
-          <a:lstStyle xmlns:a="http://schemas.openxmlformats.org/drawingml/2006/main"/>
-          <a:p xmlns:a="http://schemas.openxmlformats.org/drawingml/2006/main">
-            <a:pPr algn="l">
-              <a:lnSpc>
-                <a:spcPct val="118000"/>
-              </a:lnSpc>
-              <a:buNone/>
-              <a:defRPr sz="2400" b="0">
-                <a:solidFill>
-                  <a:srgbClr val="27333D"/>
-                </a:solidFill>
-                <a:latin typeface="微软雅黑"/>
-                <a:ea typeface="微软雅黑"/>
-                <a:cs typeface="微软雅黑"/>
-              </a:defRPr>
-            </a:pPr>
-            <a:r>
-              <a:rPr sz="2400" b="0">
-                <a:solidFill>
-                  <a:srgbClr val="27333D"/>
-                </a:solidFill>
-                <a:latin typeface="微软雅黑"/>
-                <a:ea typeface="微软雅黑"/>
-                <a:cs typeface="微软雅黑"/>
-              </a:rPr>
-              <a:t>研究问题</a:t>
-            </a:r>
-          </a:p>
-          <a:p xmlns:a="http://schemas.openxmlformats.org/drawingml/2006/main">
-            <a:pPr algn="l">
-              <a:lnSpc>
-                <a:spcPct val="118000"/>
-              </a:lnSpc>
-              <a:buNone/>
-              <a:defRPr sz="2400" b="0">
-                <a:solidFill>
-                  <a:srgbClr val="27333D"/>
-                </a:solidFill>
-                <a:latin typeface="微软雅黑"/>
-                <a:ea typeface="微软雅黑"/>
-                <a:cs typeface="微软雅黑"/>
-              </a:defRPr>
-            </a:pPr>
-            <a:r>
-              <a:rPr sz="2400" b="0">
-                <a:solidFill>
-                  <a:srgbClr val="27333D"/>
-                </a:solidFill>
-                <a:latin typeface="微软雅黑"/>
-                <a:ea typeface="微软雅黑"/>
-                <a:cs typeface="微软雅黑"/>
-              </a:rPr>
-              <a:t>关键结果</a:t>
-            </a:r>
-          </a:p>
-          <a:p xmlns:a="http://schemas.openxmlformats.org/drawingml/2006/main">
-            <a:pPr algn="l">
-              <a:lnSpc>
-                <a:spcPct val="118000"/>
-              </a:lnSpc>
-              <a:buNone/>
-              <a:defRPr sz="2400" b="0">
-                <a:solidFill>
-                  <a:srgbClr val="27333D"/>
-                </a:solidFill>
-                <a:latin typeface="微软雅黑"/>
-                <a:ea typeface="微软雅黑"/>
-                <a:cs typeface="微软雅黑"/>
-              </a:defRPr>
-            </a:pPr>
-            <a:r>
-              <a:rPr sz="2400" b="0">
-                <a:solidFill>
-                  <a:srgbClr val="27333D"/>
-                </a:solidFill>
-                <a:latin typeface="微软雅黑"/>
-                <a:ea typeface="微软雅黑"/>
-                <a:cs typeface="微软雅黑"/>
-              </a:rPr>
-              <a:t>结论边界</a:t>
-            </a:r>
-          </a:p>
-        </p:txBody>
-      </p:sp>
-      <p:sp>
-        <p:nvSpPr>
-          <p:cNvPr id="8" name="demo-label">
-            <a:extLst xmlns:a="http://schemas.openxmlformats.org/drawingml/2006/main">
-              <a:ext uri="{FF2B5EF4-FFF2-40B4-BE49-F238E27FC236}">
-                <a16:creationId xmlns:a16="http://schemas.microsoft.com/office/drawing/2014/main" id="{D0F99C0F-06D2-48FD-BC10-8F8E8B0AF405}"/>
-              </a:ext>
-            </a:extLst>
-          </p:cNvPr>
-          <p:cNvSpPr>
-            <a:spLocks xmlns:a="http://schemas.openxmlformats.org/drawingml/2006/main" noGrp="1"/>
-          </p:cNvSpPr>
-          <p:nvPr/>
-        </p:nvSpPr>
-        <p:spPr>
-          <a:xfrm xmlns:a="http://schemas.openxmlformats.org/drawingml/2006/main">
-            <a:off x="609600" y="3733800"/>
-            <a:ext cx="5381625" cy="381000"/>
-          </a:xfrm>
-          <a:prstGeom xmlns:a="http://schemas.openxmlformats.org/drawingml/2006/main" prst="rect">
-            <a:avLst/>
-          </a:prstGeom>
-          <a:noFill xmlns:a="http://schemas.openxmlformats.org/drawingml/2006/main"/>
-          <a:ln xmlns:a="http://schemas.openxmlformats.org/drawingml/2006/main" w="0">
-            <a:noFill/>
-          </a:ln>
-        </p:spPr>
-        <p:txBody>
-          <a:bodyPr xmlns:a="http://schemas.openxmlformats.org/drawingml/2006/main" lIns="0" tIns="0" rIns="0" bIns="0" anchor="t"/>
-          <a:lstStyle xmlns:a="http://schemas.openxmlformats.org/drawingml/2006/main"/>
-          <a:p xmlns:a="http://schemas.openxmlformats.org/drawingml/2006/main">
-            <a:pPr algn="l">
-              <a:lnSpc>
-                <a:spcPct val="118000"/>
-              </a:lnSpc>
-              <a:buNone/>
-              <a:defRPr sz="2000" b="1">
-                <a:solidFill>
-                  <a:srgbClr val="1F4D78"/>
-                </a:solidFill>
-                <a:latin typeface="微软雅黑"/>
-                <a:ea typeface="微软雅黑"/>
-                <a:cs typeface="微软雅黑"/>
-              </a:defRPr>
-            </a:pPr>
-            <a:r>
-              <a:rPr sz="2000" b="1">
-                <a:solidFill>
-                  <a:srgbClr val="1F4D78"/>
-                </a:solidFill>
-                <a:latin typeface="微软雅黑"/>
-                <a:ea typeface="微软雅黑"/>
-                <a:cs typeface="微软雅黑"/>
-              </a:rPr>
-              <a:t>分组证据／工作流演示</a:t>
-            </a:r>
-          </a:p>
-        </p:txBody>
-      </p:sp>
-      <p:sp>
-        <p:nvSpPr>
-          <p:cNvPr id="9" name="demo-body">
-            <a:extLst xmlns:a="http://schemas.openxmlformats.org/drawingml/2006/main">
-              <a:ext uri="{FF2B5EF4-FFF2-40B4-BE49-F238E27FC236}">
-                <a16:creationId xmlns:a16="http://schemas.microsoft.com/office/drawing/2014/main" id="{2E1233FA-D2D6-4C9D-A454-9CC0B94D302E}"/>
-              </a:ext>
-            </a:extLst>
-          </p:cNvPr>
-          <p:cNvSpPr>
-            <a:spLocks xmlns:a="http://schemas.openxmlformats.org/drawingml/2006/main" noGrp="1"/>
-          </p:cNvSpPr>
-          <p:nvPr/>
-        </p:nvSpPr>
-        <p:spPr>
-          <a:xfrm xmlns:a="http://schemas.openxmlformats.org/drawingml/2006/main">
-            <a:off x="609600" y="4238625"/>
-            <a:ext cx="5381625" cy="1381125"/>
-          </a:xfrm>
-          <a:prstGeom xmlns:a="http://schemas.openxmlformats.org/drawingml/2006/main" prst="rect">
-            <a:avLst/>
-          </a:prstGeom>
-          <a:noFill xmlns:a="http://schemas.openxmlformats.org/drawingml/2006/main"/>
-          <a:ln xmlns:a="http://schemas.openxmlformats.org/drawingml/2006/main" w="0">
-            <a:noFill/>
-          </a:ln>
-        </p:spPr>
-        <p:txBody>
-          <a:bodyPr xmlns:a="http://schemas.openxmlformats.org/drawingml/2006/main" lIns="0" tIns="0" rIns="0" bIns="0" anchor="t"/>
-          <a:lstStyle xmlns:a="http://schemas.openxmlformats.org/drawingml/2006/main"/>
-          <a:p xmlns:a="http://schemas.openxmlformats.org/drawingml/2006/main">
-            <a:pPr algn="l">
-              <a:lnSpc>
-                <a:spcPct val="118000"/>
-              </a:lnSpc>
-              <a:buNone/>
-              <a:defRPr sz="2400" b="0">
-                <a:solidFill>
-                  <a:srgbClr val="27333D"/>
-                </a:solidFill>
-                <a:latin typeface="微软雅黑"/>
-                <a:ea typeface="微软雅黑"/>
-                <a:cs typeface="微软雅黑"/>
-              </a:defRPr>
-            </a:pPr>
-            <a:r>
-              <a:rPr sz="2400" b="0">
-                <a:solidFill>
-                  <a:srgbClr val="27333D"/>
-                </a:solidFill>
-                <a:latin typeface="微软雅黑"/>
-                <a:ea typeface="微软雅黑"/>
-                <a:cs typeface="微软雅黑"/>
-              </a:rPr>
-              <a:t>证据定位与真实作用</a:t>
-            </a:r>
-          </a:p>
-          <a:p xmlns:a="http://schemas.openxmlformats.org/drawingml/2006/main">
-            <a:pPr algn="l">
-              <a:lnSpc>
-                <a:spcPct val="118000"/>
-              </a:lnSpc>
-              <a:buNone/>
-              <a:defRPr sz="2400" b="0">
-                <a:solidFill>
-                  <a:srgbClr val="27333D"/>
-                </a:solidFill>
-                <a:latin typeface="微软雅黑"/>
-                <a:ea typeface="微软雅黑"/>
-                <a:cs typeface="微软雅黑"/>
-              </a:defRPr>
-            </a:pPr>
-            <a:r>
-              <a:rPr sz="2400" b="0">
-                <a:solidFill>
-                  <a:srgbClr val="27333D"/>
-                </a:solidFill>
-                <a:latin typeface="微软雅黑"/>
-                <a:ea typeface="微软雅黑"/>
-                <a:cs typeface="微软雅黑"/>
-              </a:rPr>
-              <a:t>失败与人工判断</a:t>
-            </a:r>
-          </a:p>
-        </p:txBody>
-      </p:sp>
-      <p:sp>
-        <p:nvSpPr>
-          <p:cNvPr id="10" name="divider">
-            <a:extLst xmlns:a="http://schemas.openxmlformats.org/drawingml/2006/main">
-              <a:ext uri="{FF2B5EF4-FFF2-40B4-BE49-F238E27FC236}">
-                <a16:creationId xmlns:a16="http://schemas.microsoft.com/office/drawing/2014/main" id="{E3F14289-8116-465C-A31F-C39EE5773A7C}"/>
-              </a:ext>
-            </a:extLst>
-          </p:cNvPr>
-          <p:cNvSpPr>
-            <a:spLocks xmlns:a="http://schemas.openxmlformats.org/drawingml/2006/main" noGrp="1"/>
-          </p:cNvSpPr>
-          <p:nvPr/>
-        </p:nvSpPr>
-        <p:spPr>
-          <a:xfrm xmlns:a="http://schemas.openxmlformats.org/drawingml/2006/main">
-            <a:off x="6486525" y="1390650"/>
-            <a:ext cx="9525" cy="14288"/>
-          </a:xfrm>
-          <a:prstGeom xmlns:a="http://schemas.openxmlformats.org/drawingml/2006/main" prst="rect">
-            <a:avLst/>
-          </a:prstGeom>
-          <a:solidFill xmlns:a="http://schemas.openxmlformats.org/drawingml/2006/main">
-            <a:srgbClr val="CDD5DB"/>
-          </a:solidFill>
-          <a:ln xmlns:a="http://schemas.openxmlformats.org/drawingml/2006/main" w="0">
-            <a:noFill/>
-          </a:ln>
-        </p:spPr>
-      </p:sp>
-      <p:sp>
-        <p:nvSpPr>
-          <p:cNvPr id="11" name="audit">
-            <a:extLst xmlns:a="http://schemas.openxmlformats.org/drawingml/2006/main">
-              <a:ext uri="{FF2B5EF4-FFF2-40B4-BE49-F238E27FC236}">
-                <a16:creationId xmlns:a16="http://schemas.microsoft.com/office/drawing/2014/main" id="{137A22D1-AE57-4863-952D-D530B9DAA122}"/>
-              </a:ext>
-            </a:extLst>
-          </p:cNvPr>
-          <p:cNvSpPr>
-            <a:spLocks xmlns:a="http://schemas.openxmlformats.org/drawingml/2006/main" noGrp="1"/>
-          </p:cNvSpPr>
-          <p:nvPr/>
-        </p:nvSpPr>
-        <p:spPr>
-          <a:xfrm xmlns:a="http://schemas.openxmlformats.org/drawingml/2006/main">
-            <a:off x="7400925" y="1600200"/>
-            <a:ext cx="4095750" cy="542925"/>
-          </a:xfrm>
-          <a:prstGeom xmlns:a="http://schemas.openxmlformats.org/drawingml/2006/main" prst="rect">
-            <a:avLst/>
-          </a:prstGeom>
-          <a:noFill xmlns:a="http://schemas.openxmlformats.org/drawingml/2006/main"/>
-          <a:ln xmlns:a="http://schemas.openxmlformats.org/drawingml/2006/main" w="0">
-            <a:noFill/>
-          </a:ln>
-        </p:spPr>
-        <p:txBody>
-          <a:bodyPr xmlns:a="http://schemas.openxmlformats.org/drawingml/2006/main" lIns="0" tIns="0" rIns="0" bIns="0" anchor="t"/>
-          <a:lstStyle xmlns:a="http://schemas.openxmlformats.org/drawingml/2006/main"/>
-          <a:p xmlns:a="http://schemas.openxmlformats.org/drawingml/2006/main">
-            <a:pPr algn="l">
-              <a:lnSpc>
-                <a:spcPct val="118000"/>
-              </a:lnSpc>
-              <a:buNone/>
-              <a:defRPr sz="2800" b="1">
-                <a:solidFill>
-                  <a:srgbClr val="1F4D78"/>
-                </a:solidFill>
-                <a:latin typeface="微软雅黑"/>
-                <a:ea typeface="微软雅黑"/>
-                <a:cs typeface="微软雅黑"/>
-              </a:defRPr>
-            </a:pPr>
-            <a:r>
-              <a:rPr sz="2800" b="1">
-                <a:solidFill>
-                  <a:srgbClr val="1F4D78"/>
-                </a:solidFill>
-                <a:latin typeface="微软雅黑"/>
-                <a:ea typeface="微软雅黑"/>
-                <a:cs typeface="微软雅黑"/>
-              </a:rPr>
-              <a:t>教师抽查</a:t>
-            </a:r>
-          </a:p>
-        </p:txBody>
-      </p:sp>
-      <p:sp>
-        <p:nvSpPr>
-          <p:cNvPr id="12" name="audit-data">
-            <a:extLst xmlns:a="http://schemas.openxmlformats.org/drawingml/2006/main">
-              <a:ext uri="{FF2B5EF4-FFF2-40B4-BE49-F238E27FC236}">
-                <a16:creationId xmlns:a16="http://schemas.microsoft.com/office/drawing/2014/main" id="{E376DB76-8551-473A-ACD8-8A7D6D8A5089}"/>
-              </a:ext>
-            </a:extLst>
-          </p:cNvPr>
-          <p:cNvSpPr>
-            <a:spLocks xmlns:a="http://schemas.openxmlformats.org/drawingml/2006/main" noGrp="1"/>
-          </p:cNvSpPr>
-          <p:nvPr/>
-        </p:nvSpPr>
-        <p:spPr>
-          <a:xfrm xmlns:a="http://schemas.openxmlformats.org/drawingml/2006/main">
-            <a:off x="7400925" y="2628900"/>
-            <a:ext cx="4095750" cy="1781175"/>
-          </a:xfrm>
-          <a:prstGeom xmlns:a="http://schemas.openxmlformats.org/drawingml/2006/main" prst="rect">
-            <a:avLst/>
-          </a:prstGeom>
-          <a:noFill xmlns:a="http://schemas.openxmlformats.org/drawingml/2006/main"/>
-          <a:ln xmlns:a="http://schemas.openxmlformats.org/drawingml/2006/main" w="0">
-            <a:noFill/>
-          </a:ln>
-        </p:spPr>
-        <p:txBody>
-          <a:bodyPr xmlns:a="http://schemas.openxmlformats.org/drawingml/2006/main" lIns="0" tIns="0" rIns="0" bIns="0" anchor="t"/>
-          <a:lstStyle xmlns:a="http://schemas.openxmlformats.org/drawingml/2006/main"/>
-          <a:p xmlns:a="http://schemas.openxmlformats.org/drawingml/2006/main">
-            <a:pPr algn="l">
-              <a:lnSpc>
-                <a:spcPct val="118000"/>
-              </a:lnSpc>
-              <a:buNone/>
-              <a:defRPr sz="2600" b="0">
-                <a:solidFill>
-                  <a:srgbClr val="27333D"/>
-                </a:solidFill>
-                <a:latin typeface="微软雅黑"/>
-                <a:ea typeface="微软雅黑"/>
-                <a:cs typeface="微软雅黑"/>
-              </a:defRPr>
-            </a:pPr>
-            <a:r>
-              <a:rPr sz="2600" b="0">
-                <a:solidFill>
-                  <a:srgbClr val="27333D"/>
-                </a:solidFill>
-                <a:latin typeface="微软雅黑"/>
-                <a:ea typeface="微软雅黑"/>
-                <a:cs typeface="微软雅黑"/>
-              </a:rPr>
-              <a:t>实验 ID</a:t>
-            </a:r>
-          </a:p>
-          <a:p xmlns:a="http://schemas.openxmlformats.org/drawingml/2006/main">
-            <a:pPr algn="l">
-              <a:lnSpc>
-                <a:spcPct val="118000"/>
-              </a:lnSpc>
-              <a:buNone/>
-              <a:defRPr sz="2600" b="0">
-                <a:solidFill>
-                  <a:srgbClr val="27333D"/>
-                </a:solidFill>
-                <a:latin typeface="微软雅黑"/>
-                <a:ea typeface="微软雅黑"/>
-                <a:cs typeface="微软雅黑"/>
-              </a:defRPr>
-            </a:pPr>
-            <a:r>
-              <a:rPr sz="2600" b="0">
-                <a:solidFill>
-                  <a:srgbClr val="27333D"/>
-                </a:solidFill>
-                <a:latin typeface="微软雅黑"/>
-                <a:ea typeface="微软雅黑"/>
-                <a:cs typeface="微软雅黑"/>
-              </a:rPr>
-              <a:t>引用</a:t>
-            </a:r>
-          </a:p>
-          <a:p xmlns:a="http://schemas.openxmlformats.org/drawingml/2006/main">
-            <a:pPr algn="l">
-              <a:lnSpc>
-                <a:spcPct val="118000"/>
-              </a:lnSpc>
-              <a:buNone/>
-              <a:defRPr sz="2600" b="0">
-                <a:solidFill>
-                  <a:srgbClr val="27333D"/>
-                </a:solidFill>
-                <a:latin typeface="微软雅黑"/>
-                <a:ea typeface="微软雅黑"/>
-                <a:cs typeface="微软雅黑"/>
-              </a:defRPr>
-            </a:pPr>
-            <a:r>
-              <a:rPr sz="2600" b="0">
-                <a:solidFill>
-                  <a:srgbClr val="27333D"/>
-                </a:solidFill>
-                <a:latin typeface="微软雅黑"/>
-                <a:ea typeface="微软雅黑"/>
-                <a:cs typeface="微软雅黑"/>
-              </a:rPr>
-              <a:t>工作流 trace</a:t>
-            </a:r>
-          </a:p>
-        </p:txBody>
-      </p:sp>
-      <p:sp>
-        <p:nvSpPr>
-          <p:cNvPr id="13" name="existing">
-            <a:extLst xmlns:a="http://schemas.openxmlformats.org/drawingml/2006/main">
-              <a:ext uri="{FF2B5EF4-FFF2-40B4-BE49-F238E27FC236}">
-                <a16:creationId xmlns:a16="http://schemas.microsoft.com/office/drawing/2014/main" id="{FC2B6FE2-A4B4-41E5-918D-7567031E25F5}"/>
-              </a:ext>
-            </a:extLst>
-          </p:cNvPr>
-          <p:cNvSpPr>
-            <a:spLocks xmlns:a="http://schemas.openxmlformats.org/drawingml/2006/main" noGrp="1"/>
-          </p:cNvSpPr>
-          <p:nvPr/>
-        </p:nvSpPr>
-        <p:spPr>
-          <a:xfrm xmlns:a="http://schemas.openxmlformats.org/drawingml/2006/main">
-            <a:off x="7400925" y="5086350"/>
-            <a:ext cx="4095750" cy="914400"/>
-          </a:xfrm>
-          <a:prstGeom xmlns:a="http://schemas.openxmlformats.org/drawingml/2006/main" prst="rect">
-            <a:avLst/>
-          </a:prstGeom>
-          <a:noFill xmlns:a="http://schemas.openxmlformats.org/drawingml/2006/main"/>
-          <a:ln xmlns:a="http://schemas.openxmlformats.org/drawingml/2006/main" w="0">
-            <a:noFill/>
-          </a:ln>
-        </p:spPr>
-        <p:txBody>
-          <a:bodyPr xmlns:a="http://schemas.openxmlformats.org/drawingml/2006/main" lIns="0" tIns="0" rIns="0" bIns="0" anchor="t"/>
-          <a:lstStyle xmlns:a="http://schemas.openxmlformats.org/drawingml/2006/main"/>
-          <a:p xmlns:a="http://schemas.openxmlformats.org/drawingml/2006/main">
-            <a:pPr algn="l">
-              <a:lnSpc>
-                <a:spcPct val="118000"/>
-              </a:lnSpc>
-              <a:buNone/>
-              <a:defRPr sz="2200" b="0">
-                <a:solidFill>
-                  <a:srgbClr val="27333D"/>
-                </a:solidFill>
-                <a:latin typeface="微软雅黑"/>
-                <a:ea typeface="微软雅黑"/>
-                <a:cs typeface="微软雅黑"/>
-              </a:defRPr>
-            </a:pPr>
-            <a:r>
-              <a:rPr sz="2200" b="0">
-                <a:solidFill>
-                  <a:srgbClr val="27333D"/>
-                </a:solidFill>
-                <a:latin typeface="微软雅黑"/>
-                <a:ea typeface="微软雅黑"/>
-                <a:cs typeface="微软雅黑"/>
-              </a:rPr>
-              <a:t>使用现有项目材料，</a:t>
-            </a:r>
-          </a:p>
-          <a:p xmlns:a="http://schemas.openxmlformats.org/drawingml/2006/main">
-            <a:pPr algn="l">
-              <a:lnSpc>
-                <a:spcPct val="118000"/>
-              </a:lnSpc>
-              <a:buNone/>
-              <a:defRPr sz="2200" b="0">
-                <a:solidFill>
-                  <a:srgbClr val="27333D"/>
-                </a:solidFill>
-                <a:latin typeface="微软雅黑"/>
-                <a:ea typeface="微软雅黑"/>
-                <a:cs typeface="微软雅黑"/>
-              </a:defRPr>
-            </a:pPr>
-            <a:r>
-              <a:rPr sz="2200" b="0">
-                <a:solidFill>
-                  <a:srgbClr val="27333D"/>
-                </a:solidFill>
-                <a:latin typeface="微软雅黑"/>
-                <a:ea typeface="微软雅黑"/>
-                <a:cs typeface="微软雅黑"/>
-              </a:rPr>
-              <a:t>不新增独立汇报文档。</a:t>
-            </a:r>
-          </a:p>
-        </p:txBody>
-      </p:sp>
-      <p:sp>
-        <p:nvSpPr>
-          <p:cNvPr id="14" name="source">
-            <a:extLst xmlns:a="http://schemas.openxmlformats.org/drawingml/2006/main">
-              <a:ext uri="{FF2B5EF4-FFF2-40B4-BE49-F238E27FC236}">
-                <a16:creationId xmlns:a16="http://schemas.microsoft.com/office/drawing/2014/main" id="{78EFC8DF-E64D-45C8-B948-1AD86B0C70D6}"/>
-              </a:ext>
-            </a:extLst>
-          </p:cNvPr>
-          <p:cNvSpPr>
-            <a:spLocks xmlns:a="http://schemas.openxmlformats.org/drawingml/2006/main" noGrp="1"/>
-          </p:cNvSpPr>
-          <p:nvPr/>
-        </p:nvSpPr>
-        <p:spPr>
-          <a:xfrm xmlns:a="http://schemas.openxmlformats.org/drawingml/2006/main">
-            <a:off x="609600" y="6067425"/>
-            <a:ext cx="10763250" cy="209550"/>
-          </a:xfrm>
-          <a:prstGeom xmlns:a="http://schemas.openxmlformats.org/drawingml/2006/main" prst="rect">
-            <a:avLst/>
-          </a:prstGeom>
-          <a:noFill xmlns:a="http://schemas.openxmlformats.org/drawingml/2006/main"/>
-          <a:ln xmlns:a="http://schemas.openxmlformats.org/drawingml/2006/main" w="0">
-            <a:noFill/>
-          </a:ln>
-        </p:spPr>
-        <p:txBody>
-          <a:bodyPr xmlns:a="http://schemas.openxmlformats.org/drawingml/2006/main" lIns="0" tIns="0" rIns="0" bIns="0" anchor="t"/>
-          <a:lstStyle xmlns:a="http://schemas.openxmlformats.org/drawingml/2006/main"/>
-          <a:p xmlns:a="http://schemas.openxmlformats.org/drawingml/2006/main">
-            <a:pPr algn="l">
-              <a:lnSpc>
-                <a:spcPct val="118000"/>
-              </a:lnSpc>
-              <a:buNone/>
-              <a:defRPr sz="1100" b="0">
-                <a:solidFill>
-                  <a:srgbClr val="66727D"/>
-                </a:solidFill>
-                <a:latin typeface="微软雅黑"/>
-                <a:ea typeface="微软雅黑"/>
-                <a:cs typeface="微软雅黑"/>
-              </a:defRPr>
-            </a:pPr>
-            <a:r>
-              <a:rPr sz="1100" b="0">
-                <a:solidFill>
-                  <a:srgbClr val="66727D"/>
-                </a:solidFill>
-                <a:latin typeface="微软雅黑"/>
-                <a:ea typeface="微软雅黑"/>
-                <a:cs typeface="微软雅黑"/>
-              </a:rPr>
-              <a:t>来源：本课讲义与课程评审模板；课程研究门规范 · 教学构造样例不冒充学生记录</a:t>
             </a:r>
           </a:p>
         </p:txBody>
@@ -11248,35 +9642,55 @@
       </p:grpSpPr>
       <p:sp>
         <p:nvSpPr>
-          <p:cNvPr id="4" name="Text Placeholder 3">
-            <a:extLst xmlns:a="http://schemas.openxmlformats.org/drawingml/2006/main">
-              <a:ext uri="{FF2B5EF4-FFF2-40B4-BE49-F238E27FC236}">
-                <a16:creationId xmlns:a16="http://schemas.microsoft.com/office/drawing/2014/main" id="{4D941B40-7A0A-534E-3563-CA11753C8E3F}"/>
-              </a:ext>
-            </a:extLst>
-          </p:cNvPr>
-          <p:cNvSpPr>
-            <a:spLocks xmlns:a="http://schemas.openxmlformats.org/drawingml/2006/main" noGrp="1"/>
-          </p:cNvSpPr>
-          <p:nvPr>
-            <p:ph type="body" idx="14"/>
-          </p:nvPr>
-        </p:nvSpPr>
-        <p:spPr>
-          <a:xfrm xmlns:a="http://schemas.openxmlformats.org/drawingml/2006/main">
-            <a:off x="1028700" y="57150"/>
-            <a:ext cx="10668000" cy="571500"/>
-          </a:xfrm>
-        </p:spPr>
-        <p:txBody>
-          <a:bodyPr xmlns:a="http://schemas.openxmlformats.org/drawingml/2006/main" lIns="0" tIns="0" rIns="0" bIns="0" anchor="ctr"/>
-          <a:lstStyle xmlns:a="http://schemas.openxmlformats.org/drawingml/2006/main"/>
+          <p:cNvPr id="7" name="judgment-title">
+            <a:extLst xmlns:a="http://schemas.openxmlformats.org/drawingml/2006/main">
+              <a:ext uri="{FF2B5EF4-FFF2-40B4-BE49-F238E27FC236}">
+                <a16:creationId xmlns:a16="http://schemas.microsoft.com/office/drawing/2014/main" id="{D538EC21-1892-4E71-B421-04FD7178BF64}"/>
+              </a:ext>
+            </a:extLst>
+          </p:cNvPr>
+          <p:cNvSpPr>
+            <a:spLocks xmlns:a="http://schemas.openxmlformats.org/drawingml/2006/main" noGrp="1"/>
+          </p:cNvSpPr>
+          <p:nvPr/>
+        </p:nvSpPr>
+        <p:spPr>
+          <a:xfrm xmlns:a="http://schemas.openxmlformats.org/drawingml/2006/main">
+            <a:off x="1028700" y="76200"/>
+            <a:ext cx="10687050" cy="514350"/>
+          </a:xfrm>
+          <a:prstGeom xmlns:a="http://schemas.openxmlformats.org/drawingml/2006/main" prst="rect">
+            <a:avLst/>
+          </a:prstGeom>
+          <a:noFill xmlns:a="http://schemas.openxmlformats.org/drawingml/2006/main"/>
+          <a:ln xmlns:a="http://schemas.openxmlformats.org/drawingml/2006/main" w="0">
+            <a:noFill/>
+          </a:ln>
+        </p:spPr>
+        <p:txBody>
+          <a:bodyPr xmlns:a="http://schemas.openxmlformats.org/drawingml/2006/main" lIns="0" tIns="0" rIns="0" bIns="0" anchor="t"/>
+          <a:lstStyle xmlns:a="http://schemas.openxmlformats.org/drawingml/2006/main">
+            <a:defPPr algn="l">
+              <a:defRPr sz="3000" b="1">
+                <a:solidFill>
+                  <a:srgbClr val="FFFFFF"/>
+                </a:solidFill>
+                <a:latin typeface="微软雅黑"/>
+                <a:ea typeface="微软雅黑"/>
+                <a:cs typeface="微软雅黑"/>
+              </a:defRPr>
+            </a:defPPr>
+          </a:lstStyle>
           <a:p xmlns:a="http://schemas.openxmlformats.org/drawingml/2006/main">
             <a:pPr algn="l">
-              <a:lnSpc>
-                <a:spcPct val="118000"/>
-              </a:lnSpc>
-              <a:buNone/>
+              <a:defRPr sz="3000" b="1">
+                <a:solidFill>
+                  <a:srgbClr val="FFFFFF"/>
+                </a:solidFill>
+                <a:latin typeface="微软雅黑"/>
+                <a:ea typeface="微软雅黑"/>
+                <a:cs typeface="微软雅黑"/>
+              </a:defRPr>
             </a:pPr>
             <a:r>
               <a:rPr sz="3000" b="1">
@@ -11287,272 +9701,406 @@
                 <a:ea typeface="微软雅黑"/>
                 <a:cs typeface="微软雅黑"/>
               </a:rPr>
-              <a:t>给三处错误排优先级</a:t>
-            </a:r>
-            <a:endParaRPr/>
-          </a:p>
-        </p:txBody>
-      </p:sp>
-      <p:sp>
-        <p:nvSpPr>
-          <p:cNvPr id="5" name="Slide Number Placeholder 4">
-            <a:extLst xmlns:a="http://schemas.openxmlformats.org/drawingml/2006/main">
-              <a:ext uri="{FF2B5EF4-FFF2-40B4-BE49-F238E27FC236}">
-                <a16:creationId xmlns:a16="http://schemas.microsoft.com/office/drawing/2014/main" id="{EBA5909F-738E-F60C-BE8C-B3F1D94548E5}"/>
-              </a:ext>
-            </a:extLst>
-          </p:cNvPr>
-          <p:cNvSpPr>
-            <a:spLocks xmlns:a="http://schemas.openxmlformats.org/drawingml/2006/main" noGrp="1"/>
-          </p:cNvSpPr>
-          <p:nvPr>
-            <p:ph type="sldNum" idx="10"/>
-          </p:nvPr>
-        </p:nvSpPr>
-        <p:spPr/>
-        <p:txBody>
-          <a:bodyPr xmlns:a="http://schemas.openxmlformats.org/drawingml/2006/main"/>
-          <a:lstStyle xmlns:a="http://schemas.openxmlformats.org/drawingml/2006/main"/>
-          <a:p xmlns:a="http://schemas.openxmlformats.org/drawingml/2006/main">
-            <a:fld id="{EFD6AB9A-5F9E-5F59-51AB-3C8734130965}" type="slidenum">
+              <a:t>哪条评审应先处理</a:t>
+            </a:r>
+          </a:p>
+        </p:txBody>
+      </p:sp>
+      <p:sp>
+        <p:nvSpPr>
+          <p:cNvPr id="2" name="judgment-body-0">
+            <a:extLst xmlns:a="http://schemas.openxmlformats.org/drawingml/2006/main">
+              <a:ext uri="{FF2B5EF4-FFF2-40B4-BE49-F238E27FC236}">
+                <a16:creationId xmlns:a16="http://schemas.microsoft.com/office/drawing/2014/main" id="{694124DB-5EAE-4CF7-A816-C3DF7C6FEBC4}"/>
+              </a:ext>
+            </a:extLst>
+          </p:cNvPr>
+          <p:cNvSpPr>
+            <a:spLocks xmlns:a="http://schemas.openxmlformats.org/drawingml/2006/main" noGrp="1"/>
+          </p:cNvSpPr>
+          <p:nvPr/>
+        </p:nvSpPr>
+        <p:spPr>
+          <a:xfrm xmlns:a="http://schemas.openxmlformats.org/drawingml/2006/main">
+            <a:off x="666750" y="1066800"/>
+            <a:ext cx="10858500" cy="1009650"/>
+          </a:xfrm>
+          <a:prstGeom xmlns:a="http://schemas.openxmlformats.org/drawingml/2006/main" prst="rect">
+            <a:avLst/>
+          </a:prstGeom>
+          <a:noFill xmlns:a="http://schemas.openxmlformats.org/drawingml/2006/main"/>
+          <a:ln xmlns:a="http://schemas.openxmlformats.org/drawingml/2006/main" w="0">
+            <a:noFill/>
+          </a:ln>
+        </p:spPr>
+        <p:txBody>
+          <a:bodyPr xmlns:a="http://schemas.openxmlformats.org/drawingml/2006/main" lIns="0" tIns="0" rIns="0" bIns="0" anchor="t"/>
+          <a:lstStyle xmlns:a="http://schemas.openxmlformats.org/drawingml/2006/main">
+            <a:defPPr algn="l">
+              <a:defRPr sz="2400" b="0">
+                <a:solidFill>
+                  <a:srgbClr val="263746"/>
+                </a:solidFill>
+                <a:latin typeface="微软雅黑"/>
+                <a:ea typeface="微软雅黑"/>
+                <a:cs typeface="微软雅黑"/>
+              </a:defRPr>
+            </a:defPPr>
+          </a:lstStyle>
+          <a:p xmlns:a="http://schemas.openxmlformats.org/drawingml/2006/main">
+            <a:pPr algn="l">
+              <a:defRPr sz="2400" b="0">
+                <a:solidFill>
+                  <a:srgbClr val="263746"/>
+                </a:solidFill>
+                <a:latin typeface="微软雅黑"/>
+                <a:ea typeface="微软雅黑"/>
+                <a:cs typeface="微软雅黑"/>
+              </a:defRPr>
+            </a:pPr>
+            <a:r>
+              <a:rPr sz="2400" b="0">
+                <a:solidFill>
+                  <a:srgbClr val="263746"/>
+                </a:solidFill>
+                <a:latin typeface="微软雅黑"/>
+                <a:ea typeface="微软雅黑"/>
+                <a:cs typeface="微软雅黑"/>
+              </a:rPr>
+              <a:t>正文：8 篇独立论文证明机制</a:t>
+            </a:r>
+          </a:p>
+          <a:p xmlns:a="http://schemas.openxmlformats.org/drawingml/2006/main">
+            <a:pPr algn="l">
+              <a:defRPr sz="2400" b="0">
+                <a:solidFill>
+                  <a:srgbClr val="263746"/>
+                </a:solidFill>
+                <a:latin typeface="微软雅黑"/>
+                <a:ea typeface="微软雅黑"/>
+                <a:cs typeface="微软雅黑"/>
+              </a:defRPr>
+            </a:pPr>
+            <a:r>
+              <a:rPr sz="2400" b="0">
+                <a:solidFill>
+                  <a:srgbClr val="263746"/>
+                </a:solidFill>
+                <a:latin typeface="微软雅黑"/>
+                <a:ea typeface="微软雅黑"/>
+                <a:cs typeface="微软雅黑"/>
+              </a:rPr>
+              <a:t>实际：3 个文本、8 条条件；确定性回放</a:t>
+            </a:r>
+          </a:p>
+        </p:txBody>
+      </p:sp>
+      <p:sp>
+        <p:nvSpPr>
+          <p:cNvPr id="3" name="judgment-body-1">
+            <a:extLst xmlns:a="http://schemas.openxmlformats.org/drawingml/2006/main">
+              <a:ext uri="{FF2B5EF4-FFF2-40B4-BE49-F238E27FC236}">
+                <a16:creationId xmlns:a16="http://schemas.microsoft.com/office/drawing/2014/main" id="{BC682C77-FB86-4B01-A788-46821A78F8B1}"/>
+              </a:ext>
+            </a:extLst>
+          </p:cNvPr>
+          <p:cNvSpPr>
+            <a:spLocks xmlns:a="http://schemas.openxmlformats.org/drawingml/2006/main" noGrp="1"/>
+          </p:cNvSpPr>
+          <p:nvPr/>
+        </p:nvSpPr>
+        <p:spPr>
+          <a:xfrm xmlns:a="http://schemas.openxmlformats.org/drawingml/2006/main">
+            <a:off x="666750" y="2238375"/>
+            <a:ext cx="10858500" cy="2076450"/>
+          </a:xfrm>
+          <a:prstGeom xmlns:a="http://schemas.openxmlformats.org/drawingml/2006/main" prst="rect">
+            <a:avLst/>
+          </a:prstGeom>
+          <a:noFill xmlns:a="http://schemas.openxmlformats.org/drawingml/2006/main"/>
+          <a:ln xmlns:a="http://schemas.openxmlformats.org/drawingml/2006/main" w="0">
+            <a:noFill/>
+          </a:ln>
+        </p:spPr>
+        <p:txBody>
+          <a:bodyPr xmlns:a="http://schemas.openxmlformats.org/drawingml/2006/main" lIns="0" tIns="0" rIns="0" bIns="0" anchor="t"/>
+          <a:lstStyle xmlns:a="http://schemas.openxmlformats.org/drawingml/2006/main">
+            <a:defPPr algn="l">
+              <a:defRPr sz="2400" b="0">
+                <a:solidFill>
+                  <a:srgbClr val="263746"/>
+                </a:solidFill>
+                <a:latin typeface="微软雅黑"/>
+                <a:ea typeface="微软雅黑"/>
+                <a:cs typeface="微软雅黑"/>
+              </a:defRPr>
+            </a:defPPr>
+          </a:lstStyle>
+          <a:p xmlns:a="http://schemas.openxmlformats.org/drawingml/2006/main">
+            <a:pPr algn="l">
+              <a:defRPr sz="2400" b="0">
+                <a:solidFill>
+                  <a:srgbClr val="263746"/>
+                </a:solidFill>
+                <a:latin typeface="微软雅黑"/>
+                <a:ea typeface="微软雅黑"/>
+                <a:cs typeface="微软雅黑"/>
+              </a:defRPr>
+            </a:pPr>
+            <a:r>
+              <a:rPr sz="2400" b="0">
+                <a:solidFill>
+                  <a:srgbClr val="263746"/>
+                </a:solidFill>
+                <a:latin typeface="微软雅黑"/>
+                <a:ea typeface="微软雅黑"/>
+                <a:cs typeface="微软雅黑"/>
+              </a:rPr>
+              <a:t>A｜修正单位与机制结论</a:t>
+            </a:r>
+          </a:p>
+          <a:p xmlns:a="http://schemas.openxmlformats.org/drawingml/2006/main">
+            <a:pPr algn="l">
+              <a:defRPr sz="2400" b="0">
+                <a:solidFill>
+                  <a:srgbClr val="263746"/>
+                </a:solidFill>
+                <a:latin typeface="微软雅黑"/>
+                <a:ea typeface="微软雅黑"/>
+                <a:cs typeface="微软雅黑"/>
+              </a:defRPr>
+            </a:pPr>
+            <a:r>
+              <a:rPr sz="2400" b="0">
+                <a:solidFill>
+                  <a:srgbClr val="263746"/>
+                </a:solidFill>
+                <a:latin typeface="微软雅黑"/>
+                <a:ea typeface="微软雅黑"/>
+                <a:cs typeface="微软雅黑"/>
+              </a:rPr>
+              <a:t>B｜重画配色</a:t>
+            </a:r>
+          </a:p>
+          <a:p xmlns:a="http://schemas.openxmlformats.org/drawingml/2006/main">
+            <a:pPr algn="l">
+              <a:defRPr sz="2400" b="0">
+                <a:solidFill>
+                  <a:srgbClr val="263746"/>
+                </a:solidFill>
+                <a:latin typeface="微软雅黑"/>
+                <a:ea typeface="微软雅黑"/>
+                <a:cs typeface="微软雅黑"/>
+              </a:defRPr>
+            </a:pPr>
+            <a:r>
+              <a:rPr sz="2400" b="0">
+                <a:solidFill>
+                  <a:srgbClr val="263746"/>
+                </a:solidFill>
+                <a:latin typeface="微软雅黑"/>
+                <a:ea typeface="微软雅黑"/>
+                <a:cs typeface="微软雅黑"/>
+              </a:rPr>
+              <a:t>C｜无随机种子，因此不可复现</a:t>
+            </a:r>
+          </a:p>
+        </p:txBody>
+      </p:sp>
+      <p:sp>
+        <p:nvSpPr>
+          <p:cNvPr id="4" name="judgment-body-2">
+            <a:extLst xmlns:a="http://schemas.openxmlformats.org/drawingml/2006/main">
+              <a:ext uri="{FF2B5EF4-FFF2-40B4-BE49-F238E27FC236}">
+                <a16:creationId xmlns:a16="http://schemas.microsoft.com/office/drawing/2014/main" id="{07B98DA1-20CD-4731-AC5A-A5D0A9971450}"/>
+              </a:ext>
+            </a:extLst>
+          </p:cNvPr>
+          <p:cNvSpPr>
+            <a:spLocks xmlns:a="http://schemas.openxmlformats.org/drawingml/2006/main" noGrp="1"/>
+          </p:cNvSpPr>
+          <p:nvPr/>
+        </p:nvSpPr>
+        <p:spPr>
+          <a:xfrm xmlns:a="http://schemas.openxmlformats.org/drawingml/2006/main">
+            <a:off x="666750" y="4495800"/>
+            <a:ext cx="10858500" cy="1409700"/>
+          </a:xfrm>
+          <a:prstGeom xmlns:a="http://schemas.openxmlformats.org/drawingml/2006/main" prst="rect">
+            <a:avLst/>
+          </a:prstGeom>
+          <a:noFill xmlns:a="http://schemas.openxmlformats.org/drawingml/2006/main"/>
+          <a:ln xmlns:a="http://schemas.openxmlformats.org/drawingml/2006/main" w="0">
+            <a:noFill/>
+          </a:ln>
+        </p:spPr>
+        <p:txBody>
+          <a:bodyPr xmlns:a="http://schemas.openxmlformats.org/drawingml/2006/main" lIns="0" tIns="0" rIns="0" bIns="0" anchor="t"/>
+          <a:lstStyle xmlns:a="http://schemas.openxmlformats.org/drawingml/2006/main">
+            <a:defPPr algn="l">
+              <a:defRPr sz="2200" b="0">
+                <a:solidFill>
+                  <a:srgbClr val="1F4D78"/>
+                </a:solidFill>
+                <a:latin typeface="微软雅黑"/>
+                <a:ea typeface="微软雅黑"/>
+                <a:cs typeface="微软雅黑"/>
+              </a:defRPr>
+            </a:defPPr>
+          </a:lstStyle>
+          <a:p xmlns:a="http://schemas.openxmlformats.org/drawingml/2006/main">
+            <a:pPr algn="l">
+              <a:defRPr sz="2200" b="0">
+                <a:solidFill>
+                  <a:srgbClr val="1F4D78"/>
+                </a:solidFill>
+                <a:latin typeface="微软雅黑"/>
+                <a:ea typeface="微软雅黑"/>
+                <a:cs typeface="微软雅黑"/>
+              </a:defRPr>
+            </a:pPr>
+            <a:r>
+              <a:rPr sz="2200" b="0">
+                <a:solidFill>
+                  <a:srgbClr val="1F4D78"/>
+                </a:solidFill>
+                <a:latin typeface="微软雅黑"/>
+                <a:ea typeface="微软雅黑"/>
+                <a:cs typeface="微软雅黑"/>
+              </a:rPr>
+              <a:t>逐项定位事实、影响与最小修订；可澄清或保留异议，但须有证据。</a:t>
+            </a:r>
+          </a:p>
+        </p:txBody>
+      </p:sp>
+      <p:sp>
+        <p:nvSpPr>
+          <p:cNvPr id="5" name="judgment-source">
+            <a:extLst xmlns:a="http://schemas.openxmlformats.org/drawingml/2006/main">
+              <a:ext uri="{FF2B5EF4-FFF2-40B4-BE49-F238E27FC236}">
+                <a16:creationId xmlns:a16="http://schemas.microsoft.com/office/drawing/2014/main" id="{8E551F6F-B802-415C-84E7-24B36B13EFEC}"/>
+              </a:ext>
+            </a:extLst>
+          </p:cNvPr>
+          <p:cNvSpPr>
+            <a:spLocks xmlns:a="http://schemas.openxmlformats.org/drawingml/2006/main" noGrp="1"/>
+          </p:cNvSpPr>
+          <p:nvPr/>
+        </p:nvSpPr>
+        <p:spPr>
+          <a:xfrm xmlns:a="http://schemas.openxmlformats.org/drawingml/2006/main">
+            <a:off x="666750" y="6276975"/>
+            <a:ext cx="10572750" cy="209550"/>
+          </a:xfrm>
+          <a:prstGeom xmlns:a="http://schemas.openxmlformats.org/drawingml/2006/main" prst="rect">
+            <a:avLst/>
+          </a:prstGeom>
+          <a:noFill xmlns:a="http://schemas.openxmlformats.org/drawingml/2006/main"/>
+          <a:ln xmlns:a="http://schemas.openxmlformats.org/drawingml/2006/main" w="0">
+            <a:noFill/>
+          </a:ln>
+        </p:spPr>
+        <p:txBody>
+          <a:bodyPr xmlns:a="http://schemas.openxmlformats.org/drawingml/2006/main" lIns="0" tIns="0" rIns="0" bIns="0" anchor="t"/>
+          <a:lstStyle xmlns:a="http://schemas.openxmlformats.org/drawingml/2006/main">
+            <a:defPPr algn="l">
+              <a:defRPr sz="1100" b="0">
+                <a:solidFill>
+                  <a:srgbClr val="667684"/>
+                </a:solidFill>
+                <a:latin typeface="微软雅黑"/>
+                <a:ea typeface="微软雅黑"/>
+                <a:cs typeface="微软雅黑"/>
+              </a:defRPr>
+            </a:defPPr>
+          </a:lstStyle>
+          <a:p xmlns:a="http://schemas.openxmlformats.org/drawingml/2006/main">
+            <a:pPr algn="l">
+              <a:defRPr sz="1100" b="0">
+                <a:solidFill>
+                  <a:srgbClr val="667684"/>
+                </a:solidFill>
+                <a:latin typeface="微软雅黑"/>
+                <a:ea typeface="微软雅黑"/>
+                <a:cs typeface="微软雅黑"/>
+              </a:defRPr>
+            </a:pPr>
+            <a:r>
+              <a:rPr sz="1100" b="0">
+                <a:solidFill>
+                  <a:srgbClr val="667684"/>
+                </a:solidFill>
+                <a:latin typeface="微软雅黑"/>
+                <a:ea typeface="微软雅黑"/>
+                <a:cs typeface="微软雅黑"/>
+              </a:rPr>
+              <a:t>来源：本课判断任务与讲义；构造材料及真实来源按材料包标识</a:t>
+            </a:r>
+          </a:p>
+        </p:txBody>
+      </p:sp>
+      <p:sp>
+        <p:nvSpPr>
+          <p:cNvPr id="6" name="judgment-page">
+            <a:extLst xmlns:a="http://schemas.openxmlformats.org/drawingml/2006/main">
+              <a:ext uri="{FF2B5EF4-FFF2-40B4-BE49-F238E27FC236}">
+                <a16:creationId xmlns:a16="http://schemas.microsoft.com/office/drawing/2014/main" id="{7467979A-7285-4C6C-81CD-B5970E507B1C}"/>
+              </a:ext>
+            </a:extLst>
+          </p:cNvPr>
+          <p:cNvSpPr>
+            <a:spLocks xmlns:a="http://schemas.openxmlformats.org/drawingml/2006/main" noGrp="1"/>
+          </p:cNvSpPr>
+          <p:nvPr/>
+        </p:nvSpPr>
+        <p:spPr>
+          <a:xfrm xmlns:a="http://schemas.openxmlformats.org/drawingml/2006/main">
+            <a:off x="11715750" y="6562725"/>
+            <a:ext cx="238125" cy="171450"/>
+          </a:xfrm>
+          <a:prstGeom xmlns:a="http://schemas.openxmlformats.org/drawingml/2006/main" prst="rect">
+            <a:avLst/>
+          </a:prstGeom>
+          <a:noFill xmlns:a="http://schemas.openxmlformats.org/drawingml/2006/main"/>
+          <a:ln xmlns:a="http://schemas.openxmlformats.org/drawingml/2006/main" w="0">
+            <a:noFill/>
+          </a:ln>
+        </p:spPr>
+        <p:txBody>
+          <a:bodyPr xmlns:a="http://schemas.openxmlformats.org/drawingml/2006/main" lIns="0" tIns="0" rIns="0" bIns="0" anchor="t"/>
+          <a:lstStyle xmlns:a="http://schemas.openxmlformats.org/drawingml/2006/main">
+            <a:defPPr algn="l">
+              <a:defRPr sz="900" b="0">
+                <a:solidFill>
+                  <a:srgbClr val="A5A5A5"/>
+                </a:solidFill>
+                <a:latin typeface="微软雅黑"/>
+                <a:ea typeface="微软雅黑"/>
+                <a:cs typeface="微软雅黑"/>
+              </a:defRPr>
+            </a:defPPr>
+          </a:lstStyle>
+          <a:p xmlns:a="http://schemas.openxmlformats.org/drawingml/2006/main">
+            <a:pPr algn="l">
+              <a:defRPr sz="900" b="0">
+                <a:solidFill>
+                  <a:srgbClr val="A5A5A5"/>
+                </a:solidFill>
+                <a:latin typeface="微软雅黑"/>
+                <a:ea typeface="微软雅黑"/>
+                <a:cs typeface="微软雅黑"/>
+              </a:defRPr>
+            </a:pPr>
+            <a:r>
+              <a:rPr sz="900" b="0">
+                <a:solidFill>
+                  <a:srgbClr val="A5A5A5"/>
+                </a:solidFill>
+                <a:latin typeface="微软雅黑"/>
+                <a:ea typeface="微软雅黑"/>
+                <a:cs typeface="微软雅黑"/>
+              </a:rPr>
               <a:t>4</a:t>
-            </a:fld>
-            <a:endParaRPr/>
-          </a:p>
-        </p:txBody>
-      </p:sp>
-      <p:sp>
-        <p:nvSpPr>
-          <p:cNvPr id="6" name="content-201">
-            <a:extLst xmlns:a="http://schemas.openxmlformats.org/drawingml/2006/main">
-              <a:ext uri="{FF2B5EF4-FFF2-40B4-BE49-F238E27FC236}">
-                <a16:creationId xmlns:a16="http://schemas.microsoft.com/office/drawing/2014/main" id="{297CD03F-BB99-4F45-8989-ECA0FA81D8FC}"/>
-              </a:ext>
-            </a:extLst>
-          </p:cNvPr>
-          <p:cNvSpPr>
-            <a:spLocks xmlns:a="http://schemas.openxmlformats.org/drawingml/2006/main" noGrp="1"/>
-          </p:cNvSpPr>
-          <p:nvPr/>
-        </p:nvSpPr>
-        <p:spPr>
-          <a:xfrm xmlns:a="http://schemas.openxmlformats.org/drawingml/2006/main">
-            <a:off x="609600" y="1571625"/>
-            <a:ext cx="10972800" cy="432435"/>
-          </a:xfrm>
-          <a:prstGeom xmlns:a="http://schemas.openxmlformats.org/drawingml/2006/main" prst="rect">
-            <a:avLst/>
-          </a:prstGeom>
-          <a:noFill xmlns:a="http://schemas.openxmlformats.org/drawingml/2006/main"/>
-          <a:ln xmlns:a="http://schemas.openxmlformats.org/drawingml/2006/main" w="0">
-            <a:noFill/>
-          </a:ln>
-        </p:spPr>
-        <p:txBody>
-          <a:bodyPr xmlns:a="http://schemas.openxmlformats.org/drawingml/2006/main" lIns="0" tIns="0" rIns="0" bIns="0" anchor="t"/>
-          <a:lstStyle xmlns:a="http://schemas.openxmlformats.org/drawingml/2006/main"/>
-          <a:p xmlns:a="http://schemas.openxmlformats.org/drawingml/2006/main">
-            <a:pPr algn="l">
-              <a:lnSpc>
-                <a:spcPct val="118000"/>
-              </a:lnSpc>
-              <a:buNone/>
-              <a:defRPr sz="2400" b="0">
-                <a:solidFill>
-                  <a:srgbClr val="27333D"/>
-                </a:solidFill>
-                <a:latin typeface="微软雅黑"/>
-                <a:ea typeface="微软雅黑"/>
-                <a:cs typeface="微软雅黑"/>
-              </a:defRPr>
-            </a:pPr>
-            <a:r>
-              <a:rPr sz="2400" b="0">
-                <a:solidFill>
-                  <a:srgbClr val="27333D"/>
-                </a:solidFill>
-                <a:latin typeface="微软雅黑"/>
-                <a:ea typeface="微软雅黑"/>
-                <a:cs typeface="微软雅黑"/>
-              </a:rPr>
-              <a:t>D1：“证明机制，对所有文本有效，stable。”</a:t>
-            </a:r>
-          </a:p>
-        </p:txBody>
-      </p:sp>
-      <p:sp>
-        <p:nvSpPr>
-          <p:cNvPr id="7" name="content-202">
-            <a:extLst xmlns:a="http://schemas.openxmlformats.org/drawingml/2006/main">
-              <a:ext uri="{FF2B5EF4-FFF2-40B4-BE49-F238E27FC236}">
-                <a16:creationId xmlns:a16="http://schemas.microsoft.com/office/drawing/2014/main" id="{12B97342-63B0-4BDE-ACE2-5B9B1A029476}"/>
-              </a:ext>
-            </a:extLst>
-          </p:cNvPr>
-          <p:cNvSpPr>
-            <a:spLocks xmlns:a="http://schemas.openxmlformats.org/drawingml/2006/main" noGrp="1"/>
-          </p:cNvSpPr>
-          <p:nvPr/>
-        </p:nvSpPr>
-        <p:spPr>
-          <a:xfrm xmlns:a="http://schemas.openxmlformats.org/drawingml/2006/main">
-            <a:off x="609600" y="2261235"/>
-            <a:ext cx="10972800" cy="432435"/>
-          </a:xfrm>
-          <a:prstGeom xmlns:a="http://schemas.openxmlformats.org/drawingml/2006/main" prst="rect">
-            <a:avLst/>
-          </a:prstGeom>
-          <a:noFill xmlns:a="http://schemas.openxmlformats.org/drawingml/2006/main"/>
-          <a:ln xmlns:a="http://schemas.openxmlformats.org/drawingml/2006/main" w="0">
-            <a:noFill/>
-          </a:ln>
-        </p:spPr>
-        <p:txBody>
-          <a:bodyPr xmlns:a="http://schemas.openxmlformats.org/drawingml/2006/main" lIns="0" tIns="0" rIns="0" bIns="0" anchor="t"/>
-          <a:lstStyle xmlns:a="http://schemas.openxmlformats.org/drawingml/2006/main"/>
-          <a:p xmlns:a="http://schemas.openxmlformats.org/drawingml/2006/main">
-            <a:pPr algn="l">
-              <a:lnSpc>
-                <a:spcPct val="118000"/>
-              </a:lnSpc>
-              <a:buNone/>
-              <a:defRPr sz="2400" b="0">
-                <a:solidFill>
-                  <a:srgbClr val="27333D"/>
-                </a:solidFill>
-                <a:latin typeface="微软雅黑"/>
-                <a:ea typeface="微软雅黑"/>
-                <a:cs typeface="微软雅黑"/>
-              </a:defRPr>
-            </a:pPr>
-            <a:r>
-              <a:rPr sz="2400" b="0">
-                <a:solidFill>
-                  <a:srgbClr val="27333D"/>
-                </a:solidFill>
-                <a:latin typeface="微软雅黑"/>
-                <a:ea typeface="微软雅黑"/>
-                <a:cs typeface="微软雅黑"/>
-              </a:rPr>
-              <a:t>D2：只给百分比，没有分母和原始记录位置。</a:t>
-            </a:r>
-          </a:p>
-        </p:txBody>
-      </p:sp>
-      <p:sp>
-        <p:nvSpPr>
-          <p:cNvPr id="8" name="content-203">
-            <a:extLst xmlns:a="http://schemas.openxmlformats.org/drawingml/2006/main">
-              <a:ext uri="{FF2B5EF4-FFF2-40B4-BE49-F238E27FC236}">
-                <a16:creationId xmlns:a16="http://schemas.microsoft.com/office/drawing/2014/main" id="{50DA49D8-EEC1-4F97-AA82-F5A1E621CF66}"/>
-              </a:ext>
-            </a:extLst>
-          </p:cNvPr>
-          <p:cNvSpPr>
-            <a:spLocks xmlns:a="http://schemas.openxmlformats.org/drawingml/2006/main" noGrp="1"/>
-          </p:cNvSpPr>
-          <p:nvPr/>
-        </p:nvSpPr>
-        <p:spPr>
-          <a:xfrm xmlns:a="http://schemas.openxmlformats.org/drawingml/2006/main">
-            <a:off x="609600" y="2950845"/>
-            <a:ext cx="10972800" cy="432435"/>
-          </a:xfrm>
-          <a:prstGeom xmlns:a="http://schemas.openxmlformats.org/drawingml/2006/main" prst="rect">
-            <a:avLst/>
-          </a:prstGeom>
-          <a:noFill xmlns:a="http://schemas.openxmlformats.org/drawingml/2006/main"/>
-          <a:ln xmlns:a="http://schemas.openxmlformats.org/drawingml/2006/main" w="0">
-            <a:noFill/>
-          </a:ln>
-        </p:spPr>
-        <p:txBody>
-          <a:bodyPr xmlns:a="http://schemas.openxmlformats.org/drawingml/2006/main" lIns="0" tIns="0" rIns="0" bIns="0" anchor="t"/>
-          <a:lstStyle xmlns:a="http://schemas.openxmlformats.org/drawingml/2006/main"/>
-          <a:p xmlns:a="http://schemas.openxmlformats.org/drawingml/2006/main">
-            <a:pPr algn="l">
-              <a:lnSpc>
-                <a:spcPct val="118000"/>
-              </a:lnSpc>
-              <a:buNone/>
-              <a:defRPr sz="2400" b="0">
-                <a:solidFill>
-                  <a:srgbClr val="27333D"/>
-                </a:solidFill>
-                <a:latin typeface="微软雅黑"/>
-                <a:ea typeface="微软雅黑"/>
-                <a:cs typeface="微软雅黑"/>
-              </a:defRPr>
-            </a:pPr>
-            <a:r>
-              <a:rPr sz="2400" b="0">
-                <a:solidFill>
-                  <a:srgbClr val="27333D"/>
-                </a:solidFill>
-                <a:latin typeface="微软雅黑"/>
-                <a:ea typeface="微软雅黑"/>
-                <a:cs typeface="微软雅黑"/>
-              </a:rPr>
-              <a:t>图1：“组一/组二”，指标和范围不明。</a:t>
-            </a:r>
-          </a:p>
-        </p:txBody>
-      </p:sp>
-      <p:sp>
-        <p:nvSpPr>
-          <p:cNvPr id="9" name="content-204">
-            <a:extLst xmlns:a="http://schemas.openxmlformats.org/drawingml/2006/main">
-              <a:ext uri="{FF2B5EF4-FFF2-40B4-BE49-F238E27FC236}">
-                <a16:creationId xmlns:a16="http://schemas.microsoft.com/office/drawing/2014/main" id="{B1419711-54CD-4FFA-A60C-4C9AADC7B885}"/>
-              </a:ext>
-            </a:extLst>
-          </p:cNvPr>
-          <p:cNvSpPr>
-            <a:spLocks xmlns:a="http://schemas.openxmlformats.org/drawingml/2006/main" noGrp="1"/>
-          </p:cNvSpPr>
-          <p:nvPr/>
-        </p:nvSpPr>
-        <p:spPr>
-          <a:xfrm xmlns:a="http://schemas.openxmlformats.org/drawingml/2006/main">
-            <a:off x="609600" y="3640455"/>
-            <a:ext cx="10972800" cy="432435"/>
-          </a:xfrm>
-          <a:prstGeom xmlns:a="http://schemas.openxmlformats.org/drawingml/2006/main" prst="rect">
-            <a:avLst/>
-          </a:prstGeom>
-          <a:noFill xmlns:a="http://schemas.openxmlformats.org/drawingml/2006/main"/>
-          <a:ln xmlns:a="http://schemas.openxmlformats.org/drawingml/2006/main" w="0">
-            <a:noFill/>
-          </a:ln>
-        </p:spPr>
-        <p:txBody>
-          <a:bodyPr xmlns:a="http://schemas.openxmlformats.org/drawingml/2006/main" lIns="0" tIns="0" rIns="0" bIns="0" anchor="t"/>
-          <a:lstStyle xmlns:a="http://schemas.openxmlformats.org/drawingml/2006/main"/>
-          <a:p xmlns:a="http://schemas.openxmlformats.org/drawingml/2006/main">
-            <a:pPr algn="l">
-              <a:lnSpc>
-                <a:spcPct val="118000"/>
-              </a:lnSpc>
-              <a:buNone/>
-              <a:defRPr sz="2400" b="0">
-                <a:solidFill>
-                  <a:srgbClr val="1F4D78"/>
-                </a:solidFill>
-                <a:latin typeface="微软雅黑"/>
-                <a:ea typeface="微软雅黑"/>
-                <a:cs typeface="微软雅黑"/>
-              </a:defRPr>
-            </a:pPr>
-            <a:r>
-              <a:rPr sz="2400" b="0">
-                <a:solidFill>
-                  <a:srgbClr val="1F4D78"/>
-                </a:solidFill>
-                <a:latin typeface="微软雅黑"/>
-                <a:ea typeface="微软雅黑"/>
-                <a:cs typeface="微软雅黑"/>
-              </a:rPr>
-              <a:t>先处理结论越界，再补追踪与图表说明。</a:t>
             </a:r>
           </a:p>
         </p:txBody>
